--- a/els-proposal.pptx
+++ b/els-proposal.pptx
@@ -11662,7 +11662,7 @@
             <a:avLst/>
           </a:prstGeom>
           <a:solidFill>
-            <a:srgbClr val="ECEFF4"/>
+            <a:srgbClr val="E7F1E9"/>
           </a:solidFill>
           <a:ln w="12700">
             <a:solidFill>
@@ -13249,7 +13249,7 @@
             <a:avLst/>
           </a:prstGeom>
           <a:solidFill>
-            <a:srgbClr val="ECEFF4"/>
+            <a:srgbClr val="FBF2DC"/>
           </a:solidFill>
           <a:ln w="12700">
             <a:solidFill>
@@ -14836,7 +14836,7 @@
             <a:avLst/>
           </a:prstGeom>
           <a:solidFill>
-            <a:srgbClr val="ECEFF4"/>
+            <a:srgbClr val="FBF2DC"/>
           </a:solidFill>
           <a:ln w="12700">
             <a:solidFill>
@@ -16495,16 +16495,17 @@
             <a:tbl>
               <a:tblPr/>
               <a:tblGrid>
-                <a:gridCol w="804672"/>
+                <a:gridCol w="731520"/>
                 <a:gridCol w="2606040"/>
                 <a:gridCol w="530352"/>
                 <a:gridCol w="841248"/>
+                <a:gridCol w="914400"/>
                 <a:gridCol w="1024128"/>
-                <a:gridCol w="1115568"/>
-                <a:gridCol w="914400"/>
+                <a:gridCol w="822960"/>
                 <a:gridCol w="1005840"/>
-                <a:gridCol w="1280160"/>
-                <a:gridCol w="932688"/>
+                <a:gridCol w="566928"/>
+                <a:gridCol w="1170432"/>
+                <a:gridCol w="841248"/>
               </a:tblGrid>
               <a:tr h="219456">
                 <a:tc>
@@ -17001,6 +17002,74 @@
                           <a:cs typeface="맑은 고딕" pitchFamily="34" charset="-120"/>
                         </a:rPr>
                         <a:t>B. 손실 확률</a:t>
+                      </a:r>
+                      <a:endParaRPr lang="en-US" sz="900" dirty="0">
+                        <a:latin typeface="맑은 고딕" charset="0"/>
+                        <a:ea typeface="맑은 고딕" charset="0"/>
+                        <a:cs typeface="맑은 고딕" charset="0"/>
+                      </a:endParaRPr>
+                    </a:p>
+                  </a:txBody>
+                  <a:tcPr marL="25400" marR="25400" marT="25400" marB="25400" anchor="ctr">
+                    <a:lnL w="12700" cap="flat" cmpd="sng" algn="ctr">
+                      <a:solidFill>
+                        <a:srgbClr val="E5E4E1"/>
+                      </a:solidFill>
+                      <a:prstDash val="solid"/>
+                      <a:round/>
+                      <a:headEnd type="none" w="med" len="med"/>
+                      <a:tailEnd type="none" w="med" len="med"/>
+                    </a:lnL>
+                    <a:lnR w="12700" cap="flat" cmpd="sng" algn="ctr">
+                      <a:solidFill>
+                        <a:srgbClr val="E5E4E1"/>
+                      </a:solidFill>
+                      <a:prstDash val="solid"/>
+                      <a:round/>
+                      <a:headEnd type="none" w="med" len="med"/>
+                      <a:tailEnd type="none" w="med" len="med"/>
+                    </a:lnR>
+                    <a:lnT w="12700" cap="flat" cmpd="sng" algn="ctr">
+                      <a:solidFill>
+                        <a:srgbClr val="E5E4E1"/>
+                      </a:solidFill>
+                      <a:prstDash val="solid"/>
+                      <a:round/>
+                      <a:headEnd type="none" w="med" len="med"/>
+                      <a:tailEnd type="none" w="med" len="med"/>
+                    </a:lnT>
+                    <a:lnB w="12700" cap="flat" cmpd="sng" algn="ctr">
+                      <a:solidFill>
+                        <a:srgbClr val="E5E4E1"/>
+                      </a:solidFill>
+                      <a:prstDash val="solid"/>
+                      <a:round/>
+                      <a:headEnd type="none" w="med" len="med"/>
+                      <a:tailEnd type="none" w="med" len="med"/>
+                    </a:lnB>
+                    <a:solidFill>
+                      <a:srgbClr val="FAB072"/>
+                    </a:solidFill>
+                  </a:tcPr>
+                </a:tc>
+                <a:tc>
+                  <a:txBody>
+                    <a:bodyPr/>
+                    <a:lstStyle/>
+                    <a:p>
+                      <a:pPr algn="ctr" indent="0" marL="0">
+                        <a:buNone/>
+                      </a:pPr>
+                      <a:r>
+                        <a:rPr lang="en-US" sz="900" b="1" dirty="0">
+                          <a:solidFill>
+                            <a:srgbClr val="1A1A1A"/>
+                          </a:solidFill>
+                          <a:latin typeface="맑은 고딕" pitchFamily="34" charset="0"/>
+                          <a:ea typeface="맑은 고딕" pitchFamily="34" charset="-122"/>
+                          <a:cs typeface="맑은 고딕" pitchFamily="34" charset="-120"/>
+                        </a:rPr>
+                        <a:t>등급</a:t>
                       </a:r>
                       <a:endParaRPr lang="en-US" sz="900" dirty="0">
                         <a:latin typeface="맑은 고딕" charset="0"/>
@@ -17714,6 +17783,74 @@
                     <a:bodyPr/>
                     <a:lstStyle/>
                     <a:p>
+                      <a:pPr algn="ctr" indent="0" marL="0">
+                        <a:buNone/>
+                      </a:pPr>
+                      <a:r>
+                        <a:rPr lang="en-US" sz="900" dirty="0">
+                          <a:solidFill>
+                            <a:srgbClr val="2E8540"/>
+                          </a:solidFill>
+                          <a:latin typeface="맑은 고딕" pitchFamily="34" charset="0"/>
+                          <a:ea typeface="맑은 고딕" pitchFamily="34" charset="-122"/>
+                          <a:cs typeface="맑은 고딕" pitchFamily="34" charset="-120"/>
+                        </a:rPr>
+                        <a:t>방어적</a:t>
+                      </a:r>
+                      <a:endParaRPr lang="en-US" sz="900" dirty="0">
+                        <a:latin typeface="맑은 고딕" charset="0"/>
+                        <a:ea typeface="맑은 고딕" charset="0"/>
+                        <a:cs typeface="맑은 고딕" charset="0"/>
+                      </a:endParaRPr>
+                    </a:p>
+                  </a:txBody>
+                  <a:tcPr marL="25400" marR="25400" marT="25400" marB="25400" anchor="ctr">
+                    <a:lnL w="12700" cap="flat" cmpd="sng" algn="ctr">
+                      <a:solidFill>
+                        <a:srgbClr val="E5E4E1"/>
+                      </a:solidFill>
+                      <a:prstDash val="solid"/>
+                      <a:round/>
+                      <a:headEnd type="none" w="med" len="med"/>
+                      <a:tailEnd type="none" w="med" len="med"/>
+                    </a:lnL>
+                    <a:lnR w="12700" cap="flat" cmpd="sng" algn="ctr">
+                      <a:solidFill>
+                        <a:srgbClr val="E5E4E1"/>
+                      </a:solidFill>
+                      <a:prstDash val="solid"/>
+                      <a:round/>
+                      <a:headEnd type="none" w="med" len="med"/>
+                      <a:tailEnd type="none" w="med" len="med"/>
+                    </a:lnR>
+                    <a:lnT w="12700" cap="flat" cmpd="sng" algn="ctr">
+                      <a:solidFill>
+                        <a:srgbClr val="E5E4E1"/>
+                      </a:solidFill>
+                      <a:prstDash val="solid"/>
+                      <a:round/>
+                      <a:headEnd type="none" w="med" len="med"/>
+                      <a:tailEnd type="none" w="med" len="med"/>
+                    </a:lnT>
+                    <a:lnB w="12700" cap="flat" cmpd="sng" algn="ctr">
+                      <a:solidFill>
+                        <a:srgbClr val="E5E4E1"/>
+                      </a:solidFill>
+                      <a:prstDash val="solid"/>
+                      <a:round/>
+                      <a:headEnd type="none" w="med" len="med"/>
+                      <a:tailEnd type="none" w="med" len="med"/>
+                    </a:lnB>
+                    <a:solidFill>
+                      <a:srgbClr val="E7F1E9"/>
+                    </a:solidFill>
+                  </a:tcPr>
+                </a:tc>
+                <a:tc>
+                  <a:txBody>
+                    <a:bodyPr/>
+                    <a:lstStyle/>
+                    <a:p>
                       <a:pPr algn="r" indent="0" marL="0">
                         <a:buNone/>
                       </a:pPr>
@@ -18366,6 +18503,74 @@
                     <a:bodyPr/>
                     <a:lstStyle/>
                     <a:p>
+                      <a:pPr algn="ctr" indent="0" marL="0">
+                        <a:buNone/>
+                      </a:pPr>
+                      <a:r>
+                        <a:rPr lang="en-US" sz="900" dirty="0">
+                          <a:solidFill>
+                            <a:srgbClr val="2E8540"/>
+                          </a:solidFill>
+                          <a:latin typeface="맑은 고딕" pitchFamily="34" charset="0"/>
+                          <a:ea typeface="맑은 고딕" pitchFamily="34" charset="-122"/>
+                          <a:cs typeface="맑은 고딕" pitchFamily="34" charset="-120"/>
+                        </a:rPr>
+                        <a:t>방어적</a:t>
+                      </a:r>
+                      <a:endParaRPr lang="en-US" sz="900" dirty="0">
+                        <a:latin typeface="맑은 고딕" charset="0"/>
+                        <a:ea typeface="맑은 고딕" charset="0"/>
+                        <a:cs typeface="맑은 고딕" charset="0"/>
+                      </a:endParaRPr>
+                    </a:p>
+                  </a:txBody>
+                  <a:tcPr marL="25400" marR="25400" marT="25400" marB="25400" anchor="ctr">
+                    <a:lnL w="12700" cap="flat" cmpd="sng" algn="ctr">
+                      <a:solidFill>
+                        <a:srgbClr val="E5E4E1"/>
+                      </a:solidFill>
+                      <a:prstDash val="solid"/>
+                      <a:round/>
+                      <a:headEnd type="none" w="med" len="med"/>
+                      <a:tailEnd type="none" w="med" len="med"/>
+                    </a:lnL>
+                    <a:lnR w="12700" cap="flat" cmpd="sng" algn="ctr">
+                      <a:solidFill>
+                        <a:srgbClr val="E5E4E1"/>
+                      </a:solidFill>
+                      <a:prstDash val="solid"/>
+                      <a:round/>
+                      <a:headEnd type="none" w="med" len="med"/>
+                      <a:tailEnd type="none" w="med" len="med"/>
+                    </a:lnR>
+                    <a:lnT w="12700" cap="flat" cmpd="sng" algn="ctr">
+                      <a:solidFill>
+                        <a:srgbClr val="E5E4E1"/>
+                      </a:solidFill>
+                      <a:prstDash val="solid"/>
+                      <a:round/>
+                      <a:headEnd type="none" w="med" len="med"/>
+                      <a:tailEnd type="none" w="med" len="med"/>
+                    </a:lnT>
+                    <a:lnB w="12700" cap="flat" cmpd="sng" algn="ctr">
+                      <a:solidFill>
+                        <a:srgbClr val="E5E4E1"/>
+                      </a:solidFill>
+                      <a:prstDash val="solid"/>
+                      <a:round/>
+                      <a:headEnd type="none" w="med" len="med"/>
+                      <a:tailEnd type="none" w="med" len="med"/>
+                    </a:lnB>
+                    <a:solidFill>
+                      <a:srgbClr val="E7F1E9"/>
+                    </a:solidFill>
+                  </a:tcPr>
+                </a:tc>
+                <a:tc>
+                  <a:txBody>
+                    <a:bodyPr/>
+                    <a:lstStyle/>
+                    <a:p>
                       <a:pPr algn="r" indent="0" marL="0">
                         <a:buNone/>
                       </a:pPr>
@@ -19018,6 +19223,74 @@
                     <a:bodyPr/>
                     <a:lstStyle/>
                     <a:p>
+                      <a:pPr algn="ctr" indent="0" marL="0">
+                        <a:buNone/>
+                      </a:pPr>
+                      <a:r>
+                        <a:rPr lang="en-US" sz="900" dirty="0">
+                          <a:solidFill>
+                            <a:srgbClr val="2E8540"/>
+                          </a:solidFill>
+                          <a:latin typeface="맑은 고딕" pitchFamily="34" charset="0"/>
+                          <a:ea typeface="맑은 고딕" pitchFamily="34" charset="-122"/>
+                          <a:cs typeface="맑은 고딕" pitchFamily="34" charset="-120"/>
+                        </a:rPr>
+                        <a:t>방어적</a:t>
+                      </a:r>
+                      <a:endParaRPr lang="en-US" sz="900" dirty="0">
+                        <a:latin typeface="맑은 고딕" charset="0"/>
+                        <a:ea typeface="맑은 고딕" charset="0"/>
+                        <a:cs typeface="맑은 고딕" charset="0"/>
+                      </a:endParaRPr>
+                    </a:p>
+                  </a:txBody>
+                  <a:tcPr marL="25400" marR="25400" marT="25400" marB="25400" anchor="ctr">
+                    <a:lnL w="12700" cap="flat" cmpd="sng" algn="ctr">
+                      <a:solidFill>
+                        <a:srgbClr val="E5E4E1"/>
+                      </a:solidFill>
+                      <a:prstDash val="solid"/>
+                      <a:round/>
+                      <a:headEnd type="none" w="med" len="med"/>
+                      <a:tailEnd type="none" w="med" len="med"/>
+                    </a:lnL>
+                    <a:lnR w="12700" cap="flat" cmpd="sng" algn="ctr">
+                      <a:solidFill>
+                        <a:srgbClr val="E5E4E1"/>
+                      </a:solidFill>
+                      <a:prstDash val="solid"/>
+                      <a:round/>
+                      <a:headEnd type="none" w="med" len="med"/>
+                      <a:tailEnd type="none" w="med" len="med"/>
+                    </a:lnR>
+                    <a:lnT w="12700" cap="flat" cmpd="sng" algn="ctr">
+                      <a:solidFill>
+                        <a:srgbClr val="E5E4E1"/>
+                      </a:solidFill>
+                      <a:prstDash val="solid"/>
+                      <a:round/>
+                      <a:headEnd type="none" w="med" len="med"/>
+                      <a:tailEnd type="none" w="med" len="med"/>
+                    </a:lnT>
+                    <a:lnB w="12700" cap="flat" cmpd="sng" algn="ctr">
+                      <a:solidFill>
+                        <a:srgbClr val="E5E4E1"/>
+                      </a:solidFill>
+                      <a:prstDash val="solid"/>
+                      <a:round/>
+                      <a:headEnd type="none" w="med" len="med"/>
+                      <a:tailEnd type="none" w="med" len="med"/>
+                    </a:lnB>
+                    <a:solidFill>
+                      <a:srgbClr val="E7F1E9"/>
+                    </a:solidFill>
+                  </a:tcPr>
+                </a:tc>
+                <a:tc>
+                  <a:txBody>
+                    <a:bodyPr/>
+                    <a:lstStyle/>
+                    <a:p>
                       <a:pPr algn="r" indent="0" marL="0">
                         <a:buNone/>
                       </a:pPr>
@@ -19670,6 +19943,74 @@
                     <a:bodyPr/>
                     <a:lstStyle/>
                     <a:p>
+                      <a:pPr algn="ctr" indent="0" marL="0">
+                        <a:buNone/>
+                      </a:pPr>
+                      <a:r>
+                        <a:rPr lang="en-US" sz="900" dirty="0">
+                          <a:solidFill>
+                            <a:srgbClr val="2E8540"/>
+                          </a:solidFill>
+                          <a:latin typeface="맑은 고딕" pitchFamily="34" charset="0"/>
+                          <a:ea typeface="맑은 고딕" pitchFamily="34" charset="-122"/>
+                          <a:cs typeface="맑은 고딕" pitchFamily="34" charset="-120"/>
+                        </a:rPr>
+                        <a:t>방어적</a:t>
+                      </a:r>
+                      <a:endParaRPr lang="en-US" sz="900" dirty="0">
+                        <a:latin typeface="맑은 고딕" charset="0"/>
+                        <a:ea typeface="맑은 고딕" charset="0"/>
+                        <a:cs typeface="맑은 고딕" charset="0"/>
+                      </a:endParaRPr>
+                    </a:p>
+                  </a:txBody>
+                  <a:tcPr marL="25400" marR="25400" marT="25400" marB="25400" anchor="ctr">
+                    <a:lnL w="12700" cap="flat" cmpd="sng" algn="ctr">
+                      <a:solidFill>
+                        <a:srgbClr val="E5E4E1"/>
+                      </a:solidFill>
+                      <a:prstDash val="solid"/>
+                      <a:round/>
+                      <a:headEnd type="none" w="med" len="med"/>
+                      <a:tailEnd type="none" w="med" len="med"/>
+                    </a:lnL>
+                    <a:lnR w="12700" cap="flat" cmpd="sng" algn="ctr">
+                      <a:solidFill>
+                        <a:srgbClr val="E5E4E1"/>
+                      </a:solidFill>
+                      <a:prstDash val="solid"/>
+                      <a:round/>
+                      <a:headEnd type="none" w="med" len="med"/>
+                      <a:tailEnd type="none" w="med" len="med"/>
+                    </a:lnR>
+                    <a:lnT w="12700" cap="flat" cmpd="sng" algn="ctr">
+                      <a:solidFill>
+                        <a:srgbClr val="E5E4E1"/>
+                      </a:solidFill>
+                      <a:prstDash val="solid"/>
+                      <a:round/>
+                      <a:headEnd type="none" w="med" len="med"/>
+                      <a:tailEnd type="none" w="med" len="med"/>
+                    </a:lnT>
+                    <a:lnB w="12700" cap="flat" cmpd="sng" algn="ctr">
+                      <a:solidFill>
+                        <a:srgbClr val="E5E4E1"/>
+                      </a:solidFill>
+                      <a:prstDash val="solid"/>
+                      <a:round/>
+                      <a:headEnd type="none" w="med" len="med"/>
+                      <a:tailEnd type="none" w="med" len="med"/>
+                    </a:lnB>
+                    <a:solidFill>
+                      <a:srgbClr val="E7F1E9"/>
+                    </a:solidFill>
+                  </a:tcPr>
+                </a:tc>
+                <a:tc>
+                  <a:txBody>
+                    <a:bodyPr/>
+                    <a:lstStyle/>
+                    <a:p>
                       <a:pPr algn="r" indent="0" marL="0">
                         <a:buNone/>
                       </a:pPr>
@@ -20322,6 +20663,74 @@
                     <a:bodyPr/>
                     <a:lstStyle/>
                     <a:p>
+                      <a:pPr algn="ctr" indent="0" marL="0">
+                        <a:buNone/>
+                      </a:pPr>
+                      <a:r>
+                        <a:rPr lang="en-US" sz="900" dirty="0">
+                          <a:solidFill>
+                            <a:srgbClr val="8A6A0B"/>
+                          </a:solidFill>
+                          <a:latin typeface="맑은 고딕" pitchFamily="34" charset="0"/>
+                          <a:ea typeface="맑은 고딕" pitchFamily="34" charset="-122"/>
+                          <a:cs typeface="맑은 고딕" pitchFamily="34" charset="-120"/>
+                        </a:rPr>
+                        <a:t>중간</a:t>
+                      </a:r>
+                      <a:endParaRPr lang="en-US" sz="900" dirty="0">
+                        <a:latin typeface="맑은 고딕" charset="0"/>
+                        <a:ea typeface="맑은 고딕" charset="0"/>
+                        <a:cs typeface="맑은 고딕" charset="0"/>
+                      </a:endParaRPr>
+                    </a:p>
+                  </a:txBody>
+                  <a:tcPr marL="25400" marR="25400" marT="25400" marB="25400" anchor="ctr">
+                    <a:lnL w="12700" cap="flat" cmpd="sng" algn="ctr">
+                      <a:solidFill>
+                        <a:srgbClr val="E5E4E1"/>
+                      </a:solidFill>
+                      <a:prstDash val="solid"/>
+                      <a:round/>
+                      <a:headEnd type="none" w="med" len="med"/>
+                      <a:tailEnd type="none" w="med" len="med"/>
+                    </a:lnL>
+                    <a:lnR w="12700" cap="flat" cmpd="sng" algn="ctr">
+                      <a:solidFill>
+                        <a:srgbClr val="E5E4E1"/>
+                      </a:solidFill>
+                      <a:prstDash val="solid"/>
+                      <a:round/>
+                      <a:headEnd type="none" w="med" len="med"/>
+                      <a:tailEnd type="none" w="med" len="med"/>
+                    </a:lnR>
+                    <a:lnT w="12700" cap="flat" cmpd="sng" algn="ctr">
+                      <a:solidFill>
+                        <a:srgbClr val="E5E4E1"/>
+                      </a:solidFill>
+                      <a:prstDash val="solid"/>
+                      <a:round/>
+                      <a:headEnd type="none" w="med" len="med"/>
+                      <a:tailEnd type="none" w="med" len="med"/>
+                    </a:lnT>
+                    <a:lnB w="12700" cap="flat" cmpd="sng" algn="ctr">
+                      <a:solidFill>
+                        <a:srgbClr val="E5E4E1"/>
+                      </a:solidFill>
+                      <a:prstDash val="solid"/>
+                      <a:round/>
+                      <a:headEnd type="none" w="med" len="med"/>
+                      <a:tailEnd type="none" w="med" len="med"/>
+                    </a:lnB>
+                    <a:solidFill>
+                      <a:srgbClr val="FBF2DC"/>
+                    </a:solidFill>
+                  </a:tcPr>
+                </a:tc>
+                <a:tc>
+                  <a:txBody>
+                    <a:bodyPr/>
+                    <a:lstStyle/>
+                    <a:p>
                       <a:pPr algn="r" indent="0" marL="0">
                         <a:buNone/>
                       </a:pPr>
@@ -20974,6 +21383,74 @@
                     <a:bodyPr/>
                     <a:lstStyle/>
                     <a:p>
+                      <a:pPr algn="ctr" indent="0" marL="0">
+                        <a:buNone/>
+                      </a:pPr>
+                      <a:r>
+                        <a:rPr lang="en-US" sz="900" dirty="0">
+                          <a:solidFill>
+                            <a:srgbClr val="8A6A0B"/>
+                          </a:solidFill>
+                          <a:latin typeface="맑은 고딕" pitchFamily="34" charset="0"/>
+                          <a:ea typeface="맑은 고딕" pitchFamily="34" charset="-122"/>
+                          <a:cs typeface="맑은 고딕" pitchFamily="34" charset="-120"/>
+                        </a:rPr>
+                        <a:t>중간</a:t>
+                      </a:r>
+                      <a:endParaRPr lang="en-US" sz="900" dirty="0">
+                        <a:latin typeface="맑은 고딕" charset="0"/>
+                        <a:ea typeface="맑은 고딕" charset="0"/>
+                        <a:cs typeface="맑은 고딕" charset="0"/>
+                      </a:endParaRPr>
+                    </a:p>
+                  </a:txBody>
+                  <a:tcPr marL="25400" marR="25400" marT="25400" marB="25400" anchor="ctr">
+                    <a:lnL w="12700" cap="flat" cmpd="sng" algn="ctr">
+                      <a:solidFill>
+                        <a:srgbClr val="E5E4E1"/>
+                      </a:solidFill>
+                      <a:prstDash val="solid"/>
+                      <a:round/>
+                      <a:headEnd type="none" w="med" len="med"/>
+                      <a:tailEnd type="none" w="med" len="med"/>
+                    </a:lnL>
+                    <a:lnR w="12700" cap="flat" cmpd="sng" algn="ctr">
+                      <a:solidFill>
+                        <a:srgbClr val="E5E4E1"/>
+                      </a:solidFill>
+                      <a:prstDash val="solid"/>
+                      <a:round/>
+                      <a:headEnd type="none" w="med" len="med"/>
+                      <a:tailEnd type="none" w="med" len="med"/>
+                    </a:lnR>
+                    <a:lnT w="12700" cap="flat" cmpd="sng" algn="ctr">
+                      <a:solidFill>
+                        <a:srgbClr val="E5E4E1"/>
+                      </a:solidFill>
+                      <a:prstDash val="solid"/>
+                      <a:round/>
+                      <a:headEnd type="none" w="med" len="med"/>
+                      <a:tailEnd type="none" w="med" len="med"/>
+                    </a:lnT>
+                    <a:lnB w="12700" cap="flat" cmpd="sng" algn="ctr">
+                      <a:solidFill>
+                        <a:srgbClr val="E5E4E1"/>
+                      </a:solidFill>
+                      <a:prstDash val="solid"/>
+                      <a:round/>
+                      <a:headEnd type="none" w="med" len="med"/>
+                      <a:tailEnd type="none" w="med" len="med"/>
+                    </a:lnB>
+                    <a:solidFill>
+                      <a:srgbClr val="FBF2DC"/>
+                    </a:solidFill>
+                  </a:tcPr>
+                </a:tc>
+                <a:tc>
+                  <a:txBody>
+                    <a:bodyPr/>
+                    <a:lstStyle/>
+                    <a:p>
                       <a:pPr algn="r" indent="0" marL="0">
                         <a:buNone/>
                       </a:pPr>
@@ -21626,6 +22103,74 @@
                     <a:bodyPr/>
                     <a:lstStyle/>
                     <a:p>
+                      <a:pPr algn="ctr" indent="0" marL="0">
+                        <a:buNone/>
+                      </a:pPr>
+                      <a:r>
+                        <a:rPr lang="en-US" sz="900" dirty="0">
+                          <a:solidFill>
+                            <a:srgbClr val="8A6A0B"/>
+                          </a:solidFill>
+                          <a:latin typeface="맑은 고딕" pitchFamily="34" charset="0"/>
+                          <a:ea typeface="맑은 고딕" pitchFamily="34" charset="-122"/>
+                          <a:cs typeface="맑은 고딕" pitchFamily="34" charset="-120"/>
+                        </a:rPr>
+                        <a:t>중간</a:t>
+                      </a:r>
+                      <a:endParaRPr lang="en-US" sz="900" dirty="0">
+                        <a:latin typeface="맑은 고딕" charset="0"/>
+                        <a:ea typeface="맑은 고딕" charset="0"/>
+                        <a:cs typeface="맑은 고딕" charset="0"/>
+                      </a:endParaRPr>
+                    </a:p>
+                  </a:txBody>
+                  <a:tcPr marL="25400" marR="25400" marT="25400" marB="25400" anchor="ctr">
+                    <a:lnL w="12700" cap="flat" cmpd="sng" algn="ctr">
+                      <a:solidFill>
+                        <a:srgbClr val="E5E4E1"/>
+                      </a:solidFill>
+                      <a:prstDash val="solid"/>
+                      <a:round/>
+                      <a:headEnd type="none" w="med" len="med"/>
+                      <a:tailEnd type="none" w="med" len="med"/>
+                    </a:lnL>
+                    <a:lnR w="12700" cap="flat" cmpd="sng" algn="ctr">
+                      <a:solidFill>
+                        <a:srgbClr val="E5E4E1"/>
+                      </a:solidFill>
+                      <a:prstDash val="solid"/>
+                      <a:round/>
+                      <a:headEnd type="none" w="med" len="med"/>
+                      <a:tailEnd type="none" w="med" len="med"/>
+                    </a:lnR>
+                    <a:lnT w="12700" cap="flat" cmpd="sng" algn="ctr">
+                      <a:solidFill>
+                        <a:srgbClr val="E5E4E1"/>
+                      </a:solidFill>
+                      <a:prstDash val="solid"/>
+                      <a:round/>
+                      <a:headEnd type="none" w="med" len="med"/>
+                      <a:tailEnd type="none" w="med" len="med"/>
+                    </a:lnT>
+                    <a:lnB w="12700" cap="flat" cmpd="sng" algn="ctr">
+                      <a:solidFill>
+                        <a:srgbClr val="E5E4E1"/>
+                      </a:solidFill>
+                      <a:prstDash val="solid"/>
+                      <a:round/>
+                      <a:headEnd type="none" w="med" len="med"/>
+                      <a:tailEnd type="none" w="med" len="med"/>
+                    </a:lnB>
+                    <a:solidFill>
+                      <a:srgbClr val="FBF2DC"/>
+                    </a:solidFill>
+                  </a:tcPr>
+                </a:tc>
+                <a:tc>
+                  <a:txBody>
+                    <a:bodyPr/>
+                    <a:lstStyle/>
+                    <a:p>
                       <a:pPr algn="r" indent="0" marL="0">
                         <a:buNone/>
                       </a:pPr>
@@ -22278,6 +22823,74 @@
                     <a:bodyPr/>
                     <a:lstStyle/>
                     <a:p>
+                      <a:pPr algn="ctr" indent="0" marL="0">
+                        <a:buNone/>
+                      </a:pPr>
+                      <a:r>
+                        <a:rPr lang="en-US" sz="900" dirty="0">
+                          <a:solidFill>
+                            <a:srgbClr val="8A6A0B"/>
+                          </a:solidFill>
+                          <a:latin typeface="맑은 고딕" pitchFamily="34" charset="0"/>
+                          <a:ea typeface="맑은 고딕" pitchFamily="34" charset="-122"/>
+                          <a:cs typeface="맑은 고딕" pitchFamily="34" charset="-120"/>
+                        </a:rPr>
+                        <a:t>중간</a:t>
+                      </a:r>
+                      <a:endParaRPr lang="en-US" sz="900" dirty="0">
+                        <a:latin typeface="맑은 고딕" charset="0"/>
+                        <a:ea typeface="맑은 고딕" charset="0"/>
+                        <a:cs typeface="맑은 고딕" charset="0"/>
+                      </a:endParaRPr>
+                    </a:p>
+                  </a:txBody>
+                  <a:tcPr marL="25400" marR="25400" marT="25400" marB="25400" anchor="ctr">
+                    <a:lnL w="12700" cap="flat" cmpd="sng" algn="ctr">
+                      <a:solidFill>
+                        <a:srgbClr val="E5E4E1"/>
+                      </a:solidFill>
+                      <a:prstDash val="solid"/>
+                      <a:round/>
+                      <a:headEnd type="none" w="med" len="med"/>
+                      <a:tailEnd type="none" w="med" len="med"/>
+                    </a:lnL>
+                    <a:lnR w="12700" cap="flat" cmpd="sng" algn="ctr">
+                      <a:solidFill>
+                        <a:srgbClr val="E5E4E1"/>
+                      </a:solidFill>
+                      <a:prstDash val="solid"/>
+                      <a:round/>
+                      <a:headEnd type="none" w="med" len="med"/>
+                      <a:tailEnd type="none" w="med" len="med"/>
+                    </a:lnR>
+                    <a:lnT w="12700" cap="flat" cmpd="sng" algn="ctr">
+                      <a:solidFill>
+                        <a:srgbClr val="E5E4E1"/>
+                      </a:solidFill>
+                      <a:prstDash val="solid"/>
+                      <a:round/>
+                      <a:headEnd type="none" w="med" len="med"/>
+                      <a:tailEnd type="none" w="med" len="med"/>
+                    </a:lnT>
+                    <a:lnB w="12700" cap="flat" cmpd="sng" algn="ctr">
+                      <a:solidFill>
+                        <a:srgbClr val="E5E4E1"/>
+                      </a:solidFill>
+                      <a:prstDash val="solid"/>
+                      <a:round/>
+                      <a:headEnd type="none" w="med" len="med"/>
+                      <a:tailEnd type="none" w="med" len="med"/>
+                    </a:lnB>
+                    <a:solidFill>
+                      <a:srgbClr val="FBF2DC"/>
+                    </a:solidFill>
+                  </a:tcPr>
+                </a:tc>
+                <a:tc>
+                  <a:txBody>
+                    <a:bodyPr/>
+                    <a:lstStyle/>
+                    <a:p>
                       <a:pPr algn="r" indent="0" marL="0">
                         <a:buNone/>
                       </a:pPr>
@@ -22930,6 +23543,74 @@
                     <a:bodyPr/>
                     <a:lstStyle/>
                     <a:p>
+                      <a:pPr algn="ctr" indent="0" marL="0">
+                        <a:buNone/>
+                      </a:pPr>
+                      <a:r>
+                        <a:rPr lang="en-US" sz="900" dirty="0">
+                          <a:solidFill>
+                            <a:srgbClr val="8A6A0B"/>
+                          </a:solidFill>
+                          <a:latin typeface="맑은 고딕" pitchFamily="34" charset="0"/>
+                          <a:ea typeface="맑은 고딕" pitchFamily="34" charset="-122"/>
+                          <a:cs typeface="맑은 고딕" pitchFamily="34" charset="-120"/>
+                        </a:rPr>
+                        <a:t>중간</a:t>
+                      </a:r>
+                      <a:endParaRPr lang="en-US" sz="900" dirty="0">
+                        <a:latin typeface="맑은 고딕" charset="0"/>
+                        <a:ea typeface="맑은 고딕" charset="0"/>
+                        <a:cs typeface="맑은 고딕" charset="0"/>
+                      </a:endParaRPr>
+                    </a:p>
+                  </a:txBody>
+                  <a:tcPr marL="25400" marR="25400" marT="25400" marB="25400" anchor="ctr">
+                    <a:lnL w="12700" cap="flat" cmpd="sng" algn="ctr">
+                      <a:solidFill>
+                        <a:srgbClr val="E5E4E1"/>
+                      </a:solidFill>
+                      <a:prstDash val="solid"/>
+                      <a:round/>
+                      <a:headEnd type="none" w="med" len="med"/>
+                      <a:tailEnd type="none" w="med" len="med"/>
+                    </a:lnL>
+                    <a:lnR w="12700" cap="flat" cmpd="sng" algn="ctr">
+                      <a:solidFill>
+                        <a:srgbClr val="E5E4E1"/>
+                      </a:solidFill>
+                      <a:prstDash val="solid"/>
+                      <a:round/>
+                      <a:headEnd type="none" w="med" len="med"/>
+                      <a:tailEnd type="none" w="med" len="med"/>
+                    </a:lnR>
+                    <a:lnT w="12700" cap="flat" cmpd="sng" algn="ctr">
+                      <a:solidFill>
+                        <a:srgbClr val="E5E4E1"/>
+                      </a:solidFill>
+                      <a:prstDash val="solid"/>
+                      <a:round/>
+                      <a:headEnd type="none" w="med" len="med"/>
+                      <a:tailEnd type="none" w="med" len="med"/>
+                    </a:lnT>
+                    <a:lnB w="12700" cap="flat" cmpd="sng" algn="ctr">
+                      <a:solidFill>
+                        <a:srgbClr val="E5E4E1"/>
+                      </a:solidFill>
+                      <a:prstDash val="solid"/>
+                      <a:round/>
+                      <a:headEnd type="none" w="med" len="med"/>
+                      <a:tailEnd type="none" w="med" len="med"/>
+                    </a:lnB>
+                    <a:solidFill>
+                      <a:srgbClr val="FBF2DC"/>
+                    </a:solidFill>
+                  </a:tcPr>
+                </a:tc>
+                <a:tc>
+                  <a:txBody>
+                    <a:bodyPr/>
+                    <a:lstStyle/>
+                    <a:p>
                       <a:pPr algn="r" indent="0" marL="0">
                         <a:buNone/>
                       </a:pPr>
@@ -23582,6 +24263,74 @@
                     <a:bodyPr/>
                     <a:lstStyle/>
                     <a:p>
+                      <a:pPr algn="ctr" indent="0" marL="0">
+                        <a:buNone/>
+                      </a:pPr>
+                      <a:r>
+                        <a:rPr lang="en-US" sz="900" dirty="0">
+                          <a:solidFill>
+                            <a:srgbClr val="8A6A0B"/>
+                          </a:solidFill>
+                          <a:latin typeface="맑은 고딕" pitchFamily="34" charset="0"/>
+                          <a:ea typeface="맑은 고딕" pitchFamily="34" charset="-122"/>
+                          <a:cs typeface="맑은 고딕" pitchFamily="34" charset="-120"/>
+                        </a:rPr>
+                        <a:t>중간</a:t>
+                      </a:r>
+                      <a:endParaRPr lang="en-US" sz="900" dirty="0">
+                        <a:latin typeface="맑은 고딕" charset="0"/>
+                        <a:ea typeface="맑은 고딕" charset="0"/>
+                        <a:cs typeface="맑은 고딕" charset="0"/>
+                      </a:endParaRPr>
+                    </a:p>
+                  </a:txBody>
+                  <a:tcPr marL="25400" marR="25400" marT="25400" marB="25400" anchor="ctr">
+                    <a:lnL w="12700" cap="flat" cmpd="sng" algn="ctr">
+                      <a:solidFill>
+                        <a:srgbClr val="E5E4E1"/>
+                      </a:solidFill>
+                      <a:prstDash val="solid"/>
+                      <a:round/>
+                      <a:headEnd type="none" w="med" len="med"/>
+                      <a:tailEnd type="none" w="med" len="med"/>
+                    </a:lnL>
+                    <a:lnR w="12700" cap="flat" cmpd="sng" algn="ctr">
+                      <a:solidFill>
+                        <a:srgbClr val="E5E4E1"/>
+                      </a:solidFill>
+                      <a:prstDash val="solid"/>
+                      <a:round/>
+                      <a:headEnd type="none" w="med" len="med"/>
+                      <a:tailEnd type="none" w="med" len="med"/>
+                    </a:lnR>
+                    <a:lnT w="12700" cap="flat" cmpd="sng" algn="ctr">
+                      <a:solidFill>
+                        <a:srgbClr val="E5E4E1"/>
+                      </a:solidFill>
+                      <a:prstDash val="solid"/>
+                      <a:round/>
+                      <a:headEnd type="none" w="med" len="med"/>
+                      <a:tailEnd type="none" w="med" len="med"/>
+                    </a:lnT>
+                    <a:lnB w="12700" cap="flat" cmpd="sng" algn="ctr">
+                      <a:solidFill>
+                        <a:srgbClr val="E5E4E1"/>
+                      </a:solidFill>
+                      <a:prstDash val="solid"/>
+                      <a:round/>
+                      <a:headEnd type="none" w="med" len="med"/>
+                      <a:tailEnd type="none" w="med" len="med"/>
+                    </a:lnB>
+                    <a:solidFill>
+                      <a:srgbClr val="FBF2DC"/>
+                    </a:solidFill>
+                  </a:tcPr>
+                </a:tc>
+                <a:tc>
+                  <a:txBody>
+                    <a:bodyPr/>
+                    <a:lstStyle/>
+                    <a:p>
                       <a:pPr algn="r" indent="0" marL="0">
                         <a:buNone/>
                       </a:pPr>
@@ -24234,6 +24983,74 @@
                     <a:bodyPr/>
                     <a:lstStyle/>
                     <a:p>
+                      <a:pPr algn="ctr" indent="0" marL="0">
+                        <a:buNone/>
+                      </a:pPr>
+                      <a:r>
+                        <a:rPr lang="en-US" sz="900" dirty="0">
+                          <a:solidFill>
+                            <a:srgbClr val="8A6A0B"/>
+                          </a:solidFill>
+                          <a:latin typeface="맑은 고딕" pitchFamily="34" charset="0"/>
+                          <a:ea typeface="맑은 고딕" pitchFamily="34" charset="-122"/>
+                          <a:cs typeface="맑은 고딕" pitchFamily="34" charset="-120"/>
+                        </a:rPr>
+                        <a:t>중간</a:t>
+                      </a:r>
+                      <a:endParaRPr lang="en-US" sz="900" dirty="0">
+                        <a:latin typeface="맑은 고딕" charset="0"/>
+                        <a:ea typeface="맑은 고딕" charset="0"/>
+                        <a:cs typeface="맑은 고딕" charset="0"/>
+                      </a:endParaRPr>
+                    </a:p>
+                  </a:txBody>
+                  <a:tcPr marL="25400" marR="25400" marT="25400" marB="25400" anchor="ctr">
+                    <a:lnL w="12700" cap="flat" cmpd="sng" algn="ctr">
+                      <a:solidFill>
+                        <a:srgbClr val="E5E4E1"/>
+                      </a:solidFill>
+                      <a:prstDash val="solid"/>
+                      <a:round/>
+                      <a:headEnd type="none" w="med" len="med"/>
+                      <a:tailEnd type="none" w="med" len="med"/>
+                    </a:lnL>
+                    <a:lnR w="12700" cap="flat" cmpd="sng" algn="ctr">
+                      <a:solidFill>
+                        <a:srgbClr val="E5E4E1"/>
+                      </a:solidFill>
+                      <a:prstDash val="solid"/>
+                      <a:round/>
+                      <a:headEnd type="none" w="med" len="med"/>
+                      <a:tailEnd type="none" w="med" len="med"/>
+                    </a:lnR>
+                    <a:lnT w="12700" cap="flat" cmpd="sng" algn="ctr">
+                      <a:solidFill>
+                        <a:srgbClr val="E5E4E1"/>
+                      </a:solidFill>
+                      <a:prstDash val="solid"/>
+                      <a:round/>
+                      <a:headEnd type="none" w="med" len="med"/>
+                      <a:tailEnd type="none" w="med" len="med"/>
+                    </a:lnT>
+                    <a:lnB w="12700" cap="flat" cmpd="sng" algn="ctr">
+                      <a:solidFill>
+                        <a:srgbClr val="E5E4E1"/>
+                      </a:solidFill>
+                      <a:prstDash val="solid"/>
+                      <a:round/>
+                      <a:headEnd type="none" w="med" len="med"/>
+                      <a:tailEnd type="none" w="med" len="med"/>
+                    </a:lnB>
+                    <a:solidFill>
+                      <a:srgbClr val="FBF2DC"/>
+                    </a:solidFill>
+                  </a:tcPr>
+                </a:tc>
+                <a:tc>
+                  <a:txBody>
+                    <a:bodyPr/>
+                    <a:lstStyle/>
+                    <a:p>
                       <a:pPr algn="r" indent="0" marL="0">
                         <a:buNone/>
                       </a:pPr>
@@ -24886,6 +25703,74 @@
                     <a:bodyPr/>
                     <a:lstStyle/>
                     <a:p>
+                      <a:pPr algn="ctr" indent="0" marL="0">
+                        <a:buNone/>
+                      </a:pPr>
+                      <a:r>
+                        <a:rPr lang="en-US" sz="900" dirty="0">
+                          <a:solidFill>
+                            <a:srgbClr val="8A6A0B"/>
+                          </a:solidFill>
+                          <a:latin typeface="맑은 고딕" pitchFamily="34" charset="0"/>
+                          <a:ea typeface="맑은 고딕" pitchFamily="34" charset="-122"/>
+                          <a:cs typeface="맑은 고딕" pitchFamily="34" charset="-120"/>
+                        </a:rPr>
+                        <a:t>중간</a:t>
+                      </a:r>
+                      <a:endParaRPr lang="en-US" sz="900" dirty="0">
+                        <a:latin typeface="맑은 고딕" charset="0"/>
+                        <a:ea typeface="맑은 고딕" charset="0"/>
+                        <a:cs typeface="맑은 고딕" charset="0"/>
+                      </a:endParaRPr>
+                    </a:p>
+                  </a:txBody>
+                  <a:tcPr marL="25400" marR="25400" marT="25400" marB="25400" anchor="ctr">
+                    <a:lnL w="12700" cap="flat" cmpd="sng" algn="ctr">
+                      <a:solidFill>
+                        <a:srgbClr val="E5E4E1"/>
+                      </a:solidFill>
+                      <a:prstDash val="solid"/>
+                      <a:round/>
+                      <a:headEnd type="none" w="med" len="med"/>
+                      <a:tailEnd type="none" w="med" len="med"/>
+                    </a:lnL>
+                    <a:lnR w="12700" cap="flat" cmpd="sng" algn="ctr">
+                      <a:solidFill>
+                        <a:srgbClr val="E5E4E1"/>
+                      </a:solidFill>
+                      <a:prstDash val="solid"/>
+                      <a:round/>
+                      <a:headEnd type="none" w="med" len="med"/>
+                      <a:tailEnd type="none" w="med" len="med"/>
+                    </a:lnR>
+                    <a:lnT w="12700" cap="flat" cmpd="sng" algn="ctr">
+                      <a:solidFill>
+                        <a:srgbClr val="E5E4E1"/>
+                      </a:solidFill>
+                      <a:prstDash val="solid"/>
+                      <a:round/>
+                      <a:headEnd type="none" w="med" len="med"/>
+                      <a:tailEnd type="none" w="med" len="med"/>
+                    </a:lnT>
+                    <a:lnB w="12700" cap="flat" cmpd="sng" algn="ctr">
+                      <a:solidFill>
+                        <a:srgbClr val="E5E4E1"/>
+                      </a:solidFill>
+                      <a:prstDash val="solid"/>
+                      <a:round/>
+                      <a:headEnd type="none" w="med" len="med"/>
+                      <a:tailEnd type="none" w="med" len="med"/>
+                    </a:lnB>
+                    <a:solidFill>
+                      <a:srgbClr val="FBF2DC"/>
+                    </a:solidFill>
+                  </a:tcPr>
+                </a:tc>
+                <a:tc>
+                  <a:txBody>
+                    <a:bodyPr/>
+                    <a:lstStyle/>
+                    <a:p>
                       <a:pPr algn="r" indent="0" marL="0">
                         <a:buNone/>
                       </a:pPr>
@@ -25538,6 +26423,74 @@
                     <a:bodyPr/>
                     <a:lstStyle/>
                     <a:p>
+                      <a:pPr algn="ctr" indent="0" marL="0">
+                        <a:buNone/>
+                      </a:pPr>
+                      <a:r>
+                        <a:rPr lang="en-US" sz="900" dirty="0">
+                          <a:solidFill>
+                            <a:srgbClr val="8A6A0B"/>
+                          </a:solidFill>
+                          <a:latin typeface="맑은 고딕" pitchFamily="34" charset="0"/>
+                          <a:ea typeface="맑은 고딕" pitchFamily="34" charset="-122"/>
+                          <a:cs typeface="맑은 고딕" pitchFamily="34" charset="-120"/>
+                        </a:rPr>
+                        <a:t>중간</a:t>
+                      </a:r>
+                      <a:endParaRPr lang="en-US" sz="900" dirty="0">
+                        <a:latin typeface="맑은 고딕" charset="0"/>
+                        <a:ea typeface="맑은 고딕" charset="0"/>
+                        <a:cs typeface="맑은 고딕" charset="0"/>
+                      </a:endParaRPr>
+                    </a:p>
+                  </a:txBody>
+                  <a:tcPr marL="25400" marR="25400" marT="25400" marB="25400" anchor="ctr">
+                    <a:lnL w="12700" cap="flat" cmpd="sng" algn="ctr">
+                      <a:solidFill>
+                        <a:srgbClr val="E5E4E1"/>
+                      </a:solidFill>
+                      <a:prstDash val="solid"/>
+                      <a:round/>
+                      <a:headEnd type="none" w="med" len="med"/>
+                      <a:tailEnd type="none" w="med" len="med"/>
+                    </a:lnL>
+                    <a:lnR w="12700" cap="flat" cmpd="sng" algn="ctr">
+                      <a:solidFill>
+                        <a:srgbClr val="E5E4E1"/>
+                      </a:solidFill>
+                      <a:prstDash val="solid"/>
+                      <a:round/>
+                      <a:headEnd type="none" w="med" len="med"/>
+                      <a:tailEnd type="none" w="med" len="med"/>
+                    </a:lnR>
+                    <a:lnT w="12700" cap="flat" cmpd="sng" algn="ctr">
+                      <a:solidFill>
+                        <a:srgbClr val="E5E4E1"/>
+                      </a:solidFill>
+                      <a:prstDash val="solid"/>
+                      <a:round/>
+                      <a:headEnd type="none" w="med" len="med"/>
+                      <a:tailEnd type="none" w="med" len="med"/>
+                    </a:lnT>
+                    <a:lnB w="12700" cap="flat" cmpd="sng" algn="ctr">
+                      <a:solidFill>
+                        <a:srgbClr val="E5E4E1"/>
+                      </a:solidFill>
+                      <a:prstDash val="solid"/>
+                      <a:round/>
+                      <a:headEnd type="none" w="med" len="med"/>
+                      <a:tailEnd type="none" w="med" len="med"/>
+                    </a:lnB>
+                    <a:solidFill>
+                      <a:srgbClr val="FBF2DC"/>
+                    </a:solidFill>
+                  </a:tcPr>
+                </a:tc>
+                <a:tc>
+                  <a:txBody>
+                    <a:bodyPr/>
+                    <a:lstStyle/>
+                    <a:p>
                       <a:pPr algn="r" indent="0" marL="0">
                         <a:buNone/>
                       </a:pPr>
@@ -26190,6 +27143,74 @@
                     <a:bodyPr/>
                     <a:lstStyle/>
                     <a:p>
+                      <a:pPr algn="ctr" indent="0" marL="0">
+                        <a:buNone/>
+                      </a:pPr>
+                      <a:r>
+                        <a:rPr lang="en-US" sz="900" dirty="0">
+                          <a:solidFill>
+                            <a:srgbClr val="C62828"/>
+                          </a:solidFill>
+                          <a:latin typeface="맑은 고딕" pitchFamily="34" charset="0"/>
+                          <a:ea typeface="맑은 고딕" pitchFamily="34" charset="-122"/>
+                          <a:cs typeface="맑은 고딕" pitchFamily="34" charset="-120"/>
+                        </a:rPr>
+                        <a:t>공격적</a:t>
+                      </a:r>
+                      <a:endParaRPr lang="en-US" sz="900" dirty="0">
+                        <a:latin typeface="맑은 고딕" charset="0"/>
+                        <a:ea typeface="맑은 고딕" charset="0"/>
+                        <a:cs typeface="맑은 고딕" charset="0"/>
+                      </a:endParaRPr>
+                    </a:p>
+                  </a:txBody>
+                  <a:tcPr marL="25400" marR="25400" marT="25400" marB="25400" anchor="ctr">
+                    <a:lnL w="12700" cap="flat" cmpd="sng" algn="ctr">
+                      <a:solidFill>
+                        <a:srgbClr val="E5E4E1"/>
+                      </a:solidFill>
+                      <a:prstDash val="solid"/>
+                      <a:round/>
+                      <a:headEnd type="none" w="med" len="med"/>
+                      <a:tailEnd type="none" w="med" len="med"/>
+                    </a:lnL>
+                    <a:lnR w="12700" cap="flat" cmpd="sng" algn="ctr">
+                      <a:solidFill>
+                        <a:srgbClr val="E5E4E1"/>
+                      </a:solidFill>
+                      <a:prstDash val="solid"/>
+                      <a:round/>
+                      <a:headEnd type="none" w="med" len="med"/>
+                      <a:tailEnd type="none" w="med" len="med"/>
+                    </a:lnR>
+                    <a:lnT w="12700" cap="flat" cmpd="sng" algn="ctr">
+                      <a:solidFill>
+                        <a:srgbClr val="E5E4E1"/>
+                      </a:solidFill>
+                      <a:prstDash val="solid"/>
+                      <a:round/>
+                      <a:headEnd type="none" w="med" len="med"/>
+                      <a:tailEnd type="none" w="med" len="med"/>
+                    </a:lnT>
+                    <a:lnB w="12700" cap="flat" cmpd="sng" algn="ctr">
+                      <a:solidFill>
+                        <a:srgbClr val="E5E4E1"/>
+                      </a:solidFill>
+                      <a:prstDash val="solid"/>
+                      <a:round/>
+                      <a:headEnd type="none" w="med" len="med"/>
+                      <a:tailEnd type="none" w="med" len="med"/>
+                    </a:lnB>
+                    <a:solidFill>
+                      <a:srgbClr val="FAE7E7"/>
+                    </a:solidFill>
+                  </a:tcPr>
+                </a:tc>
+                <a:tc>
+                  <a:txBody>
+                    <a:bodyPr/>
+                    <a:lstStyle/>
+                    <a:p>
                       <a:pPr algn="r" indent="0" marL="0">
                         <a:buNone/>
                       </a:pPr>
@@ -26842,6 +27863,74 @@
                     <a:bodyPr/>
                     <a:lstStyle/>
                     <a:p>
+                      <a:pPr algn="ctr" indent="0" marL="0">
+                        <a:buNone/>
+                      </a:pPr>
+                      <a:r>
+                        <a:rPr lang="en-US" sz="900" dirty="0">
+                          <a:solidFill>
+                            <a:srgbClr val="C62828"/>
+                          </a:solidFill>
+                          <a:latin typeface="맑은 고딕" pitchFamily="34" charset="0"/>
+                          <a:ea typeface="맑은 고딕" pitchFamily="34" charset="-122"/>
+                          <a:cs typeface="맑은 고딕" pitchFamily="34" charset="-120"/>
+                        </a:rPr>
+                        <a:t>공격적</a:t>
+                      </a:r>
+                      <a:endParaRPr lang="en-US" sz="900" dirty="0">
+                        <a:latin typeface="맑은 고딕" charset="0"/>
+                        <a:ea typeface="맑은 고딕" charset="0"/>
+                        <a:cs typeface="맑은 고딕" charset="0"/>
+                      </a:endParaRPr>
+                    </a:p>
+                  </a:txBody>
+                  <a:tcPr marL="25400" marR="25400" marT="25400" marB="25400" anchor="ctr">
+                    <a:lnL w="12700" cap="flat" cmpd="sng" algn="ctr">
+                      <a:solidFill>
+                        <a:srgbClr val="E5E4E1"/>
+                      </a:solidFill>
+                      <a:prstDash val="solid"/>
+                      <a:round/>
+                      <a:headEnd type="none" w="med" len="med"/>
+                      <a:tailEnd type="none" w="med" len="med"/>
+                    </a:lnL>
+                    <a:lnR w="12700" cap="flat" cmpd="sng" algn="ctr">
+                      <a:solidFill>
+                        <a:srgbClr val="E5E4E1"/>
+                      </a:solidFill>
+                      <a:prstDash val="solid"/>
+                      <a:round/>
+                      <a:headEnd type="none" w="med" len="med"/>
+                      <a:tailEnd type="none" w="med" len="med"/>
+                    </a:lnR>
+                    <a:lnT w="12700" cap="flat" cmpd="sng" algn="ctr">
+                      <a:solidFill>
+                        <a:srgbClr val="E5E4E1"/>
+                      </a:solidFill>
+                      <a:prstDash val="solid"/>
+                      <a:round/>
+                      <a:headEnd type="none" w="med" len="med"/>
+                      <a:tailEnd type="none" w="med" len="med"/>
+                    </a:lnT>
+                    <a:lnB w="12700" cap="flat" cmpd="sng" algn="ctr">
+                      <a:solidFill>
+                        <a:srgbClr val="E5E4E1"/>
+                      </a:solidFill>
+                      <a:prstDash val="solid"/>
+                      <a:round/>
+                      <a:headEnd type="none" w="med" len="med"/>
+                      <a:tailEnd type="none" w="med" len="med"/>
+                    </a:lnB>
+                    <a:solidFill>
+                      <a:srgbClr val="FAE7E7"/>
+                    </a:solidFill>
+                  </a:tcPr>
+                </a:tc>
+                <a:tc>
+                  <a:txBody>
+                    <a:bodyPr/>
+                    <a:lstStyle/>
+                    <a:p>
                       <a:pPr algn="r" indent="0" marL="0">
                         <a:buNone/>
                       </a:pPr>
@@ -27494,6 +28583,74 @@
                     <a:bodyPr/>
                     <a:lstStyle/>
                     <a:p>
+                      <a:pPr algn="ctr" indent="0" marL="0">
+                        <a:buNone/>
+                      </a:pPr>
+                      <a:r>
+                        <a:rPr lang="en-US" sz="900" dirty="0">
+                          <a:solidFill>
+                            <a:srgbClr val="C62828"/>
+                          </a:solidFill>
+                          <a:latin typeface="맑은 고딕" pitchFamily="34" charset="0"/>
+                          <a:ea typeface="맑은 고딕" pitchFamily="34" charset="-122"/>
+                          <a:cs typeface="맑은 고딕" pitchFamily="34" charset="-120"/>
+                        </a:rPr>
+                        <a:t>공격적</a:t>
+                      </a:r>
+                      <a:endParaRPr lang="en-US" sz="900" dirty="0">
+                        <a:latin typeface="맑은 고딕" charset="0"/>
+                        <a:ea typeface="맑은 고딕" charset="0"/>
+                        <a:cs typeface="맑은 고딕" charset="0"/>
+                      </a:endParaRPr>
+                    </a:p>
+                  </a:txBody>
+                  <a:tcPr marL="25400" marR="25400" marT="25400" marB="25400" anchor="ctr">
+                    <a:lnL w="12700" cap="flat" cmpd="sng" algn="ctr">
+                      <a:solidFill>
+                        <a:srgbClr val="E5E4E1"/>
+                      </a:solidFill>
+                      <a:prstDash val="solid"/>
+                      <a:round/>
+                      <a:headEnd type="none" w="med" len="med"/>
+                      <a:tailEnd type="none" w="med" len="med"/>
+                    </a:lnL>
+                    <a:lnR w="12700" cap="flat" cmpd="sng" algn="ctr">
+                      <a:solidFill>
+                        <a:srgbClr val="E5E4E1"/>
+                      </a:solidFill>
+                      <a:prstDash val="solid"/>
+                      <a:round/>
+                      <a:headEnd type="none" w="med" len="med"/>
+                      <a:tailEnd type="none" w="med" len="med"/>
+                    </a:lnR>
+                    <a:lnT w="12700" cap="flat" cmpd="sng" algn="ctr">
+                      <a:solidFill>
+                        <a:srgbClr val="E5E4E1"/>
+                      </a:solidFill>
+                      <a:prstDash val="solid"/>
+                      <a:round/>
+                      <a:headEnd type="none" w="med" len="med"/>
+                      <a:tailEnd type="none" w="med" len="med"/>
+                    </a:lnT>
+                    <a:lnB w="12700" cap="flat" cmpd="sng" algn="ctr">
+                      <a:solidFill>
+                        <a:srgbClr val="E5E4E1"/>
+                      </a:solidFill>
+                      <a:prstDash val="solid"/>
+                      <a:round/>
+                      <a:headEnd type="none" w="med" len="med"/>
+                      <a:tailEnd type="none" w="med" len="med"/>
+                    </a:lnB>
+                    <a:solidFill>
+                      <a:srgbClr val="FAE7E7"/>
+                    </a:solidFill>
+                  </a:tcPr>
+                </a:tc>
+                <a:tc>
+                  <a:txBody>
+                    <a:bodyPr/>
+                    <a:lstStyle/>
+                    <a:p>
                       <a:pPr algn="r" indent="0" marL="0">
                         <a:buNone/>
                       </a:pPr>
@@ -28146,6 +29303,74 @@
                     <a:bodyPr/>
                     <a:lstStyle/>
                     <a:p>
+                      <a:pPr algn="ctr" indent="0" marL="0">
+                        <a:buNone/>
+                      </a:pPr>
+                      <a:r>
+                        <a:rPr lang="en-US" sz="900" dirty="0">
+                          <a:solidFill>
+                            <a:srgbClr val="C62828"/>
+                          </a:solidFill>
+                          <a:latin typeface="맑은 고딕" pitchFamily="34" charset="0"/>
+                          <a:ea typeface="맑은 고딕" pitchFamily="34" charset="-122"/>
+                          <a:cs typeface="맑은 고딕" pitchFamily="34" charset="-120"/>
+                        </a:rPr>
+                        <a:t>공격적</a:t>
+                      </a:r>
+                      <a:endParaRPr lang="en-US" sz="900" dirty="0">
+                        <a:latin typeface="맑은 고딕" charset="0"/>
+                        <a:ea typeface="맑은 고딕" charset="0"/>
+                        <a:cs typeface="맑은 고딕" charset="0"/>
+                      </a:endParaRPr>
+                    </a:p>
+                  </a:txBody>
+                  <a:tcPr marL="25400" marR="25400" marT="25400" marB="25400" anchor="ctr">
+                    <a:lnL w="12700" cap="flat" cmpd="sng" algn="ctr">
+                      <a:solidFill>
+                        <a:srgbClr val="E5E4E1"/>
+                      </a:solidFill>
+                      <a:prstDash val="solid"/>
+                      <a:round/>
+                      <a:headEnd type="none" w="med" len="med"/>
+                      <a:tailEnd type="none" w="med" len="med"/>
+                    </a:lnL>
+                    <a:lnR w="12700" cap="flat" cmpd="sng" algn="ctr">
+                      <a:solidFill>
+                        <a:srgbClr val="E5E4E1"/>
+                      </a:solidFill>
+                      <a:prstDash val="solid"/>
+                      <a:round/>
+                      <a:headEnd type="none" w="med" len="med"/>
+                      <a:tailEnd type="none" w="med" len="med"/>
+                    </a:lnR>
+                    <a:lnT w="12700" cap="flat" cmpd="sng" algn="ctr">
+                      <a:solidFill>
+                        <a:srgbClr val="E5E4E1"/>
+                      </a:solidFill>
+                      <a:prstDash val="solid"/>
+                      <a:round/>
+                      <a:headEnd type="none" w="med" len="med"/>
+                      <a:tailEnd type="none" w="med" len="med"/>
+                    </a:lnT>
+                    <a:lnB w="12700" cap="flat" cmpd="sng" algn="ctr">
+                      <a:solidFill>
+                        <a:srgbClr val="E5E4E1"/>
+                      </a:solidFill>
+                      <a:prstDash val="solid"/>
+                      <a:round/>
+                      <a:headEnd type="none" w="med" len="med"/>
+                      <a:tailEnd type="none" w="med" len="med"/>
+                    </a:lnB>
+                    <a:solidFill>
+                      <a:srgbClr val="FAE7E7"/>
+                    </a:solidFill>
+                  </a:tcPr>
+                </a:tc>
+                <a:tc>
+                  <a:txBody>
+                    <a:bodyPr/>
+                    <a:lstStyle/>
+                    <a:p>
                       <a:pPr algn="r" indent="0" marL="0">
                         <a:buNone/>
                       </a:pPr>
@@ -28284,6 +29509,45 @@
         </p:nvSpPr>
         <p:spPr>
           <a:xfrm>
+            <a:off x="566928" y="5413248"/>
+            <a:ext cx="11057839" cy="310896"/>
+          </a:xfrm>
+          <a:prstGeom prst="rect">
+            <a:avLst/>
+          </a:prstGeom>
+          <a:noFill/>
+          <a:ln/>
+        </p:spPr>
+        <p:txBody>
+          <a:bodyPr wrap="square" lIns="0" tIns="0" rIns="0" bIns="0" rtlCol="0" anchor="t"/>
+          <a:lstStyle/>
+          <a:p>
+            <a:pPr indent="0" marL="0">
+              <a:buNone/>
+            </a:pPr>
+            <a:r>
+              <a:rPr lang="en-US" sz="1050" dirty="0">
+                <a:solidFill>
+                  <a:srgbClr val="84888B"/>
+                </a:solidFill>
+                <a:latin typeface="맑은 고딕" pitchFamily="34" charset="0"/>
+                <a:ea typeface="맑은 고딕" pitchFamily="34" charset="-122"/>
+                <a:cs typeface="맑은 고딕" pitchFamily="34" charset="-120"/>
+              </a:rPr>
+              <a:t>등급은 B(같은 조건으로 돌린 손실 확률) 하나로만 가릅니다 — 15% 이하 방어적, 15~25% 중간, 25% 초과 공격적. 수익률이나 기초자산 종류는 등급에 넣지 않았습니다. 모두 원금비보장 1등급 상품이므로 "안전"이 아니라 서로 견준 순서입니다.</a:t>
+            </a:r>
+            <a:endParaRPr lang="en-US" sz="1050" dirty="0"/>
+          </a:p>
+        </p:txBody>
+      </p:sp>
+      <p:sp>
+        <p:nvSpPr>
+          <p:cNvPr id="7" name="Text 4"/>
+          <p:cNvSpPr/>
+          <p:nvPr/>
+        </p:nvSpPr>
+        <p:spPr>
+          <a:xfrm>
             <a:off x="566928" y="6473952"/>
             <a:ext cx="10417759" cy="237744"/>
           </a:xfrm>
@@ -28317,7 +29581,7 @@
       </p:sp>
       <p:sp>
         <p:nvSpPr>
-          <p:cNvPr id="7" name="Text 4"/>
+          <p:cNvPr id="8" name="Text 5"/>
           <p:cNvSpPr/>
           <p:nvPr/>
         </p:nvSpPr>

--- a/els-proposal.pptx
+++ b/els-proposal.pptx
@@ -19,9 +19,10 @@
     <p:sldId id="267" r:id="rId13"/>
     <p:sldId id="268" r:id="rId14"/>
     <p:sldId id="269" r:id="rId15"/>
+    <p:sldId id="270" r:id="rId16"/>
   </p:sldIdLst>
   <p:notesMasterIdLst>
-    <p:notesMasterId r:id="rId16"/>
+    <p:notesMasterId r:id="rId17"/>
   </p:notesMasterIdLst>
   <p:sldSz cx="12192000" cy="6858000"/>
   <p:notesSz cx="6858000" cy="12192000"/>
@@ -146,7 +147,7 @@
                 </a:solidFill>
                 <a:latin typeface="맑은 고딕"/>
               </a:rPr>
-              <a:t>자산군별 손실 확률 (%)</a:t>
+              <a:t>무엇을 담았느냐에 따른 손해 볼 가능성 (%)</a:t>
             </a:r>
           </a:p>
         </c:rich>
@@ -170,7 +171,7 @@
               <c:strCache>
                 <c:ptCount val="1"/>
                 <c:pt idx="0">
-                  <c:v>손실 확률(평균)</c:v>
+                  <c:v>손해 볼 가능성(평균)</c:v>
                 </c:pt>
               </c:strCache>
             </c:strRef>
@@ -246,13 +247,13 @@
                 <c:ptCount val="3"/>
                 <c:lvl>
                   <c:pt idx="0">
-                    <c:v>지수형 (6종)</c:v>
+                    <c:v>지수만 (6종)</c:v>
                   </c:pt>
                   <c:pt idx="1">
-                    <c:v>혼합형 (3종)</c:v>
+                    <c:v>지수 + 종목 (3종)</c:v>
                   </c:pt>
                   <c:pt idx="2">
-                    <c:v>종목형 (8종)</c:v>
+                    <c:v>개별 종목만 (8종)</c:v>
                   </c:pt>
                 </c:lvl>
               </c:multiLvlStrCache>
@@ -818,7 +819,7 @@
           <a:p>
             <a:r>
               <a:rPr lang="en-US" dirty="0"/>
-              <a:t>이번 회차 17종. 청약 2026.08.24~2026.08.28. 전부 원금비보장 1등급입니다.</a:t>
+              <a:t>이번 주 17종. 신청 2026.08.24~2026.08.28. 전부 원금을 잃을 수 있는 1등급 상품입니다.</a:t>
             </a:r>
             <a:endParaRPr lang="en-US" dirty="0"/>
           </a:p>
@@ -906,7 +907,7 @@
           <a:p>
             <a:r>
               <a:rPr lang="en-US" dirty="0"/>
-              <a:t>"종목이 들어갔는데 괜찮나요?" → 삼성전자·SK하이닉스가 들어간 종목형이 맞고, 적용 변동성 60.9%로 지수 평균(40.5%)보다 높은 것도 맞습니다. 손실 확률도 18.9%로 지수형 평균(15.8%)보다 높습니다. 이 자리에 올린 이유는 안전해서가 아니라 대가가 크기 때문입니다 — 손실 확률 1%당 연 2.11%로, 지수형 평균 0.95%의 2.2배입니다. 원금 보전이 최우선인 분께는 추천 1번을 권하십시오.</a:t>
+              <a:t>"개별 종목이 들어갔는데 괜찮나요?" → 삼성전자·SK하이닉스가 들어간 게 맞고, 가격 출렁임 60.9%로 지수만 담은 상품 평균(40.5%)보다 큰 것도 맞습니다. 손해 볼 가능성도 18.9%로 지수만 담은 상품 평균(15.8%)보다 높습니다. 그런데도 올린 이유는 안전해서가 아니라 대가가 크기 때문입니다 — 손해 볼 가능성 1%마다 연 2.11%로, 지수 상품 평균 0.95%의 2.2배입니다. 원금 지키는 게 제일 중요한 분께는 추천 1번을 권하십시오.</a:t>
             </a:r>
             <a:endParaRPr lang="en-US" dirty="0"/>
           </a:p>
@@ -1170,7 +1171,7 @@
           <a:p>
             <a:r>
               <a:rPr lang="en-US" dirty="0"/>
-              <a:t>1번은 이번 주에만 해당하는 이야기가 아니라 매 회차 반복됩니다. 마감일을 잘못 안내하면 고객이 청약 기회를 놓칩니다.</a:t>
+              <a:t>1번은 이번 주에만 해당하는 이야기가 아니라 매주 반복됩니다. 마감일을 잘못 안내하면 고객이 기회를 놓칩니다.</a:t>
             </a:r>
             <a:endParaRPr lang="en-US" dirty="0"/>
           </a:p>
@@ -1300,6 +1301,94 @@
 </p:notes>
 </file>
 
+<file path=ppt/notesSlides/notesSlide15.xml><?xml version="1.0" encoding="utf-8"?>
+<p:notes xmlns:a="http://schemas.openxmlformats.org/drawingml/2006/main" xmlns:r="http://schemas.openxmlformats.org/officeDocument/2006/relationships" xmlns:p="http://schemas.openxmlformats.org/presentationml/2006/main">
+  <p:cSld>
+    <p:spTree>
+      <p:nvGrpSpPr>
+        <p:cNvPr id="1" name=""/>
+        <p:cNvGrpSpPr/>
+        <p:nvPr/>
+      </p:nvGrpSpPr>
+      <p:grpSpPr>
+        <a:xfrm>
+          <a:off x="0" y="0"/>
+          <a:ext cx="0" cy="0"/>
+          <a:chOff x="0" y="0"/>
+          <a:chExt cx="0" cy="0"/>
+        </a:xfrm>
+      </p:grpSpPr>
+      <p:sp>
+        <p:nvSpPr>
+          <p:cNvPr id="2" name="Slide Image Placeholder 1"/>
+          <p:cNvSpPr>
+            <a:spLocks noGrp="1" noRot="1" noChangeAspect="1"/>
+          </p:cNvSpPr>
+          <p:nvPr>
+            <p:ph type="sldImg"/>
+          </p:nvPr>
+        </p:nvSpPr>
+        <p:spPr/>
+      </p:sp>
+      <p:sp>
+        <p:nvSpPr>
+          <p:cNvPr id="3" name="Notes Placeholder 2"/>
+          <p:cNvSpPr>
+            <a:spLocks noGrp="1"/>
+          </p:cNvSpPr>
+          <p:nvPr>
+            <p:ph type="body" idx="1"/>
+          </p:nvPr>
+        </p:nvSpPr>
+        <p:spPr/>
+        <p:txBody>
+          <a:bodyPr/>
+          <a:lstStyle/>
+          <a:p>
+            <a:r>
+              <a:rPr lang="en-US" dirty="0"/>
+              <a:t>고객이 서류의 "낙인", "공정가액" 같은 말을 짚으며 물으실 때 이 장을 펴십시오. 왼쪽이 우리가 쓰는 말, 가운데가 서류에 적힌 말입니다.</a:t>
+            </a:r>
+            <a:endParaRPr lang="en-US" dirty="0"/>
+          </a:p>
+        </p:txBody>
+      </p:sp>
+      <p:sp>
+        <p:nvSpPr>
+          <p:cNvPr id="4" name="Slide Number Placeholder 3"/>
+          <p:cNvSpPr>
+            <a:spLocks noGrp="1"/>
+          </p:cNvSpPr>
+          <p:nvPr>
+            <p:ph type="sldNum" sz="quarter" idx="10"/>
+          </p:nvPr>
+        </p:nvSpPr>
+        <p:spPr/>
+        <p:txBody>
+          <a:bodyPr/>
+          <a:lstStyle/>
+          <a:p>
+            <a:fld id="{F7021451-1387-4CA6-816F-3879F97B5CBC}" type="slidenum">
+              <a:rPr lang="en-US"/>
+              <a:t>15</a:t>
+            </a:fld>
+            <a:endParaRPr lang="en-US"/>
+          </a:p>
+        </p:txBody>
+      </p:sp>
+    </p:spTree>
+    <p:extLst>
+      <p:ext uri="{BB962C8B-B14F-4D97-AF65-F5344CB8AC3E}">
+        <p14:creationId xmlns:p14="http://schemas.microsoft.com/office/powerpoint/2010/main" val="1024086991"/>
+      </p:ext>
+    </p:extLst>
+  </p:cSld>
+  <p:clrMapOvr>
+    <a:masterClrMapping/>
+  </p:clrMapOvr>
+</p:notes>
+</file>
+
 <file path=ppt/notesSlides/notesSlide2.xml><?xml version="1.0" encoding="utf-8"?>
 <p:notes xmlns:a="http://schemas.openxmlformats.org/drawingml/2006/main" xmlns:r="http://schemas.openxmlformats.org/officeDocument/2006/relationships" xmlns:p="http://schemas.openxmlformats.org/presentationml/2006/main">
   <p:cSld>
@@ -1346,7 +1435,7 @@
           <a:p>
             <a:r>
               <a:rPr lang="en-US" dirty="0"/>
-              <a:t>마감일을 잘못 안내하면 고객이 청약 기회를 놓칩니다. 홈페이지의 2026.08.28이 아니라 8월 25일(화)이 개인 일반투자자의 마감입니다.</a:t>
+              <a:t>마감일을 잘못 안내하면 고객이 기회를 놓칩니다. 홈페이지의 2026.08.28이 아니라 8월 25일(화)이 개인 고객의 마감입니다.</a:t>
             </a:r>
             <a:endParaRPr lang="en-US" dirty="0"/>
           </a:p>
@@ -1522,7 +1611,7 @@
           <a:p>
             <a:r>
               <a:rPr lang="en-US" dirty="0"/>
-              <a:t>공시의 손실 확률을 그대로 "이 상품의 손실 확률"이라고 말하면 안 됩니다.</a:t>
+              <a:t>서류에 적힌 손실 숫자를 그대로 "이 상품의 손실 확률"이라고 말하면 안 됩니다.</a:t>
             </a:r>
             <a:endParaRPr lang="en-US" dirty="0"/>
           </a:p>
@@ -1610,7 +1699,7 @@
           <a:p>
             <a:r>
               <a:rPr lang="en-US" dirty="0"/>
-              <a:t>고객이 "종목형은 위험하지 않나요"라고 물으면 이 장을 펴십시오. 일반론은 맞고, 개별로는 확인이 필요하다는 답입니다.</a:t>
+              <a:t>고객이 "종목 들어간 건 위험하지 않나요"라고 물으면 이 장을 펴십시오. 일반론은 맞고, 상품별로는 확인이 필요하다는 답입니다.</a:t>
             </a:r>
             <a:endParaRPr lang="en-US" dirty="0"/>
           </a:p>
@@ -1698,7 +1787,7 @@
           <a:p>
             <a:r>
               <a:rPr lang="en-US" dirty="0"/>
-              <a:t>"수익률 높으면 위험한 거 아니냐"는 질문에 이 장을 펴십시오. 맞다고 인정하고 시작하되, 같은 위험에 더 받는 상품이 있다는 것이 다음 장입니다.</a:t>
+              <a:t>"수익률 높으면 위험한 거 아니냐"는 질문에 이 장을 펴십시오. 맞다고 인정하고 시작하되, 같은 위험을 지고도 더 받는 상품이 있다는 것이 다음 장입니다.</a:t>
             </a:r>
             <a:endParaRPr lang="en-US" dirty="0"/>
           </a:p>
@@ -1786,7 +1875,7 @@
           <a:p>
             <a:r>
               <a:rPr lang="en-US" dirty="0"/>
-              <a:t>쿠폰이 유난히 높은데 위험은 안 높아 보이면 셋 중 하나입니다 — 구조 덕이거나, 통화가 다르거나, 아직 못 본 위험이 있거나. 앞의 둘로 설명되지 않으면 세 번째입니다.</a:t>
+              <a:t>수익률만 유난히 높고 위험은 안 높아 보이면 셋 중 하나입니다 — 조건 덕이거나, 돈의 종류가 다르거나, 아직 못 본 위험이 있거나. 앞의 둘로 설명이 안 되면 세 번째입니다.</a:t>
             </a:r>
             <a:endParaRPr lang="en-US" dirty="0"/>
           </a:p>
@@ -1874,7 +1963,7 @@
           <a:p>
             <a:r>
               <a:rPr lang="en-US" dirty="0"/>
-              <a:t>"종목이 들어갔는데 괜찮나요?" → SK하이닉스가 들어간 혼합형이 맞고, 적용 변동성 60.9%로 지수 평균(40.5%)보다 높은 것도 맞습니다. 다만 같은 조건 손실 확률은 8.9%로 지수형 평균(15.8%)보다 낮고 순수 지수형 6종 중 5종보다도 낮습니다. 상관계수 0.94로 거의 같이 움직여 워스트오브 불이익이 거의 없고, 낙인이 35%로 깊습니다.</a:t>
+              <a:t>"개별 종목이 들어갔는데 괜찮나요?" → SK하이닉스가 들어간 게 맞고, 가격 출렁임 60.9%로 지수만 담은 상품 평균(40.5%)보다 큰 것도 맞습니다. 다만 컴퓨터로 똑같이 돌려본 손해 볼 가능성은 8.9%로 지수만 담은 상품 평균(15.8%)보다 낮고, 지수만 담은 6종 중 5종보다도 낮습니다. 두 자산이 0.94만큼 거의 같이 움직여서 "더 나쁜 쪽으로 판정"하는 불이익이 거의 없고, 원금 지키는 선도 35%로 훨씬 아래입니다.</a:t>
             </a:r>
             <a:endParaRPr lang="en-US" dirty="0"/>
           </a:p>
@@ -1962,7 +2051,7 @@
           <a:p>
             <a:r>
               <a:rPr lang="en-US" dirty="0"/>
-              <a:t>"종목이 들어갔는데 괜찮나요?" → 삼성전자·SK하이닉스가 들어간 종목형이 맞고, 적용 변동성 60.9%로 지수 평균(40.5%)보다 높은 것도 맞습니다. 손실 확률도 17.8%로 지수형 평균(15.8%)보다 높습니다. 이 자리에 올린 이유는 안전해서가 아니라 대가가 크기 때문입니다 — 손실 확률 1%당 연 1.76%로, 지수형 평균 0.95%의 1.8배입니다. 원금 보전이 최우선인 분께는 추천 1번을 권하십시오.</a:t>
+              <a:t>"개별 종목이 들어갔는데 괜찮나요?" → 삼성전자·SK하이닉스가 들어간 게 맞고, 가격 출렁임 60.9%로 지수만 담은 상품 평균(40.5%)보다 큰 것도 맞습니다. 손해 볼 가능성도 17.8%로 지수만 담은 상품 평균(15.8%)보다 높습니다. 그런데도 올린 이유는 안전해서가 아니라 대가가 크기 때문입니다 — 손해 볼 가능성 1%마다 연 1.76%로, 지수 상품 평균 0.95%의 1.8배입니다. 원금 지키는 게 제일 중요한 분께는 추천 1번을 권하십시오.</a:t>
             </a:r>
             <a:endParaRPr lang="en-US" dirty="0"/>
           </a:p>
@@ -2469,7 +2558,7 @@
                 <a:ea typeface="맑은 고딕" pitchFamily="34" charset="-122"/>
                 <a:cs typeface="맑은 고딕" pitchFamily="34" charset="-120"/>
               </a:rPr>
-              <a:t>투자설명서(일괄신고추가서류) 2026.08.21 공시 원문 기준 · 전 17종 분석</a:t>
+              <a:t>2026.08.21에 공시된 투자설명서 원문을 그대로 읽어 17종 전부를 견줬습니다</a:t>
             </a:r>
             <a:endParaRPr lang="en-US" sz="1400" dirty="0"/>
           </a:p>
@@ -2533,7 +2622,7 @@
                 <a:ea typeface="맑은 고딕" pitchFamily="34" charset="-122"/>
                 <a:cs typeface="맑은 고딕" pitchFamily="34" charset="-120"/>
               </a:rPr>
-              <a:t>개인 일반투자자 청약</a:t>
+              <a:t>개인 고객이 넣을 수 있는 기간</a:t>
             </a:r>
             <a:endParaRPr lang="en-US" sz="1000" dirty="0"/>
           </a:p>
@@ -2611,7 +2700,7 @@
                 <a:ea typeface="맑은 고딕" pitchFamily="34" charset="-122"/>
                 <a:cs typeface="맑은 고딕" pitchFamily="34" charset="-120"/>
               </a:rPr>
-              <a:t>전체 청약기간 (숙려 대상 아닌 경우)</a:t>
+              <a:t>서류에 적힌 청약기간 (법인·전문투자자 기준)</a:t>
             </a:r>
             <a:endParaRPr lang="en-US" sz="1000" dirty="0"/>
           </a:p>
@@ -2689,7 +2778,7 @@
                 <a:ea typeface="맑은 고딕" pitchFamily="34" charset="-122"/>
                 <a:cs typeface="맑은 고딕" pitchFamily="34" charset="-120"/>
               </a:rPr>
-              <a:t>발행일 / 만기</a:t>
+              <a:t>시작하는 날 / 끝나는 날</a:t>
             </a:r>
             <a:endParaRPr lang="en-US" sz="1000" dirty="0"/>
           </a:p>
@@ -2792,7 +2881,7 @@
                 <a:ea typeface="맑은 고딕" pitchFamily="34" charset="-122"/>
                 <a:cs typeface="맑은 고딕" pitchFamily="34" charset="-120"/>
               </a:rPr>
-              <a:t>이번 회차 추천</a:t>
+              <a:t>이번 주 추천</a:t>
             </a:r>
             <a:endParaRPr lang="en-US" sz="1100" dirty="0"/>
           </a:p>
@@ -2851,7 +2940,7 @@
                 <a:ea typeface="맑은 고딕" pitchFamily="34" charset="-122"/>
                 <a:cs typeface="맑은 고딕" pitchFamily="34" charset="-120"/>
               </a:rPr>
-              <a:t>  연 24.0%  ·  손실 8.9%</a:t>
+              <a:t>  연 24.0%  ·  손해 볼 가능성 8.9%</a:t>
             </a:r>
             <a:pPr indent="0" marL="0">
               <a:lnSpc>
@@ -2877,7 +2966,7 @@
                 <a:ea typeface="맑은 고딕" pitchFamily="34" charset="-122"/>
                 <a:cs typeface="맑은 고딕" pitchFamily="34" charset="-120"/>
               </a:rPr>
-              <a:t>원금 방어를 먼저 보는 분</a:t>
+              <a:t>원금을 지키는 게 먼저인 분</a:t>
             </a:r>
             <a:endParaRPr lang="en-US" sz="1500" dirty="0"/>
           </a:p>
@@ -2936,7 +3025,7 @@
                 <a:ea typeface="맑은 고딕" pitchFamily="34" charset="-122"/>
                 <a:cs typeface="맑은 고딕" pitchFamily="34" charset="-120"/>
               </a:rPr>
-              <a:t>  연 31.3%  ·  손실 17.8%</a:t>
+              <a:t>  연 31.3%  ·  손해 볼 가능성 17.8%</a:t>
             </a:r>
             <a:pPr indent="0" marL="0">
               <a:lnSpc>
@@ -2962,7 +3051,7 @@
                 <a:ea typeface="맑은 고딕" pitchFamily="34" charset="-122"/>
                 <a:cs typeface="맑은 고딕" pitchFamily="34" charset="-120"/>
               </a:rPr>
-              <a:t>수익과 안정을 함께 보는 분</a:t>
+              <a:t>수익과 안정을 반반 보는 분</a:t>
             </a:r>
             <a:endParaRPr lang="en-US" sz="1500" dirty="0"/>
           </a:p>
@@ -3021,7 +3110,7 @@
                 <a:ea typeface="맑은 고딕" pitchFamily="34" charset="-122"/>
                 <a:cs typeface="맑은 고딕" pitchFamily="34" charset="-120"/>
               </a:rPr>
-              <a:t>  연 40.0%  ·  손실 18.9%</a:t>
+              <a:t>  연 40.0%  ·  손해 볼 가능성 18.9%</a:t>
             </a:r>
             <a:pPr indent="0" marL="0">
               <a:lnSpc>
@@ -3047,7 +3136,7 @@
                 <a:ea typeface="맑은 고딕" pitchFamily="34" charset="-122"/>
                 <a:cs typeface="맑은 고딕" pitchFamily="34" charset="-120"/>
               </a:rPr>
-              <a:t>수익률을 우선하는 분</a:t>
+              <a:t>수익률을 먼저 보는 분</a:t>
             </a:r>
             <a:endParaRPr lang="en-US" sz="1500" dirty="0"/>
           </a:p>
@@ -3086,7 +3175,7 @@
                 <a:ea typeface="맑은 고딕" pitchFamily="34" charset="-122"/>
                 <a:cs typeface="맑은 고딕" pitchFamily="34" charset="-120"/>
               </a:rPr>
-              <a:t>홈페이지 확인 2026.08.23(일) 14:33 — 현재 청약 진행중 0건. 이 회차는 2026.08.24부터 열립니다.  개인 일반투자자 청약 마감은 8월 25일(화)입니다.</a:t>
+              <a:t>홈페이지 확인 2026.08.24(월) 09:27 — 지금 청약 중인 상품 17건.  개인 고객 신청 마감은 8월 25일(화)입니다.</a:t>
             </a:r>
             <a:endParaRPr lang="en-US" sz="1200" dirty="0"/>
           </a:p>
@@ -3125,7 +3214,7 @@
                 <a:ea typeface="맑은 고딕" pitchFamily="34" charset="-122"/>
                 <a:cs typeface="맑은 고딕" pitchFamily="34" charset="-120"/>
               </a:rPr>
-              <a:t>원금비보장 · 상품위험등급 1등급(매우높은위험) · 투자 권유 참고자료</a:t>
+              <a:t>원금을 잃을 수 있는 상품 · 위험등급 1등급(가장 위험) · 투자 권유 참고자료</a:t>
             </a:r>
             <a:endParaRPr lang="en-US" sz="1100" dirty="0"/>
           </a:p>
@@ -3214,7 +3303,7 @@
                 <a:ea typeface="맑은 고딕" pitchFamily="34" charset="-122"/>
                 <a:cs typeface="맑은 고딕" pitchFamily="34" charset="-120"/>
               </a:rPr>
-              <a:t>추천 3 — 수익률을 우선하는 분</a:t>
+              <a:t>추천 3 — 수익률을 먼저 보는 분</a:t>
             </a:r>
             <a:endParaRPr lang="en-US" sz="2400" dirty="0"/>
           </a:p>
@@ -3381,7 +3470,7 @@
                 <a:ea typeface="맑은 고딕" pitchFamily="34" charset="-122"/>
                 <a:cs typeface="맑은 고딕" pitchFamily="34" charset="-120"/>
               </a:rPr>
-              <a:t>종목형</a:t>
+              <a:t>종목만</a:t>
             </a:r>
             <a:endParaRPr lang="en-US" sz="1050" dirty="0"/>
           </a:p>
@@ -3548,7 +3637,7 @@
                 <a:ea typeface="맑은 고딕" pitchFamily="34" charset="-122"/>
                 <a:cs typeface="맑은 고딕" pitchFamily="34" charset="-120"/>
               </a:rPr>
-              <a:t>연 수익률</a:t>
+              <a:t>잘 되면 연 수익률</a:t>
             </a:r>
             <a:endParaRPr lang="en-US" sz="1050" dirty="0"/>
           </a:p>
@@ -3640,7 +3729,7 @@
                 <a:ea typeface="맑은 고딕" pitchFamily="34" charset="-122"/>
                 <a:cs typeface="맑은 고딕" pitchFamily="34" charset="-120"/>
               </a:rPr>
-              <a:t>1만 달러 → 3개월 뒤 11,000달러</a:t>
+              <a:t>1만 달러 → 빠르면 3개월 뒤 11,000달러</a:t>
             </a:r>
             <a:endParaRPr lang="en-US" sz="1300" dirty="0"/>
           </a:p>
@@ -3655,7 +3744,7 @@
         <p:spPr>
           <a:xfrm>
             <a:off x="566928" y="2267712"/>
-            <a:ext cx="786384" cy="274320"/>
+            <a:ext cx="1042416" cy="274320"/>
           </a:xfrm>
           <a:prstGeom prst="rect">
             <a:avLst/>
@@ -3680,7 +3769,7 @@
         <p:spPr>
           <a:xfrm>
             <a:off x="566928" y="2267712"/>
-            <a:ext cx="786384" cy="274320"/>
+            <a:ext cx="1042416" cy="274320"/>
           </a:xfrm>
           <a:prstGeom prst="rect">
             <a:avLst/>
@@ -3704,7 +3793,7 @@
                 <a:ea typeface="맑은 고딕" pitchFamily="34" charset="-122"/>
                 <a:cs typeface="맑은 고딕" pitchFamily="34" charset="-120"/>
               </a:rPr>
-              <a:t>판정</a:t>
+              <a:t>무엇을 보나</a:t>
             </a:r>
             <a:endParaRPr lang="en-US" sz="1050" dirty="0"/>
           </a:p>
@@ -3718,8 +3807,8 @@
         </p:nvSpPr>
         <p:spPr>
           <a:xfrm>
-            <a:off x="1499616" y="2231136"/>
-            <a:ext cx="10125151" cy="384048"/>
+            <a:off x="1755648" y="2231136"/>
+            <a:ext cx="9869119" cy="384048"/>
           </a:xfrm>
           <a:prstGeom prst="rect">
             <a:avLst/>
@@ -3743,7 +3832,7 @@
                 <a:ea typeface="맑은 고딕" pitchFamily="34" charset="-122"/>
                 <a:cs typeface="맑은 고딕" pitchFamily="34" charset="-120"/>
               </a:rPr>
-              <a:t>삼성전자 · SK하이닉스 중 더 많이 떨어진 하나로 판정합니다.</a:t>
+              <a:t>삼성전자 · SK하이닉스 중 더 많이 떨어진 하나로 판정합니다. 하나만 나빠도 그쪽을 봅니다.</a:t>
             </a:r>
             <a:endParaRPr lang="en-US" sz="1200" dirty="0"/>
           </a:p>
@@ -3758,7 +3847,7 @@
         <p:spPr>
           <a:xfrm>
             <a:off x="566928" y="2724912"/>
-            <a:ext cx="786384" cy="274320"/>
+            <a:ext cx="1042416" cy="274320"/>
           </a:xfrm>
           <a:prstGeom prst="rect">
             <a:avLst/>
@@ -3783,7 +3872,7 @@
         <p:spPr>
           <a:xfrm>
             <a:off x="566928" y="2724912"/>
-            <a:ext cx="786384" cy="274320"/>
+            <a:ext cx="1042416" cy="274320"/>
           </a:xfrm>
           <a:prstGeom prst="rect">
             <a:avLst/>
@@ -3807,7 +3896,7 @@
                 <a:ea typeface="맑은 고딕" pitchFamily="34" charset="-122"/>
                 <a:cs typeface="맑은 고딕" pitchFamily="34" charset="-120"/>
               </a:rPr>
-              <a:t>조기상환</a:t>
+              <a:t>언제 끝나나</a:t>
             </a:r>
             <a:endParaRPr lang="en-US" sz="1050" dirty="0"/>
           </a:p>
@@ -3821,8 +3910,8 @@
         </p:nvSpPr>
         <p:spPr>
           <a:xfrm>
-            <a:off x="1499616" y="2688336"/>
-            <a:ext cx="10125151" cy="384048"/>
+            <a:off x="1755648" y="2688336"/>
+            <a:ext cx="9869119" cy="384048"/>
           </a:xfrm>
           <a:prstGeom prst="rect">
             <a:avLst/>
@@ -3846,7 +3935,7 @@
                 <a:ea typeface="맑은 고딕" pitchFamily="34" charset="-122"/>
                 <a:cs typeface="맑은 고딕" pitchFamily="34" charset="-120"/>
               </a:rPr>
-              <a:t>3개월마다 확인해서 처음 가격의 85% 이상(-15% 이내)이면 그 자리에서 끝나고 1만 달러가 11,000달러가 됩니다.</a:t>
+              <a:t>3개월마다 확인해서 처음 가격의 85% 이상(-15%까지 떨어져도 괜찮다는 뜻)이면 그 자리에서 끝나고 1만 달러가 11,000달러가 되어 돌아옵니다.</a:t>
             </a:r>
             <a:endParaRPr lang="en-US" sz="1200" dirty="0"/>
           </a:p>
@@ -3861,7 +3950,7 @@
         <p:spPr>
           <a:xfrm>
             <a:off x="566928" y="3182112"/>
-            <a:ext cx="786384" cy="274320"/>
+            <a:ext cx="1042416" cy="274320"/>
           </a:xfrm>
           <a:prstGeom prst="rect">
             <a:avLst/>
@@ -3886,7 +3975,7 @@
         <p:spPr>
           <a:xfrm>
             <a:off x="566928" y="3182112"/>
-            <a:ext cx="786384" cy="274320"/>
+            <a:ext cx="1042416" cy="274320"/>
           </a:xfrm>
           <a:prstGeom prst="rect">
             <a:avLst/>
@@ -3910,7 +3999,7 @@
                 <a:ea typeface="맑은 고딕" pitchFamily="34" charset="-122"/>
                 <a:cs typeface="맑은 고딕" pitchFamily="34" charset="-120"/>
               </a:rPr>
-              <a:t>원금</a:t>
+              <a:t>원금 지키기</a:t>
             </a:r>
             <a:endParaRPr lang="en-US" sz="1050" dirty="0"/>
           </a:p>
@@ -3924,8 +4013,8 @@
         </p:nvSpPr>
         <p:spPr>
           <a:xfrm>
-            <a:off x="1499616" y="3145536"/>
-            <a:ext cx="10125151" cy="384048"/>
+            <a:off x="1755648" y="3145536"/>
+            <a:ext cx="9869119" cy="384048"/>
           </a:xfrm>
           <a:prstGeom prst="rect">
             <a:avLst/>
@@ -3949,7 +4038,7 @@
                 <a:ea typeface="맑은 고딕" pitchFamily="34" charset="-122"/>
                 <a:cs typeface="맑은 고딕" pitchFamily="34" charset="-120"/>
               </a:rPr>
-              <a:t>만기까지 한 번도 35%(-65%) 아래로 종가가 내려간 적이 없으면, 마지막에 얼마든 원금과 이자를 다 받습니다.</a:t>
+              <a:t>끝날 때까지 종가가 단 한 번도 35%(처음 가격에서 -65%) 아래로 안 내려가면, 마지막에 얼마가 됐든 원금과 이자를 다 받습니다.</a:t>
             </a:r>
             <a:endParaRPr lang="en-US" sz="1200" dirty="0"/>
           </a:p>
@@ -3964,7 +4053,7 @@
         <p:spPr>
           <a:xfrm>
             <a:off x="566928" y="3639312"/>
-            <a:ext cx="786384" cy="274320"/>
+            <a:ext cx="1042416" cy="274320"/>
           </a:xfrm>
           <a:prstGeom prst="rect">
             <a:avLst/>
@@ -3989,7 +4078,7 @@
         <p:spPr>
           <a:xfrm>
             <a:off x="566928" y="3639312"/>
-            <a:ext cx="786384" cy="274320"/>
+            <a:ext cx="1042416" cy="274320"/>
           </a:xfrm>
           <a:prstGeom prst="rect">
             <a:avLst/>
@@ -4013,7 +4102,7 @@
                 <a:ea typeface="맑은 고딕" pitchFamily="34" charset="-122"/>
                 <a:cs typeface="맑은 고딕" pitchFamily="34" charset="-120"/>
               </a:rPr>
-              <a:t>손실</a:t>
+              <a:t>손해 나는 때</a:t>
             </a:r>
             <a:endParaRPr lang="en-US" sz="1050" dirty="0"/>
           </a:p>
@@ -4027,8 +4116,8 @@
         </p:nvSpPr>
         <p:spPr>
           <a:xfrm>
-            <a:off x="1499616" y="3602736"/>
-            <a:ext cx="10125151" cy="384048"/>
+            <a:off x="1755648" y="3602736"/>
+            <a:ext cx="9869119" cy="384048"/>
           </a:xfrm>
           <a:prstGeom prst="rect">
             <a:avLst/>
@@ -4052,7 +4141,7 @@
                 <a:ea typeface="맑은 고딕" pitchFamily="34" charset="-122"/>
                 <a:cs typeface="맑은 고딕" pitchFamily="34" charset="-120"/>
               </a:rPr>
-              <a:t>35% 아래를 밟은 적이 있고 만기에도 70% 미만이면, 떨어진 만큼 그대로 손실입니다.</a:t>
+              <a:t>35% 아래를 한 번이라도 밟았고 마지막 날에도 70% 아래면, 떨어진 만큼 그대로 손실입니다.</a:t>
             </a:r>
             <a:endParaRPr lang="en-US" sz="1200" dirty="0"/>
           </a:p>
@@ -4116,7 +4205,7 @@
                 <a:ea typeface="맑은 고딕" pitchFamily="34" charset="-122"/>
                 <a:cs typeface="맑은 고딕" pitchFamily="34" charset="-120"/>
               </a:rPr>
-              <a:t>A. 발행사 20년 모의실험</a:t>
+              <a:t>A. 회사가 20년 돌려본 손실</a:t>
             </a:r>
             <a:endParaRPr lang="en-US" sz="1000" dirty="0"/>
           </a:p>
@@ -4155,7 +4244,7 @@
                 <a:ea typeface="맑은 고딕" pitchFamily="34" charset="-122"/>
                 <a:cs typeface="맑은 고딕" pitchFamily="34" charset="-120"/>
               </a:rPr>
-              <a:t>손실 0.47%</a:t>
+              <a:t>0.47%</a:t>
             </a:r>
             <a:endParaRPr lang="en-US" sz="1600" dirty="0"/>
           </a:p>
@@ -4194,7 +4283,7 @@
                 <a:ea typeface="맑은 고딕" pitchFamily="34" charset="-122"/>
                 <a:cs typeface="맑은 고딕" pitchFamily="34" charset="-120"/>
               </a:rPr>
-              <a:t>5,085회 중 24회</a:t>
+              <a:t>5,085번 중 24번</a:t>
             </a:r>
             <a:endParaRPr lang="en-US" sz="950" dirty="0"/>
           </a:p>
@@ -4258,7 +4347,7 @@
                 <a:ea typeface="맑은 고딕" pitchFamily="34" charset="-122"/>
                 <a:cs typeface="맑은 고딕" pitchFamily="34" charset="-120"/>
               </a:rPr>
-              <a:t>B. 같은 조건 모의실험</a:t>
+              <a:t>B. 컴퓨터로 다시 돌린 손실</a:t>
             </a:r>
             <a:endParaRPr lang="en-US" sz="1000" dirty="0"/>
           </a:p>
@@ -4297,7 +4386,7 @@
                 <a:ea typeface="맑은 고딕" pitchFamily="34" charset="-122"/>
                 <a:cs typeface="맑은 고딕" pitchFamily="34" charset="-120"/>
               </a:rPr>
-              <a:t>손실 18.9%</a:t>
+              <a:t>18.9%</a:t>
             </a:r>
             <a:endParaRPr lang="en-US" sz="1600" dirty="0"/>
           </a:p>
@@ -4400,7 +4489,7 @@
                 <a:ea typeface="맑은 고딕" pitchFamily="34" charset="-122"/>
                 <a:cs typeface="맑은 고딕" pitchFamily="34" charset="-120"/>
               </a:rPr>
-              <a:t>1만 달러의 출발 가치</a:t>
+              <a:t>1만 달러의 실제 값어치</a:t>
             </a:r>
             <a:endParaRPr lang="en-US" sz="1000" dirty="0"/>
           </a:p>
@@ -4478,7 +4567,7 @@
                 <a:ea typeface="맑은 고딕" pitchFamily="34" charset="-122"/>
                 <a:cs typeface="맑은 고딕" pitchFamily="34" charset="-120"/>
               </a:rPr>
-              <a:t>공정가액 대비 -0.35%</a:t>
+              <a:t>제값보다 -0.35%</a:t>
             </a:r>
             <a:endParaRPr lang="en-US" sz="950" dirty="0"/>
           </a:p>
@@ -4542,7 +4631,7 @@
                 <a:ea typeface="맑은 고딕" pitchFamily="34" charset="-122"/>
                 <a:cs typeface="맑은 고딕" pitchFamily="34" charset="-120"/>
               </a:rPr>
-              <a:t>적용 변동성 / 상관</a:t>
+              <a:t>가격 출렁임</a:t>
             </a:r>
             <a:endParaRPr lang="en-US" sz="1000" dirty="0"/>
           </a:p>
@@ -4620,7 +4709,7 @@
                 <a:ea typeface="맑은 고딕" pitchFamily="34" charset="-122"/>
                 <a:cs typeface="맑은 고딕" pitchFamily="34" charset="-120"/>
               </a:rPr>
-              <a:t>기초자산끼리 0.87</a:t>
+              <a:t>둘이 같이 움직임 0.87</a:t>
             </a:r>
             <a:endParaRPr lang="en-US" sz="950" dirty="0"/>
           </a:p>
@@ -4684,7 +4773,7 @@
                 <a:ea typeface="맑은 고딕" pitchFamily="34" charset="-122"/>
                 <a:cs typeface="맑은 고딕" pitchFamily="34" charset="-120"/>
               </a:rPr>
-              <a:t>추천 이유  </a:t>
+              <a:t>이 상품을 권하는 이유  </a:t>
             </a:r>
             <a:pPr indent="0" marL="0">
               <a:buNone/>
@@ -4698,7 +4787,7 @@
                 <a:ea typeface="맑은 고딕" pitchFamily="34" charset="-122"/>
                 <a:cs typeface="맑은 고딕" pitchFamily="34" charset="-120"/>
               </a:rPr>
-              <a:t>이번 회차에서 가장 높은 수익률입니다. 출발 가치가 크게 깎이지 않은 상품 중에서 골랐습니다. USD로 투자하고 USD로 돌려받는 상품이라, 위 수익률에 환율 변동이 그대로 더해지거나 빠집니다.</a:t>
+              <a:t>이번 주에서 가장 높은 수익률입니다. 넣는 순간의 값어치가 크게 깎이지 않은 상품 중에서 골랐습니다. USD로 넣고 USD로 돌려받는 상품이라, 위 수익률에 환율이 오르내린 만큼이 그대로 더해지거나 빠집니다.</a:t>
             </a:r>
             <a:endParaRPr lang="en-US" sz="1150" dirty="0"/>
           </a:p>
@@ -4737,7 +4826,7 @@
                 <a:ea typeface="맑은 고딕" pitchFamily="34" charset="-122"/>
                 <a:cs typeface="맑은 고딕" pitchFamily="34" charset="-120"/>
               </a:rPr>
-              <a:t>출처 — 금융감독원 전자공시시스템 일괄신고추가서류 접수번호 20260821000193 (2026.08.21 공시)  ·  원금 손실이 발생할 수 있는 상품입니다</a:t>
+              <a:t>출처 — 금융감독원 전자공시시스템(DART)에 2026.08.21 올라온 투자설명서 (접수번호 20260821000193)  ·  원금을 잃을 수 있는 상품입니다</a:t>
             </a:r>
             <a:endParaRPr lang="en-US" sz="850" dirty="0"/>
           </a:p>
@@ -4865,7 +4954,7 @@
                 <a:ea typeface="맑은 고딕" pitchFamily="34" charset="-122"/>
                 <a:cs typeface="맑은 고딕" pitchFamily="34" charset="-120"/>
               </a:rPr>
-              <a:t>이번 회차 전체 17종</a:t>
+              <a:t>이번 주 17종 전부</a:t>
             </a:r>
             <a:endParaRPr lang="en-US" sz="2400" dirty="0"/>
           </a:p>
@@ -4904,7 +4993,7 @@
                 <a:ea typeface="맑은 고딕" pitchFamily="34" charset="-122"/>
                 <a:cs typeface="맑은 고딕" pitchFamily="34" charset="-120"/>
               </a:rPr>
-              <a:t>같은 조건으로 돌린 손실 확률(B)이 낮은 순서. A 옆 괄호는 그 상품의 표본 구간 길이 — 10년에 못 미치면(빨강) 다른 상품과 나란히 비교할 수 없습니다. "만기만" = 낙인이 없어 만기 그날만 봅니다.</a:t>
+              <a:t>컴퓨터로 다시 돌린 손해 볼 가능성(B)이 낮은 순서. A 옆 괄호는 그 상품을 몇 년치 과거로 돌려봤는지 — 10년에 못 미치면(빨강) 다른 상품과 나란히 비교할 수 없습니다. "만기만" = 중간 하락을 안 따지고 마지막 날 하루만 봅니다.</a:t>
             </a:r>
             <a:endParaRPr lang="en-US" sz="1250" dirty="0"/>
           </a:p>
@@ -5031,7 +5120,7 @@
                           <a:ea typeface="맑은 고딕" pitchFamily="34" charset="-122"/>
                           <a:cs typeface="맑은 고딕" pitchFamily="34" charset="-120"/>
                         </a:rPr>
-                        <a:t>기초자산</a:t>
+                        <a:t>기준 자산</a:t>
                       </a:r>
                       <a:endParaRPr lang="en-US" sz="900" dirty="0">
                         <a:latin typeface="맑은 고딕" charset="0"/>
@@ -5235,7 +5324,7 @@
                           <a:ea typeface="맑은 고딕" pitchFamily="34" charset="-122"/>
                           <a:cs typeface="맑은 고딕" pitchFamily="34" charset="-120"/>
                         </a:rPr>
-                        <a:t>조기상환</a:t>
+                        <a:t>끝나는 조건</a:t>
                       </a:r>
                       <a:endParaRPr lang="en-US" sz="900" dirty="0">
                         <a:latin typeface="맑은 고딕" charset="0"/>
@@ -5371,7 +5460,7 @@
                           <a:ea typeface="맑은 고딕" pitchFamily="34" charset="-122"/>
                           <a:cs typeface="맑은 고딕" pitchFamily="34" charset="-120"/>
                         </a:rPr>
-                        <a:t>적용 변동성</a:t>
+                        <a:t>가격 출렁임</a:t>
                       </a:r>
                       <a:endParaRPr lang="en-US" sz="900" dirty="0">
                         <a:latin typeface="맑은 고딕" charset="0"/>
@@ -5439,7 +5528,7 @@
                           <a:ea typeface="맑은 고딕" pitchFamily="34" charset="-122"/>
                           <a:cs typeface="맑은 고딕" pitchFamily="34" charset="-120"/>
                         </a:rPr>
-                        <a:t>B. 손실 확률</a:t>
+                        <a:t>B. 손해 가능성</a:t>
                       </a:r>
                       <a:endParaRPr lang="en-US" sz="900" dirty="0">
                         <a:latin typeface="맑은 고딕" charset="0"/>
@@ -5575,7 +5664,7 @@
                           <a:ea typeface="맑은 고딕" pitchFamily="34" charset="-122"/>
                           <a:cs typeface="맑은 고딕" pitchFamily="34" charset="-120"/>
                         </a:rPr>
-                        <a:t>A. 공시 손실</a:t>
+                        <a:t>A. 서류 손실</a:t>
                       </a:r>
                       <a:endParaRPr lang="en-US" sz="900" dirty="0">
                         <a:latin typeface="맑은 고딕" charset="0"/>
@@ -5643,7 +5732,7 @@
                           <a:ea typeface="맑은 고딕" pitchFamily="34" charset="-122"/>
                           <a:cs typeface="맑은 고딕" pitchFamily="34" charset="-120"/>
                         </a:rPr>
-                        <a:t>출발 가치</a:t>
+                        <a:t>실제 값어치</a:t>
                       </a:r>
                       <a:endParaRPr lang="en-US" sz="900" dirty="0">
                         <a:latin typeface="맑은 고딕" charset="0"/>
@@ -5843,7 +5932,7 @@
                           <a:ea typeface="맑은 고딕" pitchFamily="34" charset="-122"/>
                           <a:cs typeface="맑은 고딕" pitchFamily="34" charset="-120"/>
                         </a:rPr>
-                        <a:t>지수</a:t>
+                        <a:t>지수만</a:t>
                       </a:r>
                       <a:endParaRPr lang="en-US" sz="900" dirty="0">
                         <a:latin typeface="맑은 고딕" charset="0"/>
@@ -6563,7 +6652,7 @@
                           <a:ea typeface="맑은 고딕" pitchFamily="34" charset="-122"/>
                           <a:cs typeface="맑은 고딕" pitchFamily="34" charset="-120"/>
                         </a:rPr>
-                        <a:t>혼합</a:t>
+                        <a:t>섞임</a:t>
                       </a:r>
                       <a:endParaRPr lang="en-US" sz="900" dirty="0">
                         <a:latin typeface="맑은 고딕" charset="0"/>
@@ -7283,7 +7372,7 @@
                           <a:ea typeface="맑은 고딕" pitchFamily="34" charset="-122"/>
                           <a:cs typeface="맑은 고딕" pitchFamily="34" charset="-120"/>
                         </a:rPr>
-                        <a:t>지수</a:t>
+                        <a:t>지수만</a:t>
                       </a:r>
                       <a:endParaRPr lang="en-US" sz="900" dirty="0">
                         <a:latin typeface="맑은 고딕" charset="0"/>
@@ -8003,7 +8092,7 @@
                           <a:ea typeface="맑은 고딕" pitchFamily="34" charset="-122"/>
                           <a:cs typeface="맑은 고딕" pitchFamily="34" charset="-120"/>
                         </a:rPr>
-                        <a:t>지수</a:t>
+                        <a:t>지수만</a:t>
                       </a:r>
                       <a:endParaRPr lang="en-US" sz="900" dirty="0">
                         <a:latin typeface="맑은 고딕" charset="0"/>
@@ -8723,7 +8812,7 @@
                           <a:ea typeface="맑은 고딕" pitchFamily="34" charset="-122"/>
                           <a:cs typeface="맑은 고딕" pitchFamily="34" charset="-120"/>
                         </a:rPr>
-                        <a:t>종목</a:t>
+                        <a:t>종목만</a:t>
                       </a:r>
                       <a:endParaRPr lang="en-US" sz="900" dirty="0">
                         <a:latin typeface="맑은 고딕" charset="0"/>
@@ -9443,7 +9532,7 @@
                           <a:ea typeface="맑은 고딕" pitchFamily="34" charset="-122"/>
                           <a:cs typeface="맑은 고딕" pitchFamily="34" charset="-120"/>
                         </a:rPr>
-                        <a:t>종목</a:t>
+                        <a:t>종목만</a:t>
                       </a:r>
                       <a:endParaRPr lang="en-US" sz="900" dirty="0">
                         <a:latin typeface="맑은 고딕" charset="0"/>
@@ -10163,7 +10252,7 @@
                           <a:ea typeface="맑은 고딕" pitchFamily="34" charset="-122"/>
                           <a:cs typeface="맑은 고딕" pitchFamily="34" charset="-120"/>
                         </a:rPr>
-                        <a:t>지수</a:t>
+                        <a:t>지수만</a:t>
                       </a:r>
                       <a:endParaRPr lang="en-US" sz="900" dirty="0">
                         <a:latin typeface="맑은 고딕" charset="0"/>
@@ -10883,7 +10972,7 @@
                           <a:ea typeface="맑은 고딕" pitchFamily="34" charset="-122"/>
                           <a:cs typeface="맑은 고딕" pitchFamily="34" charset="-120"/>
                         </a:rPr>
-                        <a:t>혼합</a:t>
+                        <a:t>섞임</a:t>
                       </a:r>
                       <a:endParaRPr lang="en-US" sz="900" dirty="0">
                         <a:latin typeface="맑은 고딕" charset="0"/>
@@ -11603,7 +11692,7 @@
                           <a:ea typeface="맑은 고딕" pitchFamily="34" charset="-122"/>
                           <a:cs typeface="맑은 고딕" pitchFamily="34" charset="-120"/>
                         </a:rPr>
-                        <a:t>종목</a:t>
+                        <a:t>종목만</a:t>
                       </a:r>
                       <a:endParaRPr lang="en-US" sz="900" dirty="0">
                         <a:latin typeface="맑은 고딕" charset="0"/>
@@ -12323,7 +12412,7 @@
                           <a:ea typeface="맑은 고딕" pitchFamily="34" charset="-122"/>
                           <a:cs typeface="맑은 고딕" pitchFamily="34" charset="-120"/>
                         </a:rPr>
-                        <a:t>종목</a:t>
+                        <a:t>종목만</a:t>
                       </a:r>
                       <a:endParaRPr lang="en-US" sz="900" dirty="0">
                         <a:latin typeface="맑은 고딕" charset="0"/>
@@ -13043,7 +13132,7 @@
                           <a:ea typeface="맑은 고딕" pitchFamily="34" charset="-122"/>
                           <a:cs typeface="맑은 고딕" pitchFamily="34" charset="-120"/>
                         </a:rPr>
-                        <a:t>지수</a:t>
+                        <a:t>지수만</a:t>
                       </a:r>
                       <a:endParaRPr lang="en-US" sz="900" dirty="0">
                         <a:latin typeface="맑은 고딕" charset="0"/>
@@ -13763,7 +13852,7 @@
                           <a:ea typeface="맑은 고딕" pitchFamily="34" charset="-122"/>
                           <a:cs typeface="맑은 고딕" pitchFamily="34" charset="-120"/>
                         </a:rPr>
-                        <a:t>종목</a:t>
+                        <a:t>종목만</a:t>
                       </a:r>
                       <a:endParaRPr lang="en-US" sz="900" dirty="0">
                         <a:latin typeface="맑은 고딕" charset="0"/>
@@ -14483,7 +14572,7 @@
                           <a:ea typeface="맑은 고딕" pitchFamily="34" charset="-122"/>
                           <a:cs typeface="맑은 고딕" pitchFamily="34" charset="-120"/>
                         </a:rPr>
-                        <a:t>지수</a:t>
+                        <a:t>지수만</a:t>
                       </a:r>
                       <a:endParaRPr lang="en-US" sz="900" dirty="0">
                         <a:latin typeface="맑은 고딕" charset="0"/>
@@ -15203,7 +15292,7 @@
                           <a:ea typeface="맑은 고딕" pitchFamily="34" charset="-122"/>
                           <a:cs typeface="맑은 고딕" pitchFamily="34" charset="-120"/>
                         </a:rPr>
-                        <a:t>종목</a:t>
+                        <a:t>종목만</a:t>
                       </a:r>
                       <a:endParaRPr lang="en-US" sz="900" dirty="0">
                         <a:latin typeface="맑은 고딕" charset="0"/>
@@ -15923,7 +16012,7 @@
                           <a:ea typeface="맑은 고딕" pitchFamily="34" charset="-122"/>
                           <a:cs typeface="맑은 고딕" pitchFamily="34" charset="-120"/>
                         </a:rPr>
-                        <a:t>혼합</a:t>
+                        <a:t>섞임</a:t>
                       </a:r>
                       <a:endParaRPr lang="en-US" sz="900" dirty="0">
                         <a:latin typeface="맑은 고딕" charset="0"/>
@@ -16643,7 +16732,7 @@
                           <a:ea typeface="맑은 고딕" pitchFamily="34" charset="-122"/>
                           <a:cs typeface="맑은 고딕" pitchFamily="34" charset="-120"/>
                         </a:rPr>
-                        <a:t>종목</a:t>
+                        <a:t>종목만</a:t>
                       </a:r>
                       <a:endParaRPr lang="en-US" sz="900" dirty="0">
                         <a:latin typeface="맑은 고딕" charset="0"/>
@@ -17363,7 +17452,7 @@
                           <a:ea typeface="맑은 고딕" pitchFamily="34" charset="-122"/>
                           <a:cs typeface="맑은 고딕" pitchFamily="34" charset="-120"/>
                         </a:rPr>
-                        <a:t>종목</a:t>
+                        <a:t>종목만</a:t>
                       </a:r>
                       <a:endParaRPr lang="en-US" sz="900" dirty="0">
                         <a:latin typeface="맑은 고딕" charset="0"/>
@@ -17972,7 +18061,7 @@
                 <a:ea typeface="맑은 고딕" pitchFamily="34" charset="-122"/>
                 <a:cs typeface="맑은 고딕" pitchFamily="34" charset="-120"/>
               </a:rPr>
-              <a:t>등급은 B(같은 조건으로 돌린 손실 확률) 하나로만 가릅니다 — 15% 이하 방어적, 15~25% 중간, 25% 초과 공격적. 수익률이나 기초자산 종류는 등급에 넣지 않았습니다. 모두 원금비보장 1등급 상품이므로 "안전"이 아니라 서로 견준 순서입니다.</a:t>
+              <a:t>이 등급은 B(컴퓨터로 다시 돌린 손실 확률) 하나만 보고 나눈 것입니다 — 15% 이하면 방어적, 15~25%면 중간, 25%를 넘으면 공격적. 수익률이나 기준 자산 종류는 등급에 넣지 않았습니다. 전부 원금을 잃을 수 있는 가장 높은 위험 등급이므로, "안전하다"는 뜻이 아니라 서로 견줘 본 순서일 뿐입니다.</a:t>
             </a:r>
             <a:endParaRPr lang="en-US" sz="1050" dirty="0"/>
           </a:p>
@@ -18011,7 +18100,7 @@
                 <a:ea typeface="맑은 고딕" pitchFamily="34" charset="-122"/>
                 <a:cs typeface="맑은 고딕" pitchFamily="34" charset="-120"/>
               </a:rPr>
-              <a:t>출처 — 금융감독원 전자공시시스템 일괄신고추가서류 접수번호 20260821000193 (2026.08.21 공시)  ·  원금 손실이 발생할 수 있는 상품입니다</a:t>
+              <a:t>출처 — 금융감독원 전자공시시스템(DART)에 2026.08.21 올라온 투자설명서 (접수번호 20260821000193)  ·  원금을 잃을 수 있는 상품입니다</a:t>
             </a:r>
             <a:endParaRPr lang="en-US" sz="850" dirty="0"/>
           </a:p>
@@ -18139,7 +18228,7 @@
                 <a:ea typeface="맑은 고딕" pitchFamily="34" charset="-122"/>
                 <a:cs typeface="맑은 고딕" pitchFamily="34" charset="-120"/>
               </a:rPr>
-              <a:t>이번 주 권하지 않는 상품</a:t>
+              <a:t>이번 주에는 권하지 않는 상품</a:t>
             </a:r>
             <a:endParaRPr lang="en-US" sz="2400" dirty="0"/>
           </a:p>
@@ -18178,7 +18267,7 @@
                 <a:ea typeface="맑은 고딕" pitchFamily="34" charset="-122"/>
                 <a:cs typeface="맑은 고딕" pitchFamily="34" charset="-120"/>
               </a:rPr>
-              <a:t>수익률만 보면 눈에 띄지만, 손실 확률이나 가격에서 대가를 치르고 있습니다. 손실 확률이 높은 순서입니다.</a:t>
+              <a:t>수익률만 보면 눈에 띄지만, 그 대가를 손해 볼 가능성이나 값어치에서 치르고 있습니다. 가능성이 큰 순서입니다.</a:t>
             </a:r>
             <a:endParaRPr lang="en-US" sz="1250" dirty="0"/>
           </a:p>
@@ -18337,7 +18426,7 @@
                 <a:ea typeface="맑은 고딕" pitchFamily="34" charset="-122"/>
                 <a:cs typeface="맑은 고딕" pitchFamily="34" charset="-120"/>
               </a:rPr>
-              <a:t>   손실 58.3%</a:t>
+              <a:t>   손해 58.3%</a:t>
             </a:r>
             <a:endParaRPr lang="en-US" sz="1300" dirty="0"/>
           </a:p>
@@ -18383,7 +18472,7 @@
                 <a:ea typeface="맑은 고딕" pitchFamily="34" charset="-122"/>
                 <a:cs typeface="맑은 고딕" pitchFamily="34" charset="-120"/>
               </a:rPr>
-              <a:t>같은 조건으로 돌리면 100번 중 58번이 손실 (회차 평균 23번)</a:t>
+              <a:t>컴퓨터로 똑같이 돌리면 100번 중 58번이 손실 (이번 주 평균 23번)</a:t>
             </a:r>
             <a:endParaRPr lang="en-US" sz="1050" dirty="0"/>
           </a:p>
@@ -18407,7 +18496,7 @@
                 <a:ea typeface="맑은 고딕" pitchFamily="34" charset="-122"/>
                 <a:cs typeface="맑은 고딕" pitchFamily="34" charset="-120"/>
               </a:rPr>
-              <a:t>1만원을 넣는 순간의 가치가 7,768원</a:t>
+              <a:t>1만원을 넣는 순간의 실제 값어치가 7,768원밖에 안 됨</a:t>
             </a:r>
             <a:endParaRPr lang="en-US" sz="1050" dirty="0"/>
           </a:p>
@@ -18431,7 +18520,7 @@
                 <a:ea typeface="맑은 고딕" pitchFamily="34" charset="-122"/>
                 <a:cs typeface="맑은 고딕" pitchFamily="34" charset="-120"/>
               </a:rPr>
-              <a:t>적용 변동성 98% — 이번 회차 최고 축</a:t>
+              <a:t>가격 출렁임 98% — 이번 주에서 가장 심한 축</a:t>
             </a:r>
             <a:endParaRPr lang="en-US" sz="1050" dirty="0"/>
           </a:p>
@@ -18590,7 +18679,7 @@
                 <a:ea typeface="맑은 고딕" pitchFamily="34" charset="-122"/>
                 <a:cs typeface="맑은 고딕" pitchFamily="34" charset="-120"/>
               </a:rPr>
-              <a:t>   손실 50.4%</a:t>
+              <a:t>   손해 50.4%</a:t>
             </a:r>
             <a:endParaRPr lang="en-US" sz="1300" dirty="0"/>
           </a:p>
@@ -18636,7 +18725,7 @@
                 <a:ea typeface="맑은 고딕" pitchFamily="34" charset="-122"/>
                 <a:cs typeface="맑은 고딕" pitchFamily="34" charset="-120"/>
               </a:rPr>
-              <a:t>같은 조건으로 돌리면 100번 중 50번이 손실 (회차 평균 23번)</a:t>
+              <a:t>컴퓨터로 똑같이 돌리면 100번 중 50번이 손실 (이번 주 평균 23번)</a:t>
             </a:r>
             <a:endParaRPr lang="en-US" sz="1050" dirty="0"/>
           </a:p>
@@ -18660,7 +18749,7 @@
                 <a:ea typeface="맑은 고딕" pitchFamily="34" charset="-122"/>
                 <a:cs typeface="맑은 고딕" pitchFamily="34" charset="-120"/>
               </a:rPr>
-              <a:t>1만원을 넣는 순간의 가치가 6,834원</a:t>
+              <a:t>1만원을 넣는 순간의 실제 값어치가 6,834원밖에 안 됨</a:t>
             </a:r>
             <a:endParaRPr lang="en-US" sz="1050" dirty="0"/>
           </a:p>
@@ -18684,7 +18773,7 @@
                 <a:ea typeface="맑은 고딕" pitchFamily="34" charset="-122"/>
                 <a:cs typeface="맑은 고딕" pitchFamily="34" charset="-120"/>
               </a:rPr>
-              <a:t>공시 모의실험 표본이 2.9년(721회)뿐 — 큰 하락장이 표본에 없어 손실 2.07%를 20년짜리와 견줄 수 없음</a:t>
+              <a:t>회사가 과거로 돌려본 기간이 2.9년(721번)뿐 — 큰 폭락장이 아예 빠져 있어 손실 2.07%를 20년 돌려본 상품과 견줄 수 없음</a:t>
             </a:r>
             <a:endParaRPr lang="en-US" sz="1050" dirty="0"/>
           </a:p>
@@ -18843,7 +18932,7 @@
                 <a:ea typeface="맑은 고딕" pitchFamily="34" charset="-122"/>
                 <a:cs typeface="맑은 고딕" pitchFamily="34" charset="-120"/>
               </a:rPr>
-              <a:t>   손실 43.4%</a:t>
+              <a:t>   손해 43.4%</a:t>
             </a:r>
             <a:endParaRPr lang="en-US" sz="1300" dirty="0"/>
           </a:p>
@@ -18889,7 +18978,7 @@
                 <a:ea typeface="맑은 고딕" pitchFamily="34" charset="-122"/>
                 <a:cs typeface="맑은 고딕" pitchFamily="34" charset="-120"/>
               </a:rPr>
-              <a:t>같은 조건으로 돌리면 100번 중 43번이 손실 (회차 평균 23번)</a:t>
+              <a:t>컴퓨터로 똑같이 돌리면 100번 중 43번이 손실 (이번 주 평균 23번)</a:t>
             </a:r>
             <a:endParaRPr lang="en-US" sz="1050" dirty="0"/>
           </a:p>
@@ -18913,7 +19002,7 @@
                 <a:ea typeface="맑은 고딕" pitchFamily="34" charset="-122"/>
                 <a:cs typeface="맑은 고딕" pitchFamily="34" charset="-120"/>
               </a:rPr>
-              <a:t>1만원을 넣는 순간의 가치가 7,795원</a:t>
+              <a:t>1만원을 넣는 순간의 실제 값어치가 7,795원밖에 안 됨</a:t>
             </a:r>
             <a:endParaRPr lang="en-US" sz="1050" dirty="0"/>
           </a:p>
@@ -18937,7 +19026,7 @@
                 <a:ea typeface="맑은 고딕" pitchFamily="34" charset="-122"/>
                 <a:cs typeface="맑은 고딕" pitchFamily="34" charset="-120"/>
               </a:rPr>
-              <a:t>적용 변동성 98% — 이번 회차 최고 축</a:t>
+              <a:t>가격 출렁임 98% — 이번 주에서 가장 심한 축</a:t>
             </a:r>
             <a:endParaRPr lang="en-US" sz="1050" dirty="0"/>
           </a:p>
@@ -19096,7 +19185,7 @@
                 <a:ea typeface="맑은 고딕" pitchFamily="34" charset="-122"/>
                 <a:cs typeface="맑은 고딕" pitchFamily="34" charset="-120"/>
               </a:rPr>
-              <a:t>   손실 28.8%</a:t>
+              <a:t>   손해 28.8%</a:t>
             </a:r>
             <a:endParaRPr lang="en-US" sz="1300" dirty="0"/>
           </a:p>
@@ -19142,7 +19231,7 @@
                 <a:ea typeface="맑은 고딕" pitchFamily="34" charset="-122"/>
                 <a:cs typeface="맑은 고딕" pitchFamily="34" charset="-120"/>
               </a:rPr>
-              <a:t>같은 조건으로 돌리면 100번 중 29번이 손실 (회차 평균 23번)</a:t>
+              <a:t>컴퓨터로 똑같이 돌리면 100번 중 29번이 손실 (이번 주 평균 23번)</a:t>
             </a:r>
             <a:endParaRPr lang="en-US" sz="1050" dirty="0"/>
           </a:p>
@@ -19166,7 +19255,7 @@
                 <a:ea typeface="맑은 고딕" pitchFamily="34" charset="-122"/>
                 <a:cs typeface="맑은 고딕" pitchFamily="34" charset="-120"/>
               </a:rPr>
-              <a:t>같은 기초자산인 제38041회가 수익률은 더 높고(연 40.0%) 손실 확률은 더 낮습니다(18.9%) — 6개월마다 보는 이 상품과 달리 3개월마다 상환 기회가 옵니다</a:t>
+              <a:t>기준 자산이 똑같은 제38041회가 수익률은 더 높고(연 40.0%) 손해 볼 가능성은 더 낮습니다(18.9%) — 6개월마다 보는 이 상품과 달리 3개월마다 끝날 기회가 옵니다</a:t>
             </a:r>
             <a:endParaRPr lang="en-US" sz="1050" dirty="0"/>
           </a:p>
@@ -19250,7 +19339,7 @@
                 <a:ea typeface="맑은 고딕" pitchFamily="34" charset="-122"/>
                 <a:cs typeface="맑은 고딕" pitchFamily="34" charset="-120"/>
               </a:rPr>
-              <a:t>① 같은 조건 손실 확률이 25%를 넘거나  ② 1만원 기준 출발 가치가 공정가액보다 10% 넘게 깎였거나  ③ 발행사 모의실험 표본이 10년에 못 미쳐 다른 상품과 비교할 수 없는 경우. 셋 중 하나라도 걸리면 이 자리로 내립니다. 수익률이 높아 먼저 눈에 띄는 상품들이라, 상담 전에 걸러두는 편이 낫습니다.</a:t>
+              <a:t>① 컴퓨터로 돌린 손해 볼 가능성이 25%를 넘거나  ② 1만원을 넣는 순간의 값어치가 제값보다 10% 넘게 깎였거나  ③ 회사가 과거로 돌려본 기간이 10년에 못 미쳐 다른 상품과 비교할 수 없는 경우. 셋 중 하나라도 걸리면 이 자리로 내립니다. 수익률이 높아 먼저 눈에 띄는 상품들이라, 상담 전에 걸러두는 편이 낫습니다.</a:t>
             </a:r>
             <a:endParaRPr lang="en-US" sz="1150" dirty="0"/>
           </a:p>
@@ -19289,7 +19378,7 @@
                 <a:ea typeface="맑은 고딕" pitchFamily="34" charset="-122"/>
                 <a:cs typeface="맑은 고딕" pitchFamily="34" charset="-120"/>
               </a:rPr>
-              <a:t>출처 — 금융감독원 전자공시시스템 일괄신고추가서류 접수번호 20260821000193 (2026.08.21 공시)  ·  원금 손실이 발생할 수 있는 상품입니다</a:t>
+              <a:t>출처 — 금융감독원 전자공시시스템(DART)에 2026.08.21 올라온 투자설명서 (접수번호 20260821000193)  ·  원금을 잃을 수 있는 상품입니다</a:t>
             </a:r>
             <a:endParaRPr lang="en-US" sz="850" dirty="0"/>
           </a:p>
@@ -19417,7 +19506,7 @@
                 <a:ea typeface="맑은 고딕" pitchFamily="34" charset="-122"/>
                 <a:cs typeface="맑은 고딕" pitchFamily="34" charset="-120"/>
               </a:rPr>
-              <a:t>가입 전 꼭 짚어드릴 것</a:t>
+              <a:t>가입 전에 꼭 짚어드릴 것</a:t>
             </a:r>
             <a:endParaRPr lang="en-US" sz="2400" dirty="0"/>
           </a:p>
@@ -19562,7 +19651,7 @@
                 <a:ea typeface="맑은 고딕" pitchFamily="34" charset="-122"/>
                 <a:cs typeface="맑은 고딕" pitchFamily="34" charset="-120"/>
               </a:rPr>
-              <a:t>청약 마감은 8월 25일(화)입니다</a:t>
+              <a:t>신청 마감은 8월 25일(화)입니다</a:t>
             </a:r>
             <a:endParaRPr lang="en-US" sz="1350" dirty="0"/>
           </a:p>
@@ -19604,7 +19693,7 @@
                 <a:ea typeface="맑은 고딕" pitchFamily="34" charset="-122"/>
                 <a:cs typeface="맑은 고딕" pitchFamily="34" charset="-120"/>
               </a:rPr>
-              <a:t>홈페이지에는 2026.08.24~2026.08.28로 나오지만 개인 일반투자자는 8월 25일(화)까지만 청약할 수 있습니다. 이후는 숙려·가입의사확인 기간이라 주문을 받을 수 없습니다.</a:t>
+              <a:t>홈페이지에는 2026.08.24~2026.08.28로 나오지만 개인 고객은 8월 25일(화)까지만 신청할 수 있습니다. 이후는 다시 생각하는 기간과 확인하는 날이라 주문을 받을 수 없습니다.</a:t>
             </a:r>
             <a:endParaRPr lang="en-US" sz="1100" dirty="0"/>
           </a:p>
@@ -19710,7 +19799,7 @@
                 <a:ea typeface="맑은 고딕" pitchFamily="34" charset="-122"/>
                 <a:cs typeface="맑은 고딕" pitchFamily="34" charset="-120"/>
               </a:rPr>
-              <a:t>1만원이 1만원이 아닙니다</a:t>
+              <a:t>1만원을 넣어도 1만원어치가 아닙니다</a:t>
             </a:r>
             <a:endParaRPr lang="en-US" sz="1350" dirty="0"/>
           </a:p>
@@ -19752,7 +19841,7 @@
                 <a:ea typeface="맑은 고딕" pitchFamily="34" charset="-122"/>
                 <a:cs typeface="맑은 고딕" pitchFamily="34" charset="-120"/>
               </a:rPr>
-              <a:t>공정가액이 10,013원부터 6,834원까지 벌어집니다(각 액면 1만 단위). 게다가 만기까지의 헤지비용은 빠진 값입니다.</a:t>
+              <a:t>넣는 순간의 실제 값어치가 10,013원부터 6,834원까지 벌어집니다. 차액은 회사 몫과 비용이고, 이마저도 앞으로 들 비용을 이미 뺀 값입니다.</a:t>
             </a:r>
             <a:endParaRPr lang="en-US" sz="1100" dirty="0"/>
           </a:p>
@@ -19858,7 +19947,7 @@
                 <a:ea typeface="맑은 고딕" pitchFamily="34" charset="-122"/>
                 <a:cs typeface="맑은 고딕" pitchFamily="34" charset="-120"/>
               </a:rPr>
-              <a:t>중간에 깨면 손해입니다</a:t>
+              <a:t>중간에 빼면 손해입니다</a:t>
             </a:r>
             <a:endParaRPr lang="en-US" sz="1350" dirty="0"/>
           </a:p>
@@ -19900,7 +19989,7 @@
                 <a:ea typeface="맑은 고딕" pitchFamily="34" charset="-122"/>
                 <a:cs typeface="맑은 고딕" pitchFamily="34" charset="-120"/>
               </a:rPr>
-              <a:t>중도상환은 그 시점 공정가액의 95%(가입 6개월 안이면 90%). 3년을 묻어둘 수 있는 돈으로만 하셔야 합니다.</a:t>
+              <a:t>만기 전에 빼시면 원금이 아니라 그날 계산한 값어치의 95%(가입 6개월 안이면 90%)만 받습니다. 36개월 동안 안 쓸 돈으로만 하셔야 합니다.</a:t>
             </a:r>
             <a:endParaRPr lang="en-US" sz="1100" dirty="0"/>
           </a:p>
@@ -20006,7 +20095,7 @@
                 <a:ea typeface="맑은 고딕" pitchFamily="34" charset="-122"/>
                 <a:cs typeface="맑은 고딕" pitchFamily="34" charset="-120"/>
               </a:rPr>
-              <a:t>판정은 종가로 합니다</a:t>
+              <a:t>판정은 그날 종가로만 합니다</a:t>
             </a:r>
             <a:endParaRPr lang="en-US" sz="1350" dirty="0"/>
           </a:p>
@@ -20048,7 +20137,7 @@
                 <a:ea typeface="맑은 고딕" pitchFamily="34" charset="-122"/>
                 <a:cs typeface="맑은 고딕" pitchFamily="34" charset="-120"/>
               </a:rPr>
-              <a:t>장중에 잠깐 뚫어도 종가가 위면 괜찮고, 종가가 한 번이라도 아래면 그걸로 기록이 남습니다.</a:t>
+              <a:t>장중에 잠깐 뚫고 내려가도 종가가 선 위면 아무 일 없고, 종가가 딱 한 번이라도 아래면 그걸로 기록이 남습니다.</a:t>
             </a:r>
             <a:endParaRPr lang="en-US" sz="1100" dirty="0"/>
           </a:p>
@@ -20154,7 +20243,7 @@
                 <a:ea typeface="맑은 고딕" pitchFamily="34" charset="-122"/>
                 <a:cs typeface="맑은 고딕" pitchFamily="34" charset="-120"/>
               </a:rPr>
-              <a:t>손실 확률 숫자를 그대로 옮기지 마십시오</a:t>
+              <a:t>서류의 손실 숫자를 그대로 옮기지 마십시오</a:t>
             </a:r>
             <a:endParaRPr lang="en-US" sz="1350" dirty="0"/>
           </a:p>
@@ -20196,7 +20285,7 @@
                 <a:ea typeface="맑은 고딕" pitchFamily="34" charset="-122"/>
                 <a:cs typeface="맑은 고딕" pitchFamily="34" charset="-120"/>
               </a:rPr>
-              <a:t>공시의 손실 확률은 "지난 20년이 되풀이된다면"의 답입니다. 추천 1번 제38044회도 공시로는 0.06%지만 같은 조건으로 다시 돌리면 8.9%입니다.</a:t>
+              <a:t>서류의 손실 숫자는 "지난 20년이 되풀이된다면"의 답입니다. 추천 1번 제38044회도 서류로는 0.06%지만 똑같은 조건으로 다시 돌리면 8.9%입니다.</a:t>
             </a:r>
             <a:endParaRPr lang="en-US" sz="1100" dirty="0"/>
           </a:p>
@@ -20302,7 +20391,7 @@
                 <a:ea typeface="맑은 고딕" pitchFamily="34" charset="-122"/>
                 <a:cs typeface="맑은 고딕" pitchFamily="34" charset="-120"/>
               </a:rPr>
-              <a:t>판매 과정은 녹취됩니다</a:t>
+              <a:t>상담 내용은 녹음됩니다</a:t>
             </a:r>
             <a:endParaRPr lang="en-US" sz="1350" dirty="0"/>
           </a:p>
@@ -20344,7 +20433,7 @@
                 <a:ea typeface="맑은 고딕" pitchFamily="34" charset="-122"/>
                 <a:cs typeface="맑은 고딕" pitchFamily="34" charset="-120"/>
               </a:rPr>
-              <a:t>개인 일반투자자는 녹취 자료를 요청할 수 있고, 투자 위험을 요약한 설명서를 받습니다. 최대 원금손실 가능금액은 숙려기간 중에 따로 고지됩니다. 설명을 건너뛰면 그대로 기록에 남습니다.</a:t>
+              <a:t>개인 고객은 녹음 파일을 달라고 하실 수 있고, 위험을 한 장으로 정리한 설명서도 받습니다. "최대 얼마까지 잃을 수 있는지"는 다시 생각하는 기간에 따로 알려드립니다. 설명을 건너뛰면 그것도 그대로 기록에 남습니다.</a:t>
             </a:r>
             <a:endParaRPr lang="en-US" sz="1100" dirty="0"/>
           </a:p>
@@ -20383,7 +20472,7 @@
                 <a:ea typeface="맑은 고딕" pitchFamily="34" charset="-122"/>
                 <a:cs typeface="맑은 고딕" pitchFamily="34" charset="-120"/>
               </a:rPr>
-              <a:t>출처 — 금융감독원 전자공시시스템 일괄신고추가서류 접수번호 20260821000193 (2026.08.21 공시)  ·  원금 손실이 발생할 수 있는 상품입니다</a:t>
+              <a:t>출처 — 금융감독원 전자공시시스템(DART)에 2026.08.21 올라온 투자설명서 (접수번호 20260821000193)  ·  원금을 잃을 수 있는 상품입니다</a:t>
             </a:r>
             <a:endParaRPr lang="en-US" sz="850" dirty="0"/>
           </a:p>
@@ -20511,7 +20600,7 @@
                 <a:ea typeface="맑은 고딕" pitchFamily="34" charset="-122"/>
                 <a:cs typeface="맑은 고딕" pitchFamily="34" charset="-120"/>
               </a:rPr>
-              <a:t>상담 시 이 순서로 말씀하시면 됩니다</a:t>
+              <a:t>상담할 때 이 순서로 말씀하시면 됩니다</a:t>
             </a:r>
             <a:endParaRPr lang="en-US" sz="2400" dirty="0"/>
           </a:p>
@@ -20550,7 +20639,7 @@
                 <a:ea typeface="맑은 고딕" pitchFamily="34" charset="-122"/>
                 <a:cs typeface="맑은 고딕" pitchFamily="34" charset="-120"/>
               </a:rPr>
-              <a:t>추천 1번 제38044회 기준입니다. 다른 상품이면 회차·기간·낙인 숫자만 바꾸십시오.</a:t>
+              <a:t>추천 1번 제38044회 기준입니다. 다른 상품이면 회차·기간·원금 지키는 선 숫자만 바꾸십시오.</a:t>
             </a:r>
             <a:endParaRPr lang="en-US" sz="1250" dirty="0"/>
           </a:p>
@@ -20656,7 +20745,7 @@
                 <a:ea typeface="맑은 고딕" pitchFamily="34" charset="-122"/>
                 <a:cs typeface="맑은 고딕" pitchFamily="34" charset="-120"/>
               </a:rPr>
-              <a:t>"먼저 일정부터 말씀드리면, 청약은 8월 25일(화)까지 넣으셔야 합니다. 그 뒤 이틀은 법으로 정해진 숙려기간이라 주문을 받을 수 없습니다."</a:t>
+              <a:t>"먼저 일정부터 말씀드리면, 신청은 8월 25일(화)까지 넣으셔야 합니다. 그 뒤 이틀은 법으로 정해진 '다시 생각하는 기간'이라 주문을 받을 수 없습니다."</a:t>
             </a:r>
             <a:endParaRPr lang="en-US" sz="1250" dirty="0"/>
           </a:p>
@@ -20762,7 +20851,7 @@
                 <a:ea typeface="맑은 고딕" pitchFamily="34" charset="-122"/>
                 <a:cs typeface="맑은 고딕" pitchFamily="34" charset="-120"/>
               </a:rPr>
-              <a:t>"이 상품은 3년짜리인데, 3개월마다 끝날 기회가 옵니다. 대부분은 첫 번째에 끝났습니다."</a:t>
+              <a:t>"이 상품은 최장 36개월짜리인데, 3개월마다 끝날 기회가 옵니다. 지금까지는 대부분 첫 번째에 끝났습니다."</a:t>
             </a:r>
             <a:endParaRPr lang="en-US" sz="1250" dirty="0"/>
           </a:p>
@@ -20974,7 +21063,7 @@
                 <a:ea typeface="맑은 고딕" pitchFamily="34" charset="-122"/>
                 <a:cs typeface="맑은 고딕" pitchFamily="34" charset="-120"/>
               </a:rPr>
-              <a:t>"올라야 버는 게 아니라, 많이 안 떨어지면 버는 구조입니다."</a:t>
+              <a:t>"올라야 버는 게 아니라, 많이 안 떨어지면 버는 구조입니다. 제자리여도 약속한 이자를 다 받습니다."</a:t>
             </a:r>
             <a:endParaRPr lang="en-US" sz="1250" dirty="0"/>
           </a:p>
@@ -21080,7 +21169,7 @@
                 <a:ea typeface="맑은 고딕" pitchFamily="34" charset="-122"/>
                 <a:cs typeface="맑은 고딕" pitchFamily="34" charset="-120"/>
               </a:rPr>
-              <a:t>"대신 35% 아래로 크게 떨어지면 그 하락률이 그대로 손실로 옵니다. 원금이 보장되지 않습니다."</a:t>
+              <a:t>"대신 35% 아래로 크게 떨어지면 떨어진 만큼 그대로 손실입니다. 원금은 보장되지 않습니다."</a:t>
             </a:r>
             <a:endParaRPr lang="en-US" sz="1250" dirty="0"/>
           </a:p>
@@ -21186,7 +21275,7 @@
                 <a:ea typeface="맑은 고딕" pitchFamily="34" charset="-122"/>
                 <a:cs typeface="맑은 고딕" pitchFamily="34" charset="-120"/>
               </a:rPr>
-              <a:t>"과거 20년으로 보면 손실은 0.06%였지만 그 구간이 좋았던 덕도 있습니다. 보수적으로는 9% 정도로 봅니다."</a:t>
+              <a:t>"지난 20년으로 돌려보면 손실은 0.06%였는데 그 기간이 좋았던 덕도 있습니다. 넉넉하게 잡으면 9% 정도로 봅니다."</a:t>
             </a:r>
             <a:endParaRPr lang="en-US" sz="1250" dirty="0"/>
           </a:p>
@@ -21292,7 +21381,7 @@
                 <a:ea typeface="맑은 고딕" pitchFamily="34" charset="-122"/>
                 <a:cs typeface="맑은 고딕" pitchFamily="34" charset="-120"/>
               </a:rPr>
-              <a:t>"3년 동안 안 쓸 돈인지 먼저 확인해 주세요. 중간에 빼면 그날 평가금액의 95%만 받습니다."</a:t>
+              <a:t>"36개월 동안 안 쓸 돈인지부터 확인해 주세요. 중간에 빼시면 그날 계산한 값어치의 95%만 받습니다."</a:t>
             </a:r>
             <a:endParaRPr lang="en-US" sz="1250" dirty="0"/>
           </a:p>
@@ -21398,7 +21487,7 @@
                 <a:ea typeface="맑은 고딕" pitchFamily="34" charset="-122"/>
                 <a:cs typeface="맑은 고딕" pitchFamily="34" charset="-120"/>
               </a:rPr>
-              <a:t>"청약을 넣으셔도 바로 확정되는 게 아닙니다. 이틀 숙려기간을 거친 뒤 저희가 다시 연락드려 최종 의사를 확인합니다. 그때 확인이 안 되면 청약금은 2026.08.31에 돌려드립니다."</a:t>
+              <a:t>"신청하셨다고 바로 되는 게 아닙니다. 이틀 생각하실 시간을 드린 뒤 저희가 다시 연락드려 정말 하실 건지 확인합니다. 그때 연락이 안 닿으면 넣으신 돈은 2026.08.31에 돌려드립니다."</a:t>
             </a:r>
             <a:endParaRPr lang="en-US" sz="1250" dirty="0"/>
           </a:p>
@@ -21465,7 +21554,7 @@
                 <a:ea typeface="맑은 고딕" pitchFamily="34" charset="-122"/>
                 <a:cs typeface="맑은 고딕" pitchFamily="34" charset="-120"/>
               </a:rPr>
-              <a:t>"종목이 들어간 건 더 위험하지 않나요?"  </a:t>
+              <a:t>"개별 종목이 들어간 건 더 위험하지 않나요?"  </a:t>
             </a:r>
             <a:pPr indent="0" marL="0">
               <a:lnSpc>
@@ -21482,7 +21571,7 @@
                 <a:ea typeface="맑은 고딕" pitchFamily="34" charset="-122"/>
                 <a:cs typeface="맑은 고딕" pitchFamily="34" charset="-120"/>
               </a:rPr>
-              <a:t>→ "맞습니다. 이번 회차도 종목형 평균 손실 확률이 지수형의 1.8배입니다. 다만 제38044회는 두 기초자산이 상관계수 0.94로 거의 같이 움직이고 낙인이 35%로 깊어서, 같은 기준으로 재면 지수형 대부분보다 오히려 낮게 나옵니다."</a:t>
+              <a:t>→ "맞습니다. 이번 주도 종목만 담은 상품의 손해 볼 가능성이 지수만 담은 것의 1.8배입니다. 다만 제38044회는 두 자산이 거의 같이 움직이고(0.94, 1이면 완전히 같이 움직임) 원금 지키는 선도 35%로 훨씬 아래에 있어서, 같은 잣대로 재면 지수 상품 대부분보다 오히려 낮게 나옵니다."</a:t>
             </a:r>
             <a:endParaRPr lang="en-US" sz="1150" dirty="0"/>
           </a:p>
@@ -21521,7 +21610,7 @@
                 <a:ea typeface="맑은 고딕" pitchFamily="34" charset="-122"/>
                 <a:cs typeface="맑은 고딕" pitchFamily="34" charset="-120"/>
               </a:rPr>
-              <a:t>출처 — 금융감독원 전자공시시스템 일괄신고추가서류 접수번호 20260821000193 (2026.08.21 공시)  ·  원금 손실이 발생할 수 있는 상품입니다</a:t>
+              <a:t>출처 — 금융감독원 전자공시시스템(DART)에 2026.08.21 올라온 투자설명서 (접수번호 20260821000193)  ·  원금을 잃을 수 있는 상품입니다</a:t>
             </a:r>
             <a:endParaRPr lang="en-US" sz="850" dirty="0"/>
           </a:p>
@@ -21561,6 +21650,3444 @@
                 <a:cs typeface="맑은 고딕" pitchFamily="34" charset="-120"/>
               </a:rPr>
               <a:t>14</a:t>
+            </a:r>
+            <a:endParaRPr lang="en-US" sz="900" dirty="0"/>
+          </a:p>
+        </p:txBody>
+      </p:sp>
+    </p:spTree>
+  </p:cSld>
+  <p:clrMapOvr>
+    <a:masterClrMapping/>
+  </p:clrMapOvr>
+</p:sld>
+</file>
+
+<file path=ppt/slides/slide15.xml><?xml version="1.0" encoding="utf-8"?>
+<p:sld xmlns:a="http://schemas.openxmlformats.org/drawingml/2006/main" xmlns:r="http://schemas.openxmlformats.org/officeDocument/2006/relationships" xmlns:p="http://schemas.openxmlformats.org/presentationml/2006/main">
+  <p:cSld name="Slide 15">
+    <p:spTree>
+      <p:nvGrpSpPr>
+        <p:cNvPr id="1" name=""/>
+        <p:cNvGrpSpPr/>
+        <p:nvPr/>
+      </p:nvGrpSpPr>
+      <p:grpSpPr>
+        <a:xfrm>
+          <a:off x="0" y="0"/>
+          <a:ext cx="0" cy="0"/>
+          <a:chOff x="0" y="0"/>
+          <a:chExt cx="0" cy="0"/>
+        </a:xfrm>
+      </p:grpSpPr>
+      <p:sp>
+        <p:nvSpPr>
+          <p:cNvPr id="2" name="Shape 0"/>
+          <p:cNvSpPr/>
+          <p:nvPr/>
+        </p:nvSpPr>
+        <p:spPr>
+          <a:xfrm>
+            <a:off x="566928" y="420624"/>
+            <a:ext cx="11057839" cy="12802"/>
+          </a:xfrm>
+          <a:prstGeom prst="rect">
+            <a:avLst/>
+          </a:prstGeom>
+          <a:solidFill>
+            <a:srgbClr val="F58220"/>
+          </a:solidFill>
+          <a:ln w="12700">
+            <a:solidFill>
+              <a:srgbClr val="333333"/>
+            </a:solidFill>
+            <a:prstDash val="solid"/>
+          </a:ln>
+        </p:spPr>
+      </p:sp>
+      <p:sp>
+        <p:nvSpPr>
+          <p:cNvPr id="3" name="Text 1"/>
+          <p:cNvSpPr/>
+          <p:nvPr/>
+        </p:nvSpPr>
+        <p:spPr>
+          <a:xfrm>
+            <a:off x="566928" y="493776"/>
+            <a:ext cx="11057839" cy="420624"/>
+          </a:xfrm>
+          <a:prstGeom prst="rect">
+            <a:avLst/>
+          </a:prstGeom>
+          <a:noFill/>
+          <a:ln/>
+        </p:spPr>
+        <p:txBody>
+          <a:bodyPr wrap="square" lIns="0" tIns="0" rIns="0" bIns="0" rtlCol="0" anchor="ctr"/>
+          <a:lstStyle/>
+          <a:p>
+            <a:pPr indent="0" marL="0">
+              <a:buNone/>
+            </a:pPr>
+            <a:r>
+              <a:rPr lang="en-US" sz="2400" b="1" dirty="0">
+                <a:solidFill>
+                  <a:srgbClr val="1A1A1A"/>
+                </a:solidFill>
+                <a:latin typeface="맑은 고딕" pitchFamily="34" charset="0"/>
+                <a:ea typeface="맑은 고딕" pitchFamily="34" charset="-122"/>
+                <a:cs typeface="맑은 고딕" pitchFamily="34" charset="-120"/>
+              </a:rPr>
+              <a:t>말 풀이 — 서류에 나오는 말과 맞춰 보기</a:t>
+            </a:r>
+            <a:endParaRPr lang="en-US" sz="2400" dirty="0"/>
+          </a:p>
+        </p:txBody>
+      </p:sp>
+      <p:sp>
+        <p:nvSpPr>
+          <p:cNvPr id="4" name="Text 2"/>
+          <p:cNvSpPr/>
+          <p:nvPr/>
+        </p:nvSpPr>
+        <p:spPr>
+          <a:xfrm>
+            <a:off x="566928" y="914400"/>
+            <a:ext cx="11057839" cy="310896"/>
+          </a:xfrm>
+          <a:prstGeom prst="rect">
+            <a:avLst/>
+          </a:prstGeom>
+          <a:noFill/>
+          <a:ln/>
+        </p:spPr>
+        <p:txBody>
+          <a:bodyPr wrap="square" lIns="0" tIns="0" rIns="0" bIns="0" rtlCol="0" anchor="ctr"/>
+          <a:lstStyle/>
+          <a:p>
+            <a:pPr indent="0" marL="0">
+              <a:buNone/>
+            </a:pPr>
+            <a:r>
+              <a:rPr lang="en-US" sz="1250" dirty="0">
+                <a:solidFill>
+                  <a:srgbClr val="6C6C6C"/>
+                </a:solidFill>
+                <a:latin typeface="맑은 고딕" pitchFamily="34" charset="0"/>
+                <a:ea typeface="맑은 고딕" pitchFamily="34" charset="-122"/>
+                <a:cs typeface="맑은 고딕" pitchFamily="34" charset="-120"/>
+              </a:rPr>
+              <a:t>이 자료는 어려운 말을 일부러 풀어서 썼습니다. 홈페이지와 투자설명서에는 원래 용어로 적혀 있으니, 고객이 서류를 펴 놓고 물으시면 두 말을 이어드리십시오.</a:t>
+            </a:r>
+            <a:endParaRPr lang="en-US" sz="1250" dirty="0"/>
+          </a:p>
+        </p:txBody>
+      </p:sp>
+      <p:graphicFrame>
+        <p:nvGraphicFramePr>
+          <p:cNvPr id="16" name="Table 0"/>
+          <p:cNvGraphicFramePr>
+            <a:graphicFrameLocks noGrp="1"/>
+          </p:cNvGraphicFramePr>
+          <p:nvPr>
+            <p:extLst>
+              <p:ext uri="{D42A27DB-BD31-4B8C-83A1-F6EECF244321}">
+                <p14:modId xmlns:p14="http://schemas.microsoft.com/office/powerpoint/2010/main" val="1579011935"/>
+              </p:ext>
+            </p:extLst>
+          </p:nvPr>
+        </p:nvGraphicFramePr>
+        <p:xfrm>
+          <a:off x="566928" y="1316736"/>
+          <a:ext cx="5391760" cy="914400"/>
+        </p:xfrm>
+        <a:graphic>
+          <a:graphicData uri="http://schemas.openxmlformats.org/drawingml/2006/table">
+            <a:tbl>
+              <a:tblPr/>
+              <a:tblGrid>
+                <a:gridCol w="1481328"/>
+                <a:gridCol w="1316736"/>
+                <a:gridCol w="2593696"/>
+              </a:tblGrid>
+              <a:tr h="457200">
+                <a:tc>
+                  <a:txBody>
+                    <a:bodyPr/>
+                    <a:lstStyle/>
+                    <a:p>
+                      <a:pPr indent="0" marL="0">
+                        <a:buNone/>
+                      </a:pPr>
+                      <a:r>
+                        <a:rPr lang="en-US" sz="1050" b="1" dirty="0">
+                          <a:solidFill>
+                            <a:srgbClr val="1A1A1A"/>
+                          </a:solidFill>
+                          <a:latin typeface="맑은 고딕" pitchFamily="34" charset="0"/>
+                          <a:ea typeface="맑은 고딕" pitchFamily="34" charset="-122"/>
+                          <a:cs typeface="맑은 고딕" pitchFamily="34" charset="-120"/>
+                        </a:rPr>
+                        <a:t>이 자료에서 쓴 말</a:t>
+                      </a:r>
+                      <a:endParaRPr lang="en-US" sz="1050" dirty="0">
+                        <a:latin typeface="맑은 고딕" charset="0"/>
+                        <a:ea typeface="맑은 고딕" charset="0"/>
+                        <a:cs typeface="맑은 고딕" charset="0"/>
+                      </a:endParaRPr>
+                    </a:p>
+                  </a:txBody>
+                  <a:tcPr marL="76200" marR="76200" marT="76200" marB="76200" anchor="ctr">
+                    <a:lnL w="12700" cap="flat" cmpd="sng" algn="ctr">
+                      <a:solidFill>
+                        <a:srgbClr val="E5E4E1"/>
+                      </a:solidFill>
+                      <a:prstDash val="solid"/>
+                      <a:round/>
+                      <a:headEnd type="none" w="med" len="med"/>
+                      <a:tailEnd type="none" w="med" len="med"/>
+                    </a:lnL>
+                    <a:lnR w="12700" cap="flat" cmpd="sng" algn="ctr">
+                      <a:solidFill>
+                        <a:srgbClr val="E5E4E1"/>
+                      </a:solidFill>
+                      <a:prstDash val="solid"/>
+                      <a:round/>
+                      <a:headEnd type="none" w="med" len="med"/>
+                      <a:tailEnd type="none" w="med" len="med"/>
+                    </a:lnR>
+                    <a:lnT w="12700" cap="flat" cmpd="sng" algn="ctr">
+                      <a:solidFill>
+                        <a:srgbClr val="E5E4E1"/>
+                      </a:solidFill>
+                      <a:prstDash val="solid"/>
+                      <a:round/>
+                      <a:headEnd type="none" w="med" len="med"/>
+                      <a:tailEnd type="none" w="med" len="med"/>
+                    </a:lnT>
+                    <a:lnB w="12700" cap="flat" cmpd="sng" algn="ctr">
+                      <a:solidFill>
+                        <a:srgbClr val="E5E4E1"/>
+                      </a:solidFill>
+                      <a:prstDash val="solid"/>
+                      <a:round/>
+                      <a:headEnd type="none" w="med" len="med"/>
+                      <a:tailEnd type="none" w="med" len="med"/>
+                    </a:lnB>
+                    <a:solidFill>
+                      <a:srgbClr val="FAB072"/>
+                    </a:solidFill>
+                  </a:tcPr>
+                </a:tc>
+                <a:tc>
+                  <a:txBody>
+                    <a:bodyPr/>
+                    <a:lstStyle/>
+                    <a:p>
+                      <a:pPr indent="0" marL="0">
+                        <a:buNone/>
+                      </a:pPr>
+                      <a:r>
+                        <a:rPr lang="en-US" sz="1050" b="1" dirty="0">
+                          <a:solidFill>
+                            <a:srgbClr val="1A1A1A"/>
+                          </a:solidFill>
+                          <a:latin typeface="맑은 고딕" pitchFamily="34" charset="0"/>
+                          <a:ea typeface="맑은 고딕" pitchFamily="34" charset="-122"/>
+                          <a:cs typeface="맑은 고딕" pitchFamily="34" charset="-120"/>
+                        </a:rPr>
+                        <a:t>서류 용어</a:t>
+                      </a:r>
+                      <a:endParaRPr lang="en-US" sz="1050" dirty="0">
+                        <a:latin typeface="맑은 고딕" charset="0"/>
+                        <a:ea typeface="맑은 고딕" charset="0"/>
+                        <a:cs typeface="맑은 고딕" charset="0"/>
+                      </a:endParaRPr>
+                    </a:p>
+                  </a:txBody>
+                  <a:tcPr marL="76200" marR="76200" marT="76200" marB="76200" anchor="ctr">
+                    <a:lnL w="12700" cap="flat" cmpd="sng" algn="ctr">
+                      <a:solidFill>
+                        <a:srgbClr val="E5E4E1"/>
+                      </a:solidFill>
+                      <a:prstDash val="solid"/>
+                      <a:round/>
+                      <a:headEnd type="none" w="med" len="med"/>
+                      <a:tailEnd type="none" w="med" len="med"/>
+                    </a:lnL>
+                    <a:lnR w="12700" cap="flat" cmpd="sng" algn="ctr">
+                      <a:solidFill>
+                        <a:srgbClr val="E5E4E1"/>
+                      </a:solidFill>
+                      <a:prstDash val="solid"/>
+                      <a:round/>
+                      <a:headEnd type="none" w="med" len="med"/>
+                      <a:tailEnd type="none" w="med" len="med"/>
+                    </a:lnR>
+                    <a:lnT w="12700" cap="flat" cmpd="sng" algn="ctr">
+                      <a:solidFill>
+                        <a:srgbClr val="E5E4E1"/>
+                      </a:solidFill>
+                      <a:prstDash val="solid"/>
+                      <a:round/>
+                      <a:headEnd type="none" w="med" len="med"/>
+                      <a:tailEnd type="none" w="med" len="med"/>
+                    </a:lnT>
+                    <a:lnB w="12700" cap="flat" cmpd="sng" algn="ctr">
+                      <a:solidFill>
+                        <a:srgbClr val="E5E4E1"/>
+                      </a:solidFill>
+                      <a:prstDash val="solid"/>
+                      <a:round/>
+                      <a:headEnd type="none" w="med" len="med"/>
+                      <a:tailEnd type="none" w="med" len="med"/>
+                    </a:lnB>
+                    <a:solidFill>
+                      <a:srgbClr val="FAB072"/>
+                    </a:solidFill>
+                  </a:tcPr>
+                </a:tc>
+                <a:tc>
+                  <a:txBody>
+                    <a:bodyPr/>
+                    <a:lstStyle/>
+                    <a:p>
+                      <a:pPr indent="0" marL="0">
+                        <a:buNone/>
+                      </a:pPr>
+                      <a:r>
+                        <a:rPr lang="en-US" sz="1050" b="1" dirty="0">
+                          <a:solidFill>
+                            <a:srgbClr val="1A1A1A"/>
+                          </a:solidFill>
+                          <a:latin typeface="맑은 고딕" pitchFamily="34" charset="0"/>
+                          <a:ea typeface="맑은 고딕" pitchFamily="34" charset="-122"/>
+                          <a:cs typeface="맑은 고딕" pitchFamily="34" charset="-120"/>
+                        </a:rPr>
+                        <a:t>무슨 뜻인가</a:t>
+                      </a:r>
+                      <a:endParaRPr lang="en-US" sz="1050" dirty="0">
+                        <a:latin typeface="맑은 고딕" charset="0"/>
+                        <a:ea typeface="맑은 고딕" charset="0"/>
+                        <a:cs typeface="맑은 고딕" charset="0"/>
+                      </a:endParaRPr>
+                    </a:p>
+                  </a:txBody>
+                  <a:tcPr marL="76200" marR="76200" marT="76200" marB="76200" anchor="ctr">
+                    <a:lnL w="12700" cap="flat" cmpd="sng" algn="ctr">
+                      <a:solidFill>
+                        <a:srgbClr val="E5E4E1"/>
+                      </a:solidFill>
+                      <a:prstDash val="solid"/>
+                      <a:round/>
+                      <a:headEnd type="none" w="med" len="med"/>
+                      <a:tailEnd type="none" w="med" len="med"/>
+                    </a:lnL>
+                    <a:lnR w="12700" cap="flat" cmpd="sng" algn="ctr">
+                      <a:solidFill>
+                        <a:srgbClr val="E5E4E1"/>
+                      </a:solidFill>
+                      <a:prstDash val="solid"/>
+                      <a:round/>
+                      <a:headEnd type="none" w="med" len="med"/>
+                      <a:tailEnd type="none" w="med" len="med"/>
+                    </a:lnR>
+                    <a:lnT w="12700" cap="flat" cmpd="sng" algn="ctr">
+                      <a:solidFill>
+                        <a:srgbClr val="E5E4E1"/>
+                      </a:solidFill>
+                      <a:prstDash val="solid"/>
+                      <a:round/>
+                      <a:headEnd type="none" w="med" len="med"/>
+                      <a:tailEnd type="none" w="med" len="med"/>
+                    </a:lnT>
+                    <a:lnB w="12700" cap="flat" cmpd="sng" algn="ctr">
+                      <a:solidFill>
+                        <a:srgbClr val="E5E4E1"/>
+                      </a:solidFill>
+                      <a:prstDash val="solid"/>
+                      <a:round/>
+                      <a:headEnd type="none" w="med" len="med"/>
+                      <a:tailEnd type="none" w="med" len="med"/>
+                    </a:lnB>
+                    <a:solidFill>
+                      <a:srgbClr val="FAB072"/>
+                    </a:solidFill>
+                  </a:tcPr>
+                </a:tc>
+              </a:tr>
+              <a:tr h="457200">
+                <a:tc>
+                  <a:txBody>
+                    <a:bodyPr/>
+                    <a:lstStyle/>
+                    <a:p>
+                      <a:pPr indent="0" marL="0">
+                        <a:buNone/>
+                      </a:pPr>
+                      <a:r>
+                        <a:rPr lang="en-US" sz="1050" b="1" dirty="0">
+                          <a:solidFill>
+                            <a:srgbClr val="1A1A1A"/>
+                          </a:solidFill>
+                          <a:latin typeface="맑은 고딕" pitchFamily="34" charset="0"/>
+                          <a:ea typeface="맑은 고딕" pitchFamily="34" charset="-122"/>
+                          <a:cs typeface="맑은 고딕" pitchFamily="34" charset="-120"/>
+                        </a:rPr>
+                        <a:t>기준 자산</a:t>
+                      </a:r>
+                      <a:endParaRPr lang="en-US" sz="1050" dirty="0">
+                        <a:latin typeface="맑은 고딕" charset="0"/>
+                        <a:ea typeface="맑은 고딕" charset="0"/>
+                        <a:cs typeface="맑은 고딕" charset="0"/>
+                      </a:endParaRPr>
+                    </a:p>
+                  </a:txBody>
+                  <a:tcPr marL="76200" marR="76200" marT="76200" marB="76200" anchor="ctr">
+                    <a:lnL w="12700" cap="flat" cmpd="sng" algn="ctr">
+                      <a:solidFill>
+                        <a:srgbClr val="E5E4E1"/>
+                      </a:solidFill>
+                      <a:prstDash val="solid"/>
+                      <a:round/>
+                      <a:headEnd type="none" w="med" len="med"/>
+                      <a:tailEnd type="none" w="med" len="med"/>
+                    </a:lnL>
+                    <a:lnR w="12700" cap="flat" cmpd="sng" algn="ctr">
+                      <a:solidFill>
+                        <a:srgbClr val="E5E4E1"/>
+                      </a:solidFill>
+                      <a:prstDash val="solid"/>
+                      <a:round/>
+                      <a:headEnd type="none" w="med" len="med"/>
+                      <a:tailEnd type="none" w="med" len="med"/>
+                    </a:lnR>
+                    <a:lnT w="12700" cap="flat" cmpd="sng" algn="ctr">
+                      <a:solidFill>
+                        <a:srgbClr val="E5E4E1"/>
+                      </a:solidFill>
+                      <a:prstDash val="solid"/>
+                      <a:round/>
+                      <a:headEnd type="none" w="med" len="med"/>
+                      <a:tailEnd type="none" w="med" len="med"/>
+                    </a:lnT>
+                    <a:lnB w="12700" cap="flat" cmpd="sng" algn="ctr">
+                      <a:solidFill>
+                        <a:srgbClr val="E5E4E1"/>
+                      </a:solidFill>
+                      <a:prstDash val="solid"/>
+                      <a:round/>
+                      <a:headEnd type="none" w="med" len="med"/>
+                      <a:tailEnd type="none" w="med" len="med"/>
+                    </a:lnB>
+                  </a:tcPr>
+                </a:tc>
+                <a:tc>
+                  <a:txBody>
+                    <a:bodyPr/>
+                    <a:lstStyle/>
+                    <a:p>
+                      <a:pPr indent="0" marL="0">
+                        <a:buNone/>
+                      </a:pPr>
+                      <a:r>
+                        <a:rPr lang="en-US" sz="1050" dirty="0">
+                          <a:solidFill>
+                            <a:srgbClr val="6C6C6C"/>
+                          </a:solidFill>
+                          <a:latin typeface="맑은 고딕" pitchFamily="34" charset="0"/>
+                          <a:ea typeface="맑은 고딕" pitchFamily="34" charset="-122"/>
+                          <a:cs typeface="맑은 고딕" pitchFamily="34" charset="-120"/>
+                        </a:rPr>
+                        <a:t>기초자산</a:t>
+                      </a:r>
+                      <a:endParaRPr lang="en-US" sz="1050" dirty="0">
+                        <a:latin typeface="맑은 고딕" charset="0"/>
+                        <a:ea typeface="맑은 고딕" charset="0"/>
+                        <a:cs typeface="맑은 고딕" charset="0"/>
+                      </a:endParaRPr>
+                    </a:p>
+                  </a:txBody>
+                  <a:tcPr marL="76200" marR="76200" marT="76200" marB="76200" anchor="ctr">
+                    <a:lnL w="12700" cap="flat" cmpd="sng" algn="ctr">
+                      <a:solidFill>
+                        <a:srgbClr val="E5E4E1"/>
+                      </a:solidFill>
+                      <a:prstDash val="solid"/>
+                      <a:round/>
+                      <a:headEnd type="none" w="med" len="med"/>
+                      <a:tailEnd type="none" w="med" len="med"/>
+                    </a:lnL>
+                    <a:lnR w="12700" cap="flat" cmpd="sng" algn="ctr">
+                      <a:solidFill>
+                        <a:srgbClr val="E5E4E1"/>
+                      </a:solidFill>
+                      <a:prstDash val="solid"/>
+                      <a:round/>
+                      <a:headEnd type="none" w="med" len="med"/>
+                      <a:tailEnd type="none" w="med" len="med"/>
+                    </a:lnR>
+                    <a:lnT w="12700" cap="flat" cmpd="sng" algn="ctr">
+                      <a:solidFill>
+                        <a:srgbClr val="E5E4E1"/>
+                      </a:solidFill>
+                      <a:prstDash val="solid"/>
+                      <a:round/>
+                      <a:headEnd type="none" w="med" len="med"/>
+                      <a:tailEnd type="none" w="med" len="med"/>
+                    </a:lnT>
+                    <a:lnB w="12700" cap="flat" cmpd="sng" algn="ctr">
+                      <a:solidFill>
+                        <a:srgbClr val="E5E4E1"/>
+                      </a:solidFill>
+                      <a:prstDash val="solid"/>
+                      <a:round/>
+                      <a:headEnd type="none" w="med" len="med"/>
+                      <a:tailEnd type="none" w="med" len="med"/>
+                    </a:lnB>
+                  </a:tcPr>
+                </a:tc>
+                <a:tc>
+                  <a:txBody>
+                    <a:bodyPr/>
+                    <a:lstStyle/>
+                    <a:p>
+                      <a:pPr indent="0" marL="0">
+                        <a:buNone/>
+                      </a:pPr>
+                      <a:r>
+                        <a:rPr lang="en-US" sz="1050" dirty="0">
+                          <a:solidFill>
+                            <a:srgbClr val="3D3D3D"/>
+                          </a:solidFill>
+                          <a:latin typeface="맑은 고딕" pitchFamily="34" charset="0"/>
+                          <a:ea typeface="맑은 고딕" pitchFamily="34" charset="-122"/>
+                          <a:cs typeface="맑은 고딕" pitchFamily="34" charset="-120"/>
+                        </a:rPr>
+                        <a:t>이 상품의 성패를 정하는 주식·지수</a:t>
+                      </a:r>
+                      <a:endParaRPr lang="en-US" sz="1050" dirty="0">
+                        <a:latin typeface="맑은 고딕" charset="0"/>
+                        <a:ea typeface="맑은 고딕" charset="0"/>
+                        <a:cs typeface="맑은 고딕" charset="0"/>
+                      </a:endParaRPr>
+                    </a:p>
+                  </a:txBody>
+                  <a:tcPr marL="76200" marR="76200" marT="76200" marB="76200" anchor="ctr">
+                    <a:lnL w="12700" cap="flat" cmpd="sng" algn="ctr">
+                      <a:solidFill>
+                        <a:srgbClr val="E5E4E1"/>
+                      </a:solidFill>
+                      <a:prstDash val="solid"/>
+                      <a:round/>
+                      <a:headEnd type="none" w="med" len="med"/>
+                      <a:tailEnd type="none" w="med" len="med"/>
+                    </a:lnL>
+                    <a:lnR w="12700" cap="flat" cmpd="sng" algn="ctr">
+                      <a:solidFill>
+                        <a:srgbClr val="E5E4E1"/>
+                      </a:solidFill>
+                      <a:prstDash val="solid"/>
+                      <a:round/>
+                      <a:headEnd type="none" w="med" len="med"/>
+                      <a:tailEnd type="none" w="med" len="med"/>
+                    </a:lnR>
+                    <a:lnT w="12700" cap="flat" cmpd="sng" algn="ctr">
+                      <a:solidFill>
+                        <a:srgbClr val="E5E4E1"/>
+                      </a:solidFill>
+                      <a:prstDash val="solid"/>
+                      <a:round/>
+                      <a:headEnd type="none" w="med" len="med"/>
+                      <a:tailEnd type="none" w="med" len="med"/>
+                    </a:lnT>
+                    <a:lnB w="12700" cap="flat" cmpd="sng" algn="ctr">
+                      <a:solidFill>
+                        <a:srgbClr val="E5E4E1"/>
+                      </a:solidFill>
+                      <a:prstDash val="solid"/>
+                      <a:round/>
+                      <a:headEnd type="none" w="med" len="med"/>
+                      <a:tailEnd type="none" w="med" len="med"/>
+                    </a:lnB>
+                  </a:tcPr>
+                </a:tc>
+              </a:tr>
+              <a:tr h="457200">
+                <a:tc>
+                  <a:txBody>
+                    <a:bodyPr/>
+                    <a:lstStyle/>
+                    <a:p>
+                      <a:pPr indent="0" marL="0">
+                        <a:buNone/>
+                      </a:pPr>
+                      <a:r>
+                        <a:rPr lang="en-US" sz="1050" b="1" dirty="0">
+                          <a:solidFill>
+                            <a:srgbClr val="1A1A1A"/>
+                          </a:solidFill>
+                          <a:latin typeface="맑은 고딕" pitchFamily="34" charset="0"/>
+                          <a:ea typeface="맑은 고딕" pitchFamily="34" charset="-122"/>
+                          <a:cs typeface="맑은 고딕" pitchFamily="34" charset="-120"/>
+                        </a:rPr>
+                        <a:t>처음 가격</a:t>
+                      </a:r>
+                      <a:endParaRPr lang="en-US" sz="1050" dirty="0">
+                        <a:latin typeface="맑은 고딕" charset="0"/>
+                        <a:ea typeface="맑은 고딕" charset="0"/>
+                        <a:cs typeface="맑은 고딕" charset="0"/>
+                      </a:endParaRPr>
+                    </a:p>
+                  </a:txBody>
+                  <a:tcPr marL="76200" marR="76200" marT="76200" marB="76200" anchor="ctr">
+                    <a:lnL w="12700" cap="flat" cmpd="sng" algn="ctr">
+                      <a:solidFill>
+                        <a:srgbClr val="E5E4E1"/>
+                      </a:solidFill>
+                      <a:prstDash val="solid"/>
+                      <a:round/>
+                      <a:headEnd type="none" w="med" len="med"/>
+                      <a:tailEnd type="none" w="med" len="med"/>
+                    </a:lnL>
+                    <a:lnR w="12700" cap="flat" cmpd="sng" algn="ctr">
+                      <a:solidFill>
+                        <a:srgbClr val="E5E4E1"/>
+                      </a:solidFill>
+                      <a:prstDash val="solid"/>
+                      <a:round/>
+                      <a:headEnd type="none" w="med" len="med"/>
+                      <a:tailEnd type="none" w="med" len="med"/>
+                    </a:lnR>
+                    <a:lnT w="12700" cap="flat" cmpd="sng" algn="ctr">
+                      <a:solidFill>
+                        <a:srgbClr val="E5E4E1"/>
+                      </a:solidFill>
+                      <a:prstDash val="solid"/>
+                      <a:round/>
+                      <a:headEnd type="none" w="med" len="med"/>
+                      <a:tailEnd type="none" w="med" len="med"/>
+                    </a:lnT>
+                    <a:lnB w="12700" cap="flat" cmpd="sng" algn="ctr">
+                      <a:solidFill>
+                        <a:srgbClr val="E5E4E1"/>
+                      </a:solidFill>
+                      <a:prstDash val="solid"/>
+                      <a:round/>
+                      <a:headEnd type="none" w="med" len="med"/>
+                      <a:tailEnd type="none" w="med" len="med"/>
+                    </a:lnB>
+                  </a:tcPr>
+                </a:tc>
+                <a:tc>
+                  <a:txBody>
+                    <a:bodyPr/>
+                    <a:lstStyle/>
+                    <a:p>
+                      <a:pPr indent="0" marL="0">
+                        <a:buNone/>
+                      </a:pPr>
+                      <a:r>
+                        <a:rPr lang="en-US" sz="1050" dirty="0">
+                          <a:solidFill>
+                            <a:srgbClr val="6C6C6C"/>
+                          </a:solidFill>
+                          <a:latin typeface="맑은 고딕" pitchFamily="34" charset="0"/>
+                          <a:ea typeface="맑은 고딕" pitchFamily="34" charset="-122"/>
+                          <a:cs typeface="맑은 고딕" pitchFamily="34" charset="-120"/>
+                        </a:rPr>
+                        <a:t>최초기준가격</a:t>
+                      </a:r>
+                      <a:endParaRPr lang="en-US" sz="1050" dirty="0">
+                        <a:latin typeface="맑은 고딕" charset="0"/>
+                        <a:ea typeface="맑은 고딕" charset="0"/>
+                        <a:cs typeface="맑은 고딕" charset="0"/>
+                      </a:endParaRPr>
+                    </a:p>
+                  </a:txBody>
+                  <a:tcPr marL="76200" marR="76200" marT="76200" marB="76200" anchor="ctr">
+                    <a:lnL w="12700" cap="flat" cmpd="sng" algn="ctr">
+                      <a:solidFill>
+                        <a:srgbClr val="E5E4E1"/>
+                      </a:solidFill>
+                      <a:prstDash val="solid"/>
+                      <a:round/>
+                      <a:headEnd type="none" w="med" len="med"/>
+                      <a:tailEnd type="none" w="med" len="med"/>
+                    </a:lnL>
+                    <a:lnR w="12700" cap="flat" cmpd="sng" algn="ctr">
+                      <a:solidFill>
+                        <a:srgbClr val="E5E4E1"/>
+                      </a:solidFill>
+                      <a:prstDash val="solid"/>
+                      <a:round/>
+                      <a:headEnd type="none" w="med" len="med"/>
+                      <a:tailEnd type="none" w="med" len="med"/>
+                    </a:lnR>
+                    <a:lnT w="12700" cap="flat" cmpd="sng" algn="ctr">
+                      <a:solidFill>
+                        <a:srgbClr val="E5E4E1"/>
+                      </a:solidFill>
+                      <a:prstDash val="solid"/>
+                      <a:round/>
+                      <a:headEnd type="none" w="med" len="med"/>
+                      <a:tailEnd type="none" w="med" len="med"/>
+                    </a:lnT>
+                    <a:lnB w="12700" cap="flat" cmpd="sng" algn="ctr">
+                      <a:solidFill>
+                        <a:srgbClr val="E5E4E1"/>
+                      </a:solidFill>
+                      <a:prstDash val="solid"/>
+                      <a:round/>
+                      <a:headEnd type="none" w="med" len="med"/>
+                      <a:tailEnd type="none" w="med" len="med"/>
+                    </a:lnB>
+                  </a:tcPr>
+                </a:tc>
+                <a:tc>
+                  <a:txBody>
+                    <a:bodyPr/>
+                    <a:lstStyle/>
+                    <a:p>
+                      <a:pPr indent="0" marL="0">
+                        <a:buNone/>
+                      </a:pPr>
+                      <a:r>
+                        <a:rPr lang="en-US" sz="1050" dirty="0">
+                          <a:solidFill>
+                            <a:srgbClr val="3D3D3D"/>
+                          </a:solidFill>
+                          <a:latin typeface="맑은 고딕" pitchFamily="34" charset="0"/>
+                          <a:ea typeface="맑은 고딕" pitchFamily="34" charset="-122"/>
+                          <a:cs typeface="맑은 고딕" pitchFamily="34" charset="-120"/>
+                        </a:rPr>
+                        <a:t>시작하는 날의 종가. 모든 %의 기준</a:t>
+                      </a:r>
+                      <a:endParaRPr lang="en-US" sz="1050" dirty="0">
+                        <a:latin typeface="맑은 고딕" charset="0"/>
+                        <a:ea typeface="맑은 고딕" charset="0"/>
+                        <a:cs typeface="맑은 고딕" charset="0"/>
+                      </a:endParaRPr>
+                    </a:p>
+                  </a:txBody>
+                  <a:tcPr marL="76200" marR="76200" marT="76200" marB="76200" anchor="ctr">
+                    <a:lnL w="12700" cap="flat" cmpd="sng" algn="ctr">
+                      <a:solidFill>
+                        <a:srgbClr val="E5E4E1"/>
+                      </a:solidFill>
+                      <a:prstDash val="solid"/>
+                      <a:round/>
+                      <a:headEnd type="none" w="med" len="med"/>
+                      <a:tailEnd type="none" w="med" len="med"/>
+                    </a:lnL>
+                    <a:lnR w="12700" cap="flat" cmpd="sng" algn="ctr">
+                      <a:solidFill>
+                        <a:srgbClr val="E5E4E1"/>
+                      </a:solidFill>
+                      <a:prstDash val="solid"/>
+                      <a:round/>
+                      <a:headEnd type="none" w="med" len="med"/>
+                      <a:tailEnd type="none" w="med" len="med"/>
+                    </a:lnR>
+                    <a:lnT w="12700" cap="flat" cmpd="sng" algn="ctr">
+                      <a:solidFill>
+                        <a:srgbClr val="E5E4E1"/>
+                      </a:solidFill>
+                      <a:prstDash val="solid"/>
+                      <a:round/>
+                      <a:headEnd type="none" w="med" len="med"/>
+                      <a:tailEnd type="none" w="med" len="med"/>
+                    </a:lnT>
+                    <a:lnB w="12700" cap="flat" cmpd="sng" algn="ctr">
+                      <a:solidFill>
+                        <a:srgbClr val="E5E4E1"/>
+                      </a:solidFill>
+                      <a:prstDash val="solid"/>
+                      <a:round/>
+                      <a:headEnd type="none" w="med" len="med"/>
+                      <a:tailEnd type="none" w="med" len="med"/>
+                    </a:lnB>
+                  </a:tcPr>
+                </a:tc>
+              </a:tr>
+              <a:tr h="457200">
+                <a:tc>
+                  <a:txBody>
+                    <a:bodyPr/>
+                    <a:lstStyle/>
+                    <a:p>
+                      <a:pPr indent="0" marL="0">
+                        <a:buNone/>
+                      </a:pPr>
+                      <a:r>
+                        <a:rPr lang="en-US" sz="1050" b="1" dirty="0">
+                          <a:solidFill>
+                            <a:srgbClr val="1A1A1A"/>
+                          </a:solidFill>
+                          <a:latin typeface="맑은 고딕" pitchFamily="34" charset="0"/>
+                          <a:ea typeface="맑은 고딕" pitchFamily="34" charset="-122"/>
+                          <a:cs typeface="맑은 고딕" pitchFamily="34" charset="-120"/>
+                        </a:rPr>
+                        <a:t>미리 끝나는 기준선</a:t>
+                      </a:r>
+                      <a:endParaRPr lang="en-US" sz="1050" dirty="0">
+                        <a:latin typeface="맑은 고딕" charset="0"/>
+                        <a:ea typeface="맑은 고딕" charset="0"/>
+                        <a:cs typeface="맑은 고딕" charset="0"/>
+                      </a:endParaRPr>
+                    </a:p>
+                  </a:txBody>
+                  <a:tcPr marL="76200" marR="76200" marT="76200" marB="76200" anchor="ctr">
+                    <a:lnL w="12700" cap="flat" cmpd="sng" algn="ctr">
+                      <a:solidFill>
+                        <a:srgbClr val="E5E4E1"/>
+                      </a:solidFill>
+                      <a:prstDash val="solid"/>
+                      <a:round/>
+                      <a:headEnd type="none" w="med" len="med"/>
+                      <a:tailEnd type="none" w="med" len="med"/>
+                    </a:lnL>
+                    <a:lnR w="12700" cap="flat" cmpd="sng" algn="ctr">
+                      <a:solidFill>
+                        <a:srgbClr val="E5E4E1"/>
+                      </a:solidFill>
+                      <a:prstDash val="solid"/>
+                      <a:round/>
+                      <a:headEnd type="none" w="med" len="med"/>
+                      <a:tailEnd type="none" w="med" len="med"/>
+                    </a:lnR>
+                    <a:lnT w="12700" cap="flat" cmpd="sng" algn="ctr">
+                      <a:solidFill>
+                        <a:srgbClr val="E5E4E1"/>
+                      </a:solidFill>
+                      <a:prstDash val="solid"/>
+                      <a:round/>
+                      <a:headEnd type="none" w="med" len="med"/>
+                      <a:tailEnd type="none" w="med" len="med"/>
+                    </a:lnT>
+                    <a:lnB w="12700" cap="flat" cmpd="sng" algn="ctr">
+                      <a:solidFill>
+                        <a:srgbClr val="E5E4E1"/>
+                      </a:solidFill>
+                      <a:prstDash val="solid"/>
+                      <a:round/>
+                      <a:headEnd type="none" w="med" len="med"/>
+                      <a:tailEnd type="none" w="med" len="med"/>
+                    </a:lnB>
+                  </a:tcPr>
+                </a:tc>
+                <a:tc>
+                  <a:txBody>
+                    <a:bodyPr/>
+                    <a:lstStyle/>
+                    <a:p>
+                      <a:pPr indent="0" marL="0">
+                        <a:buNone/>
+                      </a:pPr>
+                      <a:r>
+                        <a:rPr lang="en-US" sz="1050" dirty="0">
+                          <a:solidFill>
+                            <a:srgbClr val="6C6C6C"/>
+                          </a:solidFill>
+                          <a:latin typeface="맑은 고딕" pitchFamily="34" charset="0"/>
+                          <a:ea typeface="맑은 고딕" pitchFamily="34" charset="-122"/>
+                          <a:cs typeface="맑은 고딕" pitchFamily="34" charset="-120"/>
+                        </a:rPr>
+                        <a:t>조기상환 배리어</a:t>
+                      </a:r>
+                      <a:endParaRPr lang="en-US" sz="1050" dirty="0">
+                        <a:latin typeface="맑은 고딕" charset="0"/>
+                        <a:ea typeface="맑은 고딕" charset="0"/>
+                        <a:cs typeface="맑은 고딕" charset="0"/>
+                      </a:endParaRPr>
+                    </a:p>
+                  </a:txBody>
+                  <a:tcPr marL="76200" marR="76200" marT="76200" marB="76200" anchor="ctr">
+                    <a:lnL w="12700" cap="flat" cmpd="sng" algn="ctr">
+                      <a:solidFill>
+                        <a:srgbClr val="E5E4E1"/>
+                      </a:solidFill>
+                      <a:prstDash val="solid"/>
+                      <a:round/>
+                      <a:headEnd type="none" w="med" len="med"/>
+                      <a:tailEnd type="none" w="med" len="med"/>
+                    </a:lnL>
+                    <a:lnR w="12700" cap="flat" cmpd="sng" algn="ctr">
+                      <a:solidFill>
+                        <a:srgbClr val="E5E4E1"/>
+                      </a:solidFill>
+                      <a:prstDash val="solid"/>
+                      <a:round/>
+                      <a:headEnd type="none" w="med" len="med"/>
+                      <a:tailEnd type="none" w="med" len="med"/>
+                    </a:lnR>
+                    <a:lnT w="12700" cap="flat" cmpd="sng" algn="ctr">
+                      <a:solidFill>
+                        <a:srgbClr val="E5E4E1"/>
+                      </a:solidFill>
+                      <a:prstDash val="solid"/>
+                      <a:round/>
+                      <a:headEnd type="none" w="med" len="med"/>
+                      <a:tailEnd type="none" w="med" len="med"/>
+                    </a:lnT>
+                    <a:lnB w="12700" cap="flat" cmpd="sng" algn="ctr">
+                      <a:solidFill>
+                        <a:srgbClr val="E5E4E1"/>
+                      </a:solidFill>
+                      <a:prstDash val="solid"/>
+                      <a:round/>
+                      <a:headEnd type="none" w="med" len="med"/>
+                      <a:tailEnd type="none" w="med" len="med"/>
+                    </a:lnB>
+                  </a:tcPr>
+                </a:tc>
+                <a:tc>
+                  <a:txBody>
+                    <a:bodyPr/>
+                    <a:lstStyle/>
+                    <a:p>
+                      <a:pPr indent="0" marL="0">
+                        <a:buNone/>
+                      </a:pPr>
+                      <a:r>
+                        <a:rPr lang="en-US" sz="1050" dirty="0">
+                          <a:solidFill>
+                            <a:srgbClr val="3D3D3D"/>
+                          </a:solidFill>
+                          <a:latin typeface="맑은 고딕" pitchFamily="34" charset="0"/>
+                          <a:ea typeface="맑은 고딕" pitchFamily="34" charset="-122"/>
+                          <a:cs typeface="맑은 고딕" pitchFamily="34" charset="-120"/>
+                        </a:rPr>
+                        <a:t>이 위에 있으면 이자까지 얹어 그 자리에서 끝남</a:t>
+                      </a:r>
+                      <a:endParaRPr lang="en-US" sz="1050" dirty="0">
+                        <a:latin typeface="맑은 고딕" charset="0"/>
+                        <a:ea typeface="맑은 고딕" charset="0"/>
+                        <a:cs typeface="맑은 고딕" charset="0"/>
+                      </a:endParaRPr>
+                    </a:p>
+                  </a:txBody>
+                  <a:tcPr marL="76200" marR="76200" marT="76200" marB="76200" anchor="ctr">
+                    <a:lnL w="12700" cap="flat" cmpd="sng" algn="ctr">
+                      <a:solidFill>
+                        <a:srgbClr val="E5E4E1"/>
+                      </a:solidFill>
+                      <a:prstDash val="solid"/>
+                      <a:round/>
+                      <a:headEnd type="none" w="med" len="med"/>
+                      <a:tailEnd type="none" w="med" len="med"/>
+                    </a:lnL>
+                    <a:lnR w="12700" cap="flat" cmpd="sng" algn="ctr">
+                      <a:solidFill>
+                        <a:srgbClr val="E5E4E1"/>
+                      </a:solidFill>
+                      <a:prstDash val="solid"/>
+                      <a:round/>
+                      <a:headEnd type="none" w="med" len="med"/>
+                      <a:tailEnd type="none" w="med" len="med"/>
+                    </a:lnR>
+                    <a:lnT w="12700" cap="flat" cmpd="sng" algn="ctr">
+                      <a:solidFill>
+                        <a:srgbClr val="E5E4E1"/>
+                      </a:solidFill>
+                      <a:prstDash val="solid"/>
+                      <a:round/>
+                      <a:headEnd type="none" w="med" len="med"/>
+                      <a:tailEnd type="none" w="med" len="med"/>
+                    </a:lnT>
+                    <a:lnB w="12700" cap="flat" cmpd="sng" algn="ctr">
+                      <a:solidFill>
+                        <a:srgbClr val="E5E4E1"/>
+                      </a:solidFill>
+                      <a:prstDash val="solid"/>
+                      <a:round/>
+                      <a:headEnd type="none" w="med" len="med"/>
+                      <a:tailEnd type="none" w="med" len="med"/>
+                    </a:lnB>
+                  </a:tcPr>
+                </a:tc>
+              </a:tr>
+              <a:tr h="457200">
+                <a:tc>
+                  <a:txBody>
+                    <a:bodyPr/>
+                    <a:lstStyle/>
+                    <a:p>
+                      <a:pPr indent="0" marL="0">
+                        <a:buNone/>
+                      </a:pPr>
+                      <a:r>
+                        <a:rPr lang="en-US" sz="1050" b="1" dirty="0">
+                          <a:solidFill>
+                            <a:srgbClr val="1A1A1A"/>
+                          </a:solidFill>
+                          <a:latin typeface="맑은 고딕" pitchFamily="34" charset="0"/>
+                          <a:ea typeface="맑은 고딕" pitchFamily="34" charset="-122"/>
+                          <a:cs typeface="맑은 고딕" pitchFamily="34" charset="-120"/>
+                        </a:rPr>
+                        <a:t>뒤로 갈수록 기준이 낮아짐</a:t>
+                      </a:r>
+                      <a:endParaRPr lang="en-US" sz="1050" dirty="0">
+                        <a:latin typeface="맑은 고딕" charset="0"/>
+                        <a:ea typeface="맑은 고딕" charset="0"/>
+                        <a:cs typeface="맑은 고딕" charset="0"/>
+                      </a:endParaRPr>
+                    </a:p>
+                  </a:txBody>
+                  <a:tcPr marL="76200" marR="76200" marT="76200" marB="76200" anchor="ctr">
+                    <a:lnL w="12700" cap="flat" cmpd="sng" algn="ctr">
+                      <a:solidFill>
+                        <a:srgbClr val="E5E4E1"/>
+                      </a:solidFill>
+                      <a:prstDash val="solid"/>
+                      <a:round/>
+                      <a:headEnd type="none" w="med" len="med"/>
+                      <a:tailEnd type="none" w="med" len="med"/>
+                    </a:lnL>
+                    <a:lnR w="12700" cap="flat" cmpd="sng" algn="ctr">
+                      <a:solidFill>
+                        <a:srgbClr val="E5E4E1"/>
+                      </a:solidFill>
+                      <a:prstDash val="solid"/>
+                      <a:round/>
+                      <a:headEnd type="none" w="med" len="med"/>
+                      <a:tailEnd type="none" w="med" len="med"/>
+                    </a:lnR>
+                    <a:lnT w="12700" cap="flat" cmpd="sng" algn="ctr">
+                      <a:solidFill>
+                        <a:srgbClr val="E5E4E1"/>
+                      </a:solidFill>
+                      <a:prstDash val="solid"/>
+                      <a:round/>
+                      <a:headEnd type="none" w="med" len="med"/>
+                      <a:tailEnd type="none" w="med" len="med"/>
+                    </a:lnT>
+                    <a:lnB w="12700" cap="flat" cmpd="sng" algn="ctr">
+                      <a:solidFill>
+                        <a:srgbClr val="E5E4E1"/>
+                      </a:solidFill>
+                      <a:prstDash val="solid"/>
+                      <a:round/>
+                      <a:headEnd type="none" w="med" len="med"/>
+                      <a:tailEnd type="none" w="med" len="med"/>
+                    </a:lnB>
+                  </a:tcPr>
+                </a:tc>
+                <a:tc>
+                  <a:txBody>
+                    <a:bodyPr/>
+                    <a:lstStyle/>
+                    <a:p>
+                      <a:pPr indent="0" marL="0">
+                        <a:buNone/>
+                      </a:pPr>
+                      <a:r>
+                        <a:rPr lang="en-US" sz="1050" dirty="0">
+                          <a:solidFill>
+                            <a:srgbClr val="6C6C6C"/>
+                          </a:solidFill>
+                          <a:latin typeface="맑은 고딕" pitchFamily="34" charset="0"/>
+                          <a:ea typeface="맑은 고딕" pitchFamily="34" charset="-122"/>
+                          <a:cs typeface="맑은 고딕" pitchFamily="34" charset="-120"/>
+                        </a:rPr>
+                        <a:t>스텝다운</a:t>
+                      </a:r>
+                      <a:endParaRPr lang="en-US" sz="1050" dirty="0">
+                        <a:latin typeface="맑은 고딕" charset="0"/>
+                        <a:ea typeface="맑은 고딕" charset="0"/>
+                        <a:cs typeface="맑은 고딕" charset="0"/>
+                      </a:endParaRPr>
+                    </a:p>
+                  </a:txBody>
+                  <a:tcPr marL="76200" marR="76200" marT="76200" marB="76200" anchor="ctr">
+                    <a:lnL w="12700" cap="flat" cmpd="sng" algn="ctr">
+                      <a:solidFill>
+                        <a:srgbClr val="E5E4E1"/>
+                      </a:solidFill>
+                      <a:prstDash val="solid"/>
+                      <a:round/>
+                      <a:headEnd type="none" w="med" len="med"/>
+                      <a:tailEnd type="none" w="med" len="med"/>
+                    </a:lnL>
+                    <a:lnR w="12700" cap="flat" cmpd="sng" algn="ctr">
+                      <a:solidFill>
+                        <a:srgbClr val="E5E4E1"/>
+                      </a:solidFill>
+                      <a:prstDash val="solid"/>
+                      <a:round/>
+                      <a:headEnd type="none" w="med" len="med"/>
+                      <a:tailEnd type="none" w="med" len="med"/>
+                    </a:lnR>
+                    <a:lnT w="12700" cap="flat" cmpd="sng" algn="ctr">
+                      <a:solidFill>
+                        <a:srgbClr val="E5E4E1"/>
+                      </a:solidFill>
+                      <a:prstDash val="solid"/>
+                      <a:round/>
+                      <a:headEnd type="none" w="med" len="med"/>
+                      <a:tailEnd type="none" w="med" len="med"/>
+                    </a:lnT>
+                    <a:lnB w="12700" cap="flat" cmpd="sng" algn="ctr">
+                      <a:solidFill>
+                        <a:srgbClr val="E5E4E1"/>
+                      </a:solidFill>
+                      <a:prstDash val="solid"/>
+                      <a:round/>
+                      <a:headEnd type="none" w="med" len="med"/>
+                      <a:tailEnd type="none" w="med" len="med"/>
+                    </a:lnB>
+                  </a:tcPr>
+                </a:tc>
+                <a:tc>
+                  <a:txBody>
+                    <a:bodyPr/>
+                    <a:lstStyle/>
+                    <a:p>
+                      <a:pPr indent="0" marL="0">
+                        <a:buNone/>
+                      </a:pPr>
+                      <a:r>
+                        <a:rPr lang="en-US" sz="1050" dirty="0">
+                          <a:solidFill>
+                            <a:srgbClr val="3D3D3D"/>
+                          </a:solidFill>
+                          <a:latin typeface="맑은 고딕" pitchFamily="34" charset="0"/>
+                          <a:ea typeface="맑은 고딕" pitchFamily="34" charset="-122"/>
+                          <a:cs typeface="맑은 고딕" pitchFamily="34" charset="-120"/>
+                        </a:rPr>
+                        <a:t>시간이 갈수록 끝나기 쉬워지는 구조</a:t>
+                      </a:r>
+                      <a:endParaRPr lang="en-US" sz="1050" dirty="0">
+                        <a:latin typeface="맑은 고딕" charset="0"/>
+                        <a:ea typeface="맑은 고딕" charset="0"/>
+                        <a:cs typeface="맑은 고딕" charset="0"/>
+                      </a:endParaRPr>
+                    </a:p>
+                  </a:txBody>
+                  <a:tcPr marL="76200" marR="76200" marT="76200" marB="76200" anchor="ctr">
+                    <a:lnL w="12700" cap="flat" cmpd="sng" algn="ctr">
+                      <a:solidFill>
+                        <a:srgbClr val="E5E4E1"/>
+                      </a:solidFill>
+                      <a:prstDash val="solid"/>
+                      <a:round/>
+                      <a:headEnd type="none" w="med" len="med"/>
+                      <a:tailEnd type="none" w="med" len="med"/>
+                    </a:lnL>
+                    <a:lnR w="12700" cap="flat" cmpd="sng" algn="ctr">
+                      <a:solidFill>
+                        <a:srgbClr val="E5E4E1"/>
+                      </a:solidFill>
+                      <a:prstDash val="solid"/>
+                      <a:round/>
+                      <a:headEnd type="none" w="med" len="med"/>
+                      <a:tailEnd type="none" w="med" len="med"/>
+                    </a:lnR>
+                    <a:lnT w="12700" cap="flat" cmpd="sng" algn="ctr">
+                      <a:solidFill>
+                        <a:srgbClr val="E5E4E1"/>
+                      </a:solidFill>
+                      <a:prstDash val="solid"/>
+                      <a:round/>
+                      <a:headEnd type="none" w="med" len="med"/>
+                      <a:tailEnd type="none" w="med" len="med"/>
+                    </a:lnT>
+                    <a:lnB w="12700" cap="flat" cmpd="sng" algn="ctr">
+                      <a:solidFill>
+                        <a:srgbClr val="E5E4E1"/>
+                      </a:solidFill>
+                      <a:prstDash val="solid"/>
+                      <a:round/>
+                      <a:headEnd type="none" w="med" len="med"/>
+                      <a:tailEnd type="none" w="med" len="med"/>
+                    </a:lnB>
+                  </a:tcPr>
+                </a:tc>
+              </a:tr>
+              <a:tr h="457200">
+                <a:tc>
+                  <a:txBody>
+                    <a:bodyPr/>
+                    <a:lstStyle/>
+                    <a:p>
+                      <a:pPr indent="0" marL="0">
+                        <a:buNone/>
+                      </a:pPr>
+                      <a:r>
+                        <a:rPr lang="en-US" sz="1050" b="1" dirty="0">
+                          <a:solidFill>
+                            <a:srgbClr val="1A1A1A"/>
+                          </a:solidFill>
+                          <a:latin typeface="맑은 고딕" pitchFamily="34" charset="0"/>
+                          <a:ea typeface="맑은 고딕" pitchFamily="34" charset="-122"/>
+                          <a:cs typeface="맑은 고딕" pitchFamily="34" charset="-120"/>
+                        </a:rPr>
+                        <a:t>원금 지키는 선</a:t>
+                      </a:r>
+                      <a:endParaRPr lang="en-US" sz="1050" dirty="0">
+                        <a:latin typeface="맑은 고딕" charset="0"/>
+                        <a:ea typeface="맑은 고딕" charset="0"/>
+                        <a:cs typeface="맑은 고딕" charset="0"/>
+                      </a:endParaRPr>
+                    </a:p>
+                  </a:txBody>
+                  <a:tcPr marL="76200" marR="76200" marT="76200" marB="76200" anchor="ctr">
+                    <a:lnL w="12700" cap="flat" cmpd="sng" algn="ctr">
+                      <a:solidFill>
+                        <a:srgbClr val="E5E4E1"/>
+                      </a:solidFill>
+                      <a:prstDash val="solid"/>
+                      <a:round/>
+                      <a:headEnd type="none" w="med" len="med"/>
+                      <a:tailEnd type="none" w="med" len="med"/>
+                    </a:lnL>
+                    <a:lnR w="12700" cap="flat" cmpd="sng" algn="ctr">
+                      <a:solidFill>
+                        <a:srgbClr val="E5E4E1"/>
+                      </a:solidFill>
+                      <a:prstDash val="solid"/>
+                      <a:round/>
+                      <a:headEnd type="none" w="med" len="med"/>
+                      <a:tailEnd type="none" w="med" len="med"/>
+                    </a:lnR>
+                    <a:lnT w="12700" cap="flat" cmpd="sng" algn="ctr">
+                      <a:solidFill>
+                        <a:srgbClr val="E5E4E1"/>
+                      </a:solidFill>
+                      <a:prstDash val="solid"/>
+                      <a:round/>
+                      <a:headEnd type="none" w="med" len="med"/>
+                      <a:tailEnd type="none" w="med" len="med"/>
+                    </a:lnT>
+                    <a:lnB w="12700" cap="flat" cmpd="sng" algn="ctr">
+                      <a:solidFill>
+                        <a:srgbClr val="E5E4E1"/>
+                      </a:solidFill>
+                      <a:prstDash val="solid"/>
+                      <a:round/>
+                      <a:headEnd type="none" w="med" len="med"/>
+                      <a:tailEnd type="none" w="med" len="med"/>
+                    </a:lnB>
+                  </a:tcPr>
+                </a:tc>
+                <a:tc>
+                  <a:txBody>
+                    <a:bodyPr/>
+                    <a:lstStyle/>
+                    <a:p>
+                      <a:pPr indent="0" marL="0">
+                        <a:buNone/>
+                      </a:pPr>
+                      <a:r>
+                        <a:rPr lang="en-US" sz="1050" dirty="0">
+                          <a:solidFill>
+                            <a:srgbClr val="6C6C6C"/>
+                          </a:solidFill>
+                          <a:latin typeface="맑은 고딕" pitchFamily="34" charset="0"/>
+                          <a:ea typeface="맑은 고딕" pitchFamily="34" charset="-122"/>
+                          <a:cs typeface="맑은 고딕" pitchFamily="34" charset="-120"/>
+                        </a:rPr>
+                        <a:t>낙인(KI) 배리어</a:t>
+                      </a:r>
+                      <a:endParaRPr lang="en-US" sz="1050" dirty="0">
+                        <a:latin typeface="맑은 고딕" charset="0"/>
+                        <a:ea typeface="맑은 고딕" charset="0"/>
+                        <a:cs typeface="맑은 고딕" charset="0"/>
+                      </a:endParaRPr>
+                    </a:p>
+                  </a:txBody>
+                  <a:tcPr marL="76200" marR="76200" marT="76200" marB="76200" anchor="ctr">
+                    <a:lnL w="12700" cap="flat" cmpd="sng" algn="ctr">
+                      <a:solidFill>
+                        <a:srgbClr val="E5E4E1"/>
+                      </a:solidFill>
+                      <a:prstDash val="solid"/>
+                      <a:round/>
+                      <a:headEnd type="none" w="med" len="med"/>
+                      <a:tailEnd type="none" w="med" len="med"/>
+                    </a:lnL>
+                    <a:lnR w="12700" cap="flat" cmpd="sng" algn="ctr">
+                      <a:solidFill>
+                        <a:srgbClr val="E5E4E1"/>
+                      </a:solidFill>
+                      <a:prstDash val="solid"/>
+                      <a:round/>
+                      <a:headEnd type="none" w="med" len="med"/>
+                      <a:tailEnd type="none" w="med" len="med"/>
+                    </a:lnR>
+                    <a:lnT w="12700" cap="flat" cmpd="sng" algn="ctr">
+                      <a:solidFill>
+                        <a:srgbClr val="E5E4E1"/>
+                      </a:solidFill>
+                      <a:prstDash val="solid"/>
+                      <a:round/>
+                      <a:headEnd type="none" w="med" len="med"/>
+                      <a:tailEnd type="none" w="med" len="med"/>
+                    </a:lnT>
+                    <a:lnB w="12700" cap="flat" cmpd="sng" algn="ctr">
+                      <a:solidFill>
+                        <a:srgbClr val="E5E4E1"/>
+                      </a:solidFill>
+                      <a:prstDash val="solid"/>
+                      <a:round/>
+                      <a:headEnd type="none" w="med" len="med"/>
+                      <a:tailEnd type="none" w="med" len="med"/>
+                    </a:lnB>
+                  </a:tcPr>
+                </a:tc>
+                <a:tc>
+                  <a:txBody>
+                    <a:bodyPr/>
+                    <a:lstStyle/>
+                    <a:p>
+                      <a:pPr indent="0" marL="0">
+                        <a:buNone/>
+                      </a:pPr>
+                      <a:r>
+                        <a:rPr lang="en-US" sz="1050" dirty="0">
+                          <a:solidFill>
+                            <a:srgbClr val="3D3D3D"/>
+                          </a:solidFill>
+                          <a:latin typeface="맑은 고딕" pitchFamily="34" charset="0"/>
+                          <a:ea typeface="맑은 고딕" pitchFamily="34" charset="-122"/>
+                          <a:cs typeface="맑은 고딕" pitchFamily="34" charset="-120"/>
+                        </a:rPr>
+                        <a:t>한 번도 이 밑으로 안 가면 원금·이자를 다 받음</a:t>
+                      </a:r>
+                      <a:endParaRPr lang="en-US" sz="1050" dirty="0">
+                        <a:latin typeface="맑은 고딕" charset="0"/>
+                        <a:ea typeface="맑은 고딕" charset="0"/>
+                        <a:cs typeface="맑은 고딕" charset="0"/>
+                      </a:endParaRPr>
+                    </a:p>
+                  </a:txBody>
+                  <a:tcPr marL="76200" marR="76200" marT="76200" marB="76200" anchor="ctr">
+                    <a:lnL w="12700" cap="flat" cmpd="sng" algn="ctr">
+                      <a:solidFill>
+                        <a:srgbClr val="E5E4E1"/>
+                      </a:solidFill>
+                      <a:prstDash val="solid"/>
+                      <a:round/>
+                      <a:headEnd type="none" w="med" len="med"/>
+                      <a:tailEnd type="none" w="med" len="med"/>
+                    </a:lnL>
+                    <a:lnR w="12700" cap="flat" cmpd="sng" algn="ctr">
+                      <a:solidFill>
+                        <a:srgbClr val="E5E4E1"/>
+                      </a:solidFill>
+                      <a:prstDash val="solid"/>
+                      <a:round/>
+                      <a:headEnd type="none" w="med" len="med"/>
+                      <a:tailEnd type="none" w="med" len="med"/>
+                    </a:lnR>
+                    <a:lnT w="12700" cap="flat" cmpd="sng" algn="ctr">
+                      <a:solidFill>
+                        <a:srgbClr val="E5E4E1"/>
+                      </a:solidFill>
+                      <a:prstDash val="solid"/>
+                      <a:round/>
+                      <a:headEnd type="none" w="med" len="med"/>
+                      <a:tailEnd type="none" w="med" len="med"/>
+                    </a:lnT>
+                    <a:lnB w="12700" cap="flat" cmpd="sng" algn="ctr">
+                      <a:solidFill>
+                        <a:srgbClr val="E5E4E1"/>
+                      </a:solidFill>
+                      <a:prstDash val="solid"/>
+                      <a:round/>
+                      <a:headEnd type="none" w="med" len="med"/>
+                      <a:tailEnd type="none" w="med" len="med"/>
+                    </a:lnB>
+                  </a:tcPr>
+                </a:tc>
+              </a:tr>
+              <a:tr h="457200">
+                <a:tc>
+                  <a:txBody>
+                    <a:bodyPr/>
+                    <a:lstStyle/>
+                    <a:p>
+                      <a:pPr indent="0" marL="0">
+                        <a:buNone/>
+                      </a:pPr>
+                      <a:r>
+                        <a:rPr lang="en-US" sz="1050" b="1" dirty="0">
+                          <a:solidFill>
+                            <a:srgbClr val="1A1A1A"/>
+                          </a:solidFill>
+                          <a:latin typeface="맑은 고딕" pitchFamily="34" charset="0"/>
+                          <a:ea typeface="맑은 고딕" pitchFamily="34" charset="-122"/>
+                          <a:cs typeface="맑은 고딕" pitchFamily="34" charset="-120"/>
+                        </a:rPr>
+                        <a:t>더 떨어진 하나로 판정</a:t>
+                      </a:r>
+                      <a:endParaRPr lang="en-US" sz="1050" dirty="0">
+                        <a:latin typeface="맑은 고딕" charset="0"/>
+                        <a:ea typeface="맑은 고딕" charset="0"/>
+                        <a:cs typeface="맑은 고딕" charset="0"/>
+                      </a:endParaRPr>
+                    </a:p>
+                  </a:txBody>
+                  <a:tcPr marL="76200" marR="76200" marT="76200" marB="76200" anchor="ctr">
+                    <a:lnL w="12700" cap="flat" cmpd="sng" algn="ctr">
+                      <a:solidFill>
+                        <a:srgbClr val="E5E4E1"/>
+                      </a:solidFill>
+                      <a:prstDash val="solid"/>
+                      <a:round/>
+                      <a:headEnd type="none" w="med" len="med"/>
+                      <a:tailEnd type="none" w="med" len="med"/>
+                    </a:lnL>
+                    <a:lnR w="12700" cap="flat" cmpd="sng" algn="ctr">
+                      <a:solidFill>
+                        <a:srgbClr val="E5E4E1"/>
+                      </a:solidFill>
+                      <a:prstDash val="solid"/>
+                      <a:round/>
+                      <a:headEnd type="none" w="med" len="med"/>
+                      <a:tailEnd type="none" w="med" len="med"/>
+                    </a:lnR>
+                    <a:lnT w="12700" cap="flat" cmpd="sng" algn="ctr">
+                      <a:solidFill>
+                        <a:srgbClr val="E5E4E1"/>
+                      </a:solidFill>
+                      <a:prstDash val="solid"/>
+                      <a:round/>
+                      <a:headEnd type="none" w="med" len="med"/>
+                      <a:tailEnd type="none" w="med" len="med"/>
+                    </a:lnT>
+                    <a:lnB w="12700" cap="flat" cmpd="sng" algn="ctr">
+                      <a:solidFill>
+                        <a:srgbClr val="E5E4E1"/>
+                      </a:solidFill>
+                      <a:prstDash val="solid"/>
+                      <a:round/>
+                      <a:headEnd type="none" w="med" len="med"/>
+                      <a:tailEnd type="none" w="med" len="med"/>
+                    </a:lnB>
+                  </a:tcPr>
+                </a:tc>
+                <a:tc>
+                  <a:txBody>
+                    <a:bodyPr/>
+                    <a:lstStyle/>
+                    <a:p>
+                      <a:pPr indent="0" marL="0">
+                        <a:buNone/>
+                      </a:pPr>
+                      <a:r>
+                        <a:rPr lang="en-US" sz="1050" dirty="0">
+                          <a:solidFill>
+                            <a:srgbClr val="6C6C6C"/>
+                          </a:solidFill>
+                          <a:latin typeface="맑은 고딕" pitchFamily="34" charset="0"/>
+                          <a:ea typeface="맑은 고딕" pitchFamily="34" charset="-122"/>
+                          <a:cs typeface="맑은 고딕" pitchFamily="34" charset="-120"/>
+                        </a:rPr>
+                        <a:t>워스트 퍼포머</a:t>
+                      </a:r>
+                      <a:endParaRPr lang="en-US" sz="1050" dirty="0">
+                        <a:latin typeface="맑은 고딕" charset="0"/>
+                        <a:ea typeface="맑은 고딕" charset="0"/>
+                        <a:cs typeface="맑은 고딕" charset="0"/>
+                      </a:endParaRPr>
+                    </a:p>
+                  </a:txBody>
+                  <a:tcPr marL="76200" marR="76200" marT="76200" marB="76200" anchor="ctr">
+                    <a:lnL w="12700" cap="flat" cmpd="sng" algn="ctr">
+                      <a:solidFill>
+                        <a:srgbClr val="E5E4E1"/>
+                      </a:solidFill>
+                      <a:prstDash val="solid"/>
+                      <a:round/>
+                      <a:headEnd type="none" w="med" len="med"/>
+                      <a:tailEnd type="none" w="med" len="med"/>
+                    </a:lnL>
+                    <a:lnR w="12700" cap="flat" cmpd="sng" algn="ctr">
+                      <a:solidFill>
+                        <a:srgbClr val="E5E4E1"/>
+                      </a:solidFill>
+                      <a:prstDash val="solid"/>
+                      <a:round/>
+                      <a:headEnd type="none" w="med" len="med"/>
+                      <a:tailEnd type="none" w="med" len="med"/>
+                    </a:lnR>
+                    <a:lnT w="12700" cap="flat" cmpd="sng" algn="ctr">
+                      <a:solidFill>
+                        <a:srgbClr val="E5E4E1"/>
+                      </a:solidFill>
+                      <a:prstDash val="solid"/>
+                      <a:round/>
+                      <a:headEnd type="none" w="med" len="med"/>
+                      <a:tailEnd type="none" w="med" len="med"/>
+                    </a:lnT>
+                    <a:lnB w="12700" cap="flat" cmpd="sng" algn="ctr">
+                      <a:solidFill>
+                        <a:srgbClr val="E5E4E1"/>
+                      </a:solidFill>
+                      <a:prstDash val="solid"/>
+                      <a:round/>
+                      <a:headEnd type="none" w="med" len="med"/>
+                      <a:tailEnd type="none" w="med" len="med"/>
+                    </a:lnB>
+                  </a:tcPr>
+                </a:tc>
+                <a:tc>
+                  <a:txBody>
+                    <a:bodyPr/>
+                    <a:lstStyle/>
+                    <a:p>
+                      <a:pPr indent="0" marL="0">
+                        <a:buNone/>
+                      </a:pPr>
+                      <a:r>
+                        <a:rPr lang="en-US" sz="1050" dirty="0">
+                          <a:solidFill>
+                            <a:srgbClr val="3D3D3D"/>
+                          </a:solidFill>
+                          <a:latin typeface="맑은 고딕" pitchFamily="34" charset="0"/>
+                          <a:ea typeface="맑은 고딕" pitchFamily="34" charset="-122"/>
+                          <a:cs typeface="맑은 고딕" pitchFamily="34" charset="-120"/>
+                        </a:rPr>
+                        <a:t>잘 오른 쪽은 안 보고 제일 못한 하나만 봄</a:t>
+                      </a:r>
+                      <a:endParaRPr lang="en-US" sz="1050" dirty="0">
+                        <a:latin typeface="맑은 고딕" charset="0"/>
+                        <a:ea typeface="맑은 고딕" charset="0"/>
+                        <a:cs typeface="맑은 고딕" charset="0"/>
+                      </a:endParaRPr>
+                    </a:p>
+                  </a:txBody>
+                  <a:tcPr marL="76200" marR="76200" marT="76200" marB="76200" anchor="ctr">
+                    <a:lnL w="12700" cap="flat" cmpd="sng" algn="ctr">
+                      <a:solidFill>
+                        <a:srgbClr val="E5E4E1"/>
+                      </a:solidFill>
+                      <a:prstDash val="solid"/>
+                      <a:round/>
+                      <a:headEnd type="none" w="med" len="med"/>
+                      <a:tailEnd type="none" w="med" len="med"/>
+                    </a:lnL>
+                    <a:lnR w="12700" cap="flat" cmpd="sng" algn="ctr">
+                      <a:solidFill>
+                        <a:srgbClr val="E5E4E1"/>
+                      </a:solidFill>
+                      <a:prstDash val="solid"/>
+                      <a:round/>
+                      <a:headEnd type="none" w="med" len="med"/>
+                      <a:tailEnd type="none" w="med" len="med"/>
+                    </a:lnR>
+                    <a:lnT w="12700" cap="flat" cmpd="sng" algn="ctr">
+                      <a:solidFill>
+                        <a:srgbClr val="E5E4E1"/>
+                      </a:solidFill>
+                      <a:prstDash val="solid"/>
+                      <a:round/>
+                      <a:headEnd type="none" w="med" len="med"/>
+                      <a:tailEnd type="none" w="med" len="med"/>
+                    </a:lnT>
+                    <a:lnB w="12700" cap="flat" cmpd="sng" algn="ctr">
+                      <a:solidFill>
+                        <a:srgbClr val="E5E4E1"/>
+                      </a:solidFill>
+                      <a:prstDash val="solid"/>
+                      <a:round/>
+                      <a:headEnd type="none" w="med" len="med"/>
+                      <a:tailEnd type="none" w="med" len="med"/>
+                    </a:lnB>
+                  </a:tcPr>
+                </a:tc>
+              </a:tr>
+              <a:tr h="457200">
+                <a:tc>
+                  <a:txBody>
+                    <a:bodyPr/>
+                    <a:lstStyle/>
+                    <a:p>
+                      <a:pPr indent="0" marL="0">
+                        <a:buNone/>
+                      </a:pPr>
+                      <a:r>
+                        <a:rPr lang="en-US" sz="1050" b="1" dirty="0">
+                          <a:solidFill>
+                            <a:srgbClr val="1A1A1A"/>
+                          </a:solidFill>
+                          <a:latin typeface="맑은 고딕" pitchFamily="34" charset="0"/>
+                          <a:ea typeface="맑은 고딕" pitchFamily="34" charset="-122"/>
+                          <a:cs typeface="맑은 고딕" pitchFamily="34" charset="-120"/>
+                        </a:rPr>
+                        <a:t>가격 출렁임</a:t>
+                      </a:r>
+                      <a:endParaRPr lang="en-US" sz="1050" dirty="0">
+                        <a:latin typeface="맑은 고딕" charset="0"/>
+                        <a:ea typeface="맑은 고딕" charset="0"/>
+                        <a:cs typeface="맑은 고딕" charset="0"/>
+                      </a:endParaRPr>
+                    </a:p>
+                  </a:txBody>
+                  <a:tcPr marL="76200" marR="76200" marT="76200" marB="76200" anchor="ctr">
+                    <a:lnL w="12700" cap="flat" cmpd="sng" algn="ctr">
+                      <a:solidFill>
+                        <a:srgbClr val="E5E4E1"/>
+                      </a:solidFill>
+                      <a:prstDash val="solid"/>
+                      <a:round/>
+                      <a:headEnd type="none" w="med" len="med"/>
+                      <a:tailEnd type="none" w="med" len="med"/>
+                    </a:lnL>
+                    <a:lnR w="12700" cap="flat" cmpd="sng" algn="ctr">
+                      <a:solidFill>
+                        <a:srgbClr val="E5E4E1"/>
+                      </a:solidFill>
+                      <a:prstDash val="solid"/>
+                      <a:round/>
+                      <a:headEnd type="none" w="med" len="med"/>
+                      <a:tailEnd type="none" w="med" len="med"/>
+                    </a:lnR>
+                    <a:lnT w="12700" cap="flat" cmpd="sng" algn="ctr">
+                      <a:solidFill>
+                        <a:srgbClr val="E5E4E1"/>
+                      </a:solidFill>
+                      <a:prstDash val="solid"/>
+                      <a:round/>
+                      <a:headEnd type="none" w="med" len="med"/>
+                      <a:tailEnd type="none" w="med" len="med"/>
+                    </a:lnT>
+                    <a:lnB w="12700" cap="flat" cmpd="sng" algn="ctr">
+                      <a:solidFill>
+                        <a:srgbClr val="E5E4E1"/>
+                      </a:solidFill>
+                      <a:prstDash val="solid"/>
+                      <a:round/>
+                      <a:headEnd type="none" w="med" len="med"/>
+                      <a:tailEnd type="none" w="med" len="med"/>
+                    </a:lnB>
+                  </a:tcPr>
+                </a:tc>
+                <a:tc>
+                  <a:txBody>
+                    <a:bodyPr/>
+                    <a:lstStyle/>
+                    <a:p>
+                      <a:pPr indent="0" marL="0">
+                        <a:buNone/>
+                      </a:pPr>
+                      <a:r>
+                        <a:rPr lang="en-US" sz="1050" dirty="0">
+                          <a:solidFill>
+                            <a:srgbClr val="6C6C6C"/>
+                          </a:solidFill>
+                          <a:latin typeface="맑은 고딕" pitchFamily="34" charset="0"/>
+                          <a:ea typeface="맑은 고딕" pitchFamily="34" charset="-122"/>
+                          <a:cs typeface="맑은 고딕" pitchFamily="34" charset="-120"/>
+                        </a:rPr>
+                        <a:t>(내재)변동성</a:t>
+                      </a:r>
+                      <a:endParaRPr lang="en-US" sz="1050" dirty="0">
+                        <a:latin typeface="맑은 고딕" charset="0"/>
+                        <a:ea typeface="맑은 고딕" charset="0"/>
+                        <a:cs typeface="맑은 고딕" charset="0"/>
+                      </a:endParaRPr>
+                    </a:p>
+                  </a:txBody>
+                  <a:tcPr marL="76200" marR="76200" marT="76200" marB="76200" anchor="ctr">
+                    <a:lnL w="12700" cap="flat" cmpd="sng" algn="ctr">
+                      <a:solidFill>
+                        <a:srgbClr val="E5E4E1"/>
+                      </a:solidFill>
+                      <a:prstDash val="solid"/>
+                      <a:round/>
+                      <a:headEnd type="none" w="med" len="med"/>
+                      <a:tailEnd type="none" w="med" len="med"/>
+                    </a:lnL>
+                    <a:lnR w="12700" cap="flat" cmpd="sng" algn="ctr">
+                      <a:solidFill>
+                        <a:srgbClr val="E5E4E1"/>
+                      </a:solidFill>
+                      <a:prstDash val="solid"/>
+                      <a:round/>
+                      <a:headEnd type="none" w="med" len="med"/>
+                      <a:tailEnd type="none" w="med" len="med"/>
+                    </a:lnR>
+                    <a:lnT w="12700" cap="flat" cmpd="sng" algn="ctr">
+                      <a:solidFill>
+                        <a:srgbClr val="E5E4E1"/>
+                      </a:solidFill>
+                      <a:prstDash val="solid"/>
+                      <a:round/>
+                      <a:headEnd type="none" w="med" len="med"/>
+                      <a:tailEnd type="none" w="med" len="med"/>
+                    </a:lnT>
+                    <a:lnB w="12700" cap="flat" cmpd="sng" algn="ctr">
+                      <a:solidFill>
+                        <a:srgbClr val="E5E4E1"/>
+                      </a:solidFill>
+                      <a:prstDash val="solid"/>
+                      <a:round/>
+                      <a:headEnd type="none" w="med" len="med"/>
+                      <a:tailEnd type="none" w="med" len="med"/>
+                    </a:lnB>
+                  </a:tcPr>
+                </a:tc>
+                <a:tc>
+                  <a:txBody>
+                    <a:bodyPr/>
+                    <a:lstStyle/>
+                    <a:p>
+                      <a:pPr indent="0" marL="0">
+                        <a:buNone/>
+                      </a:pPr>
+                      <a:r>
+                        <a:rPr lang="en-US" sz="1050" dirty="0">
+                          <a:solidFill>
+                            <a:srgbClr val="3D3D3D"/>
+                          </a:solidFill>
+                          <a:latin typeface="맑은 고딕" pitchFamily="34" charset="0"/>
+                          <a:ea typeface="맑은 고딕" pitchFamily="34" charset="-122"/>
+                          <a:cs typeface="맑은 고딕" pitchFamily="34" charset="-120"/>
+                        </a:rPr>
+                        <a:t>앞으로 1년간 얼마나 흔들릴지 시장이 보는 정도</a:t>
+                      </a:r>
+                      <a:endParaRPr lang="en-US" sz="1050" dirty="0">
+                        <a:latin typeface="맑은 고딕" charset="0"/>
+                        <a:ea typeface="맑은 고딕" charset="0"/>
+                        <a:cs typeface="맑은 고딕" charset="0"/>
+                      </a:endParaRPr>
+                    </a:p>
+                  </a:txBody>
+                  <a:tcPr marL="76200" marR="76200" marT="76200" marB="76200" anchor="ctr">
+                    <a:lnL w="12700" cap="flat" cmpd="sng" algn="ctr">
+                      <a:solidFill>
+                        <a:srgbClr val="E5E4E1"/>
+                      </a:solidFill>
+                      <a:prstDash val="solid"/>
+                      <a:round/>
+                      <a:headEnd type="none" w="med" len="med"/>
+                      <a:tailEnd type="none" w="med" len="med"/>
+                    </a:lnL>
+                    <a:lnR w="12700" cap="flat" cmpd="sng" algn="ctr">
+                      <a:solidFill>
+                        <a:srgbClr val="E5E4E1"/>
+                      </a:solidFill>
+                      <a:prstDash val="solid"/>
+                      <a:round/>
+                      <a:headEnd type="none" w="med" len="med"/>
+                      <a:tailEnd type="none" w="med" len="med"/>
+                    </a:lnR>
+                    <a:lnT w="12700" cap="flat" cmpd="sng" algn="ctr">
+                      <a:solidFill>
+                        <a:srgbClr val="E5E4E1"/>
+                      </a:solidFill>
+                      <a:prstDash val="solid"/>
+                      <a:round/>
+                      <a:headEnd type="none" w="med" len="med"/>
+                      <a:tailEnd type="none" w="med" len="med"/>
+                    </a:lnT>
+                    <a:lnB w="12700" cap="flat" cmpd="sng" algn="ctr">
+                      <a:solidFill>
+                        <a:srgbClr val="E5E4E1"/>
+                      </a:solidFill>
+                      <a:prstDash val="solid"/>
+                      <a:round/>
+                      <a:headEnd type="none" w="med" len="med"/>
+                      <a:tailEnd type="none" w="med" len="med"/>
+                    </a:lnB>
+                  </a:tcPr>
+                </a:tc>
+              </a:tr>
+            </a:tbl>
+          </a:graphicData>
+        </a:graphic>
+      </p:graphicFrame>
+      <p:graphicFrame>
+        <p:nvGraphicFramePr>
+          <p:cNvPr id="31" name="Table 1"/>
+          <p:cNvGraphicFramePr>
+            <a:graphicFrameLocks noGrp="1"/>
+          </p:cNvGraphicFramePr>
+          <p:nvPr>
+            <p:extLst>
+              <p:ext uri="{D42A27DB-BD31-4B8C-83A1-F6EECF244321}">
+                <p14:modId xmlns:p14="http://schemas.microsoft.com/office/powerpoint/2010/main" val="1579011935"/>
+              </p:ext>
+            </p:extLst>
+          </p:nvPr>
+        </p:nvGraphicFramePr>
+        <p:xfrm>
+          <a:off x="6233008" y="1316736"/>
+          <a:ext cx="5391760" cy="914400"/>
+        </p:xfrm>
+        <a:graphic>
+          <a:graphicData uri="http://schemas.openxmlformats.org/drawingml/2006/table">
+            <a:tbl>
+              <a:tblPr/>
+              <a:tblGrid>
+                <a:gridCol w="1481328"/>
+                <a:gridCol w="1316736"/>
+                <a:gridCol w="2593696"/>
+              </a:tblGrid>
+              <a:tr h="457200">
+                <a:tc>
+                  <a:txBody>
+                    <a:bodyPr/>
+                    <a:lstStyle/>
+                    <a:p>
+                      <a:pPr indent="0" marL="0">
+                        <a:buNone/>
+                      </a:pPr>
+                      <a:r>
+                        <a:rPr lang="en-US" sz="1050" b="1" dirty="0">
+                          <a:solidFill>
+                            <a:srgbClr val="1A1A1A"/>
+                          </a:solidFill>
+                          <a:latin typeface="맑은 고딕" pitchFamily="34" charset="0"/>
+                          <a:ea typeface="맑은 고딕" pitchFamily="34" charset="-122"/>
+                          <a:cs typeface="맑은 고딕" pitchFamily="34" charset="-120"/>
+                        </a:rPr>
+                        <a:t>이 자료에서 쓴 말</a:t>
+                      </a:r>
+                      <a:endParaRPr lang="en-US" sz="1050" dirty="0">
+                        <a:latin typeface="맑은 고딕" charset="0"/>
+                        <a:ea typeface="맑은 고딕" charset="0"/>
+                        <a:cs typeface="맑은 고딕" charset="0"/>
+                      </a:endParaRPr>
+                    </a:p>
+                  </a:txBody>
+                  <a:tcPr marL="76200" marR="76200" marT="76200" marB="76200" anchor="ctr">
+                    <a:lnL w="12700" cap="flat" cmpd="sng" algn="ctr">
+                      <a:solidFill>
+                        <a:srgbClr val="E5E4E1"/>
+                      </a:solidFill>
+                      <a:prstDash val="solid"/>
+                      <a:round/>
+                      <a:headEnd type="none" w="med" len="med"/>
+                      <a:tailEnd type="none" w="med" len="med"/>
+                    </a:lnL>
+                    <a:lnR w="12700" cap="flat" cmpd="sng" algn="ctr">
+                      <a:solidFill>
+                        <a:srgbClr val="E5E4E1"/>
+                      </a:solidFill>
+                      <a:prstDash val="solid"/>
+                      <a:round/>
+                      <a:headEnd type="none" w="med" len="med"/>
+                      <a:tailEnd type="none" w="med" len="med"/>
+                    </a:lnR>
+                    <a:lnT w="12700" cap="flat" cmpd="sng" algn="ctr">
+                      <a:solidFill>
+                        <a:srgbClr val="E5E4E1"/>
+                      </a:solidFill>
+                      <a:prstDash val="solid"/>
+                      <a:round/>
+                      <a:headEnd type="none" w="med" len="med"/>
+                      <a:tailEnd type="none" w="med" len="med"/>
+                    </a:lnT>
+                    <a:lnB w="12700" cap="flat" cmpd="sng" algn="ctr">
+                      <a:solidFill>
+                        <a:srgbClr val="E5E4E1"/>
+                      </a:solidFill>
+                      <a:prstDash val="solid"/>
+                      <a:round/>
+                      <a:headEnd type="none" w="med" len="med"/>
+                      <a:tailEnd type="none" w="med" len="med"/>
+                    </a:lnB>
+                    <a:solidFill>
+                      <a:srgbClr val="FAB072"/>
+                    </a:solidFill>
+                  </a:tcPr>
+                </a:tc>
+                <a:tc>
+                  <a:txBody>
+                    <a:bodyPr/>
+                    <a:lstStyle/>
+                    <a:p>
+                      <a:pPr indent="0" marL="0">
+                        <a:buNone/>
+                      </a:pPr>
+                      <a:r>
+                        <a:rPr lang="en-US" sz="1050" b="1" dirty="0">
+                          <a:solidFill>
+                            <a:srgbClr val="1A1A1A"/>
+                          </a:solidFill>
+                          <a:latin typeface="맑은 고딕" pitchFamily="34" charset="0"/>
+                          <a:ea typeface="맑은 고딕" pitchFamily="34" charset="-122"/>
+                          <a:cs typeface="맑은 고딕" pitchFamily="34" charset="-120"/>
+                        </a:rPr>
+                        <a:t>서류 용어</a:t>
+                      </a:r>
+                      <a:endParaRPr lang="en-US" sz="1050" dirty="0">
+                        <a:latin typeface="맑은 고딕" charset="0"/>
+                        <a:ea typeface="맑은 고딕" charset="0"/>
+                        <a:cs typeface="맑은 고딕" charset="0"/>
+                      </a:endParaRPr>
+                    </a:p>
+                  </a:txBody>
+                  <a:tcPr marL="76200" marR="76200" marT="76200" marB="76200" anchor="ctr">
+                    <a:lnL w="12700" cap="flat" cmpd="sng" algn="ctr">
+                      <a:solidFill>
+                        <a:srgbClr val="E5E4E1"/>
+                      </a:solidFill>
+                      <a:prstDash val="solid"/>
+                      <a:round/>
+                      <a:headEnd type="none" w="med" len="med"/>
+                      <a:tailEnd type="none" w="med" len="med"/>
+                    </a:lnL>
+                    <a:lnR w="12700" cap="flat" cmpd="sng" algn="ctr">
+                      <a:solidFill>
+                        <a:srgbClr val="E5E4E1"/>
+                      </a:solidFill>
+                      <a:prstDash val="solid"/>
+                      <a:round/>
+                      <a:headEnd type="none" w="med" len="med"/>
+                      <a:tailEnd type="none" w="med" len="med"/>
+                    </a:lnR>
+                    <a:lnT w="12700" cap="flat" cmpd="sng" algn="ctr">
+                      <a:solidFill>
+                        <a:srgbClr val="E5E4E1"/>
+                      </a:solidFill>
+                      <a:prstDash val="solid"/>
+                      <a:round/>
+                      <a:headEnd type="none" w="med" len="med"/>
+                      <a:tailEnd type="none" w="med" len="med"/>
+                    </a:lnT>
+                    <a:lnB w="12700" cap="flat" cmpd="sng" algn="ctr">
+                      <a:solidFill>
+                        <a:srgbClr val="E5E4E1"/>
+                      </a:solidFill>
+                      <a:prstDash val="solid"/>
+                      <a:round/>
+                      <a:headEnd type="none" w="med" len="med"/>
+                      <a:tailEnd type="none" w="med" len="med"/>
+                    </a:lnB>
+                    <a:solidFill>
+                      <a:srgbClr val="FAB072"/>
+                    </a:solidFill>
+                  </a:tcPr>
+                </a:tc>
+                <a:tc>
+                  <a:txBody>
+                    <a:bodyPr/>
+                    <a:lstStyle/>
+                    <a:p>
+                      <a:pPr indent="0" marL="0">
+                        <a:buNone/>
+                      </a:pPr>
+                      <a:r>
+                        <a:rPr lang="en-US" sz="1050" b="1" dirty="0">
+                          <a:solidFill>
+                            <a:srgbClr val="1A1A1A"/>
+                          </a:solidFill>
+                          <a:latin typeface="맑은 고딕" pitchFamily="34" charset="0"/>
+                          <a:ea typeface="맑은 고딕" pitchFamily="34" charset="-122"/>
+                          <a:cs typeface="맑은 고딕" pitchFamily="34" charset="-120"/>
+                        </a:rPr>
+                        <a:t>무슨 뜻인가</a:t>
+                      </a:r>
+                      <a:endParaRPr lang="en-US" sz="1050" dirty="0">
+                        <a:latin typeface="맑은 고딕" charset="0"/>
+                        <a:ea typeface="맑은 고딕" charset="0"/>
+                        <a:cs typeface="맑은 고딕" charset="0"/>
+                      </a:endParaRPr>
+                    </a:p>
+                  </a:txBody>
+                  <a:tcPr marL="76200" marR="76200" marT="76200" marB="76200" anchor="ctr">
+                    <a:lnL w="12700" cap="flat" cmpd="sng" algn="ctr">
+                      <a:solidFill>
+                        <a:srgbClr val="E5E4E1"/>
+                      </a:solidFill>
+                      <a:prstDash val="solid"/>
+                      <a:round/>
+                      <a:headEnd type="none" w="med" len="med"/>
+                      <a:tailEnd type="none" w="med" len="med"/>
+                    </a:lnL>
+                    <a:lnR w="12700" cap="flat" cmpd="sng" algn="ctr">
+                      <a:solidFill>
+                        <a:srgbClr val="E5E4E1"/>
+                      </a:solidFill>
+                      <a:prstDash val="solid"/>
+                      <a:round/>
+                      <a:headEnd type="none" w="med" len="med"/>
+                      <a:tailEnd type="none" w="med" len="med"/>
+                    </a:lnR>
+                    <a:lnT w="12700" cap="flat" cmpd="sng" algn="ctr">
+                      <a:solidFill>
+                        <a:srgbClr val="E5E4E1"/>
+                      </a:solidFill>
+                      <a:prstDash val="solid"/>
+                      <a:round/>
+                      <a:headEnd type="none" w="med" len="med"/>
+                      <a:tailEnd type="none" w="med" len="med"/>
+                    </a:lnT>
+                    <a:lnB w="12700" cap="flat" cmpd="sng" algn="ctr">
+                      <a:solidFill>
+                        <a:srgbClr val="E5E4E1"/>
+                      </a:solidFill>
+                      <a:prstDash val="solid"/>
+                      <a:round/>
+                      <a:headEnd type="none" w="med" len="med"/>
+                      <a:tailEnd type="none" w="med" len="med"/>
+                    </a:lnB>
+                    <a:solidFill>
+                      <a:srgbClr val="FAB072"/>
+                    </a:solidFill>
+                  </a:tcPr>
+                </a:tc>
+              </a:tr>
+              <a:tr h="457200">
+                <a:tc>
+                  <a:txBody>
+                    <a:bodyPr/>
+                    <a:lstStyle/>
+                    <a:p>
+                      <a:pPr indent="0" marL="0">
+                        <a:buNone/>
+                      </a:pPr>
+                      <a:r>
+                        <a:rPr lang="en-US" sz="1050" b="1" dirty="0">
+                          <a:solidFill>
+                            <a:srgbClr val="1A1A1A"/>
+                          </a:solidFill>
+                          <a:latin typeface="맑은 고딕" pitchFamily="34" charset="0"/>
+                          <a:ea typeface="맑은 고딕" pitchFamily="34" charset="-122"/>
+                          <a:cs typeface="맑은 고딕" pitchFamily="34" charset="-120"/>
+                        </a:rPr>
+                        <a:t>같이 움직이는 정도</a:t>
+                      </a:r>
+                      <a:endParaRPr lang="en-US" sz="1050" dirty="0">
+                        <a:latin typeface="맑은 고딕" charset="0"/>
+                        <a:ea typeface="맑은 고딕" charset="0"/>
+                        <a:cs typeface="맑은 고딕" charset="0"/>
+                      </a:endParaRPr>
+                    </a:p>
+                  </a:txBody>
+                  <a:tcPr marL="76200" marR="76200" marT="76200" marB="76200" anchor="ctr">
+                    <a:lnL w="12700" cap="flat" cmpd="sng" algn="ctr">
+                      <a:solidFill>
+                        <a:srgbClr val="E5E4E1"/>
+                      </a:solidFill>
+                      <a:prstDash val="solid"/>
+                      <a:round/>
+                      <a:headEnd type="none" w="med" len="med"/>
+                      <a:tailEnd type="none" w="med" len="med"/>
+                    </a:lnL>
+                    <a:lnR w="12700" cap="flat" cmpd="sng" algn="ctr">
+                      <a:solidFill>
+                        <a:srgbClr val="E5E4E1"/>
+                      </a:solidFill>
+                      <a:prstDash val="solid"/>
+                      <a:round/>
+                      <a:headEnd type="none" w="med" len="med"/>
+                      <a:tailEnd type="none" w="med" len="med"/>
+                    </a:lnR>
+                    <a:lnT w="12700" cap="flat" cmpd="sng" algn="ctr">
+                      <a:solidFill>
+                        <a:srgbClr val="E5E4E1"/>
+                      </a:solidFill>
+                      <a:prstDash val="solid"/>
+                      <a:round/>
+                      <a:headEnd type="none" w="med" len="med"/>
+                      <a:tailEnd type="none" w="med" len="med"/>
+                    </a:lnT>
+                    <a:lnB w="12700" cap="flat" cmpd="sng" algn="ctr">
+                      <a:solidFill>
+                        <a:srgbClr val="E5E4E1"/>
+                      </a:solidFill>
+                      <a:prstDash val="solid"/>
+                      <a:round/>
+                      <a:headEnd type="none" w="med" len="med"/>
+                      <a:tailEnd type="none" w="med" len="med"/>
+                    </a:lnB>
+                  </a:tcPr>
+                </a:tc>
+                <a:tc>
+                  <a:txBody>
+                    <a:bodyPr/>
+                    <a:lstStyle/>
+                    <a:p>
+                      <a:pPr indent="0" marL="0">
+                        <a:buNone/>
+                      </a:pPr>
+                      <a:r>
+                        <a:rPr lang="en-US" sz="1050" dirty="0">
+                          <a:solidFill>
+                            <a:srgbClr val="6C6C6C"/>
+                          </a:solidFill>
+                          <a:latin typeface="맑은 고딕" pitchFamily="34" charset="0"/>
+                          <a:ea typeface="맑은 고딕" pitchFamily="34" charset="-122"/>
+                          <a:cs typeface="맑은 고딕" pitchFamily="34" charset="-120"/>
+                        </a:rPr>
+                        <a:t>상관계수</a:t>
+                      </a:r>
+                      <a:endParaRPr lang="en-US" sz="1050" dirty="0">
+                        <a:latin typeface="맑은 고딕" charset="0"/>
+                        <a:ea typeface="맑은 고딕" charset="0"/>
+                        <a:cs typeface="맑은 고딕" charset="0"/>
+                      </a:endParaRPr>
+                    </a:p>
+                  </a:txBody>
+                  <a:tcPr marL="76200" marR="76200" marT="76200" marB="76200" anchor="ctr">
+                    <a:lnL w="12700" cap="flat" cmpd="sng" algn="ctr">
+                      <a:solidFill>
+                        <a:srgbClr val="E5E4E1"/>
+                      </a:solidFill>
+                      <a:prstDash val="solid"/>
+                      <a:round/>
+                      <a:headEnd type="none" w="med" len="med"/>
+                      <a:tailEnd type="none" w="med" len="med"/>
+                    </a:lnL>
+                    <a:lnR w="12700" cap="flat" cmpd="sng" algn="ctr">
+                      <a:solidFill>
+                        <a:srgbClr val="E5E4E1"/>
+                      </a:solidFill>
+                      <a:prstDash val="solid"/>
+                      <a:round/>
+                      <a:headEnd type="none" w="med" len="med"/>
+                      <a:tailEnd type="none" w="med" len="med"/>
+                    </a:lnR>
+                    <a:lnT w="12700" cap="flat" cmpd="sng" algn="ctr">
+                      <a:solidFill>
+                        <a:srgbClr val="E5E4E1"/>
+                      </a:solidFill>
+                      <a:prstDash val="solid"/>
+                      <a:round/>
+                      <a:headEnd type="none" w="med" len="med"/>
+                      <a:tailEnd type="none" w="med" len="med"/>
+                    </a:lnT>
+                    <a:lnB w="12700" cap="flat" cmpd="sng" algn="ctr">
+                      <a:solidFill>
+                        <a:srgbClr val="E5E4E1"/>
+                      </a:solidFill>
+                      <a:prstDash val="solid"/>
+                      <a:round/>
+                      <a:headEnd type="none" w="med" len="med"/>
+                      <a:tailEnd type="none" w="med" len="med"/>
+                    </a:lnB>
+                  </a:tcPr>
+                </a:tc>
+                <a:tc>
+                  <a:txBody>
+                    <a:bodyPr/>
+                    <a:lstStyle/>
+                    <a:p>
+                      <a:pPr indent="0" marL="0">
+                        <a:buNone/>
+                      </a:pPr>
+                      <a:r>
+                        <a:rPr lang="en-US" sz="1050" dirty="0">
+                          <a:solidFill>
+                            <a:srgbClr val="3D3D3D"/>
+                          </a:solidFill>
+                          <a:latin typeface="맑은 고딕" pitchFamily="34" charset="0"/>
+                          <a:ea typeface="맑은 고딕" pitchFamily="34" charset="-122"/>
+                          <a:cs typeface="맑은 고딕" pitchFamily="34" charset="-120"/>
+                        </a:rPr>
+                        <a:t>1이면 완전히 같이, 0에 가까우면 따로 놈</a:t>
+                      </a:r>
+                      <a:endParaRPr lang="en-US" sz="1050" dirty="0">
+                        <a:latin typeface="맑은 고딕" charset="0"/>
+                        <a:ea typeface="맑은 고딕" charset="0"/>
+                        <a:cs typeface="맑은 고딕" charset="0"/>
+                      </a:endParaRPr>
+                    </a:p>
+                  </a:txBody>
+                  <a:tcPr marL="76200" marR="76200" marT="76200" marB="76200" anchor="ctr">
+                    <a:lnL w="12700" cap="flat" cmpd="sng" algn="ctr">
+                      <a:solidFill>
+                        <a:srgbClr val="E5E4E1"/>
+                      </a:solidFill>
+                      <a:prstDash val="solid"/>
+                      <a:round/>
+                      <a:headEnd type="none" w="med" len="med"/>
+                      <a:tailEnd type="none" w="med" len="med"/>
+                    </a:lnL>
+                    <a:lnR w="12700" cap="flat" cmpd="sng" algn="ctr">
+                      <a:solidFill>
+                        <a:srgbClr val="E5E4E1"/>
+                      </a:solidFill>
+                      <a:prstDash val="solid"/>
+                      <a:round/>
+                      <a:headEnd type="none" w="med" len="med"/>
+                      <a:tailEnd type="none" w="med" len="med"/>
+                    </a:lnR>
+                    <a:lnT w="12700" cap="flat" cmpd="sng" algn="ctr">
+                      <a:solidFill>
+                        <a:srgbClr val="E5E4E1"/>
+                      </a:solidFill>
+                      <a:prstDash val="solid"/>
+                      <a:round/>
+                      <a:headEnd type="none" w="med" len="med"/>
+                      <a:tailEnd type="none" w="med" len="med"/>
+                    </a:lnT>
+                    <a:lnB w="12700" cap="flat" cmpd="sng" algn="ctr">
+                      <a:solidFill>
+                        <a:srgbClr val="E5E4E1"/>
+                      </a:solidFill>
+                      <a:prstDash val="solid"/>
+                      <a:round/>
+                      <a:headEnd type="none" w="med" len="med"/>
+                      <a:tailEnd type="none" w="med" len="med"/>
+                    </a:lnB>
+                  </a:tcPr>
+                </a:tc>
+              </a:tr>
+              <a:tr h="457200">
+                <a:tc>
+                  <a:txBody>
+                    <a:bodyPr/>
+                    <a:lstStyle/>
+                    <a:p>
+                      <a:pPr indent="0" marL="0">
+                        <a:buNone/>
+                      </a:pPr>
+                      <a:r>
+                        <a:rPr lang="en-US" sz="1050" b="1" dirty="0">
+                          <a:solidFill>
+                            <a:srgbClr val="1A1A1A"/>
+                          </a:solidFill>
+                          <a:latin typeface="맑은 고딕" pitchFamily="34" charset="0"/>
+                          <a:ea typeface="맑은 고딕" pitchFamily="34" charset="-122"/>
+                          <a:cs typeface="맑은 고딕" pitchFamily="34" charset="-120"/>
+                        </a:rPr>
+                        <a:t>실제 값어치</a:t>
+                      </a:r>
+                      <a:endParaRPr lang="en-US" sz="1050" dirty="0">
+                        <a:latin typeface="맑은 고딕" charset="0"/>
+                        <a:ea typeface="맑은 고딕" charset="0"/>
+                        <a:cs typeface="맑은 고딕" charset="0"/>
+                      </a:endParaRPr>
+                    </a:p>
+                  </a:txBody>
+                  <a:tcPr marL="76200" marR="76200" marT="76200" marB="76200" anchor="ctr">
+                    <a:lnL w="12700" cap="flat" cmpd="sng" algn="ctr">
+                      <a:solidFill>
+                        <a:srgbClr val="E5E4E1"/>
+                      </a:solidFill>
+                      <a:prstDash val="solid"/>
+                      <a:round/>
+                      <a:headEnd type="none" w="med" len="med"/>
+                      <a:tailEnd type="none" w="med" len="med"/>
+                    </a:lnL>
+                    <a:lnR w="12700" cap="flat" cmpd="sng" algn="ctr">
+                      <a:solidFill>
+                        <a:srgbClr val="E5E4E1"/>
+                      </a:solidFill>
+                      <a:prstDash val="solid"/>
+                      <a:round/>
+                      <a:headEnd type="none" w="med" len="med"/>
+                      <a:tailEnd type="none" w="med" len="med"/>
+                    </a:lnR>
+                    <a:lnT w="12700" cap="flat" cmpd="sng" algn="ctr">
+                      <a:solidFill>
+                        <a:srgbClr val="E5E4E1"/>
+                      </a:solidFill>
+                      <a:prstDash val="solid"/>
+                      <a:round/>
+                      <a:headEnd type="none" w="med" len="med"/>
+                      <a:tailEnd type="none" w="med" len="med"/>
+                    </a:lnT>
+                    <a:lnB w="12700" cap="flat" cmpd="sng" algn="ctr">
+                      <a:solidFill>
+                        <a:srgbClr val="E5E4E1"/>
+                      </a:solidFill>
+                      <a:prstDash val="solid"/>
+                      <a:round/>
+                      <a:headEnd type="none" w="med" len="med"/>
+                      <a:tailEnd type="none" w="med" len="med"/>
+                    </a:lnB>
+                  </a:tcPr>
+                </a:tc>
+                <a:tc>
+                  <a:txBody>
+                    <a:bodyPr/>
+                    <a:lstStyle/>
+                    <a:p>
+                      <a:pPr indent="0" marL="0">
+                        <a:buNone/>
+                      </a:pPr>
+                      <a:r>
+                        <a:rPr lang="en-US" sz="1050" dirty="0">
+                          <a:solidFill>
+                            <a:srgbClr val="6C6C6C"/>
+                          </a:solidFill>
+                          <a:latin typeface="맑은 고딕" pitchFamily="34" charset="0"/>
+                          <a:ea typeface="맑은 고딕" pitchFamily="34" charset="-122"/>
+                          <a:cs typeface="맑은 고딕" pitchFamily="34" charset="-120"/>
+                        </a:rPr>
+                        <a:t>공정가액</a:t>
+                      </a:r>
+                      <a:endParaRPr lang="en-US" sz="1050" dirty="0">
+                        <a:latin typeface="맑은 고딕" charset="0"/>
+                        <a:ea typeface="맑은 고딕" charset="0"/>
+                        <a:cs typeface="맑은 고딕" charset="0"/>
+                      </a:endParaRPr>
+                    </a:p>
+                  </a:txBody>
+                  <a:tcPr marL="76200" marR="76200" marT="76200" marB="76200" anchor="ctr">
+                    <a:lnL w="12700" cap="flat" cmpd="sng" algn="ctr">
+                      <a:solidFill>
+                        <a:srgbClr val="E5E4E1"/>
+                      </a:solidFill>
+                      <a:prstDash val="solid"/>
+                      <a:round/>
+                      <a:headEnd type="none" w="med" len="med"/>
+                      <a:tailEnd type="none" w="med" len="med"/>
+                    </a:lnL>
+                    <a:lnR w="12700" cap="flat" cmpd="sng" algn="ctr">
+                      <a:solidFill>
+                        <a:srgbClr val="E5E4E1"/>
+                      </a:solidFill>
+                      <a:prstDash val="solid"/>
+                      <a:round/>
+                      <a:headEnd type="none" w="med" len="med"/>
+                      <a:tailEnd type="none" w="med" len="med"/>
+                    </a:lnR>
+                    <a:lnT w="12700" cap="flat" cmpd="sng" algn="ctr">
+                      <a:solidFill>
+                        <a:srgbClr val="E5E4E1"/>
+                      </a:solidFill>
+                      <a:prstDash val="solid"/>
+                      <a:round/>
+                      <a:headEnd type="none" w="med" len="med"/>
+                      <a:tailEnd type="none" w="med" len="med"/>
+                    </a:lnT>
+                    <a:lnB w="12700" cap="flat" cmpd="sng" algn="ctr">
+                      <a:solidFill>
+                        <a:srgbClr val="E5E4E1"/>
+                      </a:solidFill>
+                      <a:prstDash val="solid"/>
+                      <a:round/>
+                      <a:headEnd type="none" w="med" len="med"/>
+                      <a:tailEnd type="none" w="med" len="med"/>
+                    </a:lnB>
+                  </a:tcPr>
+                </a:tc>
+                <a:tc>
+                  <a:txBody>
+                    <a:bodyPr/>
+                    <a:lstStyle/>
+                    <a:p>
+                      <a:pPr indent="0" marL="0">
+                        <a:buNone/>
+                      </a:pPr>
+                      <a:r>
+                        <a:rPr lang="en-US" sz="1050" dirty="0">
+                          <a:solidFill>
+                            <a:srgbClr val="3D3D3D"/>
+                          </a:solidFill>
+                          <a:latin typeface="맑은 고딕" pitchFamily="34" charset="0"/>
+                          <a:ea typeface="맑은 고딕" pitchFamily="34" charset="-122"/>
+                          <a:cs typeface="맑은 고딕" pitchFamily="34" charset="-120"/>
+                        </a:rPr>
+                        <a:t>1만원 넣는 순간 이 상품이 실제로 갖는 값</a:t>
+                      </a:r>
+                      <a:endParaRPr lang="en-US" sz="1050" dirty="0">
+                        <a:latin typeface="맑은 고딕" charset="0"/>
+                        <a:ea typeface="맑은 고딕" charset="0"/>
+                        <a:cs typeface="맑은 고딕" charset="0"/>
+                      </a:endParaRPr>
+                    </a:p>
+                  </a:txBody>
+                  <a:tcPr marL="76200" marR="76200" marT="76200" marB="76200" anchor="ctr">
+                    <a:lnL w="12700" cap="flat" cmpd="sng" algn="ctr">
+                      <a:solidFill>
+                        <a:srgbClr val="E5E4E1"/>
+                      </a:solidFill>
+                      <a:prstDash val="solid"/>
+                      <a:round/>
+                      <a:headEnd type="none" w="med" len="med"/>
+                      <a:tailEnd type="none" w="med" len="med"/>
+                    </a:lnL>
+                    <a:lnR w="12700" cap="flat" cmpd="sng" algn="ctr">
+                      <a:solidFill>
+                        <a:srgbClr val="E5E4E1"/>
+                      </a:solidFill>
+                      <a:prstDash val="solid"/>
+                      <a:round/>
+                      <a:headEnd type="none" w="med" len="med"/>
+                      <a:tailEnd type="none" w="med" len="med"/>
+                    </a:lnR>
+                    <a:lnT w="12700" cap="flat" cmpd="sng" algn="ctr">
+                      <a:solidFill>
+                        <a:srgbClr val="E5E4E1"/>
+                      </a:solidFill>
+                      <a:prstDash val="solid"/>
+                      <a:round/>
+                      <a:headEnd type="none" w="med" len="med"/>
+                      <a:tailEnd type="none" w="med" len="med"/>
+                    </a:lnT>
+                    <a:lnB w="12700" cap="flat" cmpd="sng" algn="ctr">
+                      <a:solidFill>
+                        <a:srgbClr val="E5E4E1"/>
+                      </a:solidFill>
+                      <a:prstDash val="solid"/>
+                      <a:round/>
+                      <a:headEnd type="none" w="med" len="med"/>
+                      <a:tailEnd type="none" w="med" len="med"/>
+                    </a:lnB>
+                  </a:tcPr>
+                </a:tc>
+              </a:tr>
+              <a:tr h="457200">
+                <a:tc>
+                  <a:txBody>
+                    <a:bodyPr/>
+                    <a:lstStyle/>
+                    <a:p>
+                      <a:pPr indent="0" marL="0">
+                        <a:buNone/>
+                      </a:pPr>
+                      <a:r>
+                        <a:rPr lang="en-US" sz="1050" b="1" dirty="0">
+                          <a:solidFill>
+                            <a:srgbClr val="1A1A1A"/>
+                          </a:solidFill>
+                          <a:latin typeface="맑은 고딕" pitchFamily="34" charset="0"/>
+                          <a:ea typeface="맑은 고딕" pitchFamily="34" charset="-122"/>
+                          <a:cs typeface="맑은 고딕" pitchFamily="34" charset="-120"/>
+                        </a:rPr>
+                        <a:t>평균적으로 잃는 크기</a:t>
+                      </a:r>
+                      <a:endParaRPr lang="en-US" sz="1050" dirty="0">
+                        <a:latin typeface="맑은 고딕" charset="0"/>
+                        <a:ea typeface="맑은 고딕" charset="0"/>
+                        <a:cs typeface="맑은 고딕" charset="0"/>
+                      </a:endParaRPr>
+                    </a:p>
+                  </a:txBody>
+                  <a:tcPr marL="76200" marR="76200" marT="76200" marB="76200" anchor="ctr">
+                    <a:lnL w="12700" cap="flat" cmpd="sng" algn="ctr">
+                      <a:solidFill>
+                        <a:srgbClr val="E5E4E1"/>
+                      </a:solidFill>
+                      <a:prstDash val="solid"/>
+                      <a:round/>
+                      <a:headEnd type="none" w="med" len="med"/>
+                      <a:tailEnd type="none" w="med" len="med"/>
+                    </a:lnL>
+                    <a:lnR w="12700" cap="flat" cmpd="sng" algn="ctr">
+                      <a:solidFill>
+                        <a:srgbClr val="E5E4E1"/>
+                      </a:solidFill>
+                      <a:prstDash val="solid"/>
+                      <a:round/>
+                      <a:headEnd type="none" w="med" len="med"/>
+                      <a:tailEnd type="none" w="med" len="med"/>
+                    </a:lnR>
+                    <a:lnT w="12700" cap="flat" cmpd="sng" algn="ctr">
+                      <a:solidFill>
+                        <a:srgbClr val="E5E4E1"/>
+                      </a:solidFill>
+                      <a:prstDash val="solid"/>
+                      <a:round/>
+                      <a:headEnd type="none" w="med" len="med"/>
+                      <a:tailEnd type="none" w="med" len="med"/>
+                    </a:lnT>
+                    <a:lnB w="12700" cap="flat" cmpd="sng" algn="ctr">
+                      <a:solidFill>
+                        <a:srgbClr val="E5E4E1"/>
+                      </a:solidFill>
+                      <a:prstDash val="solid"/>
+                      <a:round/>
+                      <a:headEnd type="none" w="med" len="med"/>
+                      <a:tailEnd type="none" w="med" len="med"/>
+                    </a:lnB>
+                  </a:tcPr>
+                </a:tc>
+                <a:tc>
+                  <a:txBody>
+                    <a:bodyPr/>
+                    <a:lstStyle/>
+                    <a:p>
+                      <a:pPr indent="0" marL="0">
+                        <a:buNone/>
+                      </a:pPr>
+                      <a:r>
+                        <a:rPr lang="en-US" sz="1050" dirty="0">
+                          <a:solidFill>
+                            <a:srgbClr val="6C6C6C"/>
+                          </a:solidFill>
+                          <a:latin typeface="맑은 고딕" pitchFamily="34" charset="0"/>
+                          <a:ea typeface="맑은 고딕" pitchFamily="34" charset="-122"/>
+                          <a:cs typeface="맑은 고딕" pitchFamily="34" charset="-120"/>
+                        </a:rPr>
+                        <a:t>기대손실</a:t>
+                      </a:r>
+                      <a:endParaRPr lang="en-US" sz="1050" dirty="0">
+                        <a:latin typeface="맑은 고딕" charset="0"/>
+                        <a:ea typeface="맑은 고딕" charset="0"/>
+                        <a:cs typeface="맑은 고딕" charset="0"/>
+                      </a:endParaRPr>
+                    </a:p>
+                  </a:txBody>
+                  <a:tcPr marL="76200" marR="76200" marT="76200" marB="76200" anchor="ctr">
+                    <a:lnL w="12700" cap="flat" cmpd="sng" algn="ctr">
+                      <a:solidFill>
+                        <a:srgbClr val="E5E4E1"/>
+                      </a:solidFill>
+                      <a:prstDash val="solid"/>
+                      <a:round/>
+                      <a:headEnd type="none" w="med" len="med"/>
+                      <a:tailEnd type="none" w="med" len="med"/>
+                    </a:lnL>
+                    <a:lnR w="12700" cap="flat" cmpd="sng" algn="ctr">
+                      <a:solidFill>
+                        <a:srgbClr val="E5E4E1"/>
+                      </a:solidFill>
+                      <a:prstDash val="solid"/>
+                      <a:round/>
+                      <a:headEnd type="none" w="med" len="med"/>
+                      <a:tailEnd type="none" w="med" len="med"/>
+                    </a:lnR>
+                    <a:lnT w="12700" cap="flat" cmpd="sng" algn="ctr">
+                      <a:solidFill>
+                        <a:srgbClr val="E5E4E1"/>
+                      </a:solidFill>
+                      <a:prstDash val="solid"/>
+                      <a:round/>
+                      <a:headEnd type="none" w="med" len="med"/>
+                      <a:tailEnd type="none" w="med" len="med"/>
+                    </a:lnT>
+                    <a:lnB w="12700" cap="flat" cmpd="sng" algn="ctr">
+                      <a:solidFill>
+                        <a:srgbClr val="E5E4E1"/>
+                      </a:solidFill>
+                      <a:prstDash val="solid"/>
+                      <a:round/>
+                      <a:headEnd type="none" w="med" len="med"/>
+                      <a:tailEnd type="none" w="med" len="med"/>
+                    </a:lnB>
+                  </a:tcPr>
+                </a:tc>
+                <a:tc>
+                  <a:txBody>
+                    <a:bodyPr/>
+                    <a:lstStyle/>
+                    <a:p>
+                      <a:pPr indent="0" marL="0">
+                        <a:buNone/>
+                      </a:pPr>
+                      <a:r>
+                        <a:rPr lang="en-US" sz="1050" dirty="0">
+                          <a:solidFill>
+                            <a:srgbClr val="3D3D3D"/>
+                          </a:solidFill>
+                          <a:latin typeface="맑은 고딕" pitchFamily="34" charset="0"/>
+                          <a:ea typeface="맑은 고딕" pitchFamily="34" charset="-122"/>
+                          <a:cs typeface="맑은 고딕" pitchFamily="34" charset="-120"/>
+                        </a:rPr>
+                        <a:t>손해 볼 가능성 × 손해 날 때 잃는 정도</a:t>
+                      </a:r>
+                      <a:endParaRPr lang="en-US" sz="1050" dirty="0">
+                        <a:latin typeface="맑은 고딕" charset="0"/>
+                        <a:ea typeface="맑은 고딕" charset="0"/>
+                        <a:cs typeface="맑은 고딕" charset="0"/>
+                      </a:endParaRPr>
+                    </a:p>
+                  </a:txBody>
+                  <a:tcPr marL="76200" marR="76200" marT="76200" marB="76200" anchor="ctr">
+                    <a:lnL w="12700" cap="flat" cmpd="sng" algn="ctr">
+                      <a:solidFill>
+                        <a:srgbClr val="E5E4E1"/>
+                      </a:solidFill>
+                      <a:prstDash val="solid"/>
+                      <a:round/>
+                      <a:headEnd type="none" w="med" len="med"/>
+                      <a:tailEnd type="none" w="med" len="med"/>
+                    </a:lnL>
+                    <a:lnR w="12700" cap="flat" cmpd="sng" algn="ctr">
+                      <a:solidFill>
+                        <a:srgbClr val="E5E4E1"/>
+                      </a:solidFill>
+                      <a:prstDash val="solid"/>
+                      <a:round/>
+                      <a:headEnd type="none" w="med" len="med"/>
+                      <a:tailEnd type="none" w="med" len="med"/>
+                    </a:lnR>
+                    <a:lnT w="12700" cap="flat" cmpd="sng" algn="ctr">
+                      <a:solidFill>
+                        <a:srgbClr val="E5E4E1"/>
+                      </a:solidFill>
+                      <a:prstDash val="solid"/>
+                      <a:round/>
+                      <a:headEnd type="none" w="med" len="med"/>
+                      <a:tailEnd type="none" w="med" len="med"/>
+                    </a:lnT>
+                    <a:lnB w="12700" cap="flat" cmpd="sng" algn="ctr">
+                      <a:solidFill>
+                        <a:srgbClr val="E5E4E1"/>
+                      </a:solidFill>
+                      <a:prstDash val="solid"/>
+                      <a:round/>
+                      <a:headEnd type="none" w="med" len="med"/>
+                      <a:tailEnd type="none" w="med" len="med"/>
+                    </a:lnB>
+                  </a:tcPr>
+                </a:tc>
+              </a:tr>
+              <a:tr h="457200">
+                <a:tc>
+                  <a:txBody>
+                    <a:bodyPr/>
+                    <a:lstStyle/>
+                    <a:p>
+                      <a:pPr indent="0" marL="0">
+                        <a:buNone/>
+                      </a:pPr>
+                      <a:r>
+                        <a:rPr lang="en-US" sz="1050" b="1" dirty="0">
+                          <a:solidFill>
+                            <a:srgbClr val="1A1A1A"/>
+                          </a:solidFill>
+                          <a:latin typeface="맑은 고딕" pitchFamily="34" charset="0"/>
+                          <a:ea typeface="맑은 고딕" pitchFamily="34" charset="-122"/>
+                          <a:cs typeface="맑은 고딕" pitchFamily="34" charset="-120"/>
+                        </a:rPr>
+                        <a:t>다시 생각하는 기간</a:t>
+                      </a:r>
+                      <a:endParaRPr lang="en-US" sz="1050" dirty="0">
+                        <a:latin typeface="맑은 고딕" charset="0"/>
+                        <a:ea typeface="맑은 고딕" charset="0"/>
+                        <a:cs typeface="맑은 고딕" charset="0"/>
+                      </a:endParaRPr>
+                    </a:p>
+                  </a:txBody>
+                  <a:tcPr marL="76200" marR="76200" marT="76200" marB="76200" anchor="ctr">
+                    <a:lnL w="12700" cap="flat" cmpd="sng" algn="ctr">
+                      <a:solidFill>
+                        <a:srgbClr val="E5E4E1"/>
+                      </a:solidFill>
+                      <a:prstDash val="solid"/>
+                      <a:round/>
+                      <a:headEnd type="none" w="med" len="med"/>
+                      <a:tailEnd type="none" w="med" len="med"/>
+                    </a:lnL>
+                    <a:lnR w="12700" cap="flat" cmpd="sng" algn="ctr">
+                      <a:solidFill>
+                        <a:srgbClr val="E5E4E1"/>
+                      </a:solidFill>
+                      <a:prstDash val="solid"/>
+                      <a:round/>
+                      <a:headEnd type="none" w="med" len="med"/>
+                      <a:tailEnd type="none" w="med" len="med"/>
+                    </a:lnR>
+                    <a:lnT w="12700" cap="flat" cmpd="sng" algn="ctr">
+                      <a:solidFill>
+                        <a:srgbClr val="E5E4E1"/>
+                      </a:solidFill>
+                      <a:prstDash val="solid"/>
+                      <a:round/>
+                      <a:headEnd type="none" w="med" len="med"/>
+                      <a:tailEnd type="none" w="med" len="med"/>
+                    </a:lnT>
+                    <a:lnB w="12700" cap="flat" cmpd="sng" algn="ctr">
+                      <a:solidFill>
+                        <a:srgbClr val="E5E4E1"/>
+                      </a:solidFill>
+                      <a:prstDash val="solid"/>
+                      <a:round/>
+                      <a:headEnd type="none" w="med" len="med"/>
+                      <a:tailEnd type="none" w="med" len="med"/>
+                    </a:lnB>
+                  </a:tcPr>
+                </a:tc>
+                <a:tc>
+                  <a:txBody>
+                    <a:bodyPr/>
+                    <a:lstStyle/>
+                    <a:p>
+                      <a:pPr indent="0" marL="0">
+                        <a:buNone/>
+                      </a:pPr>
+                      <a:r>
+                        <a:rPr lang="en-US" sz="1050" dirty="0">
+                          <a:solidFill>
+                            <a:srgbClr val="6C6C6C"/>
+                          </a:solidFill>
+                          <a:latin typeface="맑은 고딕" pitchFamily="34" charset="0"/>
+                          <a:ea typeface="맑은 고딕" pitchFamily="34" charset="-122"/>
+                          <a:cs typeface="맑은 고딕" pitchFamily="34" charset="-120"/>
+                        </a:rPr>
+                        <a:t>숙려기간</a:t>
+                      </a:r>
+                      <a:endParaRPr lang="en-US" sz="1050" dirty="0">
+                        <a:latin typeface="맑은 고딕" charset="0"/>
+                        <a:ea typeface="맑은 고딕" charset="0"/>
+                        <a:cs typeface="맑은 고딕" charset="0"/>
+                      </a:endParaRPr>
+                    </a:p>
+                  </a:txBody>
+                  <a:tcPr marL="76200" marR="76200" marT="76200" marB="76200" anchor="ctr">
+                    <a:lnL w="12700" cap="flat" cmpd="sng" algn="ctr">
+                      <a:solidFill>
+                        <a:srgbClr val="E5E4E1"/>
+                      </a:solidFill>
+                      <a:prstDash val="solid"/>
+                      <a:round/>
+                      <a:headEnd type="none" w="med" len="med"/>
+                      <a:tailEnd type="none" w="med" len="med"/>
+                    </a:lnL>
+                    <a:lnR w="12700" cap="flat" cmpd="sng" algn="ctr">
+                      <a:solidFill>
+                        <a:srgbClr val="E5E4E1"/>
+                      </a:solidFill>
+                      <a:prstDash val="solid"/>
+                      <a:round/>
+                      <a:headEnd type="none" w="med" len="med"/>
+                      <a:tailEnd type="none" w="med" len="med"/>
+                    </a:lnR>
+                    <a:lnT w="12700" cap="flat" cmpd="sng" algn="ctr">
+                      <a:solidFill>
+                        <a:srgbClr val="E5E4E1"/>
+                      </a:solidFill>
+                      <a:prstDash val="solid"/>
+                      <a:round/>
+                      <a:headEnd type="none" w="med" len="med"/>
+                      <a:tailEnd type="none" w="med" len="med"/>
+                    </a:lnT>
+                    <a:lnB w="12700" cap="flat" cmpd="sng" algn="ctr">
+                      <a:solidFill>
+                        <a:srgbClr val="E5E4E1"/>
+                      </a:solidFill>
+                      <a:prstDash val="solid"/>
+                      <a:round/>
+                      <a:headEnd type="none" w="med" len="med"/>
+                      <a:tailEnd type="none" w="med" len="med"/>
+                    </a:lnB>
+                  </a:tcPr>
+                </a:tc>
+                <a:tc>
+                  <a:txBody>
+                    <a:bodyPr/>
+                    <a:lstStyle/>
+                    <a:p>
+                      <a:pPr indent="0" marL="0">
+                        <a:buNone/>
+                      </a:pPr>
+                      <a:r>
+                        <a:rPr lang="en-US" sz="1050" dirty="0">
+                          <a:solidFill>
+                            <a:srgbClr val="3D3D3D"/>
+                          </a:solidFill>
+                          <a:latin typeface="맑은 고딕" pitchFamily="34" charset="0"/>
+                          <a:ea typeface="맑은 고딕" pitchFamily="34" charset="-122"/>
+                          <a:cs typeface="맑은 고딕" pitchFamily="34" charset="-120"/>
+                        </a:rPr>
+                        <a:t>법이 정한 2영업일 이상. 이때는 주문 못 넣음</a:t>
+                      </a:r>
+                      <a:endParaRPr lang="en-US" sz="1050" dirty="0">
+                        <a:latin typeface="맑은 고딕" charset="0"/>
+                        <a:ea typeface="맑은 고딕" charset="0"/>
+                        <a:cs typeface="맑은 고딕" charset="0"/>
+                      </a:endParaRPr>
+                    </a:p>
+                  </a:txBody>
+                  <a:tcPr marL="76200" marR="76200" marT="76200" marB="76200" anchor="ctr">
+                    <a:lnL w="12700" cap="flat" cmpd="sng" algn="ctr">
+                      <a:solidFill>
+                        <a:srgbClr val="E5E4E1"/>
+                      </a:solidFill>
+                      <a:prstDash val="solid"/>
+                      <a:round/>
+                      <a:headEnd type="none" w="med" len="med"/>
+                      <a:tailEnd type="none" w="med" len="med"/>
+                    </a:lnL>
+                    <a:lnR w="12700" cap="flat" cmpd="sng" algn="ctr">
+                      <a:solidFill>
+                        <a:srgbClr val="E5E4E1"/>
+                      </a:solidFill>
+                      <a:prstDash val="solid"/>
+                      <a:round/>
+                      <a:headEnd type="none" w="med" len="med"/>
+                      <a:tailEnd type="none" w="med" len="med"/>
+                    </a:lnR>
+                    <a:lnT w="12700" cap="flat" cmpd="sng" algn="ctr">
+                      <a:solidFill>
+                        <a:srgbClr val="E5E4E1"/>
+                      </a:solidFill>
+                      <a:prstDash val="solid"/>
+                      <a:round/>
+                      <a:headEnd type="none" w="med" len="med"/>
+                      <a:tailEnd type="none" w="med" len="med"/>
+                    </a:lnT>
+                    <a:lnB w="12700" cap="flat" cmpd="sng" algn="ctr">
+                      <a:solidFill>
+                        <a:srgbClr val="E5E4E1"/>
+                      </a:solidFill>
+                      <a:prstDash val="solid"/>
+                      <a:round/>
+                      <a:headEnd type="none" w="med" len="med"/>
+                      <a:tailEnd type="none" w="med" len="med"/>
+                    </a:lnB>
+                  </a:tcPr>
+                </a:tc>
+              </a:tr>
+              <a:tr h="457200">
+                <a:tc>
+                  <a:txBody>
+                    <a:bodyPr/>
+                    <a:lstStyle/>
+                    <a:p>
+                      <a:pPr indent="0" marL="0">
+                        <a:buNone/>
+                      </a:pPr>
+                      <a:r>
+                        <a:rPr lang="en-US" sz="1050" b="1" dirty="0">
+                          <a:solidFill>
+                            <a:srgbClr val="1A1A1A"/>
+                          </a:solidFill>
+                          <a:latin typeface="맑은 고딕" pitchFamily="34" charset="0"/>
+                          <a:ea typeface="맑은 고딕" pitchFamily="34" charset="-122"/>
+                          <a:cs typeface="맑은 고딕" pitchFamily="34" charset="-120"/>
+                        </a:rPr>
+                        <a:t>정말 하실 건지 확인</a:t>
+                      </a:r>
+                      <a:endParaRPr lang="en-US" sz="1050" dirty="0">
+                        <a:latin typeface="맑은 고딕" charset="0"/>
+                        <a:ea typeface="맑은 고딕" charset="0"/>
+                        <a:cs typeface="맑은 고딕" charset="0"/>
+                      </a:endParaRPr>
+                    </a:p>
+                  </a:txBody>
+                  <a:tcPr marL="76200" marR="76200" marT="76200" marB="76200" anchor="ctr">
+                    <a:lnL w="12700" cap="flat" cmpd="sng" algn="ctr">
+                      <a:solidFill>
+                        <a:srgbClr val="E5E4E1"/>
+                      </a:solidFill>
+                      <a:prstDash val="solid"/>
+                      <a:round/>
+                      <a:headEnd type="none" w="med" len="med"/>
+                      <a:tailEnd type="none" w="med" len="med"/>
+                    </a:lnL>
+                    <a:lnR w="12700" cap="flat" cmpd="sng" algn="ctr">
+                      <a:solidFill>
+                        <a:srgbClr val="E5E4E1"/>
+                      </a:solidFill>
+                      <a:prstDash val="solid"/>
+                      <a:round/>
+                      <a:headEnd type="none" w="med" len="med"/>
+                      <a:tailEnd type="none" w="med" len="med"/>
+                    </a:lnR>
+                    <a:lnT w="12700" cap="flat" cmpd="sng" algn="ctr">
+                      <a:solidFill>
+                        <a:srgbClr val="E5E4E1"/>
+                      </a:solidFill>
+                      <a:prstDash val="solid"/>
+                      <a:round/>
+                      <a:headEnd type="none" w="med" len="med"/>
+                      <a:tailEnd type="none" w="med" len="med"/>
+                    </a:lnT>
+                    <a:lnB w="12700" cap="flat" cmpd="sng" algn="ctr">
+                      <a:solidFill>
+                        <a:srgbClr val="E5E4E1"/>
+                      </a:solidFill>
+                      <a:prstDash val="solid"/>
+                      <a:round/>
+                      <a:headEnd type="none" w="med" len="med"/>
+                      <a:tailEnd type="none" w="med" len="med"/>
+                    </a:lnB>
+                  </a:tcPr>
+                </a:tc>
+                <a:tc>
+                  <a:txBody>
+                    <a:bodyPr/>
+                    <a:lstStyle/>
+                    <a:p>
+                      <a:pPr indent="0" marL="0">
+                        <a:buNone/>
+                      </a:pPr>
+                      <a:r>
+                        <a:rPr lang="en-US" sz="1050" dirty="0">
+                          <a:solidFill>
+                            <a:srgbClr val="6C6C6C"/>
+                          </a:solidFill>
+                          <a:latin typeface="맑은 고딕" pitchFamily="34" charset="0"/>
+                          <a:ea typeface="맑은 고딕" pitchFamily="34" charset="-122"/>
+                          <a:cs typeface="맑은 고딕" pitchFamily="34" charset="-120"/>
+                        </a:rPr>
+                        <a:t>가입의사 확인기간</a:t>
+                      </a:r>
+                      <a:endParaRPr lang="en-US" sz="1050" dirty="0">
+                        <a:latin typeface="맑은 고딕" charset="0"/>
+                        <a:ea typeface="맑은 고딕" charset="0"/>
+                        <a:cs typeface="맑은 고딕" charset="0"/>
+                      </a:endParaRPr>
+                    </a:p>
+                  </a:txBody>
+                  <a:tcPr marL="76200" marR="76200" marT="76200" marB="76200" anchor="ctr">
+                    <a:lnL w="12700" cap="flat" cmpd="sng" algn="ctr">
+                      <a:solidFill>
+                        <a:srgbClr val="E5E4E1"/>
+                      </a:solidFill>
+                      <a:prstDash val="solid"/>
+                      <a:round/>
+                      <a:headEnd type="none" w="med" len="med"/>
+                      <a:tailEnd type="none" w="med" len="med"/>
+                    </a:lnL>
+                    <a:lnR w="12700" cap="flat" cmpd="sng" algn="ctr">
+                      <a:solidFill>
+                        <a:srgbClr val="E5E4E1"/>
+                      </a:solidFill>
+                      <a:prstDash val="solid"/>
+                      <a:round/>
+                      <a:headEnd type="none" w="med" len="med"/>
+                      <a:tailEnd type="none" w="med" len="med"/>
+                    </a:lnR>
+                    <a:lnT w="12700" cap="flat" cmpd="sng" algn="ctr">
+                      <a:solidFill>
+                        <a:srgbClr val="E5E4E1"/>
+                      </a:solidFill>
+                      <a:prstDash val="solid"/>
+                      <a:round/>
+                      <a:headEnd type="none" w="med" len="med"/>
+                      <a:tailEnd type="none" w="med" len="med"/>
+                    </a:lnT>
+                    <a:lnB w="12700" cap="flat" cmpd="sng" algn="ctr">
+                      <a:solidFill>
+                        <a:srgbClr val="E5E4E1"/>
+                      </a:solidFill>
+                      <a:prstDash val="solid"/>
+                      <a:round/>
+                      <a:headEnd type="none" w="med" len="med"/>
+                      <a:tailEnd type="none" w="med" len="med"/>
+                    </a:lnB>
+                  </a:tcPr>
+                </a:tc>
+                <a:tc>
+                  <a:txBody>
+                    <a:bodyPr/>
+                    <a:lstStyle/>
+                    <a:p>
+                      <a:pPr indent="0" marL="0">
+                        <a:buNone/>
+                      </a:pPr>
+                      <a:r>
+                        <a:rPr lang="en-US" sz="1050" dirty="0">
+                          <a:solidFill>
+                            <a:srgbClr val="3D3D3D"/>
+                          </a:solidFill>
+                          <a:latin typeface="맑은 고딕" pitchFamily="34" charset="0"/>
+                          <a:ea typeface="맑은 고딕" pitchFamily="34" charset="-122"/>
+                          <a:cs typeface="맑은 고딕" pitchFamily="34" charset="-120"/>
+                        </a:rPr>
+                        <a:t>이때 연락이 안 닿으면 신청은 취소됨</a:t>
+                      </a:r>
+                      <a:endParaRPr lang="en-US" sz="1050" dirty="0">
+                        <a:latin typeface="맑은 고딕" charset="0"/>
+                        <a:ea typeface="맑은 고딕" charset="0"/>
+                        <a:cs typeface="맑은 고딕" charset="0"/>
+                      </a:endParaRPr>
+                    </a:p>
+                  </a:txBody>
+                  <a:tcPr marL="76200" marR="76200" marT="76200" marB="76200" anchor="ctr">
+                    <a:lnL w="12700" cap="flat" cmpd="sng" algn="ctr">
+                      <a:solidFill>
+                        <a:srgbClr val="E5E4E1"/>
+                      </a:solidFill>
+                      <a:prstDash val="solid"/>
+                      <a:round/>
+                      <a:headEnd type="none" w="med" len="med"/>
+                      <a:tailEnd type="none" w="med" len="med"/>
+                    </a:lnL>
+                    <a:lnR w="12700" cap="flat" cmpd="sng" algn="ctr">
+                      <a:solidFill>
+                        <a:srgbClr val="E5E4E1"/>
+                      </a:solidFill>
+                      <a:prstDash val="solid"/>
+                      <a:round/>
+                      <a:headEnd type="none" w="med" len="med"/>
+                      <a:tailEnd type="none" w="med" len="med"/>
+                    </a:lnR>
+                    <a:lnT w="12700" cap="flat" cmpd="sng" algn="ctr">
+                      <a:solidFill>
+                        <a:srgbClr val="E5E4E1"/>
+                      </a:solidFill>
+                      <a:prstDash val="solid"/>
+                      <a:round/>
+                      <a:headEnd type="none" w="med" len="med"/>
+                      <a:tailEnd type="none" w="med" len="med"/>
+                    </a:lnT>
+                    <a:lnB w="12700" cap="flat" cmpd="sng" algn="ctr">
+                      <a:solidFill>
+                        <a:srgbClr val="E5E4E1"/>
+                      </a:solidFill>
+                      <a:prstDash val="solid"/>
+                      <a:round/>
+                      <a:headEnd type="none" w="med" len="med"/>
+                      <a:tailEnd type="none" w="med" len="med"/>
+                    </a:lnB>
+                  </a:tcPr>
+                </a:tc>
+              </a:tr>
+              <a:tr h="457200">
+                <a:tc>
+                  <a:txBody>
+                    <a:bodyPr/>
+                    <a:lstStyle/>
+                    <a:p>
+                      <a:pPr indent="0" marL="0">
+                        <a:buNone/>
+                      </a:pPr>
+                      <a:r>
+                        <a:rPr lang="en-US" sz="1050" b="1" dirty="0">
+                          <a:solidFill>
+                            <a:srgbClr val="1A1A1A"/>
+                          </a:solidFill>
+                          <a:latin typeface="맑은 고딕" pitchFamily="34" charset="0"/>
+                          <a:ea typeface="맑은 고딕" pitchFamily="34" charset="-122"/>
+                          <a:cs typeface="맑은 고딕" pitchFamily="34" charset="-120"/>
+                        </a:rPr>
+                        <a:t>중간에 빼기</a:t>
+                      </a:r>
+                      <a:endParaRPr lang="en-US" sz="1050" dirty="0">
+                        <a:latin typeface="맑은 고딕" charset="0"/>
+                        <a:ea typeface="맑은 고딕" charset="0"/>
+                        <a:cs typeface="맑은 고딕" charset="0"/>
+                      </a:endParaRPr>
+                    </a:p>
+                  </a:txBody>
+                  <a:tcPr marL="76200" marR="76200" marT="76200" marB="76200" anchor="ctr">
+                    <a:lnL w="12700" cap="flat" cmpd="sng" algn="ctr">
+                      <a:solidFill>
+                        <a:srgbClr val="E5E4E1"/>
+                      </a:solidFill>
+                      <a:prstDash val="solid"/>
+                      <a:round/>
+                      <a:headEnd type="none" w="med" len="med"/>
+                      <a:tailEnd type="none" w="med" len="med"/>
+                    </a:lnL>
+                    <a:lnR w="12700" cap="flat" cmpd="sng" algn="ctr">
+                      <a:solidFill>
+                        <a:srgbClr val="E5E4E1"/>
+                      </a:solidFill>
+                      <a:prstDash val="solid"/>
+                      <a:round/>
+                      <a:headEnd type="none" w="med" len="med"/>
+                      <a:tailEnd type="none" w="med" len="med"/>
+                    </a:lnR>
+                    <a:lnT w="12700" cap="flat" cmpd="sng" algn="ctr">
+                      <a:solidFill>
+                        <a:srgbClr val="E5E4E1"/>
+                      </a:solidFill>
+                      <a:prstDash val="solid"/>
+                      <a:round/>
+                      <a:headEnd type="none" w="med" len="med"/>
+                      <a:tailEnd type="none" w="med" len="med"/>
+                    </a:lnT>
+                    <a:lnB w="12700" cap="flat" cmpd="sng" algn="ctr">
+                      <a:solidFill>
+                        <a:srgbClr val="E5E4E1"/>
+                      </a:solidFill>
+                      <a:prstDash val="solid"/>
+                      <a:round/>
+                      <a:headEnd type="none" w="med" len="med"/>
+                      <a:tailEnd type="none" w="med" len="med"/>
+                    </a:lnB>
+                  </a:tcPr>
+                </a:tc>
+                <a:tc>
+                  <a:txBody>
+                    <a:bodyPr/>
+                    <a:lstStyle/>
+                    <a:p>
+                      <a:pPr indent="0" marL="0">
+                        <a:buNone/>
+                      </a:pPr>
+                      <a:r>
+                        <a:rPr lang="en-US" sz="1050" dirty="0">
+                          <a:solidFill>
+                            <a:srgbClr val="6C6C6C"/>
+                          </a:solidFill>
+                          <a:latin typeface="맑은 고딕" pitchFamily="34" charset="0"/>
+                          <a:ea typeface="맑은 고딕" pitchFamily="34" charset="-122"/>
+                          <a:cs typeface="맑은 고딕" pitchFamily="34" charset="-120"/>
+                        </a:rPr>
+                        <a:t>중도상환</a:t>
+                      </a:r>
+                      <a:endParaRPr lang="en-US" sz="1050" dirty="0">
+                        <a:latin typeface="맑은 고딕" charset="0"/>
+                        <a:ea typeface="맑은 고딕" charset="0"/>
+                        <a:cs typeface="맑은 고딕" charset="0"/>
+                      </a:endParaRPr>
+                    </a:p>
+                  </a:txBody>
+                  <a:tcPr marL="76200" marR="76200" marT="76200" marB="76200" anchor="ctr">
+                    <a:lnL w="12700" cap="flat" cmpd="sng" algn="ctr">
+                      <a:solidFill>
+                        <a:srgbClr val="E5E4E1"/>
+                      </a:solidFill>
+                      <a:prstDash val="solid"/>
+                      <a:round/>
+                      <a:headEnd type="none" w="med" len="med"/>
+                      <a:tailEnd type="none" w="med" len="med"/>
+                    </a:lnL>
+                    <a:lnR w="12700" cap="flat" cmpd="sng" algn="ctr">
+                      <a:solidFill>
+                        <a:srgbClr val="E5E4E1"/>
+                      </a:solidFill>
+                      <a:prstDash val="solid"/>
+                      <a:round/>
+                      <a:headEnd type="none" w="med" len="med"/>
+                      <a:tailEnd type="none" w="med" len="med"/>
+                    </a:lnR>
+                    <a:lnT w="12700" cap="flat" cmpd="sng" algn="ctr">
+                      <a:solidFill>
+                        <a:srgbClr val="E5E4E1"/>
+                      </a:solidFill>
+                      <a:prstDash val="solid"/>
+                      <a:round/>
+                      <a:headEnd type="none" w="med" len="med"/>
+                      <a:tailEnd type="none" w="med" len="med"/>
+                    </a:lnT>
+                    <a:lnB w="12700" cap="flat" cmpd="sng" algn="ctr">
+                      <a:solidFill>
+                        <a:srgbClr val="E5E4E1"/>
+                      </a:solidFill>
+                      <a:prstDash val="solid"/>
+                      <a:round/>
+                      <a:headEnd type="none" w="med" len="med"/>
+                      <a:tailEnd type="none" w="med" len="med"/>
+                    </a:lnB>
+                  </a:tcPr>
+                </a:tc>
+                <a:tc>
+                  <a:txBody>
+                    <a:bodyPr/>
+                    <a:lstStyle/>
+                    <a:p>
+                      <a:pPr indent="0" marL="0">
+                        <a:buNone/>
+                      </a:pPr>
+                      <a:r>
+                        <a:rPr lang="en-US" sz="1050" dirty="0">
+                          <a:solidFill>
+                            <a:srgbClr val="3D3D3D"/>
+                          </a:solidFill>
+                          <a:latin typeface="맑은 고딕" pitchFamily="34" charset="0"/>
+                          <a:ea typeface="맑은 고딕" pitchFamily="34" charset="-122"/>
+                          <a:cs typeface="맑은 고딕" pitchFamily="34" charset="-120"/>
+                        </a:rPr>
+                        <a:t>원금이 아니라 그날 값어치의 95%(6개월 내 90%)</a:t>
+                      </a:r>
+                      <a:endParaRPr lang="en-US" sz="1050" dirty="0">
+                        <a:latin typeface="맑은 고딕" charset="0"/>
+                        <a:ea typeface="맑은 고딕" charset="0"/>
+                        <a:cs typeface="맑은 고딕" charset="0"/>
+                      </a:endParaRPr>
+                    </a:p>
+                  </a:txBody>
+                  <a:tcPr marL="76200" marR="76200" marT="76200" marB="76200" anchor="ctr">
+                    <a:lnL w="12700" cap="flat" cmpd="sng" algn="ctr">
+                      <a:solidFill>
+                        <a:srgbClr val="E5E4E1"/>
+                      </a:solidFill>
+                      <a:prstDash val="solid"/>
+                      <a:round/>
+                      <a:headEnd type="none" w="med" len="med"/>
+                      <a:tailEnd type="none" w="med" len="med"/>
+                    </a:lnL>
+                    <a:lnR w="12700" cap="flat" cmpd="sng" algn="ctr">
+                      <a:solidFill>
+                        <a:srgbClr val="E5E4E1"/>
+                      </a:solidFill>
+                      <a:prstDash val="solid"/>
+                      <a:round/>
+                      <a:headEnd type="none" w="med" len="med"/>
+                      <a:tailEnd type="none" w="med" len="med"/>
+                    </a:lnR>
+                    <a:lnT w="12700" cap="flat" cmpd="sng" algn="ctr">
+                      <a:solidFill>
+                        <a:srgbClr val="E5E4E1"/>
+                      </a:solidFill>
+                      <a:prstDash val="solid"/>
+                      <a:round/>
+                      <a:headEnd type="none" w="med" len="med"/>
+                      <a:tailEnd type="none" w="med" len="med"/>
+                    </a:lnT>
+                    <a:lnB w="12700" cap="flat" cmpd="sng" algn="ctr">
+                      <a:solidFill>
+                        <a:srgbClr val="E5E4E1"/>
+                      </a:solidFill>
+                      <a:prstDash val="solid"/>
+                      <a:round/>
+                      <a:headEnd type="none" w="med" len="med"/>
+                      <a:tailEnd type="none" w="med" len="med"/>
+                    </a:lnB>
+                  </a:tcPr>
+                </a:tc>
+              </a:tr>
+              <a:tr h="457200">
+                <a:tc>
+                  <a:txBody>
+                    <a:bodyPr/>
+                    <a:lstStyle/>
+                    <a:p>
+                      <a:pPr indent="0" marL="0">
+                        <a:buNone/>
+                      </a:pPr>
+                      <a:r>
+                        <a:rPr lang="en-US" sz="1050" b="1" dirty="0">
+                          <a:solidFill>
+                            <a:srgbClr val="1A1A1A"/>
+                          </a:solidFill>
+                          <a:latin typeface="맑은 고딕" pitchFamily="34" charset="0"/>
+                          <a:ea typeface="맑은 고딕" pitchFamily="34" charset="-122"/>
+                          <a:cs typeface="맑은 고딕" pitchFamily="34" charset="-120"/>
+                        </a:rPr>
+                        <a:t>1등급</a:t>
+                      </a:r>
+                      <a:endParaRPr lang="en-US" sz="1050" dirty="0">
+                        <a:latin typeface="맑은 고딕" charset="0"/>
+                        <a:ea typeface="맑은 고딕" charset="0"/>
+                        <a:cs typeface="맑은 고딕" charset="0"/>
+                      </a:endParaRPr>
+                    </a:p>
+                  </a:txBody>
+                  <a:tcPr marL="76200" marR="76200" marT="76200" marB="76200" anchor="ctr">
+                    <a:lnL w="12700" cap="flat" cmpd="sng" algn="ctr">
+                      <a:solidFill>
+                        <a:srgbClr val="E5E4E1"/>
+                      </a:solidFill>
+                      <a:prstDash val="solid"/>
+                      <a:round/>
+                      <a:headEnd type="none" w="med" len="med"/>
+                      <a:tailEnd type="none" w="med" len="med"/>
+                    </a:lnL>
+                    <a:lnR w="12700" cap="flat" cmpd="sng" algn="ctr">
+                      <a:solidFill>
+                        <a:srgbClr val="E5E4E1"/>
+                      </a:solidFill>
+                      <a:prstDash val="solid"/>
+                      <a:round/>
+                      <a:headEnd type="none" w="med" len="med"/>
+                      <a:tailEnd type="none" w="med" len="med"/>
+                    </a:lnR>
+                    <a:lnT w="12700" cap="flat" cmpd="sng" algn="ctr">
+                      <a:solidFill>
+                        <a:srgbClr val="E5E4E1"/>
+                      </a:solidFill>
+                      <a:prstDash val="solid"/>
+                      <a:round/>
+                      <a:headEnd type="none" w="med" len="med"/>
+                      <a:tailEnd type="none" w="med" len="med"/>
+                    </a:lnT>
+                    <a:lnB w="12700" cap="flat" cmpd="sng" algn="ctr">
+                      <a:solidFill>
+                        <a:srgbClr val="E5E4E1"/>
+                      </a:solidFill>
+                      <a:prstDash val="solid"/>
+                      <a:round/>
+                      <a:headEnd type="none" w="med" len="med"/>
+                      <a:tailEnd type="none" w="med" len="med"/>
+                    </a:lnB>
+                  </a:tcPr>
+                </a:tc>
+                <a:tc>
+                  <a:txBody>
+                    <a:bodyPr/>
+                    <a:lstStyle/>
+                    <a:p>
+                      <a:pPr indent="0" marL="0">
+                        <a:buNone/>
+                      </a:pPr>
+                      <a:r>
+                        <a:rPr lang="en-US" sz="1050" dirty="0">
+                          <a:solidFill>
+                            <a:srgbClr val="6C6C6C"/>
+                          </a:solidFill>
+                          <a:latin typeface="맑은 고딕" pitchFamily="34" charset="0"/>
+                          <a:ea typeface="맑은 고딕" pitchFamily="34" charset="-122"/>
+                          <a:cs typeface="맑은 고딕" pitchFamily="34" charset="-120"/>
+                        </a:rPr>
+                        <a:t>위험등급 1등급</a:t>
+                      </a:r>
+                      <a:endParaRPr lang="en-US" sz="1050" dirty="0">
+                        <a:latin typeface="맑은 고딕" charset="0"/>
+                        <a:ea typeface="맑은 고딕" charset="0"/>
+                        <a:cs typeface="맑은 고딕" charset="0"/>
+                      </a:endParaRPr>
+                    </a:p>
+                  </a:txBody>
+                  <a:tcPr marL="76200" marR="76200" marT="76200" marB="76200" anchor="ctr">
+                    <a:lnL w="12700" cap="flat" cmpd="sng" algn="ctr">
+                      <a:solidFill>
+                        <a:srgbClr val="E5E4E1"/>
+                      </a:solidFill>
+                      <a:prstDash val="solid"/>
+                      <a:round/>
+                      <a:headEnd type="none" w="med" len="med"/>
+                      <a:tailEnd type="none" w="med" len="med"/>
+                    </a:lnL>
+                    <a:lnR w="12700" cap="flat" cmpd="sng" algn="ctr">
+                      <a:solidFill>
+                        <a:srgbClr val="E5E4E1"/>
+                      </a:solidFill>
+                      <a:prstDash val="solid"/>
+                      <a:round/>
+                      <a:headEnd type="none" w="med" len="med"/>
+                      <a:tailEnd type="none" w="med" len="med"/>
+                    </a:lnR>
+                    <a:lnT w="12700" cap="flat" cmpd="sng" algn="ctr">
+                      <a:solidFill>
+                        <a:srgbClr val="E5E4E1"/>
+                      </a:solidFill>
+                      <a:prstDash val="solid"/>
+                      <a:round/>
+                      <a:headEnd type="none" w="med" len="med"/>
+                      <a:tailEnd type="none" w="med" len="med"/>
+                    </a:lnT>
+                    <a:lnB w="12700" cap="flat" cmpd="sng" algn="ctr">
+                      <a:solidFill>
+                        <a:srgbClr val="E5E4E1"/>
+                      </a:solidFill>
+                      <a:prstDash val="solid"/>
+                      <a:round/>
+                      <a:headEnd type="none" w="med" len="med"/>
+                      <a:tailEnd type="none" w="med" len="med"/>
+                    </a:lnB>
+                  </a:tcPr>
+                </a:tc>
+                <a:tc>
+                  <a:txBody>
+                    <a:bodyPr/>
+                    <a:lstStyle/>
+                    <a:p>
+                      <a:pPr indent="0" marL="0">
+                        <a:buNone/>
+                      </a:pPr>
+                      <a:r>
+                        <a:rPr lang="en-US" sz="1050" dirty="0">
+                          <a:solidFill>
+                            <a:srgbClr val="3D3D3D"/>
+                          </a:solidFill>
+                          <a:latin typeface="맑은 고딕" pitchFamily="34" charset="0"/>
+                          <a:ea typeface="맑은 고딕" pitchFamily="34" charset="-122"/>
+                          <a:cs typeface="맑은 고딕" pitchFamily="34" charset="-120"/>
+                        </a:rPr>
+                        <a:t>제일 좋다가 아니라 가장 위험하다는 뜻</a:t>
+                      </a:r>
+                      <a:endParaRPr lang="en-US" sz="1050" dirty="0">
+                        <a:latin typeface="맑은 고딕" charset="0"/>
+                        <a:ea typeface="맑은 고딕" charset="0"/>
+                        <a:cs typeface="맑은 고딕" charset="0"/>
+                      </a:endParaRPr>
+                    </a:p>
+                  </a:txBody>
+                  <a:tcPr marL="76200" marR="76200" marT="76200" marB="76200" anchor="ctr">
+                    <a:lnL w="12700" cap="flat" cmpd="sng" algn="ctr">
+                      <a:solidFill>
+                        <a:srgbClr val="E5E4E1"/>
+                      </a:solidFill>
+                      <a:prstDash val="solid"/>
+                      <a:round/>
+                      <a:headEnd type="none" w="med" len="med"/>
+                      <a:tailEnd type="none" w="med" len="med"/>
+                    </a:lnL>
+                    <a:lnR w="12700" cap="flat" cmpd="sng" algn="ctr">
+                      <a:solidFill>
+                        <a:srgbClr val="E5E4E1"/>
+                      </a:solidFill>
+                      <a:prstDash val="solid"/>
+                      <a:round/>
+                      <a:headEnd type="none" w="med" len="med"/>
+                      <a:tailEnd type="none" w="med" len="med"/>
+                    </a:lnR>
+                    <a:lnT w="12700" cap="flat" cmpd="sng" algn="ctr">
+                      <a:solidFill>
+                        <a:srgbClr val="E5E4E1"/>
+                      </a:solidFill>
+                      <a:prstDash val="solid"/>
+                      <a:round/>
+                      <a:headEnd type="none" w="med" len="med"/>
+                      <a:tailEnd type="none" w="med" len="med"/>
+                    </a:lnT>
+                    <a:lnB w="12700" cap="flat" cmpd="sng" algn="ctr">
+                      <a:solidFill>
+                        <a:srgbClr val="E5E4E1"/>
+                      </a:solidFill>
+                      <a:prstDash val="solid"/>
+                      <a:round/>
+                      <a:headEnd type="none" w="med" len="med"/>
+                      <a:tailEnd type="none" w="med" len="med"/>
+                    </a:lnB>
+                  </a:tcPr>
+                </a:tc>
+              </a:tr>
+            </a:tbl>
+          </a:graphicData>
+        </a:graphic>
+      </p:graphicFrame>
+      <p:sp>
+        <p:nvSpPr>
+          <p:cNvPr id="8" name="Text 3"/>
+          <p:cNvSpPr/>
+          <p:nvPr/>
+        </p:nvSpPr>
+        <p:spPr>
+          <a:xfrm>
+            <a:off x="566928" y="6473952"/>
+            <a:ext cx="10417759" cy="237744"/>
+          </a:xfrm>
+          <a:prstGeom prst="rect">
+            <a:avLst/>
+          </a:prstGeom>
+          <a:noFill/>
+          <a:ln/>
+        </p:spPr>
+        <p:txBody>
+          <a:bodyPr wrap="square" lIns="0" tIns="0" rIns="0" bIns="0" rtlCol="0" anchor="ctr"/>
+          <a:lstStyle/>
+          <a:p>
+            <a:pPr indent="0" marL="0">
+              <a:buNone/>
+            </a:pPr>
+            <a:r>
+              <a:rPr lang="en-US" sz="850" dirty="0">
+                <a:solidFill>
+                  <a:srgbClr val="84888B"/>
+                </a:solidFill>
+                <a:latin typeface="맑은 고딕" pitchFamily="34" charset="0"/>
+                <a:ea typeface="맑은 고딕" pitchFamily="34" charset="-122"/>
+                <a:cs typeface="맑은 고딕" pitchFamily="34" charset="-120"/>
+              </a:rPr>
+              <a:t>출처 — 금융감독원 전자공시시스템(DART)에 2026.08.21 올라온 투자설명서 (접수번호 20260821000193)  ·  원금을 잃을 수 있는 상품입니다</a:t>
+            </a:r>
+            <a:endParaRPr lang="en-US" sz="850" dirty="0"/>
+          </a:p>
+        </p:txBody>
+      </p:sp>
+      <p:sp>
+        <p:nvSpPr>
+          <p:cNvPr id="9" name="Text 4"/>
+          <p:cNvSpPr/>
+          <p:nvPr/>
+        </p:nvSpPr>
+        <p:spPr>
+          <a:xfrm>
+            <a:off x="11076127" y="6473952"/>
+            <a:ext cx="548640" cy="237744"/>
+          </a:xfrm>
+          <a:prstGeom prst="rect">
+            <a:avLst/>
+          </a:prstGeom>
+          <a:noFill/>
+          <a:ln/>
+        </p:spPr>
+        <p:txBody>
+          <a:bodyPr wrap="square" lIns="0" tIns="0" rIns="0" bIns="0" rtlCol="0" anchor="ctr"/>
+          <a:lstStyle/>
+          <a:p>
+            <a:pPr algn="r" indent="0" marL="0">
+              <a:buNone/>
+            </a:pPr>
+            <a:r>
+              <a:rPr lang="en-US" sz="900" dirty="0">
+                <a:solidFill>
+                  <a:srgbClr val="84888B"/>
+                </a:solidFill>
+                <a:latin typeface="맑은 고딕" pitchFamily="34" charset="0"/>
+                <a:ea typeface="맑은 고딕" pitchFamily="34" charset="-122"/>
+                <a:cs typeface="맑은 고딕" pitchFamily="34" charset="-120"/>
+              </a:rPr>
+              <a:t>15</a:t>
             </a:r>
             <a:endParaRPr lang="en-US" sz="900" dirty="0"/>
           </a:p>
@@ -21649,7 +25176,7 @@
                 <a:ea typeface="맑은 고딕" pitchFamily="34" charset="-122"/>
                 <a:cs typeface="맑은 고딕" pitchFamily="34" charset="-120"/>
               </a:rPr>
-              <a:t>언제까지 청약해야 하나</a:t>
+              <a:t>언제까지 신청해야 하나</a:t>
             </a:r>
             <a:endParaRPr lang="en-US" sz="2400" dirty="0"/>
           </a:p>
@@ -21688,7 +25215,7 @@
                 <a:ea typeface="맑은 고딕" pitchFamily="34" charset="-122"/>
                 <a:cs typeface="맑은 고딕" pitchFamily="34" charset="-120"/>
               </a:rPr>
-              <a:t>홈페이지와 공시 표지의 청약기간은 2026.08.24~2026.08.28입니다. 그런데 개인 일반투자자는 그 뒤쪽 절반을 쓸 수 없습니다 — 숙려기간과 가입의사확인기간에는 청약 자체가 불가능합니다.</a:t>
+              <a:t>홈페이지와 서류에 적힌 청약기간은 2026.08.24~2026.08.28입니다. 그런데 개인 고객은 그 뒤쪽 절반을 쓸 수 없습니다 — 뒤쪽은 다시 한 번 생각해 보시라고 법이 비워 둔 기간이라 주문 자체를 받을 수 없습니다.</a:t>
             </a:r>
             <a:endParaRPr lang="en-US" sz="1250" dirty="0"/>
           </a:p>
@@ -21767,7 +25294,7 @@
         <p:spPr>
           <a:xfrm>
             <a:off x="1481328" y="1316736"/>
-            <a:ext cx="1554480" cy="713232"/>
+            <a:ext cx="1572768" cy="713232"/>
           </a:xfrm>
           <a:prstGeom prst="rect">
             <a:avLst/>
@@ -21783,7 +25310,7 @@
               <a:buNone/>
             </a:pPr>
             <a:r>
-              <a:rPr lang="en-US" sz="1500" b="1" dirty="0">
+              <a:rPr lang="en-US" sz="1300" b="1" dirty="0">
                 <a:solidFill>
                   <a:srgbClr val="1A1A1A"/>
                 </a:solidFill>
@@ -21791,9 +25318,9 @@
                 <a:ea typeface="맑은 고딕" pitchFamily="34" charset="-122"/>
                 <a:cs typeface="맑은 고딕" pitchFamily="34" charset="-120"/>
               </a:rPr>
-              <a:t>청약 접수</a:t>
+              <a:t>신청 받는 날</a:t>
             </a:r>
-            <a:endParaRPr lang="en-US" sz="1500" dirty="0"/>
+            <a:endParaRPr lang="en-US" sz="1300" dirty="0"/>
           </a:p>
         </p:txBody>
       </p:sp>
@@ -22015,7 +25542,7 @@
         <p:spPr>
           <a:xfrm>
             <a:off x="1481328" y="2112264"/>
-            <a:ext cx="1554480" cy="713232"/>
+            <a:ext cx="1572768" cy="713232"/>
           </a:xfrm>
           <a:prstGeom prst="rect">
             <a:avLst/>
@@ -22031,7 +25558,7 @@
               <a:buNone/>
             </a:pPr>
             <a:r>
-              <a:rPr lang="en-US" sz="1500" b="1" dirty="0">
+              <a:rPr lang="en-US" sz="1300" b="1" dirty="0">
                 <a:solidFill>
                   <a:srgbClr val="1A1A1A"/>
                 </a:solidFill>
@@ -22039,9 +25566,9 @@
                 <a:ea typeface="맑은 고딕" pitchFamily="34" charset="-122"/>
                 <a:cs typeface="맑은 고딕" pitchFamily="34" charset="-120"/>
               </a:rPr>
-              <a:t>숙려기간</a:t>
+              <a:t>다시 생각하는 기간</a:t>
             </a:r>
-            <a:endParaRPr lang="en-US" sz="1500" dirty="0"/>
+            <a:endParaRPr lang="en-US" sz="1300" dirty="0"/>
           </a:p>
         </p:txBody>
       </p:sp>
@@ -22120,7 +25647,7 @@
                 <a:ea typeface="맑은 고딕" pitchFamily="34" charset="-122"/>
                 <a:cs typeface="맑은 고딕" pitchFamily="34" charset="-120"/>
               </a:rPr>
-              <a:t>2영업일 이상 · 최대 원금손실 가능금액을 고지받습니다</a:t>
+              <a:t>법으로 정해진 2영업일 이상(숙려기간) · "최대 얼마까지 잃을 수 있는지"를 따로 알려드립니다</a:t>
             </a:r>
             <a:endParaRPr lang="en-US" sz="1150" dirty="0"/>
           </a:p>
@@ -22184,7 +25711,7 @@
                 <a:ea typeface="맑은 고딕" pitchFamily="34" charset="-122"/>
                 <a:cs typeface="맑은 고딕" pitchFamily="34" charset="-120"/>
               </a:rPr>
-              <a:t>청약 불가</a:t>
+              <a:t>주문 못 받음</a:t>
             </a:r>
             <a:endParaRPr lang="en-US" sz="1050" dirty="0"/>
           </a:p>
@@ -22263,7 +25790,7 @@
         <p:spPr>
           <a:xfrm>
             <a:off x="1481328" y="2907792"/>
-            <a:ext cx="1554480" cy="713232"/>
+            <a:ext cx="1572768" cy="713232"/>
           </a:xfrm>
           <a:prstGeom prst="rect">
             <a:avLst/>
@@ -22279,7 +25806,7 @@
               <a:buNone/>
             </a:pPr>
             <a:r>
-              <a:rPr lang="en-US" sz="1500" b="1" dirty="0">
+              <a:rPr lang="en-US" sz="1300" b="1" dirty="0">
                 <a:solidFill>
                   <a:srgbClr val="1A1A1A"/>
                 </a:solidFill>
@@ -22287,9 +25814,9 @@
                 <a:ea typeface="맑은 고딕" pitchFamily="34" charset="-122"/>
                 <a:cs typeface="맑은 고딕" pitchFamily="34" charset="-120"/>
               </a:rPr>
-              <a:t>가입의사 확인</a:t>
+              <a:t>정말 하실 건지 확인</a:t>
             </a:r>
-            <a:endParaRPr lang="en-US" sz="1500" dirty="0"/>
+            <a:endParaRPr lang="en-US" sz="1300" dirty="0"/>
           </a:p>
         </p:txBody>
       </p:sp>
@@ -22368,7 +25895,7 @@
                 <a:ea typeface="맑은 고딕" pitchFamily="34" charset="-122"/>
                 <a:cs typeface="맑은 고딕" pitchFamily="34" charset="-120"/>
               </a:rPr>
-              <a:t>2026년 08월 28일 오후 5시까지 · 확인을 못 받으면 청약금은 환불됩니다</a:t>
+              <a:t>2026년 08월 28일 오후 5시까지 · 이때 확인이 안 되면 넣으신 돈은 돌려드립니다</a:t>
             </a:r>
             <a:endParaRPr lang="en-US" sz="1150" dirty="0"/>
           </a:p>
@@ -22432,7 +25959,7 @@
                 <a:ea typeface="맑은 고딕" pitchFamily="34" charset="-122"/>
                 <a:cs typeface="맑은 고딕" pitchFamily="34" charset="-120"/>
               </a:rPr>
-              <a:t>청약 불가</a:t>
+              <a:t>주문 못 받음</a:t>
             </a:r>
             <a:endParaRPr lang="en-US" sz="1050" dirty="0"/>
           </a:p>
@@ -22511,7 +26038,7 @@
         <p:spPr>
           <a:xfrm>
             <a:off x="1481328" y="3703320"/>
-            <a:ext cx="1554480" cy="713232"/>
+            <a:ext cx="1572768" cy="713232"/>
           </a:xfrm>
           <a:prstGeom prst="rect">
             <a:avLst/>
@@ -22527,7 +26054,7 @@
               <a:buNone/>
             </a:pPr>
             <a:r>
-              <a:rPr lang="en-US" sz="1500" b="1" dirty="0">
+              <a:rPr lang="en-US" sz="1300" b="1" dirty="0">
                 <a:solidFill>
                   <a:srgbClr val="1A1A1A"/>
                 </a:solidFill>
@@ -22535,9 +26062,9 @@
                 <a:ea typeface="맑은 고딕" pitchFamily="34" charset="-122"/>
                 <a:cs typeface="맑은 고딕" pitchFamily="34" charset="-120"/>
               </a:rPr>
-              <a:t>발행</a:t>
+              <a:t>상품 시작</a:t>
             </a:r>
-            <a:endParaRPr lang="en-US" sz="1500" dirty="0"/>
+            <a:endParaRPr lang="en-US" sz="1300" dirty="0"/>
           </a:p>
         </p:txBody>
       </p:sp>
@@ -22616,7 +26143,7 @@
                 <a:ea typeface="맑은 고딕" pitchFamily="34" charset="-122"/>
                 <a:cs typeface="맑은 고딕" pitchFamily="34" charset="-120"/>
               </a:rPr>
-              <a:t>납입 · 배정 · 환불 · 최초기준가격 평가</a:t>
+              <a:t>돈이 빠져나가고, 이날 종가가 앞으로 36개월의 "처음 가격"이 됩니다</a:t>
             </a:r>
             <a:endParaRPr lang="en-US" sz="1150" dirty="0"/>
           </a:p>
@@ -22764,7 +26291,7 @@
                 <a:ea typeface="맑은 고딕" pitchFamily="34" charset="-122"/>
                 <a:cs typeface="맑은 고딕" pitchFamily="34" charset="-120"/>
               </a:rPr>
-              <a:t>"청약은 8월 25일(화)까지 넣으셔야 합니다. 그 뒤 이틀은 법으로 정해진 숙려기간이라 주문을 받을 수 없고, 숙려기간이 끝나면 저희가 다시 연락드려 최종 의사를 확인합니다. 그때 확인이 안 되면 청약이 집행되지 않습니다."</a:t>
+              <a:t>"신청은 8월 25일(화)까지 넣으셔야 합니다. 그 뒤 이틀은 법으로 정해진 '다시 생각하는 기간'이라 주문을 받을 수 없고, 그 기간이 끝나면 저희가 다시 연락드려 정말 하실 건지 확인합니다. 그때 연락이 닿지 않으면 신청이 그대로 취소됩니다."</a:t>
             </a:r>
             <a:endParaRPr lang="en-US" sz="1150" dirty="0"/>
           </a:p>
@@ -22803,7 +26330,7 @@
                 <a:ea typeface="맑은 고딕" pitchFamily="34" charset="-122"/>
                 <a:cs typeface="맑은 고딕" pitchFamily="34" charset="-120"/>
               </a:rPr>
-              <a:t>전문투자자·법인 등 숙려제도 대상이 아닌 경우에만 2026.08.28까지 청약할 수 있습니다. 만 65세 이상 고령투자자는 별도 확인 절차가 더해질 수 있습니다.</a:t>
+              <a:t>법인이나 전문투자자처럼 이 제도의 대상이 아닌 경우에만 2026.08.28까지 신청할 수 있습니다. 만 65세 이상이시면 확인 절차가 하나 더 붙습니다.</a:t>
             </a:r>
             <a:endParaRPr lang="en-US" sz="1050" dirty="0"/>
           </a:p>
@@ -22842,7 +26369,7 @@
                 <a:ea typeface="맑은 고딕" pitchFamily="34" charset="-122"/>
                 <a:cs typeface="맑은 고딕" pitchFamily="34" charset="-120"/>
               </a:rPr>
-              <a:t>출처 — 금융감독원 전자공시시스템 일괄신고추가서류 접수번호 20260821000193 (2026.08.21 공시)  ·  원금 손실이 발생할 수 있는 상품입니다</a:t>
+              <a:t>출처 — 금융감독원 전자공시시스템(DART)에 2026.08.21 올라온 투자설명서 (접수번호 20260821000193)  ·  원금을 잃을 수 있는 상품입니다</a:t>
             </a:r>
             <a:endParaRPr lang="en-US" sz="850" dirty="0"/>
           </a:p>
@@ -22970,7 +26497,7 @@
                 <a:ea typeface="맑은 고딕" pitchFamily="34" charset="-122"/>
                 <a:cs typeface="맑은 고딕" pitchFamily="34" charset="-120"/>
               </a:rPr>
-              <a:t>이번 회차 한눈에</a:t>
+              <a:t>이번 주 상품, 한눈에</a:t>
             </a:r>
             <a:endParaRPr lang="en-US" sz="2400" dirty="0"/>
           </a:p>
@@ -23009,7 +26536,7 @@
                 <a:ea typeface="맑은 고딕" pitchFamily="34" charset="-122"/>
                 <a:cs typeface="맑은 고딕" pitchFamily="34" charset="-120"/>
               </a:rPr>
-              <a:t>조건과 가격은 투자설명서 원문 그대로이고, 손실 확률은 두 가지 방법으로 각각 쟀습니다.</a:t>
+              <a:t>조건과 값어치는 투자설명서에 적힌 그대로이고, 손해 볼 가능성은 두 가지 방법으로 각각 쟀습니다.</a:t>
             </a:r>
             <a:endParaRPr lang="en-US" sz="1250" dirty="0"/>
           </a:p>
@@ -23151,7 +26678,7 @@
                 <a:ea typeface="맑은 고딕" pitchFamily="34" charset="-122"/>
                 <a:cs typeface="맑은 고딕" pitchFamily="34" charset="-120"/>
               </a:rPr>
-              <a:t>지수형 6 · 혼합 3 · 종목형 8</a:t>
+              <a:t>지수만 6 · 섞임 3 · 개별 종목 8</a:t>
             </a:r>
             <a:endParaRPr lang="en-US" sz="1050" dirty="0"/>
           </a:p>
@@ -23215,7 +26742,7 @@
                 <a:ea typeface="맑은 고딕" pitchFamily="34" charset="-122"/>
                 <a:cs typeface="맑은 고딕" pitchFamily="34" charset="-120"/>
               </a:rPr>
-              <a:t>연 수익률</a:t>
+              <a:t>잘 되면 연 수익률</a:t>
             </a:r>
             <a:endParaRPr lang="en-US" sz="1150" dirty="0"/>
           </a:p>
@@ -23293,7 +26820,7 @@
                 <a:ea typeface="맑은 고딕" pitchFamily="34" charset="-122"/>
                 <a:cs typeface="맑은 고딕" pitchFamily="34" charset="-120"/>
               </a:rPr>
-              <a:t>최고 제38041회</a:t>
+              <a:t>제일 높은 건 제38041회</a:t>
             </a:r>
             <a:endParaRPr lang="en-US" sz="1050" dirty="0"/>
           </a:p>
@@ -23357,7 +26884,7 @@
                 <a:ea typeface="맑은 고딕" pitchFamily="34" charset="-122"/>
                 <a:cs typeface="맑은 고딕" pitchFamily="34" charset="-120"/>
               </a:rPr>
-              <a:t>만기</a:t>
+              <a:t>돈이 묶이는 기간</a:t>
             </a:r>
             <a:endParaRPr lang="en-US" sz="1150" dirty="0"/>
           </a:p>
@@ -23396,7 +26923,7 @@
                 <a:ea typeface="맑은 고딕" pitchFamily="34" charset="-122"/>
                 <a:cs typeface="맑은 고딕" pitchFamily="34" charset="-120"/>
               </a:rPr>
-              <a:t>36개월</a:t>
+              <a:t>최장 36개월</a:t>
             </a:r>
             <a:endParaRPr lang="en-US" sz="2400" dirty="0"/>
           </a:p>
@@ -23435,7 +26962,7 @@
                 <a:ea typeface="맑은 고딕" pitchFamily="34" charset="-122"/>
                 <a:cs typeface="맑은 고딕" pitchFamily="34" charset="-120"/>
               </a:rPr>
-              <a:t>2029.08.31 만기</a:t>
+              <a:t>2029.08.31까지 · 중간에 끝날 수 있음</a:t>
             </a:r>
             <a:endParaRPr lang="en-US" sz="1050" dirty="0"/>
           </a:p>
@@ -23499,7 +27026,7 @@
                 <a:ea typeface="맑은 고딕" pitchFamily="34" charset="-122"/>
                 <a:cs typeface="맑은 고딕" pitchFamily="34" charset="-120"/>
               </a:rPr>
-              <a:t>등급 분포</a:t>
+              <a:t>이 문서가 매긴 등급</a:t>
             </a:r>
             <a:endParaRPr lang="en-US" sz="1150" dirty="0"/>
           </a:p>
@@ -23623,7 +27150,7 @@
                 <a:ea typeface="맑은 고딕" pitchFamily="34" charset="-122"/>
                 <a:cs typeface="맑은 고딕" pitchFamily="34" charset="-120"/>
               </a:rPr>
-              <a:t>모두 원금비보장 1등급(매우높은위험) 상품입니다. 아래 등급은 안전하다는 뜻이 아니라 17종끼리 견준 순서입니다.</a:t>
+              <a:t>17종 전부 원금을 잃을 수 있는 상품이고, 위험등급도 가장 높은 1등급입니다. 이 문서가 붙인 등급은 안전하다는 뜻이 아니라 17종끼리 줄 세운 순서입니다.</a:t>
             </a:r>
             <a:endParaRPr lang="en-US" sz="1400" dirty="0"/>
           </a:p>
@@ -23647,7 +27174,7 @@
                 <a:ea typeface="맑은 고딕" pitchFamily="34" charset="-122"/>
                 <a:cs typeface="맑은 고딕" pitchFamily="34" charset="-120"/>
               </a:rPr>
-              <a:t>같은 1만원이라도 출발 가치가 다릅니다. 가장 좋은 제38044회는 10,013원, 가장 나쁜 제38046회는 6,834원입니다. 홈페이지 상품 목록에는 나오지 않는 차이입니다.</a:t>
+              <a:t>같은 1만원을 넣어도 실제 값어치가 다릅니다. 가장 좋은 제38044회는 10,013원, 가장 나쁜 제38046회는 6,834원입니다. 홈페이지 상품 목록에는 나오지 않는 차이입니다.</a:t>
             </a:r>
             <a:endParaRPr lang="en-US" sz="1400" dirty="0"/>
           </a:p>
@@ -23671,7 +27198,7 @@
                 <a:ea typeface="맑은 고딕" pitchFamily="34" charset="-122"/>
                 <a:cs typeface="맑은 고딕" pitchFamily="34" charset="-120"/>
               </a:rPr>
-              <a:t>같은 조건으로 돌린 손실 확률은 이번 회차 평균 23.1%입니다. 가장 낮은 제38032회 8.6%부터 가장 높은 제38045회 58.3%까지 벌어집니다.</a:t>
+              <a:t>컴퓨터로 다시 돌린 손해 볼 가능성은 이번 주 평균 23.1%입니다. 가장 낮은 제38032회 8.6%부터 가장 높은 제38045회 58.3%까지 벌어집니다.</a:t>
             </a:r>
             <a:endParaRPr lang="en-US" sz="1400" dirty="0"/>
           </a:p>
@@ -23695,7 +27222,7 @@
                 <a:ea typeface="맑은 고딕" pitchFamily="34" charset="-122"/>
                 <a:cs typeface="맑은 고딕" pitchFamily="34" charset="-120"/>
               </a:rPr>
-              <a:t>기초자산에 종목이 섞이면 평균 손실 확률이 지수형의 1.8배입니다. 다만 개별로는 뒤집히는 경우가 있어, 자산군이 아니라 상품별 손실 확률로 등급을 매겼습니다.</a:t>
+              <a:t>개별 종목이 섞이면 손해 볼 가능성이 지수만 담은 상품의 1.8배입니다. 다만 상품 하나하나로 보면 뒤집히는 경우가 있어, 자산 종류가 아니라 상품별 가능성으로 등급을 매겼습니다.</a:t>
             </a:r>
             <a:endParaRPr lang="en-US" sz="1400" dirty="0"/>
           </a:p>
@@ -23734,7 +27261,7 @@
                 <a:ea typeface="맑은 고딕" pitchFamily="34" charset="-122"/>
                 <a:cs typeface="맑은 고딕" pitchFamily="34" charset="-120"/>
               </a:rPr>
-              <a:t>출처 — 금융감독원 전자공시시스템 일괄신고추가서류 접수번호 20260821000193 (2026.08.21 공시)  ·  원금 손실이 발생할 수 있는 상품입니다</a:t>
+              <a:t>출처 — 금융감독원 전자공시시스템(DART)에 2026.08.21 올라온 투자설명서 (접수번호 20260821000193)  ·  원금을 잃을 수 있는 상품입니다</a:t>
             </a:r>
             <a:endParaRPr lang="en-US" sz="850" dirty="0"/>
           </a:p>
@@ -23862,7 +27389,7 @@
                 <a:ea typeface="맑은 고딕" pitchFamily="34" charset="-122"/>
                 <a:cs typeface="맑은 고딕" pitchFamily="34" charset="-120"/>
               </a:rPr>
-              <a:t>손실 확률을 어떻게 쟀나</a:t>
+              <a:t>손해 볼 가능성, 두 가지로 쟀습니다</a:t>
             </a:r>
             <a:endParaRPr lang="en-US" sz="2400" dirty="0"/>
           </a:p>
@@ -23901,7 +27428,7 @@
                 <a:ea typeface="맑은 고딕" pitchFamily="34" charset="-122"/>
                 <a:cs typeface="맑은 고딕" pitchFamily="34" charset="-120"/>
               </a:rPr>
-              <a:t>둘은 다른 질문에 답하며, 답이 크게 다릅니다. 어느 하나만 보면 상담에서 틀린 말을 하게 됩니다.</a:t>
+              <a:t>서로 다른 질문에 답하는 숫자라 값도 꽤 다릅니다. 하나만 보고 말씀드리면 틀린 안내가 됩니다.</a:t>
             </a:r>
             <a:endParaRPr lang="en-US" sz="1250" dirty="0"/>
           </a:p>
@@ -23965,7 +27492,7 @@
                 <a:ea typeface="맑은 고딕" pitchFamily="34" charset="-122"/>
                 <a:cs typeface="맑은 고딕" pitchFamily="34" charset="-120"/>
               </a:rPr>
-              <a:t>A. 발행사 20년 모의실험</a:t>
+              <a:t>A. 회사가 과거로 돌려본 결과</a:t>
             </a:r>
             <a:endParaRPr lang="en-US" sz="1500" dirty="0"/>
           </a:p>
@@ -24149,7 +27676,7 @@
                 <a:ea typeface="맑은 고딕" pitchFamily="34" charset="-122"/>
                 <a:cs typeface="맑은 고딕" pitchFamily="34" charset="-120"/>
               </a:rPr>
-              <a:t>2003.01.02~2023.08.11 매 영업일에 같은 상품을 새로 샀다고 가정 (제38031회 5,100회)</a:t>
+              <a:t>2003.01.02~2023.08.11 사이 매일 하루도 빠짐없이 가입했다고 치고 계산 (제38031회 5,100번)</a:t>
             </a:r>
             <a:endParaRPr lang="en-US" sz="1150" dirty="0"/>
           </a:p>
@@ -24188,7 +27715,7 @@
                 <a:ea typeface="맑은 고딕" pitchFamily="34" charset="-122"/>
                 <a:cs typeface="맑은 고딕" pitchFamily="34" charset="-120"/>
               </a:rPr>
-              <a:t>강점</a:t>
+              <a:t>좋은 점</a:t>
             </a:r>
             <a:endParaRPr lang="en-US" sz="1100" dirty="0"/>
           </a:p>
@@ -24230,7 +27757,7 @@
                 <a:ea typeface="맑은 고딕" pitchFamily="34" charset="-122"/>
                 <a:cs typeface="맑은 고딕" pitchFamily="34" charset="-120"/>
               </a:rPr>
-              <a:t>실제로 있었던 가격 경로. 2008년 금융위기도 들어 있습니다.</a:t>
+              <a:t>지어낸 값이 아니라 실제로 있었던 가격입니다. 2008년 금융위기도 들어 있습니다.</a:t>
             </a:r>
             <a:endParaRPr lang="en-US" sz="1150" dirty="0"/>
           </a:p>
@@ -24269,7 +27796,7 @@
                 <a:ea typeface="맑은 고딕" pitchFamily="34" charset="-122"/>
                 <a:cs typeface="맑은 고딕" pitchFamily="34" charset="-120"/>
               </a:rPr>
-              <a:t>한계</a:t>
+              <a:t>조심</a:t>
             </a:r>
             <a:endParaRPr lang="en-US" sz="1100" dirty="0"/>
           </a:p>
@@ -24311,7 +27838,7 @@
                 <a:ea typeface="맑은 고딕" pitchFamily="34" charset="-122"/>
                 <a:cs typeface="맑은 고딕" pitchFamily="34" charset="-120"/>
               </a:rPr>
-              <a:t>그 20년은 대체로 상승장이었고, 상품마다 표본 구간이 다릅니다. 표본 수가 다른 두 상품을 나란히 놓고 비교하면 안 됩니다.</a:t>
+              <a:t>그 20년은 대체로 오르는 장이었고, 상품마다 돌려본 기간도 다릅니다. 기간이 다른 두 상품을 나란히 놓고 비교하면 안 됩니다.</a:t>
             </a:r>
             <a:endParaRPr lang="en-US" sz="1150" dirty="0"/>
           </a:p>
@@ -24375,7 +27902,7 @@
                 <a:ea typeface="맑은 고딕" pitchFamily="34" charset="-122"/>
                 <a:cs typeface="맑은 고딕" pitchFamily="34" charset="-120"/>
               </a:rPr>
-              <a:t>B. 같은 조건 모의실험</a:t>
+              <a:t>B. 컴퓨터로 다시 돌린 결과</a:t>
             </a:r>
             <a:endParaRPr lang="en-US" sz="1500" dirty="0"/>
           </a:p>
@@ -24439,7 +27966,7 @@
                 <a:ea typeface="맑은 고딕" pitchFamily="34" charset="-122"/>
                 <a:cs typeface="맑은 고딕" pitchFamily="34" charset="-120"/>
               </a:rPr>
-              <a:t>자체 계산</a:t>
+              <a:t>직접 계산</a:t>
             </a:r>
             <a:endParaRPr lang="en-US" sz="1000" dirty="0"/>
           </a:p>
@@ -24478,7 +28005,7 @@
                 <a:ea typeface="맑은 고딕" pitchFamily="34" charset="-122"/>
                 <a:cs typeface="맑은 고딕" pitchFamily="34" charset="-120"/>
               </a:rPr>
-              <a:t>"발행사가 가격 매길 때 쓴 변동성이 실제로 나타난다면?"</a:t>
+              <a:t>"회사가 값 매길 때 잡은 만큼 실제로 출렁인다면?"</a:t>
             </a:r>
             <a:endParaRPr lang="en-US" sz="1250" dirty="0"/>
           </a:p>
@@ -24559,7 +28086,7 @@
                 <a:ea typeface="맑은 고딕" pitchFamily="34" charset="-122"/>
                 <a:cs typeface="맑은 고딕" pitchFamily="34" charset="-120"/>
               </a:rPr>
-              <a:t>17종 전부를 같은 경로 수(40,000회)·같은 기간·같은 판정 규칙으로. 변동성·상관계수는 투자설명서 값 그대로.</a:t>
+              <a:t>17종 전부를 똑같은 횟수(40,000번)·똑같은 기간·똑같은 규칙으로. 출렁임과 같이 움직이는 정도는 투자설명서 값 그대로.</a:t>
             </a:r>
             <a:endParaRPr lang="en-US" sz="1150" dirty="0"/>
           </a:p>
@@ -24598,7 +28125,7 @@
                 <a:ea typeface="맑은 고딕" pitchFamily="34" charset="-122"/>
                 <a:cs typeface="맑은 고딕" pitchFamily="34" charset="-120"/>
               </a:rPr>
-              <a:t>강점</a:t>
+              <a:t>좋은 점</a:t>
             </a:r>
             <a:endParaRPr lang="en-US" sz="1100" dirty="0"/>
           </a:p>
@@ -24640,7 +28167,7 @@
                 <a:ea typeface="맑은 고딕" pitchFamily="34" charset="-122"/>
                 <a:cs typeface="맑은 고딕" pitchFamily="34" charset="-120"/>
               </a:rPr>
-              <a:t>표본 구간 차이가 사라져 전 상품을 정직하게 줄 세울 수 있습니다.</a:t>
+              <a:t>기간 차이가 없어져서 전 상품을 공평하게 줄 세울 수 있습니다.</a:t>
             </a:r>
             <a:endParaRPr lang="en-US" sz="1150" dirty="0"/>
           </a:p>
@@ -24679,7 +28206,7 @@
                 <a:ea typeface="맑은 고딕" pitchFamily="34" charset="-122"/>
                 <a:cs typeface="맑은 고딕" pitchFamily="34" charset="-120"/>
               </a:rPr>
-              <a:t>한계</a:t>
+              <a:t>조심</a:t>
             </a:r>
             <a:endParaRPr lang="en-US" sz="1100" dirty="0"/>
           </a:p>
@@ -24721,7 +28248,7 @@
                 <a:ea typeface="맑은 고딕" pitchFamily="34" charset="-122"/>
                 <a:cs typeface="맑은 고딕" pitchFamily="34" charset="-120"/>
               </a:rPr>
-              <a:t>기대수익률 0으로 두었고, 발행사가 쓴 내재변동성은 보통 실제보다 높습니다. 보수적인 상한으로 읽어야 합니다.</a:t>
+              <a:t>어느 자산도 오른다고 보지 않았고, 회사가 쓴 출렁임 수치는 실제보다 크게 잡히는 게 보통입니다. 넉넉하게 잡은 최대치로 읽으셔야 합니다.</a:t>
             </a:r>
             <a:endParaRPr lang="en-US" sz="1150" dirty="0"/>
           </a:p>
@@ -24799,7 +28326,7 @@
                 <a:ea typeface="맑은 고딕" pitchFamily="34" charset="-122"/>
                 <a:cs typeface="맑은 고딕" pitchFamily="34" charset="-120"/>
               </a:rPr>
-              <a:t>절대 수준은 A와 B 사이 어딘가입니다. 상품끼리 견줄 때는 B를, "그래서 얼마나 위험한가"를 가늠할 때는 A와 B를 함께 보십시오. 기대수익률을 0%에서 연 6%로 바꿔도 순위는 거의 그대로였습니다.</a:t>
+              <a:t>진짜 값은 A와 B 사이 어딘가입니다. 상품끼리 견줄 때는 B를, "그래서 얼마나 위험하냐"를 가늠할 때는 A와 B를 같이 보십시오. "자산이 해마다 6%씩 오른다"고 바꿔 돌려도 순서는 거의 그대로였습니다.</a:t>
             </a:r>
             <a:endParaRPr lang="en-US" sz="1200" dirty="0"/>
           </a:p>
@@ -24838,7 +28365,7 @@
                 <a:ea typeface="맑은 고딕" pitchFamily="34" charset="-122"/>
                 <a:cs typeface="맑은 고딕" pitchFamily="34" charset="-120"/>
               </a:rPr>
-              <a:t>출처 — 금융감독원 전자공시시스템 일괄신고추가서류 접수번호 20260821000193 (2026.08.21 공시)  ·  원금 손실이 발생할 수 있는 상품입니다</a:t>
+              <a:t>출처 — 금융감독원 전자공시시스템(DART)에 2026.08.21 올라온 투자설명서 (접수번호 20260821000193)  ·  원금을 잃을 수 있는 상품입니다</a:t>
             </a:r>
             <a:endParaRPr lang="en-US" sz="850" dirty="0"/>
           </a:p>
@@ -24966,7 +28493,7 @@
                 <a:ea typeface="맑은 고딕" pitchFamily="34" charset="-122"/>
                 <a:cs typeface="맑은 고딕" pitchFamily="34" charset="-120"/>
               </a:rPr>
-              <a:t>종목이 섞이면 더 위험한가</a:t>
+              <a:t>개별 종목이 섞이면 더 위험한가</a:t>
             </a:r>
             <a:endParaRPr lang="en-US" sz="2400" dirty="0"/>
           </a:p>
@@ -25005,7 +28532,7 @@
                 <a:ea typeface="맑은 고딕" pitchFamily="34" charset="-122"/>
                 <a:cs typeface="맑은 고딕" pitchFamily="34" charset="-120"/>
               </a:rPr>
-              <a:t>일반적으로 종목형 ELS가 지수형보다 위험하다고 봅니다. 이번 회차에서 그 말이 맞는지 B로 확인했습니다.</a:t>
+              <a:t>보통 개별 종목이 들어간 ELS가 지수만 담은 것보다 위험하다고 봅니다. 이번 주 상품에서 그 말이 맞는지 B로 확인했습니다.</a:t>
             </a:r>
             <a:endParaRPr lang="en-US" sz="1250" dirty="0"/>
           </a:p>
@@ -25051,9 +28578,9 @@
               <a:tblPr/>
               <a:tblGrid>
                 <a:gridCol w="1554480"/>
-                <a:gridCol w="841248"/>
-                <a:gridCol w="1207008"/>
-                <a:gridCol w="1097280"/>
+                <a:gridCol w="786384"/>
+                <a:gridCol w="1078992"/>
+                <a:gridCol w="1280160"/>
                 <a:gridCol w="1033272"/>
               </a:tblGrid>
               <a:tr h="310896">
@@ -25074,7 +28601,7 @@
                           <a:ea typeface="맑은 고딕" pitchFamily="34" charset="-122"/>
                           <a:cs typeface="맑은 고딕" pitchFamily="34" charset="-120"/>
                         </a:rPr>
-                        <a:t>기초자산 종류</a:t>
+                        <a:t>무엇이 기준인가</a:t>
                       </a:r>
                       <a:endParaRPr lang="en-US" sz="1150" dirty="0">
                         <a:latin typeface="맑은 고딕" charset="0"/>
@@ -25210,7 +28737,7 @@
                           <a:ea typeface="맑은 고딕" pitchFamily="34" charset="-122"/>
                           <a:cs typeface="맑은 고딕" pitchFamily="34" charset="-120"/>
                         </a:rPr>
-                        <a:t>적용 변동성</a:t>
+                        <a:t>가격 출렁임</a:t>
                       </a:r>
                       <a:endParaRPr lang="en-US" sz="1150" dirty="0">
                         <a:latin typeface="맑은 고딕" charset="0"/>
@@ -25278,7 +28805,7 @@
                           <a:ea typeface="맑은 고딕" pitchFamily="34" charset="-122"/>
                           <a:cs typeface="맑은 고딕" pitchFamily="34" charset="-120"/>
                         </a:rPr>
-                        <a:t>손실 확률</a:t>
+                        <a:t>손해 볼 가능성</a:t>
                       </a:r>
                       <a:endParaRPr lang="en-US" sz="1150" dirty="0">
                         <a:latin typeface="맑은 고딕" charset="0"/>
@@ -25416,7 +28943,7 @@
                           <a:ea typeface="맑은 고딕" pitchFamily="34" charset="-122"/>
                           <a:cs typeface="맑은 고딕" pitchFamily="34" charset="-120"/>
                         </a:rPr>
-                        <a:t>지수형</a:t>
+                        <a:t>지수만</a:t>
                       </a:r>
                       <a:endParaRPr lang="en-US" sz="1150" dirty="0">
                         <a:latin typeface="맑은 고딕" charset="0"/>
@@ -25743,7 +29270,7 @@
                           <a:ea typeface="맑은 고딕" pitchFamily="34" charset="-122"/>
                           <a:cs typeface="맑은 고딕" pitchFamily="34" charset="-120"/>
                         </a:rPr>
-                        <a:t>혼합형</a:t>
+                        <a:t>지수 + 종목</a:t>
                       </a:r>
                       <a:endParaRPr lang="en-US" sz="1150" dirty="0">
                         <a:latin typeface="맑은 고딕" charset="0"/>
@@ -26070,7 +29597,7 @@
                           <a:ea typeface="맑은 고딕" pitchFamily="34" charset="-122"/>
                           <a:cs typeface="맑은 고딕" pitchFamily="34" charset="-120"/>
                         </a:rPr>
-                        <a:t>종목형</a:t>
+                        <a:t>개별 종목만</a:t>
                       </a:r>
                       <a:endParaRPr lang="en-US" sz="1150" dirty="0">
                         <a:latin typeface="맑은 고딕" charset="0"/>
@@ -26423,7 +29950,7 @@
                 <a:ea typeface="맑은 고딕" pitchFamily="34" charset="-122"/>
                 <a:cs typeface="맑은 고딕" pitchFamily="34" charset="-120"/>
               </a:rPr>
-              <a:t>평균으로는 맞습니다. 종목형 손실 확률이 지수형의 1.8배, 적용 변동성은 41% 대 70%로 갈립니다.</a:t>
+              <a:t>평균으로 보면 맞는 말입니다. 개별 종목만 담은 상품이 지수만 담은 것의 1.8배이고, 가격 출렁임도 41% 대 70%로 갈립니다.</a:t>
             </a:r>
             <a:endParaRPr lang="en-US" sz="1250" dirty="0"/>
           </a:p>
@@ -26447,7 +29974,7 @@
                 <a:ea typeface="맑은 고딕" pitchFamily="34" charset="-122"/>
                 <a:cs typeface="맑은 고딕" pitchFamily="34" charset="-120"/>
               </a:rPr>
-              <a:t>개별 상품으로는 뒤집힙니다. 순수 지수형 제38042회가 24.8%로 종목형 대부분보다 위험하고, 제38044회는 8.9%로 17종 중 2번째로 낮습니다.</a:t>
+              <a:t>그런데 상품 하나하나로 내려가면 뒤집힙니다. 지수만 담은 제38042회가 24.8%로 종목 섞인 상품 대부분보다 위험하고, 제38044회는 8.9%로 17종 중 2번째로 낮습니다.</a:t>
             </a:r>
             <a:endParaRPr lang="en-US" sz="1250" dirty="0"/>
           </a:p>
@@ -26471,7 +29998,7 @@
                 <a:ea typeface="맑은 고딕" pitchFamily="34" charset="-122"/>
                 <a:cs typeface="맑은 고딕" pitchFamily="34" charset="-120"/>
               </a:rPr>
-              <a:t>가른 것은 자산군이 아니라 낙인 깊이와 상관계수였습니다. 제38042회는 낙인 45%(이번 회차 최저 쿠션)에 상관 0.19, 제38044회는 낙인 35%에 상관 0.94입니다.</a:t>
+              <a:t>실제로 갈라놓은 건 자산 종류가 아니라 "원금 지키는 선이 얼마나 아래인가"와 "두 자산이 얼마나 같이 움직이는가"였습니다. 제38042회는 선이 45%(이번 주에서 가장 높아 여유가 제일 적음)에 같이 움직임 0.19, 제38044회는 선이 35%에 같이 움직임 0.94입니다.</a:t>
             </a:r>
             <a:endParaRPr lang="en-US" sz="1250" dirty="0"/>
           </a:p>
@@ -26538,7 +30065,7 @@
                 <a:ea typeface="맑은 고딕" pitchFamily="34" charset="-122"/>
                 <a:cs typeface="맑은 고딕" pitchFamily="34" charset="-120"/>
               </a:rPr>
-              <a:t>상관계수가 낮으면 "가장 많이 떨어진 하나"로 판정하는 구조에서 크게 불리해집니다. 자산군보다 이쪽이 결정적입니다.</a:t>
+              <a:t>두 자산이 따로 놀수록 "더 많이 떨어진 하나로 판정한다"는 조건에서 크게 불리해집니다. 무엇을 담았느냐보다 이쪽이 결정적입니다.</a:t>
             </a:r>
             <a:endParaRPr lang="en-US" sz="1150" dirty="0"/>
           </a:p>
@@ -26577,7 +30104,7 @@
                 <a:ea typeface="맑은 고딕" pitchFamily="34" charset="-122"/>
                 <a:cs typeface="맑은 고딕" pitchFamily="34" charset="-120"/>
               </a:rPr>
-              <a:t>출처 — 금융감독원 전자공시시스템 일괄신고추가서류 접수번호 20260821000193 (2026.08.21 공시)  ·  원금 손실이 발생할 수 있는 상품입니다</a:t>
+              <a:t>출처 — 금융감독원 전자공시시스템(DART)에 2026.08.21 올라온 투자설명서 (접수번호 20260821000193)  ·  원금을 잃을 수 있는 상품입니다</a:t>
             </a:r>
             <a:endParaRPr lang="en-US" sz="850" dirty="0"/>
           </a:p>
@@ -26705,7 +30232,7 @@
                 <a:ea typeface="맑은 고딕" pitchFamily="34" charset="-122"/>
                 <a:cs typeface="맑은 고딕" pitchFamily="34" charset="-120"/>
               </a:rPr>
-              <a:t>쿠폰이 높으면 그만큼 위험한가</a:t>
+              <a:t>수익률이 높으면 그만큼 위험한가</a:t>
             </a:r>
             <a:endParaRPr lang="en-US" sz="2400" dirty="0"/>
           </a:p>
@@ -26744,7 +30271,7 @@
                 <a:ea typeface="맑은 고딕" pitchFamily="34" charset="-122"/>
                 <a:cs typeface="맑은 고딕" pitchFamily="34" charset="-120"/>
               </a:rPr>
-              <a:t>"수익률이 높으면 그만큼 위험한 것 아니냐" — 방향은 맞습니다. 다만 정비례는 아니고, 어긋나는 그 자리가 곧 상품을 고르는 자리입니다.</a:t>
+              <a:t>"수익률이 높으면 그만큼 위험한 것 아니냐" — 맞는 말씀입니다. 다만 정확히 비례하지는 않고, 그 어긋나는 자리가 바로 상품을 고르는 자리입니다.</a:t>
             </a:r>
             <a:endParaRPr lang="en-US" sz="1250" dirty="0"/>
           </a:p>
@@ -26795,7 +30322,7 @@
                           <a:ea typeface="맑은 고딕" pitchFamily="34" charset="-122"/>
                           <a:cs typeface="맑은 고딕" pitchFamily="34" charset="-120"/>
                         </a:rPr>
-                        <a:t>쿠폰과 무엇의 관계</a:t>
+                        <a:t>연 수익률과 무엇의 관계인가</a:t>
                       </a:r>
                       <a:endParaRPr lang="en-US" sz="1150" dirty="0">
                         <a:latin typeface="맑은 고딕" charset="0"/>
@@ -26931,7 +30458,7 @@
                           <a:ea typeface="맑은 고딕" pitchFamily="34" charset="-122"/>
                           <a:cs typeface="맑은 고딕" pitchFamily="34" charset="-120"/>
                         </a:rPr>
-                        <a:t>가격 정상 13종</a:t>
+                        <a:t>값어치 멀쩡한 13종</a:t>
                       </a:r>
                       <a:endParaRPr lang="en-US" sz="1150" dirty="0">
                         <a:latin typeface="맑은 고딕" charset="0"/>
@@ -27001,7 +30528,7 @@
                           <a:ea typeface="맑은 고딕" pitchFamily="34" charset="-122"/>
                           <a:cs typeface="맑은 고딕" pitchFamily="34" charset="-120"/>
                         </a:rPr>
-                        <a:t>적용 변동성</a:t>
+                        <a:t>가격 출렁임</a:t>
                       </a:r>
                       <a:endParaRPr lang="en-US" sz="1150" dirty="0">
                         <a:latin typeface="맑은 고딕" charset="0"/>
@@ -27080,7 +30607,7 @@
                           <a:ea typeface="맑은 고딕" pitchFamily="34" charset="-122"/>
                           <a:cs typeface="맑은 고딕" pitchFamily="34" charset="-120"/>
                         </a:rPr>
-                        <a:t>   p &lt;0.001</a:t>
+                        <a:t>   우연일 확률 0.1% 미만</a:t>
                       </a:r>
                       <a:endParaRPr lang="en-US" sz="1150" dirty="0">
                         <a:latin typeface="맑은 고딕" charset="0"/>
@@ -27159,7 +30686,7 @@
                           <a:ea typeface="맑은 고딕" pitchFamily="34" charset="-122"/>
                           <a:cs typeface="맑은 고딕" pitchFamily="34" charset="-120"/>
                         </a:rPr>
-                        <a:t>   p &lt;0.001</a:t>
+                        <a:t>   우연일 확률 0.1% 미만</a:t>
                       </a:r>
                       <a:endParaRPr lang="en-US" sz="1150" dirty="0">
                         <a:latin typeface="맑은 고딕" charset="0"/>
@@ -27226,7 +30753,7 @@
                           <a:ea typeface="맑은 고딕" pitchFamily="34" charset="-122"/>
                           <a:cs typeface="맑은 고딕" pitchFamily="34" charset="-120"/>
                         </a:rPr>
-                        <a:t>손실 확률</a:t>
+                        <a:t>손해 볼 가능성</a:t>
                       </a:r>
                       <a:endParaRPr lang="en-US" sz="1150" dirty="0">
                         <a:latin typeface="맑은 고딕" charset="0"/>
@@ -27305,7 +30832,7 @@
                           <a:ea typeface="맑은 고딕" pitchFamily="34" charset="-122"/>
                           <a:cs typeface="맑은 고딕" pitchFamily="34" charset="-120"/>
                         </a:rPr>
-                        <a:t>   p 0.012</a:t>
+                        <a:t>   우연일 확률 1.2%</a:t>
                       </a:r>
                       <a:endParaRPr lang="en-US" sz="1150" dirty="0">
                         <a:latin typeface="맑은 고딕" charset="0"/>
@@ -27384,7 +30911,7 @@
                           <a:ea typeface="맑은 고딕" pitchFamily="34" charset="-122"/>
                           <a:cs typeface="맑은 고딕" pitchFamily="34" charset="-120"/>
                         </a:rPr>
-                        <a:t>   p 0.014</a:t>
+                        <a:t>   우연일 확률 1.4%</a:t>
                       </a:r>
                       <a:endParaRPr lang="en-US" sz="1150" dirty="0">
                         <a:latin typeface="맑은 고딕" charset="0"/>
@@ -27451,7 +30978,7 @@
                           <a:ea typeface="맑은 고딕" pitchFamily="34" charset="-122"/>
                           <a:cs typeface="맑은 고딕" pitchFamily="34" charset="-120"/>
                         </a:rPr>
-                        <a:t>기대손실 (손실 확률 × 평균 손실폭)</a:t>
+                        <a:t>평균적으로 잃는 크기 (가능성 × 잃을 때의 크기)</a:t>
                       </a:r>
                       <a:endParaRPr lang="en-US" sz="1150" dirty="0">
                         <a:latin typeface="맑은 고딕" charset="0"/>
@@ -27530,7 +31057,7 @@
                           <a:ea typeface="맑은 고딕" pitchFamily="34" charset="-122"/>
                           <a:cs typeface="맑은 고딕" pitchFamily="34" charset="-120"/>
                         </a:rPr>
-                        <a:t>   p 0.001</a:t>
+                        <a:t>   우연일 확률 0.1%</a:t>
                       </a:r>
                       <a:endParaRPr lang="en-US" sz="1150" dirty="0">
                         <a:latin typeface="맑은 고딕" charset="0"/>
@@ -27609,7 +31136,7 @@
                           <a:ea typeface="맑은 고딕" pitchFamily="34" charset="-122"/>
                           <a:cs typeface="맑은 고딕" pitchFamily="34" charset="-120"/>
                         </a:rPr>
-                        <a:t>   p &lt;0.001</a:t>
+                        <a:t>   우연일 확률 0.1% 미만</a:t>
                       </a:r>
                       <a:endParaRPr lang="en-US" sz="1150" dirty="0">
                         <a:latin typeface="맑은 고딕" charset="0"/>
@@ -27698,7 +31225,7 @@
                 <a:ea typeface="맑은 고딕" pitchFamily="34" charset="-122"/>
                 <a:cs typeface="맑은 고딕" pitchFamily="34" charset="-120"/>
               </a:rPr>
-              <a:t>순위상관(스피어만)과 양측 유의확률. 1에 가까울수록 "쿠폰이 높은 상품이 위험도 높다"가 잘 들어맞습니다.  가격 정상 = 출발 가치 갭이 -5%보다 나은 13종 — 나머지 4종은 쿠폰이 위험의 대가가 아니라 수수료로 빠져나간 상품이라 법칙 자체가 성립하지 않습니다.</a:t>
+              <a:t>숫자가 1에 가까울수록 "수익률 높은 상품이 위험도 크다"가 잘 들어맞고, 0이면 아무 관계가 없다는 뜻입니다(순서를 견주는 방식으로 쟀습니다).  값어치 멀쩡한 13종 = 넣는 순간의 값어치가 제값보다 5% 넘게 깎이지는 않은 상품 — 나머지 4종은 높은 수익률이 위험의 대가가 아니라 비용으로 빠져나간 상품이라 이 법칙 자체가 통하지 않습니다.</a:t>
             </a:r>
             <a:endParaRPr lang="en-US" sz="1000" dirty="0"/>
           </a:p>
@@ -27762,7 +31289,7 @@
                 <a:ea typeface="맑은 고딕" pitchFamily="34" charset="-122"/>
                 <a:cs typeface="맑은 고딕" pitchFamily="34" charset="-120"/>
               </a:rPr>
-              <a:t>짝으로 세면</a:t>
+              <a:t>둘씩 짝지어 세면</a:t>
             </a:r>
             <a:endParaRPr lang="en-US" sz="1050" dirty="0"/>
           </a:p>
@@ -27843,7 +31370,7 @@
                 <a:ea typeface="맑은 고딕" pitchFamily="34" charset="-122"/>
                 <a:cs typeface="맑은 고딕" pitchFamily="34" charset="-120"/>
               </a:rPr>
-              <a:t>17종에서 만들 수 있는 136짝 중 102짝이 "쿠폰 높은 쪽이 기대손실도 크다"를 따랐습니다</a:t>
+              <a:t>17종으로 만들 수 있는 136짝 중 102짝에서 "수익률 높은 쪽이 잃는 크기도 컸다"가 맞았습니다</a:t>
             </a:r>
             <a:endParaRPr lang="en-US" sz="1000" dirty="0"/>
           </a:p>
@@ -27907,7 +31434,7 @@
                 <a:ea typeface="맑은 고딕" pitchFamily="34" charset="-122"/>
                 <a:cs typeface="맑은 고딕" pitchFamily="34" charset="-120"/>
               </a:rPr>
-              <a:t>그런데 회귀 설명력</a:t>
+              <a:t>그런데 수익률로 맞히는 건</a:t>
             </a:r>
             <a:endParaRPr lang="en-US" sz="1050" dirty="0"/>
           </a:p>
@@ -27988,7 +31515,7 @@
                 <a:ea typeface="맑은 고딕" pitchFamily="34" charset="-122"/>
                 <a:cs typeface="맑은 고딕" pitchFamily="34" charset="-120"/>
               </a:rPr>
-              <a:t>쿠폰 1%p당 손실 확률 +0.34%p — 방향은 맞지만 산포가 그 몇 배입니다</a:t>
+              <a:t>수익률 1%p당 손해 볼 가능성 +0.34%p — 방향은 맞지만 상품마다 그 몇 배씩 들쭉날쭉합니다</a:t>
             </a:r>
             <a:endParaRPr lang="en-US" sz="1000" dirty="0"/>
           </a:p>
@@ -28052,7 +31579,7 @@
                 <a:ea typeface="맑은 고딕" pitchFamily="34" charset="-122"/>
                 <a:cs typeface="맑은 고딕" pitchFamily="34" charset="-120"/>
               </a:rPr>
-              <a:t>위험 한 단위당 쿠폰</a:t>
+              <a:t>같은 위험에 받는 수익률</a:t>
             </a:r>
             <a:endParaRPr lang="en-US" sz="1050" dirty="0"/>
           </a:p>
@@ -28133,7 +31660,7 @@
                 <a:ea typeface="맑은 고딕" pitchFamily="34" charset="-122"/>
                 <a:cs typeface="맑은 고딕" pitchFamily="34" charset="-120"/>
               </a:rPr>
-              <a:t>0.57(제38046회) ~ 3.48(제38044회). 완전 비례라면 모두 같아야 합니다</a:t>
+              <a:t>0.57(제38046회) ~ 3.48(제38044회). 정확히 비례한다면 전부 같아야 합니다</a:t>
             </a:r>
             <a:endParaRPr lang="en-US" sz="1000" dirty="0"/>
           </a:p>
@@ -28197,7 +31724,7 @@
                 <a:ea typeface="맑은 고딕" pitchFamily="34" charset="-122"/>
                 <a:cs typeface="맑은 고딕" pitchFamily="34" charset="-120"/>
               </a:rPr>
-              <a:t>왜 우연이 아닌가</a:t>
+              <a:t>왜 그런가</a:t>
             </a:r>
             <a:endParaRPr lang="en-US" sz="1200" dirty="0"/>
           </a:p>
@@ -28239,7 +31766,7 @@
                 <a:ea typeface="맑은 고딕" pitchFamily="34" charset="-122"/>
                 <a:cs typeface="맑은 고딕" pitchFamily="34" charset="-120"/>
               </a:rPr>
-              <a:t>ELS 쿠폰은 고객이 발행사에 풋옵션을 팔고 받는 프리미엄입니다. "낙인 아래로 안 떨어지면 이자를 드리겠다"는 곧 "떨어지면 그 손실은 고객이 떠안는다"는 뜻이고, 그 값이 쿠폰입니다. 변동성이 높을수록 그 풋이 비싸집니다. 관행이 아니라 가격 산식 자체가 그렇습니다.</a:t>
+              <a:t>ELS의 수익률은 고객이 회사에 "많이 떨어지면 그 손해는 제가 떠안겠습니다"라는 약속을 팔고 받는 값입니다. "많이 안 떨어지면 이자를 드리겠다"를 뒤집으면 "떨어지면 고객이 부담한다"는 뜻이고, 그 약속의 가격이 곧 수익률입니다. 심하게 출렁일수록 그 약속이 비싸집니다. 관행이 아니라 값 매기는 계산식 자체가 그렇습니다.</a:t>
             </a:r>
             <a:endParaRPr lang="en-US" sz="1050" dirty="0"/>
           </a:p>
@@ -28303,7 +31830,7 @@
                 <a:ea typeface="맑은 고딕" pitchFamily="34" charset="-122"/>
                 <a:cs typeface="맑은 고딕" pitchFamily="34" charset="-120"/>
               </a:rPr>
-              <a:t>쿠폰이 보상하는 것은 확률이 아닙니다</a:t>
+              <a:t>수익률이 갚는 건 "가능성"이 아닙니다</a:t>
             </a:r>
             <a:endParaRPr lang="en-US" sz="1200" dirty="0"/>
           </a:p>
@@ -28345,7 +31872,7 @@
                 <a:ea typeface="맑은 고딕" pitchFamily="34" charset="-122"/>
                 <a:cs typeface="맑은 고딕" pitchFamily="34" charset="-120"/>
               </a:rPr>
-              <a:t>쿠폰은 손실 확률(0.66)보다 기대손실(0.82)과 훨씬 잘 붙습니다. 지수형은 떨어질 때 65% 남짓, 종목형은 80%가량 잃습니다. 발행사는 확률이 아니라 확률 × 크기로 값을 매깁니다.</a:t>
+              <a:t>수익률은 손해 볼 가능성(0.66)보다 평균적으로 잃는 크기(0.82)와 훨씬 잘 붙습니다. 지수만 담은 상품은 잃을 때 65% 남짓, 개별 종목 상품은 80%가량 잃습니다. 회사는 "얼마나 자주"가 아니라 "자주 × 크게"로 값을 매깁니다.</a:t>
             </a:r>
             <a:endParaRPr lang="en-US" sz="1050" dirty="0"/>
           </a:p>
@@ -28384,7 +31911,7 @@
                 <a:ea typeface="맑은 고딕" pitchFamily="34" charset="-122"/>
                 <a:cs typeface="맑은 고딕" pitchFamily="34" charset="-120"/>
               </a:rPr>
-              <a:t>출처 — 금융감독원 전자공시시스템 일괄신고추가서류 접수번호 20260821000193 (2026.08.21 공시)  ·  원금 손실이 발생할 수 있는 상품입니다</a:t>
+              <a:t>출처 — 금융감독원 전자공시시스템(DART)에 2026.08.21 올라온 투자설명서 (접수번호 20260821000193)  ·  원금을 잃을 수 있는 상품입니다</a:t>
             </a:r>
             <a:endParaRPr lang="en-US" sz="850" dirty="0"/>
           </a:p>
@@ -28551,7 +32078,7 @@
                 <a:ea typeface="맑은 고딕" pitchFamily="34" charset="-122"/>
                 <a:cs typeface="맑은 고딕" pitchFamily="34" charset="-120"/>
               </a:rPr>
-              <a:t>쿠폰과 위험이 어긋나는 이유는 셋입니다. 셋 다 이번 회차 데이터에서 확인됩니다.</a:t>
+              <a:t>수익률과 위험이 어긋나는 이유는 셋입니다. 셋 다 이번 주 데이터에서 그대로 확인됩니다.</a:t>
             </a:r>
             <a:endParaRPr lang="en-US" sz="1250" dirty="0"/>
           </a:p>
@@ -28629,7 +32156,7 @@
                 <a:ea typeface="맑은 고딕" pitchFamily="34" charset="-122"/>
                 <a:cs typeface="맑은 고딕" pitchFamily="34" charset="-120"/>
               </a:rPr>
-              <a:t>구조</a:t>
+              <a:t>상품 조건이 달라서</a:t>
             </a:r>
             <a:endParaRPr lang="en-US" sz="1300" dirty="0"/>
           </a:p>
@@ -28671,7 +32198,7 @@
                 <a:ea typeface="맑은 고딕" pitchFamily="34" charset="-122"/>
                 <a:cs typeface="맑은 고딕" pitchFamily="34" charset="-120"/>
               </a:rPr>
-              <a:t>삼성전자·SK하이닉스 6종은 기초자산도 적용 변동성(60.9%)도 만기(36개월)도 같은데 쿠폰이 갈립니다.</a:t>
+              <a:t>삼성전자·SK하이닉스 6종은 기준 자산도, 가격 출렁임(60.9%)도, 기간(36개월)도 똑같은데 수익률만 갈립니다.</a:t>
             </a:r>
             <a:endParaRPr lang="en-US" sz="1000" dirty="0"/>
           </a:p>
@@ -28700,7 +32227,7 @@
                 <a:ea typeface="맑은 고딕" pitchFamily="34" charset="-122"/>
                 <a:cs typeface="맑은 고딕" pitchFamily="34" charset="-120"/>
               </a:rPr>
-              <a:t>제38039회 쿠폰 31.3% · 기대손실 13.6%</a:t>
+              <a:t>제38039회 연 31.3% · 평균적으로 잃는 크기 13.6%</a:t>
             </a:r>
             <a:endParaRPr lang="en-US" sz="1000" dirty="0"/>
           </a:p>
@@ -28720,7 +32247,7 @@
                 <a:ea typeface="맑은 고딕" pitchFamily="34" charset="-122"/>
                 <a:cs typeface="맑은 고딕" pitchFamily="34" charset="-120"/>
               </a:rPr>
-              <a:t>제38043회 쿠폰 19.2% · 기대손실 12.6%</a:t>
+              <a:t>제38043회 연 19.2% · 평균적으로 잃는 크기 12.6%</a:t>
             </a:r>
             <a:endParaRPr lang="en-US" sz="1000" dirty="0"/>
           </a:p>
@@ -28749,7 +32276,7 @@
                 <a:ea typeface="맑은 고딕" pitchFamily="34" charset="-122"/>
                 <a:cs typeface="맑은 고딕" pitchFamily="34" charset="-120"/>
               </a:rPr>
-              <a:t>위험이 사실상 같은데 쿠폰이 12.1%p 차이납니다. 조기상환을 3개월마다 보느냐 6개월마다 보느냐, 낙인이 30%냐 20%냐가 갈랐습니다.</a:t>
+              <a:t>위험이 사실상 같은데 수익률이 12.1%p 차이 납니다. 끝날 기회를 3개월마다 보느냐 6개월마다 보느냐, 원금 지키는 선이 30%냐 20%냐가 갈랐습니다.</a:t>
             </a:r>
             <a:endParaRPr lang="en-US" sz="1000" dirty="0"/>
           </a:p>
@@ -28827,7 +32354,7 @@
                 <a:ea typeface="맑은 고딕" pitchFamily="34" charset="-122"/>
                 <a:cs typeface="맑은 고딕" pitchFamily="34" charset="-120"/>
               </a:rPr>
-              <a:t>가격</a:t>
+              <a:t>값어치가 깎여서</a:t>
             </a:r>
             <a:endParaRPr lang="en-US" sz="1300" dirty="0"/>
           </a:p>
@@ -28869,7 +32396,7 @@
                 <a:ea typeface="맑은 고딕" pitchFamily="34" charset="-122"/>
                 <a:cs typeface="맑은 고딕" pitchFamily="34" charset="-120"/>
               </a:rPr>
-              <a:t>제38046회는 쿠폰 25.0%인데 기대손실이 43.8%입니다. 출발 가치 갭이 -31.7%이기 때문입니다.</a:t>
+              <a:t>제38046회는 연 25.0%인데 평균적으로 잃는 크기가 43.8%나 됩니다. 넣는 순간의 값어치가 제값보다 -31.7%나 깎여 있기 때문입니다.</a:t>
             </a:r>
             <a:endParaRPr lang="en-US" sz="1000" dirty="0"/>
           </a:p>
@@ -28898,7 +32425,7 @@
                 <a:ea typeface="맑은 고딕" pitchFamily="34" charset="-122"/>
                 <a:cs typeface="맑은 고딕" pitchFamily="34" charset="-120"/>
               </a:rPr>
-              <a:t>쿠폰이 위험의 대가로 돌아오는 게 아니라 수수료로 새어나간 경우입니다.</a:t>
+              <a:t>높은 수익률이 위험을 진 대가로 돌아오는 게 아니라 비용으로 새어나간 경우입니다.</a:t>
             </a:r>
             <a:endParaRPr lang="en-US" sz="1000" dirty="0"/>
           </a:p>
@@ -28927,7 +32454,7 @@
                 <a:ea typeface="맑은 고딕" pitchFamily="34" charset="-122"/>
                 <a:cs typeface="맑은 고딕" pitchFamily="34" charset="-120"/>
               </a:rPr>
-              <a:t>갭이 큰 4종을 빼는 것만으로 쿠폰과 변동성의 상관이 0.77 → 0.86로 올라갑니다. 이 법칙은 제값 받는 상품에서만 성립합니다.</a:t>
+              <a:t>많이 깎인 4종만 빼도 수익률과 출렁임의 관계가 0.77 → 0.86로 올라갑니다. 이 법칙은 제값 받는 상품에서만 통합니다.</a:t>
             </a:r>
             <a:endParaRPr lang="en-US" sz="1000" dirty="0"/>
           </a:p>
@@ -29005,7 +32532,7 @@
                 <a:ea typeface="맑은 고딕" pitchFamily="34" charset="-122"/>
                 <a:cs typeface="맑은 고딕" pitchFamily="34" charset="-120"/>
               </a:rPr>
-              <a:t>통화</a:t>
+              <a:t>돈의 종류가 달라서</a:t>
             </a:r>
             <a:endParaRPr lang="en-US" sz="1300" dirty="0"/>
           </a:p>
@@ -29047,7 +32574,7 @@
                 <a:ea typeface="맑은 고딕" pitchFamily="34" charset="-122"/>
                 <a:cs typeface="맑은 고딕" pitchFamily="34" charset="-120"/>
               </a:rPr>
-              <a:t>제38041회(USD)는 쿠폰 40.0%에 기대손실 14.2%로, 기초자산이 같은 원화 제38040회(35.2% · 21.4%)보다 더 주면서 덜 위험해 보입니다.</a:t>
+              <a:t>제38041회(USD)는 연 40.0%에 평균적으로 잃는 크기가 14.2%로, 기준 자산이 똑같은 원화 제38040회(35.2% · 21.4%)보다 더 주면서 덜 위험해 보입니다.</a:t>
             </a:r>
             <a:endParaRPr lang="en-US" sz="1000" dirty="0"/>
           </a:p>
@@ -29076,7 +32603,7 @@
                 <a:ea typeface="맑은 고딕" pitchFamily="34" charset="-122"/>
                 <a:cs typeface="맑은 고딕" pitchFamily="34" charset="-120"/>
               </a:rPr>
-              <a:t>USD 금리가 쿠폰에 섞여 있고, 대신 손실 확률에 잡히지 않는 환율 위험이 붙기 때문입니다.</a:t>
+              <a:t>USD 이자가 수익률에 섞여 들어간 것이고, 대신 이 손실 계산에 잡히지 않는 환율 위험이 따로 붙기 때문입니다.</a:t>
             </a:r>
             <a:endParaRPr lang="en-US" sz="1000" dirty="0"/>
           </a:p>
@@ -29105,7 +32632,7 @@
                 <a:ea typeface="맑은 고딕" pitchFamily="34" charset="-122"/>
                 <a:cs typeface="맑은 고딕" pitchFamily="34" charset="-120"/>
               </a:rPr>
-              <a:t>이 상품의 손실 확률은 환율을 뺀 숫자입니다.</a:t>
+              <a:t>이 상품의 손해 볼 가능성은 환율을 뺀 숫자입니다.</a:t>
             </a:r>
             <a:endParaRPr lang="en-US" sz="1000" dirty="0"/>
           </a:p>
@@ -29144,7 +32671,7 @@
                 <a:ea typeface="맑은 고딕" pitchFamily="34" charset="-122"/>
                 <a:cs typeface="맑은 고딕" pitchFamily="34" charset="-120"/>
               </a:rPr>
-              <a:t>가장 크게 어긋난 제38044회 — 그 우위가 공시 상관계수 0.94 한 값에 얹혀 있는지 흔들어 봤습니다 (이 문서의 추천 상품)</a:t>
+              <a:t>가장 크게 어긋난 제38044회 — 그 우위가 "두 자산이 0.94만큼 같이 움직인다"는 서류 값 하나에 얹혀 있는지 흔들어 봤습니다 (이 문서가 추천하는 상품)</a:t>
             </a:r>
             <a:endParaRPr lang="en-US" sz="1200" dirty="0"/>
           </a:p>
@@ -29173,13 +32700,13 @@
             <a:tbl>
               <a:tblPr/>
               <a:tblGrid>
-                <a:gridCol w="1828800"/>
-                <a:gridCol w="1538173"/>
-                <a:gridCol w="1538173"/>
-                <a:gridCol w="1538173"/>
-                <a:gridCol w="1538173"/>
-                <a:gridCol w="1538173"/>
-                <a:gridCol w="1538173"/>
+                <a:gridCol w="2194560"/>
+                <a:gridCol w="1477213"/>
+                <a:gridCol w="1477213"/>
+                <a:gridCol w="1477213"/>
+                <a:gridCol w="1477213"/>
+                <a:gridCol w="1477213"/>
+                <a:gridCol w="1477213"/>
               </a:tblGrid>
               <a:tr h="274320">
                 <a:tc>
@@ -29199,7 +32726,7 @@
                           <a:ea typeface="맑은 고딕" pitchFamily="34" charset="-122"/>
                           <a:cs typeface="맑은 고딕" pitchFamily="34" charset="-120"/>
                         </a:rPr>
-                        <a:t>기초자산 상관</a:t>
+                        <a:t>같이 움직이는 정도</a:t>
                       </a:r>
                       <a:endParaRPr lang="en-US" sz="1100" dirty="0">
                         <a:latin typeface="맑은 고딕" charset="0"/>
@@ -29267,7 +32794,7 @@
                           <a:ea typeface="맑은 고딕" pitchFamily="34" charset="-122"/>
                           <a:cs typeface="맑은 고딕" pitchFamily="34" charset="-120"/>
                         </a:rPr>
-                        <a:t>공시 0.94</a:t>
+                        <a:t>서류값 0.94</a:t>
                       </a:r>
                       <a:endParaRPr lang="en-US" sz="1100" dirty="0">
                         <a:latin typeface="맑은 고딕" charset="0"/>
@@ -29677,7 +33204,7 @@
                           <a:ea typeface="맑은 고딕" pitchFamily="34" charset="-122"/>
                           <a:cs typeface="맑은 고딕" pitchFamily="34" charset="-120"/>
                         </a:rPr>
-                        <a:t>손실 확률</a:t>
+                        <a:t>손해 볼 가능성</a:t>
                       </a:r>
                       <a:endParaRPr lang="en-US" sz="1100" dirty="0">
                         <a:latin typeface="맑은 고딕" charset="0"/>
@@ -30134,7 +33661,7 @@
                           <a:ea typeface="맑은 고딕" pitchFamily="34" charset="-122"/>
                           <a:cs typeface="맑은 고딕" pitchFamily="34" charset="-120"/>
                         </a:rPr>
-                        <a:t>기대손실</a:t>
+                        <a:t>평균적으로 잃는 크기</a:t>
                       </a:r>
                       <a:endParaRPr lang="en-US" sz="1100" dirty="0">
                         <a:latin typeface="맑은 고딕" charset="0"/>
@@ -30591,7 +34118,7 @@
                           <a:ea typeface="맑은 고딕" pitchFamily="34" charset="-122"/>
                           <a:cs typeface="맑은 고딕" pitchFamily="34" charset="-120"/>
                         </a:rPr>
-                        <a:t>위험당 쿠폰</a:t>
+                        <a:t>위험 한 단위당 수익률</a:t>
                       </a:r>
                       <a:endParaRPr lang="en-US" sz="1100" dirty="0">
                         <a:latin typeface="맑은 고딕" charset="0"/>
@@ -31070,7 +34597,7 @@
                 <a:ea typeface="맑은 고딕" pitchFamily="34" charset="-122"/>
                 <a:cs typeface="맑은 고딕" pitchFamily="34" charset="-120"/>
               </a:rPr>
-              <a:t>상관을 0.50까지 떨어뜨려도 손실 확률은 8.9% → 11.7% 오르는 데 그치고, 위험당 쿠폰 2.69로 여전히 이번 회차 1위입니다. 두 기초자산의 변동성이 20.4%p나 벌어져 있어 상관과 무관하게 "더 나쁜 쪽"이 거의 항상 같은 자산이기 때문입니다. 변동성이 비슷한 짝이었다면 이렇게 버티지 못합니다.</a:t>
+              <a:t>같이 움직이는 정도를 0.50까지 억지로 낮춰도 손해 볼 가능성은 8.9% → 11.7% 오르는 데 그치고, 위험 대비 대가는 2.69로 여전히 이번 주 1등입니다. 두 자산의 출렁임 정도가 20.4%p나 벌어져 있어서, 같이 움직이든 말든 "더 나쁜 쪽"이 거의 항상 같은 자산이기 때문입니다. 출렁임이 비슷한 짝이었다면 이렇게 버티지 못합니다.</a:t>
             </a:r>
             <a:endParaRPr lang="en-US" sz="1000" dirty="0"/>
           </a:p>
@@ -31137,7 +34664,7 @@
                 <a:ea typeface="맑은 고딕" pitchFamily="34" charset="-122"/>
                 <a:cs typeface="맑은 고딕" pitchFamily="34" charset="-120"/>
               </a:rPr>
-              <a:t>"쿠폰 40.0%짜리가 있는데 왜 24.0%짜리를 먼저 권하나요?"  </a:t>
+              <a:t>"연 40.0%짜리도 있는데 왜 24.0%짜리를 먼저 권하나요?"  </a:t>
             </a:r>
             <a:pPr indent="0" marL="0">
               <a:lnSpc>
@@ -31154,7 +34681,7 @@
                 <a:ea typeface="맑은 고딕" pitchFamily="34" charset="-122"/>
                 <a:cs typeface="맑은 고딕" pitchFamily="34" charset="-120"/>
               </a:rPr>
-              <a:t>→ "쿠폰이 높으면 위험도 높은 건 맞습니다. 다만 같은 위험을 지고도 남들보다 많이 받는 상품이 있습니다. 이번 회차는 그 차이가 3.0배까지 벌어집니다."</a:t>
+              <a:t>→ "수익률이 높으면 위험도 큰 것, 맞습니다. 다만 같은 위험을 지고도 남들보다 많이 받는 상품이 따로 있습니다. 이번 주는 그 차이가 3.0배까지 벌어집니다."</a:t>
             </a:r>
             <a:endParaRPr lang="en-US" sz="1150" dirty="0"/>
           </a:p>
@@ -31193,7 +34720,7 @@
                 <a:ea typeface="맑은 고딕" pitchFamily="34" charset="-122"/>
                 <a:cs typeface="맑은 고딕" pitchFamily="34" charset="-120"/>
               </a:rPr>
-              <a:t>출처 — 금융감독원 전자공시시스템 일괄신고추가서류 접수번호 20260821000193 (2026.08.21 공시)  ·  원금 손실이 발생할 수 있는 상품입니다</a:t>
+              <a:t>출처 — 금융감독원 전자공시시스템(DART)에 2026.08.21 올라온 투자설명서 (접수번호 20260821000193)  ·  원금을 잃을 수 있는 상품입니다</a:t>
             </a:r>
             <a:endParaRPr lang="en-US" sz="850" dirty="0"/>
           </a:p>
@@ -31321,7 +34848,7 @@
                 <a:ea typeface="맑은 고딕" pitchFamily="34" charset="-122"/>
                 <a:cs typeface="맑은 고딕" pitchFamily="34" charset="-120"/>
               </a:rPr>
-              <a:t>추천 1 — 원금 방어를 먼저 보는 분</a:t>
+              <a:t>추천 1 — 원금을 지키는 게 먼저인 분</a:t>
             </a:r>
             <a:endParaRPr lang="en-US" sz="2400" dirty="0"/>
           </a:p>
@@ -31488,7 +35015,7 @@
                 <a:ea typeface="맑은 고딕" pitchFamily="34" charset="-122"/>
                 <a:cs typeface="맑은 고딕" pitchFamily="34" charset="-120"/>
               </a:rPr>
-              <a:t>혼합형</a:t>
+              <a:t>섞임</a:t>
             </a:r>
             <a:endParaRPr lang="en-US" sz="1050" dirty="0"/>
           </a:p>
@@ -31591,7 +35118,7 @@
                 <a:ea typeface="맑은 고딕" pitchFamily="34" charset="-122"/>
                 <a:cs typeface="맑은 고딕" pitchFamily="34" charset="-120"/>
               </a:rPr>
-              <a:t>연 수익률</a:t>
+              <a:t>잘 되면 연 수익률</a:t>
             </a:r>
             <a:endParaRPr lang="en-US" sz="1050" dirty="0"/>
           </a:p>
@@ -31683,7 +35210,7 @@
                 <a:ea typeface="맑은 고딕" pitchFamily="34" charset="-122"/>
                 <a:cs typeface="맑은 고딕" pitchFamily="34" charset="-120"/>
               </a:rPr>
-              <a:t>1만원 → 3개월 뒤 10,600원</a:t>
+              <a:t>1만원 → 빠르면 3개월 뒤 10,600원</a:t>
             </a:r>
             <a:endParaRPr lang="en-US" sz="1300" dirty="0"/>
           </a:p>
@@ -31698,7 +35225,7 @@
         <p:spPr>
           <a:xfrm>
             <a:off x="566928" y="2267712"/>
-            <a:ext cx="786384" cy="274320"/>
+            <a:ext cx="1042416" cy="274320"/>
           </a:xfrm>
           <a:prstGeom prst="rect">
             <a:avLst/>
@@ -31723,7 +35250,7 @@
         <p:spPr>
           <a:xfrm>
             <a:off x="566928" y="2267712"/>
-            <a:ext cx="786384" cy="274320"/>
+            <a:ext cx="1042416" cy="274320"/>
           </a:xfrm>
           <a:prstGeom prst="rect">
             <a:avLst/>
@@ -31747,7 +35274,7 @@
                 <a:ea typeface="맑은 고딕" pitchFamily="34" charset="-122"/>
                 <a:cs typeface="맑은 고딕" pitchFamily="34" charset="-120"/>
               </a:rPr>
-              <a:t>판정</a:t>
+              <a:t>무엇을 보나</a:t>
             </a:r>
             <a:endParaRPr lang="en-US" sz="1050" dirty="0"/>
           </a:p>
@@ -31761,8 +35288,8 @@
         </p:nvSpPr>
         <p:spPr>
           <a:xfrm>
-            <a:off x="1499616" y="2231136"/>
-            <a:ext cx="10125151" cy="384048"/>
+            <a:off x="1755648" y="2231136"/>
+            <a:ext cx="9869119" cy="384048"/>
           </a:xfrm>
           <a:prstGeom prst="rect">
             <a:avLst/>
@@ -31786,7 +35313,7 @@
                 <a:ea typeface="맑은 고딕" pitchFamily="34" charset="-122"/>
                 <a:cs typeface="맑은 고딕" pitchFamily="34" charset="-120"/>
               </a:rPr>
-              <a:t>KOSPI200 · SK하이닉스 중 더 많이 떨어진 하나로 판정합니다.</a:t>
+              <a:t>KOSPI200 · SK하이닉스 중 더 많이 떨어진 하나로 판정합니다. 하나만 나빠도 그쪽을 봅니다.</a:t>
             </a:r>
             <a:endParaRPr lang="en-US" sz="1200" dirty="0"/>
           </a:p>
@@ -31801,7 +35328,7 @@
         <p:spPr>
           <a:xfrm>
             <a:off x="566928" y="2724912"/>
-            <a:ext cx="786384" cy="274320"/>
+            <a:ext cx="1042416" cy="274320"/>
           </a:xfrm>
           <a:prstGeom prst="rect">
             <a:avLst/>
@@ -31826,7 +35353,7 @@
         <p:spPr>
           <a:xfrm>
             <a:off x="566928" y="2724912"/>
-            <a:ext cx="786384" cy="274320"/>
+            <a:ext cx="1042416" cy="274320"/>
           </a:xfrm>
           <a:prstGeom prst="rect">
             <a:avLst/>
@@ -31850,7 +35377,7 @@
                 <a:ea typeface="맑은 고딕" pitchFamily="34" charset="-122"/>
                 <a:cs typeface="맑은 고딕" pitchFamily="34" charset="-120"/>
               </a:rPr>
-              <a:t>조기상환</a:t>
+              <a:t>언제 끝나나</a:t>
             </a:r>
             <a:endParaRPr lang="en-US" sz="1050" dirty="0"/>
           </a:p>
@@ -31864,8 +35391,8 @@
         </p:nvSpPr>
         <p:spPr>
           <a:xfrm>
-            <a:off x="1499616" y="2688336"/>
-            <a:ext cx="10125151" cy="384048"/>
+            <a:off x="1755648" y="2688336"/>
+            <a:ext cx="9869119" cy="384048"/>
           </a:xfrm>
           <a:prstGeom prst="rect">
             <a:avLst/>
@@ -31889,7 +35416,7 @@
                 <a:ea typeface="맑은 고딕" pitchFamily="34" charset="-122"/>
                 <a:cs typeface="맑은 고딕" pitchFamily="34" charset="-120"/>
               </a:rPr>
-              <a:t>3개월마다 확인해서 처음 가격의 75% 이상(-25% 이내)이면 그 자리에서 끝나고 1만원이 10,600원이 됩니다.</a:t>
+              <a:t>3개월마다 확인해서 처음 가격의 75% 이상(-25%까지 떨어져도 괜찮다는 뜻)이면 그 자리에서 끝나고 1만원이 10,600원이 되어 돌아옵니다.</a:t>
             </a:r>
             <a:endParaRPr lang="en-US" sz="1200" dirty="0"/>
           </a:p>
@@ -31904,7 +35431,7 @@
         <p:spPr>
           <a:xfrm>
             <a:off x="566928" y="3182112"/>
-            <a:ext cx="786384" cy="274320"/>
+            <a:ext cx="1042416" cy="274320"/>
           </a:xfrm>
           <a:prstGeom prst="rect">
             <a:avLst/>
@@ -31929,7 +35456,7 @@
         <p:spPr>
           <a:xfrm>
             <a:off x="566928" y="3182112"/>
-            <a:ext cx="786384" cy="274320"/>
+            <a:ext cx="1042416" cy="274320"/>
           </a:xfrm>
           <a:prstGeom prst="rect">
             <a:avLst/>
@@ -31953,7 +35480,7 @@
                 <a:ea typeface="맑은 고딕" pitchFamily="34" charset="-122"/>
                 <a:cs typeface="맑은 고딕" pitchFamily="34" charset="-120"/>
               </a:rPr>
-              <a:t>원금</a:t>
+              <a:t>원금 지키기</a:t>
             </a:r>
             <a:endParaRPr lang="en-US" sz="1050" dirty="0"/>
           </a:p>
@@ -31967,8 +35494,8 @@
         </p:nvSpPr>
         <p:spPr>
           <a:xfrm>
-            <a:off x="1499616" y="3145536"/>
-            <a:ext cx="10125151" cy="384048"/>
+            <a:off x="1755648" y="3145536"/>
+            <a:ext cx="9869119" cy="384048"/>
           </a:xfrm>
           <a:prstGeom prst="rect">
             <a:avLst/>
@@ -31992,7 +35519,7 @@
                 <a:ea typeface="맑은 고딕" pitchFamily="34" charset="-122"/>
                 <a:cs typeface="맑은 고딕" pitchFamily="34" charset="-120"/>
               </a:rPr>
-              <a:t>만기까지 한 번도 35%(-65%) 아래로 종가가 내려간 적이 없으면, 마지막에 얼마든 원금과 이자를 다 받습니다.</a:t>
+              <a:t>끝날 때까지 종가가 단 한 번도 35%(처음 가격에서 -65%) 아래로 안 내려가면, 마지막에 얼마가 됐든 원금과 이자를 다 받습니다.</a:t>
             </a:r>
             <a:endParaRPr lang="en-US" sz="1200" dirty="0"/>
           </a:p>
@@ -32007,7 +35534,7 @@
         <p:spPr>
           <a:xfrm>
             <a:off x="566928" y="3639312"/>
-            <a:ext cx="786384" cy="274320"/>
+            <a:ext cx="1042416" cy="274320"/>
           </a:xfrm>
           <a:prstGeom prst="rect">
             <a:avLst/>
@@ -32032,7 +35559,7 @@
         <p:spPr>
           <a:xfrm>
             <a:off x="566928" y="3639312"/>
-            <a:ext cx="786384" cy="274320"/>
+            <a:ext cx="1042416" cy="274320"/>
           </a:xfrm>
           <a:prstGeom prst="rect">
             <a:avLst/>
@@ -32056,7 +35583,7 @@
                 <a:ea typeface="맑은 고딕" pitchFamily="34" charset="-122"/>
                 <a:cs typeface="맑은 고딕" pitchFamily="34" charset="-120"/>
               </a:rPr>
-              <a:t>손실</a:t>
+              <a:t>손해 나는 때</a:t>
             </a:r>
             <a:endParaRPr lang="en-US" sz="1050" dirty="0"/>
           </a:p>
@@ -32070,8 +35597,8 @@
         </p:nvSpPr>
         <p:spPr>
           <a:xfrm>
-            <a:off x="1499616" y="3602736"/>
-            <a:ext cx="10125151" cy="384048"/>
+            <a:off x="1755648" y="3602736"/>
+            <a:ext cx="9869119" cy="384048"/>
           </a:xfrm>
           <a:prstGeom prst="rect">
             <a:avLst/>
@@ -32095,7 +35622,7 @@
                 <a:ea typeface="맑은 고딕" pitchFamily="34" charset="-122"/>
                 <a:cs typeface="맑은 고딕" pitchFamily="34" charset="-120"/>
               </a:rPr>
-              <a:t>35% 아래를 밟은 적이 있고 만기에도 65% 미만이면, 떨어진 만큼 그대로 손실입니다.</a:t>
+              <a:t>35% 아래를 한 번이라도 밟았고 마지막 날에도 65% 아래면, 떨어진 만큼 그대로 손실입니다.</a:t>
             </a:r>
             <a:endParaRPr lang="en-US" sz="1200" dirty="0"/>
           </a:p>
@@ -32159,7 +35686,7 @@
                 <a:ea typeface="맑은 고딕" pitchFamily="34" charset="-122"/>
                 <a:cs typeface="맑은 고딕" pitchFamily="34" charset="-120"/>
               </a:rPr>
-              <a:t>A. 발행사 20년 모의실험</a:t>
+              <a:t>A. 회사가 20년 돌려본 손실</a:t>
             </a:r>
             <a:endParaRPr lang="en-US" sz="1000" dirty="0"/>
           </a:p>
@@ -32198,7 +35725,7 @@
                 <a:ea typeface="맑은 고딕" pitchFamily="34" charset="-122"/>
                 <a:cs typeface="맑은 고딕" pitchFamily="34" charset="-120"/>
               </a:rPr>
-              <a:t>손실 0.06%</a:t>
+              <a:t>0.06%</a:t>
             </a:r>
             <a:endParaRPr lang="en-US" sz="1600" dirty="0"/>
           </a:p>
@@ -32237,7 +35764,7 @@
                 <a:ea typeface="맑은 고딕" pitchFamily="34" charset="-122"/>
                 <a:cs typeface="맑은 고딕" pitchFamily="34" charset="-120"/>
               </a:rPr>
-              <a:t>5,088회 중 3회</a:t>
+              <a:t>5,088번 중 3번</a:t>
             </a:r>
             <a:endParaRPr lang="en-US" sz="950" dirty="0"/>
           </a:p>
@@ -32301,7 +35828,7 @@
                 <a:ea typeface="맑은 고딕" pitchFamily="34" charset="-122"/>
                 <a:cs typeface="맑은 고딕" pitchFamily="34" charset="-120"/>
               </a:rPr>
-              <a:t>B. 같은 조건 모의실험</a:t>
+              <a:t>B. 컴퓨터로 다시 돌린 손실</a:t>
             </a:r>
             <a:endParaRPr lang="en-US" sz="1000" dirty="0"/>
           </a:p>
@@ -32340,7 +35867,7 @@
                 <a:ea typeface="맑은 고딕" pitchFamily="34" charset="-122"/>
                 <a:cs typeface="맑은 고딕" pitchFamily="34" charset="-120"/>
               </a:rPr>
-              <a:t>손실 8.9%</a:t>
+              <a:t>8.9%</a:t>
             </a:r>
             <a:endParaRPr lang="en-US" sz="1600" dirty="0"/>
           </a:p>
@@ -32443,7 +35970,7 @@
                 <a:ea typeface="맑은 고딕" pitchFamily="34" charset="-122"/>
                 <a:cs typeface="맑은 고딕" pitchFamily="34" charset="-120"/>
               </a:rPr>
-              <a:t>1만원의 출발 가치</a:t>
+              <a:t>1만원의 실제 값어치</a:t>
             </a:r>
             <a:endParaRPr lang="en-US" sz="1000" dirty="0"/>
           </a:p>
@@ -32521,7 +36048,7 @@
                 <a:ea typeface="맑은 고딕" pitchFamily="34" charset="-122"/>
                 <a:cs typeface="맑은 고딕" pitchFamily="34" charset="-120"/>
               </a:rPr>
-              <a:t>공정가액 대비 +0.13%</a:t>
+              <a:t>제값보다 +0.13%</a:t>
             </a:r>
             <a:endParaRPr lang="en-US" sz="950" dirty="0"/>
           </a:p>
@@ -32585,7 +36112,7 @@
                 <a:ea typeface="맑은 고딕" pitchFamily="34" charset="-122"/>
                 <a:cs typeface="맑은 고딕" pitchFamily="34" charset="-120"/>
               </a:rPr>
-              <a:t>적용 변동성 / 상관</a:t>
+              <a:t>가격 출렁임</a:t>
             </a:r>
             <a:endParaRPr lang="en-US" sz="1000" dirty="0"/>
           </a:p>
@@ -32663,7 +36190,7 @@
                 <a:ea typeface="맑은 고딕" pitchFamily="34" charset="-122"/>
                 <a:cs typeface="맑은 고딕" pitchFamily="34" charset="-120"/>
               </a:rPr>
-              <a:t>기초자산끼리 0.94</a:t>
+              <a:t>둘이 같이 움직임 0.94</a:t>
             </a:r>
             <a:endParaRPr lang="en-US" sz="950" dirty="0"/>
           </a:p>
@@ -32727,7 +36254,7 @@
                 <a:ea typeface="맑은 고딕" pitchFamily="34" charset="-122"/>
                 <a:cs typeface="맑은 고딕" pitchFamily="34" charset="-120"/>
               </a:rPr>
-              <a:t>추천 이유  </a:t>
+              <a:t>이 상품을 권하는 이유  </a:t>
             </a:r>
             <a:pPr indent="0" marL="0">
               <a:buNone/>
@@ -32741,7 +36268,7 @@
                 <a:ea typeface="맑은 고딕" pitchFamily="34" charset="-122"/>
                 <a:cs typeface="맑은 고딕" pitchFamily="34" charset="-120"/>
               </a:rPr>
-              <a:t>같은 조건으로 돌렸을 때 손실 확률이 가장 낮은 축에 들면서, 그 안에서는 수익률이 가장 높습니다.</a:t>
+              <a:t>컴퓨터로 돌려봤을 때 손해 볼 가능성이 가장 낮은 축에 들면서, 그중에서는 수익률이 제일 높습니다.</a:t>
             </a:r>
             <a:endParaRPr lang="en-US" sz="1150" dirty="0"/>
           </a:p>
@@ -32780,7 +36307,7 @@
                 <a:ea typeface="맑은 고딕" pitchFamily="34" charset="-122"/>
                 <a:cs typeface="맑은 고딕" pitchFamily="34" charset="-120"/>
               </a:rPr>
-              <a:t>출처 — 금융감독원 전자공시시스템 일괄신고추가서류 접수번호 20260821000193 (2026.08.21 공시)  ·  원금 손실이 발생할 수 있는 상품입니다</a:t>
+              <a:t>출처 — 금융감독원 전자공시시스템(DART)에 2026.08.21 올라온 투자설명서 (접수번호 20260821000193)  ·  원금을 잃을 수 있는 상품입니다</a:t>
             </a:r>
             <a:endParaRPr lang="en-US" sz="850" dirty="0"/>
           </a:p>
@@ -32908,7 +36435,7 @@
                 <a:ea typeface="맑은 고딕" pitchFamily="34" charset="-122"/>
                 <a:cs typeface="맑은 고딕" pitchFamily="34" charset="-120"/>
               </a:rPr>
-              <a:t>추천 2 — 수익과 안정을 함께 보는 분</a:t>
+              <a:t>추천 2 — 수익과 안정을 반반 보는 분</a:t>
             </a:r>
             <a:endParaRPr lang="en-US" sz="2400" dirty="0"/>
           </a:p>
@@ -33075,7 +36602,7 @@
                 <a:ea typeface="맑은 고딕" pitchFamily="34" charset="-122"/>
                 <a:cs typeface="맑은 고딕" pitchFamily="34" charset="-120"/>
               </a:rPr>
-              <a:t>종목형</a:t>
+              <a:t>종목만</a:t>
             </a:r>
             <a:endParaRPr lang="en-US" sz="1050" dirty="0"/>
           </a:p>
@@ -33178,7 +36705,7 @@
                 <a:ea typeface="맑은 고딕" pitchFamily="34" charset="-122"/>
                 <a:cs typeface="맑은 고딕" pitchFamily="34" charset="-120"/>
               </a:rPr>
-              <a:t>연 수익률</a:t>
+              <a:t>잘 되면 연 수익률</a:t>
             </a:r>
             <a:endParaRPr lang="en-US" sz="1050" dirty="0"/>
           </a:p>
@@ -33270,7 +36797,7 @@
                 <a:ea typeface="맑은 고딕" pitchFamily="34" charset="-122"/>
                 <a:cs typeface="맑은 고딕" pitchFamily="34" charset="-120"/>
               </a:rPr>
-              <a:t>1만원 → 3개월 뒤 10,783원</a:t>
+              <a:t>1만원 → 빠르면 3개월 뒤 10,783원</a:t>
             </a:r>
             <a:endParaRPr lang="en-US" sz="1300" dirty="0"/>
           </a:p>
@@ -33285,7 +36812,7 @@
         <p:spPr>
           <a:xfrm>
             <a:off x="566928" y="2267712"/>
-            <a:ext cx="786384" cy="274320"/>
+            <a:ext cx="1042416" cy="274320"/>
           </a:xfrm>
           <a:prstGeom prst="rect">
             <a:avLst/>
@@ -33310,7 +36837,7 @@
         <p:spPr>
           <a:xfrm>
             <a:off x="566928" y="2267712"/>
-            <a:ext cx="786384" cy="274320"/>
+            <a:ext cx="1042416" cy="274320"/>
           </a:xfrm>
           <a:prstGeom prst="rect">
             <a:avLst/>
@@ -33334,7 +36861,7 @@
                 <a:ea typeface="맑은 고딕" pitchFamily="34" charset="-122"/>
                 <a:cs typeface="맑은 고딕" pitchFamily="34" charset="-120"/>
               </a:rPr>
-              <a:t>판정</a:t>
+              <a:t>무엇을 보나</a:t>
             </a:r>
             <a:endParaRPr lang="en-US" sz="1050" dirty="0"/>
           </a:p>
@@ -33348,8 +36875,8 @@
         </p:nvSpPr>
         <p:spPr>
           <a:xfrm>
-            <a:off x="1499616" y="2231136"/>
-            <a:ext cx="10125151" cy="384048"/>
+            <a:off x="1755648" y="2231136"/>
+            <a:ext cx="9869119" cy="384048"/>
           </a:xfrm>
           <a:prstGeom prst="rect">
             <a:avLst/>
@@ -33373,7 +36900,7 @@
                 <a:ea typeface="맑은 고딕" pitchFamily="34" charset="-122"/>
                 <a:cs typeface="맑은 고딕" pitchFamily="34" charset="-120"/>
               </a:rPr>
-              <a:t>삼성전자 · SK하이닉스 중 더 많이 떨어진 하나로 판정합니다.</a:t>
+              <a:t>삼성전자 · SK하이닉스 중 더 많이 떨어진 하나로 판정합니다. 하나만 나빠도 그쪽을 봅니다.</a:t>
             </a:r>
             <a:endParaRPr lang="en-US" sz="1200" dirty="0"/>
           </a:p>
@@ -33388,7 +36915,7 @@
         <p:spPr>
           <a:xfrm>
             <a:off x="566928" y="2724912"/>
-            <a:ext cx="786384" cy="274320"/>
+            <a:ext cx="1042416" cy="274320"/>
           </a:xfrm>
           <a:prstGeom prst="rect">
             <a:avLst/>
@@ -33413,7 +36940,7 @@
         <p:spPr>
           <a:xfrm>
             <a:off x="566928" y="2724912"/>
-            <a:ext cx="786384" cy="274320"/>
+            <a:ext cx="1042416" cy="274320"/>
           </a:xfrm>
           <a:prstGeom prst="rect">
             <a:avLst/>
@@ -33437,7 +36964,7 @@
                 <a:ea typeface="맑은 고딕" pitchFamily="34" charset="-122"/>
                 <a:cs typeface="맑은 고딕" pitchFamily="34" charset="-120"/>
               </a:rPr>
-              <a:t>조기상환</a:t>
+              <a:t>언제 끝나나</a:t>
             </a:r>
             <a:endParaRPr lang="en-US" sz="1050" dirty="0"/>
           </a:p>
@@ -33451,8 +36978,8 @@
         </p:nvSpPr>
         <p:spPr>
           <a:xfrm>
-            <a:off x="1499616" y="2688336"/>
-            <a:ext cx="10125151" cy="384048"/>
+            <a:off x="1755648" y="2688336"/>
+            <a:ext cx="9869119" cy="384048"/>
           </a:xfrm>
           <a:prstGeom prst="rect">
             <a:avLst/>
@@ -33476,7 +37003,7 @@
                 <a:ea typeface="맑은 고딕" pitchFamily="34" charset="-122"/>
                 <a:cs typeface="맑은 고딕" pitchFamily="34" charset="-120"/>
               </a:rPr>
-              <a:t>3개월마다 확인해서 처음 가격의 85% 이상(-15% 이내)이면 그 자리에서 끝나고 1만원이 10,783원이 됩니다.</a:t>
+              <a:t>3개월마다 확인해서 처음 가격의 85% 이상(-15%까지 떨어져도 괜찮다는 뜻)이면 그 자리에서 끝나고 1만원이 10,783원이 되어 돌아옵니다.</a:t>
             </a:r>
             <a:endParaRPr lang="en-US" sz="1200" dirty="0"/>
           </a:p>
@@ -33491,7 +37018,7 @@
         <p:spPr>
           <a:xfrm>
             <a:off x="566928" y="3182112"/>
-            <a:ext cx="786384" cy="274320"/>
+            <a:ext cx="1042416" cy="274320"/>
           </a:xfrm>
           <a:prstGeom prst="rect">
             <a:avLst/>
@@ -33516,7 +37043,7 @@
         <p:spPr>
           <a:xfrm>
             <a:off x="566928" y="3182112"/>
-            <a:ext cx="786384" cy="274320"/>
+            <a:ext cx="1042416" cy="274320"/>
           </a:xfrm>
           <a:prstGeom prst="rect">
             <a:avLst/>
@@ -33540,7 +37067,7 @@
                 <a:ea typeface="맑은 고딕" pitchFamily="34" charset="-122"/>
                 <a:cs typeface="맑은 고딕" pitchFamily="34" charset="-120"/>
               </a:rPr>
-              <a:t>원금</a:t>
+              <a:t>원금 지키기</a:t>
             </a:r>
             <a:endParaRPr lang="en-US" sz="1050" dirty="0"/>
           </a:p>
@@ -33554,8 +37081,8 @@
         </p:nvSpPr>
         <p:spPr>
           <a:xfrm>
-            <a:off x="1499616" y="3145536"/>
-            <a:ext cx="10125151" cy="384048"/>
+            <a:off x="1755648" y="3145536"/>
+            <a:ext cx="9869119" cy="384048"/>
           </a:xfrm>
           <a:prstGeom prst="rect">
             <a:avLst/>
@@ -33579,7 +37106,7 @@
                 <a:ea typeface="맑은 고딕" pitchFamily="34" charset="-122"/>
                 <a:cs typeface="맑은 고딕" pitchFamily="34" charset="-120"/>
               </a:rPr>
-              <a:t>만기까지 한 번도 30%(-70%) 아래로 종가가 내려간 적이 없으면, 마지막에 얼마든 원금과 이자를 다 받습니다.</a:t>
+              <a:t>끝날 때까지 종가가 단 한 번도 30%(처음 가격에서 -70%) 아래로 안 내려가면, 마지막에 얼마가 됐든 원금과 이자를 다 받습니다.</a:t>
             </a:r>
             <a:endParaRPr lang="en-US" sz="1200" dirty="0"/>
           </a:p>
@@ -33594,7 +37121,7 @@
         <p:spPr>
           <a:xfrm>
             <a:off x="566928" y="3639312"/>
-            <a:ext cx="786384" cy="274320"/>
+            <a:ext cx="1042416" cy="274320"/>
           </a:xfrm>
           <a:prstGeom prst="rect">
             <a:avLst/>
@@ -33619,7 +37146,7 @@
         <p:spPr>
           <a:xfrm>
             <a:off x="566928" y="3639312"/>
-            <a:ext cx="786384" cy="274320"/>
+            <a:ext cx="1042416" cy="274320"/>
           </a:xfrm>
           <a:prstGeom prst="rect">
             <a:avLst/>
@@ -33643,7 +37170,7 @@
                 <a:ea typeface="맑은 고딕" pitchFamily="34" charset="-122"/>
                 <a:cs typeface="맑은 고딕" pitchFamily="34" charset="-120"/>
               </a:rPr>
-              <a:t>손실</a:t>
+              <a:t>손해 나는 때</a:t>
             </a:r>
             <a:endParaRPr lang="en-US" sz="1050" dirty="0"/>
           </a:p>
@@ -33657,8 +37184,8 @@
         </p:nvSpPr>
         <p:spPr>
           <a:xfrm>
-            <a:off x="1499616" y="3602736"/>
-            <a:ext cx="10125151" cy="384048"/>
+            <a:off x="1755648" y="3602736"/>
+            <a:ext cx="9869119" cy="384048"/>
           </a:xfrm>
           <a:prstGeom prst="rect">
             <a:avLst/>
@@ -33682,7 +37209,7 @@
                 <a:ea typeface="맑은 고딕" pitchFamily="34" charset="-122"/>
                 <a:cs typeface="맑은 고딕" pitchFamily="34" charset="-120"/>
               </a:rPr>
-              <a:t>30% 아래를 밟은 적이 있고 만기에도 70% 미만이면, 떨어진 만큼 그대로 손실입니다.</a:t>
+              <a:t>30% 아래를 한 번이라도 밟았고 마지막 날에도 70% 아래면, 떨어진 만큼 그대로 손실입니다.</a:t>
             </a:r>
             <a:endParaRPr lang="en-US" sz="1200" dirty="0"/>
           </a:p>
@@ -33746,7 +37273,7 @@
                 <a:ea typeface="맑은 고딕" pitchFamily="34" charset="-122"/>
                 <a:cs typeface="맑은 고딕" pitchFamily="34" charset="-120"/>
               </a:rPr>
-              <a:t>A. 발행사 20년 모의실험</a:t>
+              <a:t>A. 회사가 20년 돌려본 손실</a:t>
             </a:r>
             <a:endParaRPr lang="en-US" sz="1000" dirty="0"/>
           </a:p>
@@ -33785,7 +37312,7 @@
                 <a:ea typeface="맑은 고딕" pitchFamily="34" charset="-122"/>
                 <a:cs typeface="맑은 고딕" pitchFamily="34" charset="-120"/>
               </a:rPr>
-              <a:t>손실 0.47%</a:t>
+              <a:t>0.47%</a:t>
             </a:r>
             <a:endParaRPr lang="en-US" sz="1600" dirty="0"/>
           </a:p>
@@ -33824,7 +37351,7 @@
                 <a:ea typeface="맑은 고딕" pitchFamily="34" charset="-122"/>
                 <a:cs typeface="맑은 고딕" pitchFamily="34" charset="-120"/>
               </a:rPr>
-              <a:t>5,085회 중 24회</a:t>
+              <a:t>5,085번 중 24번</a:t>
             </a:r>
             <a:endParaRPr lang="en-US" sz="950" dirty="0"/>
           </a:p>
@@ -33888,7 +37415,7 @@
                 <a:ea typeface="맑은 고딕" pitchFamily="34" charset="-122"/>
                 <a:cs typeface="맑은 고딕" pitchFamily="34" charset="-120"/>
               </a:rPr>
-              <a:t>B. 같은 조건 모의실험</a:t>
+              <a:t>B. 컴퓨터로 다시 돌린 손실</a:t>
             </a:r>
             <a:endParaRPr lang="en-US" sz="1000" dirty="0"/>
           </a:p>
@@ -33927,7 +37454,7 @@
                 <a:ea typeface="맑은 고딕" pitchFamily="34" charset="-122"/>
                 <a:cs typeface="맑은 고딕" pitchFamily="34" charset="-120"/>
               </a:rPr>
-              <a:t>손실 17.8%</a:t>
+              <a:t>17.8%</a:t>
             </a:r>
             <a:endParaRPr lang="en-US" sz="1600" dirty="0"/>
           </a:p>
@@ -34030,7 +37557,7 @@
                 <a:ea typeface="맑은 고딕" pitchFamily="34" charset="-122"/>
                 <a:cs typeface="맑은 고딕" pitchFamily="34" charset="-120"/>
               </a:rPr>
-              <a:t>1만원의 출발 가치</a:t>
+              <a:t>1만원의 실제 값어치</a:t>
             </a:r>
             <a:endParaRPr lang="en-US" sz="1000" dirty="0"/>
           </a:p>
@@ -34108,7 +37635,7 @@
                 <a:ea typeface="맑은 고딕" pitchFamily="34" charset="-122"/>
                 <a:cs typeface="맑은 고딕" pitchFamily="34" charset="-120"/>
               </a:rPr>
-              <a:t>공정가액 대비 -1.01%</a:t>
+              <a:t>제값보다 -1.01%</a:t>
             </a:r>
             <a:endParaRPr lang="en-US" sz="950" dirty="0"/>
           </a:p>
@@ -34172,7 +37699,7 @@
                 <a:ea typeface="맑은 고딕" pitchFamily="34" charset="-122"/>
                 <a:cs typeface="맑은 고딕" pitchFamily="34" charset="-120"/>
               </a:rPr>
-              <a:t>적용 변동성 / 상관</a:t>
+              <a:t>가격 출렁임</a:t>
             </a:r>
             <a:endParaRPr lang="en-US" sz="1000" dirty="0"/>
           </a:p>
@@ -34250,7 +37777,7 @@
                 <a:ea typeface="맑은 고딕" pitchFamily="34" charset="-122"/>
                 <a:cs typeface="맑은 고딕" pitchFamily="34" charset="-120"/>
               </a:rPr>
-              <a:t>기초자산끼리 0.87</a:t>
+              <a:t>둘이 같이 움직임 0.87</a:t>
             </a:r>
             <a:endParaRPr lang="en-US" sz="950" dirty="0"/>
           </a:p>
@@ -34314,7 +37841,7 @@
                 <a:ea typeface="맑은 고딕" pitchFamily="34" charset="-122"/>
                 <a:cs typeface="맑은 고딕" pitchFamily="34" charset="-120"/>
               </a:rPr>
-              <a:t>추천 이유  </a:t>
+              <a:t>이 상품을 권하는 이유  </a:t>
             </a:r>
             <a:pPr indent="0" marL="0">
               <a:buNone/>
@@ -34328,7 +37855,7 @@
                 <a:ea typeface="맑은 고딕" pitchFamily="34" charset="-122"/>
                 <a:cs typeface="맑은 고딕" pitchFamily="34" charset="-120"/>
               </a:rPr>
-              <a:t>손실 확률이 한 단계 올라가는 대신 수익률이 크게 붙는 구간입니다.</a:t>
+              <a:t>손해 볼 가능성이 한 단계 올라가는 대신, 받는 수익률이 그보다 훨씬 크게 붙는 자리입니다.</a:t>
             </a:r>
             <a:endParaRPr lang="en-US" sz="1150" dirty="0"/>
           </a:p>
@@ -34367,7 +37894,7 @@
                 <a:ea typeface="맑은 고딕" pitchFamily="34" charset="-122"/>
                 <a:cs typeface="맑은 고딕" pitchFamily="34" charset="-120"/>
               </a:rPr>
-              <a:t>출처 — 금융감독원 전자공시시스템 일괄신고추가서류 접수번호 20260821000193 (2026.08.21 공시)  ·  원금 손실이 발생할 수 있는 상품입니다</a:t>
+              <a:t>출처 — 금융감독원 전자공시시스템(DART)에 2026.08.21 올라온 투자설명서 (접수번호 20260821000193)  ·  원금을 잃을 수 있는 상품입니다</a:t>
             </a:r>
             <a:endParaRPr lang="en-US" sz="850" dirty="0"/>
           </a:p>

--- a/els-proposal.pptx
+++ b/els-proposal.pptx
@@ -819,7 +819,7 @@
           <a:p>
             <a:r>
               <a:rPr lang="en-US" dirty="0"/>
-              <a:t>이번 주 17종. 신청 2026.08.24~2026.08.28. 전부 원금을 잃을 수 있는 1등급 상품입니다.</a:t>
+              <a:t>이번 회차 17종. 청약 2026.08.24~2026.08.28. 전부 원금비보장 1등급입니다.</a:t>
             </a:r>
             <a:endParaRPr lang="en-US" dirty="0"/>
           </a:p>
@@ -1171,7 +1171,7 @@
           <a:p>
             <a:r>
               <a:rPr lang="en-US" dirty="0"/>
-              <a:t>1번은 이번 주에만 해당하는 이야기가 아니라 매주 반복됩니다. 마감일을 잘못 안내하면 고객이 기회를 놓칩니다.</a:t>
+              <a:t>1번은 이번 주에만 해당하는 이야기가 아니라 매 회차 반복됩니다. 마감일을 잘못 안내하면 고객이 청약 기회를 놓칩니다.</a:t>
             </a:r>
             <a:endParaRPr lang="en-US" dirty="0"/>
           </a:p>
@@ -1435,7 +1435,7 @@
           <a:p>
             <a:r>
               <a:rPr lang="en-US" dirty="0"/>
-              <a:t>마감일을 잘못 안내하면 고객이 기회를 놓칩니다. 홈페이지의 2026.08.28이 아니라 8월 25일(화)이 개인 고객의 마감입니다.</a:t>
+              <a:t>마감일을 잘못 안내하면 고객이 청약 기회를 놓칩니다. 홈페이지의 2026.08.28이 아니라 8월 25일(화)이 개인 일반투자자의 마감입니다.</a:t>
             </a:r>
             <a:endParaRPr lang="en-US" dirty="0"/>
           </a:p>
@@ -2558,7 +2558,7 @@
                 <a:ea typeface="맑은 고딕" pitchFamily="34" charset="-122"/>
                 <a:cs typeface="맑은 고딕" pitchFamily="34" charset="-120"/>
               </a:rPr>
-              <a:t>2026.08.21에 공시된 투자설명서 원문을 그대로 읽어 17종 전부를 견줬습니다</a:t>
+              <a:t>투자설명서(일괄신고추가서류) 2026.08.21 공시 원문 기준 · 전 17종 분석</a:t>
             </a:r>
             <a:endParaRPr lang="en-US" sz="1400" dirty="0"/>
           </a:p>
@@ -2622,7 +2622,7 @@
                 <a:ea typeface="맑은 고딕" pitchFamily="34" charset="-122"/>
                 <a:cs typeface="맑은 고딕" pitchFamily="34" charset="-120"/>
               </a:rPr>
-              <a:t>개인 고객이 넣을 수 있는 기간</a:t>
+              <a:t>개인 일반투자자 청약</a:t>
             </a:r>
             <a:endParaRPr lang="en-US" sz="1000" dirty="0"/>
           </a:p>
@@ -2700,7 +2700,7 @@
                 <a:ea typeface="맑은 고딕" pitchFamily="34" charset="-122"/>
                 <a:cs typeface="맑은 고딕" pitchFamily="34" charset="-120"/>
               </a:rPr>
-              <a:t>서류에 적힌 청약기간 (법인·전문투자자 기준)</a:t>
+              <a:t>전체 청약기간 (숙려 대상 아닌 경우)</a:t>
             </a:r>
             <a:endParaRPr lang="en-US" sz="1000" dirty="0"/>
           </a:p>
@@ -2778,7 +2778,7 @@
                 <a:ea typeface="맑은 고딕" pitchFamily="34" charset="-122"/>
                 <a:cs typeface="맑은 고딕" pitchFamily="34" charset="-120"/>
               </a:rPr>
-              <a:t>시작하는 날 / 끝나는 날</a:t>
+              <a:t>발행일 / 만기</a:t>
             </a:r>
             <a:endParaRPr lang="en-US" sz="1000" dirty="0"/>
           </a:p>
@@ -2881,7 +2881,7 @@
                 <a:ea typeface="맑은 고딕" pitchFamily="34" charset="-122"/>
                 <a:cs typeface="맑은 고딕" pitchFamily="34" charset="-120"/>
               </a:rPr>
-              <a:t>이번 주 추천</a:t>
+              <a:t>이번 회차 추천</a:t>
             </a:r>
             <a:endParaRPr lang="en-US" sz="1100" dirty="0"/>
           </a:p>
@@ -2940,7 +2940,7 @@
                 <a:ea typeface="맑은 고딕" pitchFamily="34" charset="-122"/>
                 <a:cs typeface="맑은 고딕" pitchFamily="34" charset="-120"/>
               </a:rPr>
-              <a:t>  연 24.0%  ·  손해 볼 가능성 8.9%</a:t>
+              <a:t>  연 24.0%  ·  손실 8.9%</a:t>
             </a:r>
             <a:pPr indent="0" marL="0">
               <a:lnSpc>
@@ -3025,7 +3025,7 @@
                 <a:ea typeface="맑은 고딕" pitchFamily="34" charset="-122"/>
                 <a:cs typeface="맑은 고딕" pitchFamily="34" charset="-120"/>
               </a:rPr>
-              <a:t>  연 31.3%  ·  손해 볼 가능성 17.8%</a:t>
+              <a:t>  연 31.3%  ·  손실 17.8%</a:t>
             </a:r>
             <a:pPr indent="0" marL="0">
               <a:lnSpc>
@@ -3110,7 +3110,7 @@
                 <a:ea typeface="맑은 고딕" pitchFamily="34" charset="-122"/>
                 <a:cs typeface="맑은 고딕" pitchFamily="34" charset="-120"/>
               </a:rPr>
-              <a:t>  연 40.0%  ·  손해 볼 가능성 18.9%</a:t>
+              <a:t>  연 40.0%  ·  손실 18.9%</a:t>
             </a:r>
             <a:pPr indent="0" marL="0">
               <a:lnSpc>
@@ -3175,7 +3175,7 @@
                 <a:ea typeface="맑은 고딕" pitchFamily="34" charset="-122"/>
                 <a:cs typeface="맑은 고딕" pitchFamily="34" charset="-120"/>
               </a:rPr>
-              <a:t>홈페이지 확인 2026.08.24(월) 09:27 — 지금 청약 중인 상품 17건.  개인 고객 신청 마감은 8월 25일(화)입니다.</a:t>
+              <a:t>홈페이지 확인 2026.08.24(월) 09:27 — 현재 청약 진행중 17건.  개인 일반투자자 청약 마감은 8월 25일(화)입니다.</a:t>
             </a:r>
             <a:endParaRPr lang="en-US" sz="1200" dirty="0"/>
           </a:p>
@@ -3214,7 +3214,7 @@
                 <a:ea typeface="맑은 고딕" pitchFamily="34" charset="-122"/>
                 <a:cs typeface="맑은 고딕" pitchFamily="34" charset="-120"/>
               </a:rPr>
-              <a:t>원금을 잃을 수 있는 상품 · 위험등급 1등급(가장 위험) · 투자 권유 참고자료</a:t>
+              <a:t>원금비보장 · 상품위험등급 1등급(매우높은위험) · 투자 권유 참고자료</a:t>
             </a:r>
             <a:endParaRPr lang="en-US" sz="1100" dirty="0"/>
           </a:p>
@@ -19651,7 +19651,7 @@
                 <a:ea typeface="맑은 고딕" pitchFamily="34" charset="-122"/>
                 <a:cs typeface="맑은 고딕" pitchFamily="34" charset="-120"/>
               </a:rPr>
-              <a:t>신청 마감은 8월 25일(화)입니다</a:t>
+              <a:t>청약 마감은 8월 25일(화)입니다</a:t>
             </a:r>
             <a:endParaRPr lang="en-US" sz="1350" dirty="0"/>
           </a:p>
@@ -19693,7 +19693,7 @@
                 <a:ea typeface="맑은 고딕" pitchFamily="34" charset="-122"/>
                 <a:cs typeface="맑은 고딕" pitchFamily="34" charset="-120"/>
               </a:rPr>
-              <a:t>홈페이지에는 2026.08.24~2026.08.28로 나오지만 개인 고객은 8월 25일(화)까지만 신청할 수 있습니다. 이후는 다시 생각하는 기간과 확인하는 날이라 주문을 받을 수 없습니다.</a:t>
+              <a:t>홈페이지에는 2026.08.24~2026.08.28로 나오지만 개인 일반투자자는 8월 25일(화)까지만 청약할 수 있습니다. 이후는 숙려·가입의사확인 기간이라 주문을 받을 수 없습니다.</a:t>
             </a:r>
             <a:endParaRPr lang="en-US" sz="1100" dirty="0"/>
           </a:p>
@@ -20433,7 +20433,7 @@
                 <a:ea typeface="맑은 고딕" pitchFamily="34" charset="-122"/>
                 <a:cs typeface="맑은 고딕" pitchFamily="34" charset="-120"/>
               </a:rPr>
-              <a:t>개인 고객은 녹음 파일을 달라고 하실 수 있고, 위험을 한 장으로 정리한 설명서도 받습니다. "최대 얼마까지 잃을 수 있는지"는 다시 생각하는 기간에 따로 알려드립니다. 설명을 건너뛰면 그것도 그대로 기록에 남습니다.</a:t>
+              <a:t>개인 일반투자자는 녹음 파일을 달라고 하실 수 있고, 위험을 한 장으로 정리한 설명서도 받습니다. "최대 얼마까지 잃을 수 있는지"는 숙려기간에 따로 알려드립니다. 설명을 건너뛰면 그것도 그대로 기록에 남습니다.</a:t>
             </a:r>
             <a:endParaRPr lang="en-US" sz="1100" dirty="0"/>
           </a:p>
@@ -20745,7 +20745,7 @@
                 <a:ea typeface="맑은 고딕" pitchFamily="34" charset="-122"/>
                 <a:cs typeface="맑은 고딕" pitchFamily="34" charset="-120"/>
               </a:rPr>
-              <a:t>"먼저 일정부터 말씀드리면, 신청은 8월 25일(화)까지 넣으셔야 합니다. 그 뒤 이틀은 법으로 정해진 '다시 생각하는 기간'이라 주문을 받을 수 없습니다."</a:t>
+              <a:t>"먼저 일정부터 말씀드리면, 청약은 8월 25일(화)까지 넣으셔야 합니다. 그 뒤 이틀은 법으로 정해진 숙려기간이라 주문을 받을 수 없습니다."</a:t>
             </a:r>
             <a:endParaRPr lang="en-US" sz="1250" dirty="0"/>
           </a:p>
@@ -21487,7 +21487,7 @@
                 <a:ea typeface="맑은 고딕" pitchFamily="34" charset="-122"/>
                 <a:cs typeface="맑은 고딕" pitchFamily="34" charset="-120"/>
               </a:rPr>
-              <a:t>"신청하셨다고 바로 되는 게 아닙니다. 이틀 생각하실 시간을 드린 뒤 저희가 다시 연락드려 정말 하실 건지 확인합니다. 그때 연락이 안 닿으면 넣으신 돈은 2026.08.31에 돌려드립니다."</a:t>
+              <a:t>"청약을 넣으셔도 바로 확정되는 게 아닙니다. 이틀 숙려기간을 거친 뒤 저희가 다시 연락드려 최종 의사를 확인합니다. 그때 확인이 안 되면 청약금은 2026.08.31에 돌려드립니다."</a:t>
             </a:r>
             <a:endParaRPr lang="en-US" sz="1250" dirty="0"/>
           </a:p>
@@ -24241,7 +24241,7 @@
                           <a:ea typeface="맑은 고딕" pitchFamily="34" charset="-122"/>
                           <a:cs typeface="맑은 고딕" pitchFamily="34" charset="-120"/>
                         </a:rPr>
-                        <a:t>다시 생각하는 기간</a:t>
+                        <a:t>숙려기간</a:t>
                       </a:r>
                       <a:endParaRPr lang="en-US" sz="1050" dirty="0">
                         <a:latin typeface="맑은 고딕" charset="0"/>
@@ -24306,7 +24306,7 @@
                           <a:ea typeface="맑은 고딕" pitchFamily="34" charset="-122"/>
                           <a:cs typeface="맑은 고딕" pitchFamily="34" charset="-120"/>
                         </a:rPr>
-                        <a:t>숙려기간</a:t>
+                        <a:t>서류와 같은 말</a:t>
                       </a:r>
                       <a:endParaRPr lang="en-US" sz="1050" dirty="0">
                         <a:latin typeface="맑은 고딕" charset="0"/>
@@ -24371,7 +24371,7 @@
                           <a:ea typeface="맑은 고딕" pitchFamily="34" charset="-122"/>
                           <a:cs typeface="맑은 고딕" pitchFamily="34" charset="-120"/>
                         </a:rPr>
-                        <a:t>법이 정한 2영업일 이상. 이때는 주문 못 넣음</a:t>
+                        <a:t>다시 생각해 보시라고 법이 비워 둔 2영업일 이상. 이때는 청약 못 넣음</a:t>
                       </a:r>
                       <a:endParaRPr lang="en-US" sz="1050" dirty="0">
                         <a:latin typeface="맑은 고딕" charset="0"/>
@@ -24438,7 +24438,7 @@
                           <a:ea typeface="맑은 고딕" pitchFamily="34" charset="-122"/>
                           <a:cs typeface="맑은 고딕" pitchFamily="34" charset="-120"/>
                         </a:rPr>
-                        <a:t>정말 하실 건지 확인</a:t>
+                        <a:t>가입의사 확인기간</a:t>
                       </a:r>
                       <a:endParaRPr lang="en-US" sz="1050" dirty="0">
                         <a:latin typeface="맑은 고딕" charset="0"/>
@@ -24503,7 +24503,7 @@
                           <a:ea typeface="맑은 고딕" pitchFamily="34" charset="-122"/>
                           <a:cs typeface="맑은 고딕" pitchFamily="34" charset="-120"/>
                         </a:rPr>
-                        <a:t>가입의사 확인기간</a:t>
+                        <a:t>서류와 같은 말</a:t>
                       </a:r>
                       <a:endParaRPr lang="en-US" sz="1050" dirty="0">
                         <a:latin typeface="맑은 고딕" charset="0"/>
@@ -24568,7 +24568,7 @@
                           <a:ea typeface="맑은 고딕" pitchFamily="34" charset="-122"/>
                           <a:cs typeface="맑은 고딕" pitchFamily="34" charset="-120"/>
                         </a:rPr>
-                        <a:t>이때 연락이 안 닿으면 신청은 취소됨</a:t>
+                        <a:t>정말 하실 건지 회사가 연락해 확인. 안 닿으면 청약 취소</a:t>
                       </a:r>
                       <a:endParaRPr lang="en-US" sz="1050" dirty="0">
                         <a:latin typeface="맑은 고딕" charset="0"/>
@@ -25176,7 +25176,7 @@
                 <a:ea typeface="맑은 고딕" pitchFamily="34" charset="-122"/>
                 <a:cs typeface="맑은 고딕" pitchFamily="34" charset="-120"/>
               </a:rPr>
-              <a:t>언제까지 신청해야 하나</a:t>
+              <a:t>언제까지 청약해야 하나</a:t>
             </a:r>
             <a:endParaRPr lang="en-US" sz="2400" dirty="0"/>
           </a:p>
@@ -25215,7 +25215,7 @@
                 <a:ea typeface="맑은 고딕" pitchFamily="34" charset="-122"/>
                 <a:cs typeface="맑은 고딕" pitchFamily="34" charset="-120"/>
               </a:rPr>
-              <a:t>홈페이지와 서류에 적힌 청약기간은 2026.08.24~2026.08.28입니다. 그런데 개인 고객은 그 뒤쪽 절반을 쓸 수 없습니다 — 뒤쪽은 다시 한 번 생각해 보시라고 법이 비워 둔 기간이라 주문 자체를 받을 수 없습니다.</a:t>
+              <a:t>홈페이지와 공시 표지의 청약기간은 2026.08.24~2026.08.28입니다. 그런데 개인 일반투자자는 그 뒤쪽 절반을 쓸 수 없습니다 — 숙려기간과 가입의사확인기간에는 청약 자체가 불가능합니다.</a:t>
             </a:r>
             <a:endParaRPr lang="en-US" sz="1250" dirty="0"/>
           </a:p>
@@ -25294,7 +25294,7 @@
         <p:spPr>
           <a:xfrm>
             <a:off x="1481328" y="1316736"/>
-            <a:ext cx="1572768" cy="713232"/>
+            <a:ext cx="1554480" cy="713232"/>
           </a:xfrm>
           <a:prstGeom prst="rect">
             <a:avLst/>
@@ -25310,7 +25310,7 @@
               <a:buNone/>
             </a:pPr>
             <a:r>
-              <a:rPr lang="en-US" sz="1300" b="1" dirty="0">
+              <a:rPr lang="en-US" sz="1500" b="1" dirty="0">
                 <a:solidFill>
                   <a:srgbClr val="1A1A1A"/>
                 </a:solidFill>
@@ -25318,9 +25318,9 @@
                 <a:ea typeface="맑은 고딕" pitchFamily="34" charset="-122"/>
                 <a:cs typeface="맑은 고딕" pitchFamily="34" charset="-120"/>
               </a:rPr>
-              <a:t>신청 받는 날</a:t>
+              <a:t>청약 접수</a:t>
             </a:r>
-            <a:endParaRPr lang="en-US" sz="1300" dirty="0"/>
+            <a:endParaRPr lang="en-US" sz="1500" dirty="0"/>
           </a:p>
         </p:txBody>
       </p:sp>
@@ -25542,7 +25542,7 @@
         <p:spPr>
           <a:xfrm>
             <a:off x="1481328" y="2112264"/>
-            <a:ext cx="1572768" cy="713232"/>
+            <a:ext cx="1554480" cy="713232"/>
           </a:xfrm>
           <a:prstGeom prst="rect">
             <a:avLst/>
@@ -25558,7 +25558,7 @@
               <a:buNone/>
             </a:pPr>
             <a:r>
-              <a:rPr lang="en-US" sz="1300" b="1" dirty="0">
+              <a:rPr lang="en-US" sz="1500" b="1" dirty="0">
                 <a:solidFill>
                   <a:srgbClr val="1A1A1A"/>
                 </a:solidFill>
@@ -25566,9 +25566,9 @@
                 <a:ea typeface="맑은 고딕" pitchFamily="34" charset="-122"/>
                 <a:cs typeface="맑은 고딕" pitchFamily="34" charset="-120"/>
               </a:rPr>
-              <a:t>다시 생각하는 기간</a:t>
+              <a:t>숙려기간</a:t>
             </a:r>
-            <a:endParaRPr lang="en-US" sz="1300" dirty="0"/>
+            <a:endParaRPr lang="en-US" sz="1500" dirty="0"/>
           </a:p>
         </p:txBody>
       </p:sp>
@@ -25647,7 +25647,7 @@
                 <a:ea typeface="맑은 고딕" pitchFamily="34" charset="-122"/>
                 <a:cs typeface="맑은 고딕" pitchFamily="34" charset="-120"/>
               </a:rPr>
-              <a:t>법으로 정해진 2영업일 이상(숙려기간) · "최대 얼마까지 잃을 수 있는지"를 따로 알려드립니다</a:t>
+              <a:t>2영업일 이상 · 최대 원금손실 가능금액을 고지받습니다</a:t>
             </a:r>
             <a:endParaRPr lang="en-US" sz="1150" dirty="0"/>
           </a:p>
@@ -25711,7 +25711,7 @@
                 <a:ea typeface="맑은 고딕" pitchFamily="34" charset="-122"/>
                 <a:cs typeface="맑은 고딕" pitchFamily="34" charset="-120"/>
               </a:rPr>
-              <a:t>주문 못 받음</a:t>
+              <a:t>청약 불가</a:t>
             </a:r>
             <a:endParaRPr lang="en-US" sz="1050" dirty="0"/>
           </a:p>
@@ -25790,7 +25790,7 @@
         <p:spPr>
           <a:xfrm>
             <a:off x="1481328" y="2907792"/>
-            <a:ext cx="1572768" cy="713232"/>
+            <a:ext cx="1554480" cy="713232"/>
           </a:xfrm>
           <a:prstGeom prst="rect">
             <a:avLst/>
@@ -25806,7 +25806,7 @@
               <a:buNone/>
             </a:pPr>
             <a:r>
-              <a:rPr lang="en-US" sz="1300" b="1" dirty="0">
+              <a:rPr lang="en-US" sz="1500" b="1" dirty="0">
                 <a:solidFill>
                   <a:srgbClr val="1A1A1A"/>
                 </a:solidFill>
@@ -25814,9 +25814,9 @@
                 <a:ea typeface="맑은 고딕" pitchFamily="34" charset="-122"/>
                 <a:cs typeface="맑은 고딕" pitchFamily="34" charset="-120"/>
               </a:rPr>
-              <a:t>정말 하실 건지 확인</a:t>
+              <a:t>가입의사 확인</a:t>
             </a:r>
-            <a:endParaRPr lang="en-US" sz="1300" dirty="0"/>
+            <a:endParaRPr lang="en-US" sz="1500" dirty="0"/>
           </a:p>
         </p:txBody>
       </p:sp>
@@ -25895,7 +25895,7 @@
                 <a:ea typeface="맑은 고딕" pitchFamily="34" charset="-122"/>
                 <a:cs typeface="맑은 고딕" pitchFamily="34" charset="-120"/>
               </a:rPr>
-              <a:t>2026년 08월 28일 오후 5시까지 · 이때 확인이 안 되면 넣으신 돈은 돌려드립니다</a:t>
+              <a:t>2026년 08월 28일 오후 5시까지 · 확인을 못 받으면 청약금은 환불됩니다</a:t>
             </a:r>
             <a:endParaRPr lang="en-US" sz="1150" dirty="0"/>
           </a:p>
@@ -25959,7 +25959,7 @@
                 <a:ea typeface="맑은 고딕" pitchFamily="34" charset="-122"/>
                 <a:cs typeface="맑은 고딕" pitchFamily="34" charset="-120"/>
               </a:rPr>
-              <a:t>주문 못 받음</a:t>
+              <a:t>청약 불가</a:t>
             </a:r>
             <a:endParaRPr lang="en-US" sz="1050" dirty="0"/>
           </a:p>
@@ -26038,7 +26038,7 @@
         <p:spPr>
           <a:xfrm>
             <a:off x="1481328" y="3703320"/>
-            <a:ext cx="1572768" cy="713232"/>
+            <a:ext cx="1554480" cy="713232"/>
           </a:xfrm>
           <a:prstGeom prst="rect">
             <a:avLst/>
@@ -26054,7 +26054,7 @@
               <a:buNone/>
             </a:pPr>
             <a:r>
-              <a:rPr lang="en-US" sz="1300" b="1" dirty="0">
+              <a:rPr lang="en-US" sz="1500" b="1" dirty="0">
                 <a:solidFill>
                   <a:srgbClr val="1A1A1A"/>
                 </a:solidFill>
@@ -26062,9 +26062,9 @@
                 <a:ea typeface="맑은 고딕" pitchFamily="34" charset="-122"/>
                 <a:cs typeface="맑은 고딕" pitchFamily="34" charset="-120"/>
               </a:rPr>
-              <a:t>상품 시작</a:t>
+              <a:t>발행</a:t>
             </a:r>
-            <a:endParaRPr lang="en-US" sz="1300" dirty="0"/>
+            <a:endParaRPr lang="en-US" sz="1500" dirty="0"/>
           </a:p>
         </p:txBody>
       </p:sp>
@@ -26143,7 +26143,7 @@
                 <a:ea typeface="맑은 고딕" pitchFamily="34" charset="-122"/>
                 <a:cs typeface="맑은 고딕" pitchFamily="34" charset="-120"/>
               </a:rPr>
-              <a:t>돈이 빠져나가고, 이날 종가가 앞으로 36개월의 "처음 가격"이 됩니다</a:t>
+              <a:t>납입 · 배정 · 환불 · 최초기준가격 평가</a:t>
             </a:r>
             <a:endParaRPr lang="en-US" sz="1150" dirty="0"/>
           </a:p>
@@ -26291,7 +26291,7 @@
                 <a:ea typeface="맑은 고딕" pitchFamily="34" charset="-122"/>
                 <a:cs typeface="맑은 고딕" pitchFamily="34" charset="-120"/>
               </a:rPr>
-              <a:t>"신청은 8월 25일(화)까지 넣으셔야 합니다. 그 뒤 이틀은 법으로 정해진 '다시 생각하는 기간'이라 주문을 받을 수 없고, 그 기간이 끝나면 저희가 다시 연락드려 정말 하실 건지 확인합니다. 그때 연락이 닿지 않으면 신청이 그대로 취소됩니다."</a:t>
+              <a:t>"청약은 8월 25일(화)까지 넣으셔야 합니다. 그 뒤 이틀은 법으로 정해진 숙려기간이라 주문을 받을 수 없고, 숙려기간이 끝나면 저희가 다시 연락드려 최종 의사를 확인합니다. 그때 확인이 안 되면 청약이 집행되지 않습니다."</a:t>
             </a:r>
             <a:endParaRPr lang="en-US" sz="1150" dirty="0"/>
           </a:p>
@@ -26330,7 +26330,7 @@
                 <a:ea typeface="맑은 고딕" pitchFamily="34" charset="-122"/>
                 <a:cs typeface="맑은 고딕" pitchFamily="34" charset="-120"/>
               </a:rPr>
-              <a:t>법인이나 전문투자자처럼 이 제도의 대상이 아닌 경우에만 2026.08.28까지 신청할 수 있습니다. 만 65세 이상이시면 확인 절차가 하나 더 붙습니다.</a:t>
+              <a:t>전문투자자·법인 등 숙려제도 대상이 아닌 경우에만 2026.08.28까지 청약할 수 있습니다. 만 65세 이상 고령투자자는 별도 확인 절차가 더해질 수 있습니다.</a:t>
             </a:r>
             <a:endParaRPr lang="en-US" sz="1050" dirty="0"/>
           </a:p>

--- a/els-proposal.pptx
+++ b/els-proposal.pptx
@@ -247,13 +247,13 @@
                 <c:ptCount val="3"/>
                 <c:lvl>
                   <c:pt idx="0">
-                    <c:v>지수만 (6종)</c:v>
+                    <c:v>지수형 (6종)</c:v>
                   </c:pt>
                   <c:pt idx="1">
-                    <c:v>지수 + 종목 (3종)</c:v>
+                    <c:v>혼합형 (3종)</c:v>
                   </c:pt>
                   <c:pt idx="2">
-                    <c:v>개별 종목만 (8종)</c:v>
+                    <c:v>종목형 (8종)</c:v>
                   </c:pt>
                 </c:lvl>
               </c:multiLvlStrCache>
@@ -3470,7 +3470,7 @@
                 <a:ea typeface="맑은 고딕" pitchFamily="34" charset="-122"/>
                 <a:cs typeface="맑은 고딕" pitchFamily="34" charset="-120"/>
               </a:rPr>
-              <a:t>종목만</a:t>
+              <a:t>종목형</a:t>
             </a:r>
             <a:endParaRPr lang="en-US" sz="1050" dirty="0"/>
           </a:p>
@@ -4205,7 +4205,7 @@
                 <a:ea typeface="맑은 고딕" pitchFamily="34" charset="-122"/>
                 <a:cs typeface="맑은 고딕" pitchFamily="34" charset="-120"/>
               </a:rPr>
-              <a:t>A. 회사가 20년 돌려본 손실</a:t>
+              <a:t>A. 발행사 20년 백테스트</a:t>
             </a:r>
             <a:endParaRPr lang="en-US" sz="1000" dirty="0"/>
           </a:p>
@@ -4954,7 +4954,7 @@
                 <a:ea typeface="맑은 고딕" pitchFamily="34" charset="-122"/>
                 <a:cs typeface="맑은 고딕" pitchFamily="34" charset="-120"/>
               </a:rPr>
-              <a:t>이번 주 17종 전부</a:t>
+              <a:t>이번 회차 전체 17종</a:t>
             </a:r>
             <a:endParaRPr lang="en-US" sz="2400" dirty="0"/>
           </a:p>
@@ -4993,7 +4993,7 @@
                 <a:ea typeface="맑은 고딕" pitchFamily="34" charset="-122"/>
                 <a:cs typeface="맑은 고딕" pitchFamily="34" charset="-120"/>
               </a:rPr>
-              <a:t>컴퓨터로 다시 돌린 손해 볼 가능성(B)이 낮은 순서. A 옆 괄호는 그 상품을 몇 년치 과거로 돌려봤는지 — 10년에 못 미치면(빨강) 다른 상품과 나란히 비교할 수 없습니다. "만기만" = 중간 하락을 안 따지고 마지막 날 하루만 봅니다.</a:t>
+              <a:t>같은 조건으로 돌린 손실 확률(B)이 낮은 순서. A 옆 괄호는 그 상품의 표본 구간 길이 — 10년에 못 미치면(빨강) 다른 상품과 나란히 비교할 수 없습니다. "만기만" = 낙인이 없어 만기 그날만 봅니다.</a:t>
             </a:r>
             <a:endParaRPr lang="en-US" sz="1250" dirty="0"/>
           </a:p>
@@ -5120,7 +5120,7 @@
                           <a:ea typeface="맑은 고딕" pitchFamily="34" charset="-122"/>
                           <a:cs typeface="맑은 고딕" pitchFamily="34" charset="-120"/>
                         </a:rPr>
-                        <a:t>기준 자산</a:t>
+                        <a:t>기초자산</a:t>
                       </a:r>
                       <a:endParaRPr lang="en-US" sz="900" dirty="0">
                         <a:latin typeface="맑은 고딕" charset="0"/>
@@ -5324,7 +5324,7 @@
                           <a:ea typeface="맑은 고딕" pitchFamily="34" charset="-122"/>
                           <a:cs typeface="맑은 고딕" pitchFamily="34" charset="-120"/>
                         </a:rPr>
-                        <a:t>끝나는 조건</a:t>
+                        <a:t>조기상환</a:t>
                       </a:r>
                       <a:endParaRPr lang="en-US" sz="900" dirty="0">
                         <a:latin typeface="맑은 고딕" charset="0"/>
@@ -5460,7 +5460,7 @@
                           <a:ea typeface="맑은 고딕" pitchFamily="34" charset="-122"/>
                           <a:cs typeface="맑은 고딕" pitchFamily="34" charset="-120"/>
                         </a:rPr>
-                        <a:t>가격 출렁임</a:t>
+                        <a:t>적용 변동성</a:t>
                       </a:r>
                       <a:endParaRPr lang="en-US" sz="900" dirty="0">
                         <a:latin typeface="맑은 고딕" charset="0"/>
@@ -5528,7 +5528,7 @@
                           <a:ea typeface="맑은 고딕" pitchFamily="34" charset="-122"/>
                           <a:cs typeface="맑은 고딕" pitchFamily="34" charset="-120"/>
                         </a:rPr>
-                        <a:t>B. 손해 가능성</a:t>
+                        <a:t>B. 손실 확률</a:t>
                       </a:r>
                       <a:endParaRPr lang="en-US" sz="900" dirty="0">
                         <a:latin typeface="맑은 고딕" charset="0"/>
@@ -5664,7 +5664,7 @@
                           <a:ea typeface="맑은 고딕" pitchFamily="34" charset="-122"/>
                           <a:cs typeface="맑은 고딕" pitchFamily="34" charset="-120"/>
                         </a:rPr>
-                        <a:t>A. 서류 손실</a:t>
+                        <a:t>A. 백테스트 손실</a:t>
                       </a:r>
                       <a:endParaRPr lang="en-US" sz="900" dirty="0">
                         <a:latin typeface="맑은 고딕" charset="0"/>
@@ -5732,7 +5732,7 @@
                           <a:ea typeface="맑은 고딕" pitchFamily="34" charset="-122"/>
                           <a:cs typeface="맑은 고딕" pitchFamily="34" charset="-120"/>
                         </a:rPr>
-                        <a:t>실제 값어치</a:t>
+                        <a:t>출발 가치</a:t>
                       </a:r>
                       <a:endParaRPr lang="en-US" sz="900" dirty="0">
                         <a:latin typeface="맑은 고딕" charset="0"/>
@@ -5932,7 +5932,7 @@
                           <a:ea typeface="맑은 고딕" pitchFamily="34" charset="-122"/>
                           <a:cs typeface="맑은 고딕" pitchFamily="34" charset="-120"/>
                         </a:rPr>
-                        <a:t>지수만</a:t>
+                        <a:t>지수</a:t>
                       </a:r>
                       <a:endParaRPr lang="en-US" sz="900" dirty="0">
                         <a:latin typeface="맑은 고딕" charset="0"/>
@@ -6652,7 +6652,7 @@
                           <a:ea typeface="맑은 고딕" pitchFamily="34" charset="-122"/>
                           <a:cs typeface="맑은 고딕" pitchFamily="34" charset="-120"/>
                         </a:rPr>
-                        <a:t>섞임</a:t>
+                        <a:t>혼합</a:t>
                       </a:r>
                       <a:endParaRPr lang="en-US" sz="900" dirty="0">
                         <a:latin typeface="맑은 고딕" charset="0"/>
@@ -7372,7 +7372,7 @@
                           <a:ea typeface="맑은 고딕" pitchFamily="34" charset="-122"/>
                           <a:cs typeface="맑은 고딕" pitchFamily="34" charset="-120"/>
                         </a:rPr>
-                        <a:t>지수만</a:t>
+                        <a:t>지수</a:t>
                       </a:r>
                       <a:endParaRPr lang="en-US" sz="900" dirty="0">
                         <a:latin typeface="맑은 고딕" charset="0"/>
@@ -8092,7 +8092,7 @@
                           <a:ea typeface="맑은 고딕" pitchFamily="34" charset="-122"/>
                           <a:cs typeface="맑은 고딕" pitchFamily="34" charset="-120"/>
                         </a:rPr>
-                        <a:t>지수만</a:t>
+                        <a:t>지수</a:t>
                       </a:r>
                       <a:endParaRPr lang="en-US" sz="900" dirty="0">
                         <a:latin typeface="맑은 고딕" charset="0"/>
@@ -8812,7 +8812,7 @@
                           <a:ea typeface="맑은 고딕" pitchFamily="34" charset="-122"/>
                           <a:cs typeface="맑은 고딕" pitchFamily="34" charset="-120"/>
                         </a:rPr>
-                        <a:t>종목만</a:t>
+                        <a:t>종목</a:t>
                       </a:r>
                       <a:endParaRPr lang="en-US" sz="900" dirty="0">
                         <a:latin typeface="맑은 고딕" charset="0"/>
@@ -9532,7 +9532,7 @@
                           <a:ea typeface="맑은 고딕" pitchFamily="34" charset="-122"/>
                           <a:cs typeface="맑은 고딕" pitchFamily="34" charset="-120"/>
                         </a:rPr>
-                        <a:t>종목만</a:t>
+                        <a:t>종목</a:t>
                       </a:r>
                       <a:endParaRPr lang="en-US" sz="900" dirty="0">
                         <a:latin typeface="맑은 고딕" charset="0"/>
@@ -10252,7 +10252,7 @@
                           <a:ea typeface="맑은 고딕" pitchFamily="34" charset="-122"/>
                           <a:cs typeface="맑은 고딕" pitchFamily="34" charset="-120"/>
                         </a:rPr>
-                        <a:t>지수만</a:t>
+                        <a:t>지수</a:t>
                       </a:r>
                       <a:endParaRPr lang="en-US" sz="900" dirty="0">
                         <a:latin typeface="맑은 고딕" charset="0"/>
@@ -10972,7 +10972,7 @@
                           <a:ea typeface="맑은 고딕" pitchFamily="34" charset="-122"/>
                           <a:cs typeface="맑은 고딕" pitchFamily="34" charset="-120"/>
                         </a:rPr>
-                        <a:t>섞임</a:t>
+                        <a:t>혼합</a:t>
                       </a:r>
                       <a:endParaRPr lang="en-US" sz="900" dirty="0">
                         <a:latin typeface="맑은 고딕" charset="0"/>
@@ -11692,7 +11692,7 @@
                           <a:ea typeface="맑은 고딕" pitchFamily="34" charset="-122"/>
                           <a:cs typeface="맑은 고딕" pitchFamily="34" charset="-120"/>
                         </a:rPr>
-                        <a:t>종목만</a:t>
+                        <a:t>종목</a:t>
                       </a:r>
                       <a:endParaRPr lang="en-US" sz="900" dirty="0">
                         <a:latin typeface="맑은 고딕" charset="0"/>
@@ -12412,7 +12412,7 @@
                           <a:ea typeface="맑은 고딕" pitchFamily="34" charset="-122"/>
                           <a:cs typeface="맑은 고딕" pitchFamily="34" charset="-120"/>
                         </a:rPr>
-                        <a:t>종목만</a:t>
+                        <a:t>종목</a:t>
                       </a:r>
                       <a:endParaRPr lang="en-US" sz="900" dirty="0">
                         <a:latin typeface="맑은 고딕" charset="0"/>
@@ -13132,7 +13132,7 @@
                           <a:ea typeface="맑은 고딕" pitchFamily="34" charset="-122"/>
                           <a:cs typeface="맑은 고딕" pitchFamily="34" charset="-120"/>
                         </a:rPr>
-                        <a:t>지수만</a:t>
+                        <a:t>지수</a:t>
                       </a:r>
                       <a:endParaRPr lang="en-US" sz="900" dirty="0">
                         <a:latin typeface="맑은 고딕" charset="0"/>
@@ -13852,7 +13852,7 @@
                           <a:ea typeface="맑은 고딕" pitchFamily="34" charset="-122"/>
                           <a:cs typeface="맑은 고딕" pitchFamily="34" charset="-120"/>
                         </a:rPr>
-                        <a:t>종목만</a:t>
+                        <a:t>종목</a:t>
                       </a:r>
                       <a:endParaRPr lang="en-US" sz="900" dirty="0">
                         <a:latin typeface="맑은 고딕" charset="0"/>
@@ -14572,7 +14572,7 @@
                           <a:ea typeface="맑은 고딕" pitchFamily="34" charset="-122"/>
                           <a:cs typeface="맑은 고딕" pitchFamily="34" charset="-120"/>
                         </a:rPr>
-                        <a:t>지수만</a:t>
+                        <a:t>지수</a:t>
                       </a:r>
                       <a:endParaRPr lang="en-US" sz="900" dirty="0">
                         <a:latin typeface="맑은 고딕" charset="0"/>
@@ -15292,7 +15292,7 @@
                           <a:ea typeface="맑은 고딕" pitchFamily="34" charset="-122"/>
                           <a:cs typeface="맑은 고딕" pitchFamily="34" charset="-120"/>
                         </a:rPr>
-                        <a:t>종목만</a:t>
+                        <a:t>종목</a:t>
                       </a:r>
                       <a:endParaRPr lang="en-US" sz="900" dirty="0">
                         <a:latin typeface="맑은 고딕" charset="0"/>
@@ -16012,7 +16012,7 @@
                           <a:ea typeface="맑은 고딕" pitchFamily="34" charset="-122"/>
                           <a:cs typeface="맑은 고딕" pitchFamily="34" charset="-120"/>
                         </a:rPr>
-                        <a:t>섞임</a:t>
+                        <a:t>혼합</a:t>
                       </a:r>
                       <a:endParaRPr lang="en-US" sz="900" dirty="0">
                         <a:latin typeface="맑은 고딕" charset="0"/>
@@ -16732,7 +16732,7 @@
                           <a:ea typeface="맑은 고딕" pitchFamily="34" charset="-122"/>
                           <a:cs typeface="맑은 고딕" pitchFamily="34" charset="-120"/>
                         </a:rPr>
-                        <a:t>종목만</a:t>
+                        <a:t>종목</a:t>
                       </a:r>
                       <a:endParaRPr lang="en-US" sz="900" dirty="0">
                         <a:latin typeface="맑은 고딕" charset="0"/>
@@ -17452,7 +17452,7 @@
                           <a:ea typeface="맑은 고딕" pitchFamily="34" charset="-122"/>
                           <a:cs typeface="맑은 고딕" pitchFamily="34" charset="-120"/>
                         </a:rPr>
-                        <a:t>종목만</a:t>
+                        <a:t>종목</a:t>
                       </a:r>
                       <a:endParaRPr lang="en-US" sz="900" dirty="0">
                         <a:latin typeface="맑은 고딕" charset="0"/>
@@ -18061,7 +18061,7 @@
                 <a:ea typeface="맑은 고딕" pitchFamily="34" charset="-122"/>
                 <a:cs typeface="맑은 고딕" pitchFamily="34" charset="-120"/>
               </a:rPr>
-              <a:t>이 등급은 B(컴퓨터로 다시 돌린 손실 확률) 하나만 보고 나눈 것입니다 — 15% 이하면 방어적, 15~25%면 중간, 25%를 넘으면 공격적. 수익률이나 기준 자산 종류는 등급에 넣지 않았습니다. 전부 원금을 잃을 수 있는 가장 높은 위험 등급이므로, "안전하다"는 뜻이 아니라 서로 견줘 본 순서일 뿐입니다.</a:t>
+              <a:t>등급은 B(같은 조건으로 돌린 손실 확률) 하나로만 가릅니다 — 15% 이하 방어적, 15~25% 중간, 25% 초과 공격적. 수익률이나 기초자산 종류는 등급에 넣지 않았습니다. 모두 원금비보장 1등급 상품이므로 "안전"이 아니라 서로 견준 순서입니다.</a:t>
             </a:r>
             <a:endParaRPr lang="en-US" sz="1050" dirty="0"/>
           </a:p>
@@ -27492,7 +27492,7 @@
                 <a:ea typeface="맑은 고딕" pitchFamily="34" charset="-122"/>
                 <a:cs typeface="맑은 고딕" pitchFamily="34" charset="-120"/>
               </a:rPr>
-              <a:t>A. 회사가 과거로 돌려본 결과</a:t>
+              <a:t>A. 발행사 20년 백테스트</a:t>
             </a:r>
             <a:endParaRPr lang="en-US" sz="1500" dirty="0"/>
           </a:p>
@@ -28601,7 +28601,7 @@
                           <a:ea typeface="맑은 고딕" pitchFamily="34" charset="-122"/>
                           <a:cs typeface="맑은 고딕" pitchFamily="34" charset="-120"/>
                         </a:rPr>
-                        <a:t>무엇이 기준인가</a:t>
+                        <a:t>기초자산 종류</a:t>
                       </a:r>
                       <a:endParaRPr lang="en-US" sz="1150" dirty="0">
                         <a:latin typeface="맑은 고딕" charset="0"/>
@@ -28943,7 +28943,7 @@
                           <a:ea typeface="맑은 고딕" pitchFamily="34" charset="-122"/>
                           <a:cs typeface="맑은 고딕" pitchFamily="34" charset="-120"/>
                         </a:rPr>
-                        <a:t>지수만</a:t>
+                        <a:t>지수형</a:t>
                       </a:r>
                       <a:endParaRPr lang="en-US" sz="1150" dirty="0">
                         <a:latin typeface="맑은 고딕" charset="0"/>
@@ -29270,7 +29270,7 @@
                           <a:ea typeface="맑은 고딕" pitchFamily="34" charset="-122"/>
                           <a:cs typeface="맑은 고딕" pitchFamily="34" charset="-120"/>
                         </a:rPr>
-                        <a:t>지수 + 종목</a:t>
+                        <a:t>혼합형</a:t>
                       </a:r>
                       <a:endParaRPr lang="en-US" sz="1150" dirty="0">
                         <a:latin typeface="맑은 고딕" charset="0"/>
@@ -29597,7 +29597,7 @@
                           <a:ea typeface="맑은 고딕" pitchFamily="34" charset="-122"/>
                           <a:cs typeface="맑은 고딕" pitchFamily="34" charset="-120"/>
                         </a:rPr>
-                        <a:t>개별 종목만</a:t>
+                        <a:t>종목형</a:t>
                       </a:r>
                       <a:endParaRPr lang="en-US" sz="1150" dirty="0">
                         <a:latin typeface="맑은 고딕" charset="0"/>
@@ -35015,7 +35015,7 @@
                 <a:ea typeface="맑은 고딕" pitchFamily="34" charset="-122"/>
                 <a:cs typeface="맑은 고딕" pitchFamily="34" charset="-120"/>
               </a:rPr>
-              <a:t>섞임</a:t>
+              <a:t>혼합형</a:t>
             </a:r>
             <a:endParaRPr lang="en-US" sz="1050" dirty="0"/>
           </a:p>
@@ -35686,7 +35686,7 @@
                 <a:ea typeface="맑은 고딕" pitchFamily="34" charset="-122"/>
                 <a:cs typeface="맑은 고딕" pitchFamily="34" charset="-120"/>
               </a:rPr>
-              <a:t>A. 회사가 20년 돌려본 손실</a:t>
+              <a:t>A. 발행사 20년 백테스트</a:t>
             </a:r>
             <a:endParaRPr lang="en-US" sz="1000" dirty="0"/>
           </a:p>
@@ -36602,7 +36602,7 @@
                 <a:ea typeface="맑은 고딕" pitchFamily="34" charset="-122"/>
                 <a:cs typeface="맑은 고딕" pitchFamily="34" charset="-120"/>
               </a:rPr>
-              <a:t>종목만</a:t>
+              <a:t>종목형</a:t>
             </a:r>
             <a:endParaRPr lang="en-US" sz="1050" dirty="0"/>
           </a:p>
@@ -37273,7 +37273,7 @@
                 <a:ea typeface="맑은 고딕" pitchFamily="34" charset="-122"/>
                 <a:cs typeface="맑은 고딕" pitchFamily="34" charset="-120"/>
               </a:rPr>
-              <a:t>A. 회사가 20년 돌려본 손실</a:t>
+              <a:t>A. 발행사 20년 백테스트</a:t>
             </a:r>
             <a:endParaRPr lang="en-US" sz="1000" dirty="0"/>
           </a:p>

--- a/els-proposal.pptx
+++ b/els-proposal.pptx
@@ -1347,7 +1347,7 @@
           <a:p>
             <a:r>
               <a:rPr lang="en-US" dirty="0"/>
-              <a:t>고객이 서류의 "낙인", "공정가액" 같은 말을 짚으며 물으실 때 이 장을 펴십시오. 왼쪽이 우리가 쓰는 말, 가운데가 서류에 적힌 말입니다.</a:t>
+              <a:t>고객이 서류의 "낙인", "공정가액" 같은 말을 짚으며 물으실 때 이 장을 펴십시오. 왼쪽이 서류에 적힌 말, 가운데가 바꿔 말씀하실 쉬운 말입니다.</a:t>
             </a:r>
             <a:endParaRPr lang="en-US" dirty="0"/>
           </a:p>
@@ -4347,7 +4347,7 @@
                 <a:ea typeface="맑은 고딕" pitchFamily="34" charset="-122"/>
                 <a:cs typeface="맑은 고딕" pitchFamily="34" charset="-120"/>
               </a:rPr>
-              <a:t>B. 컴퓨터로 다시 돌린 손실</a:t>
+              <a:t>B. 같은 조건 시뮬레이션 손실</a:t>
             </a:r>
             <a:endParaRPr lang="en-US" sz="1000" dirty="0"/>
           </a:p>
@@ -5024,14 +5024,14 @@
               <a:tblGrid>
                 <a:gridCol w="731520"/>
                 <a:gridCol w="2606040"/>
-                <a:gridCol w="530352"/>
+                <a:gridCol w="420624"/>
                 <a:gridCol w="841248"/>
-                <a:gridCol w="914400"/>
-                <a:gridCol w="1024128"/>
-                <a:gridCol w="822960"/>
+                <a:gridCol w="896112"/>
+                <a:gridCol w="1005840"/>
+                <a:gridCol w="859536"/>
                 <a:gridCol w="1005840"/>
                 <a:gridCol w="566928"/>
-                <a:gridCol w="1170432"/>
+                <a:gridCol w="1280160"/>
                 <a:gridCol w="841248"/>
               </a:tblGrid>
               <a:tr h="219456">
@@ -5528,7 +5528,7 @@
                           <a:ea typeface="맑은 고딕" pitchFamily="34" charset="-122"/>
                           <a:cs typeface="맑은 고딕" pitchFamily="34" charset="-120"/>
                         </a:rPr>
-                        <a:t>B. 손실 확률</a:t>
+                        <a:t>B. 시뮬레이션 손실 확률</a:t>
                       </a:r>
                       <a:endParaRPr lang="en-US" sz="900" dirty="0">
                         <a:latin typeface="맑은 고딕" charset="0"/>
@@ -5664,7 +5664,7 @@
                           <a:ea typeface="맑은 고딕" pitchFamily="34" charset="-122"/>
                           <a:cs typeface="맑은 고딕" pitchFamily="34" charset="-120"/>
                         </a:rPr>
-                        <a:t>A. 백테스트 손실</a:t>
+                        <a:t>A. 20년 백테스트 손실</a:t>
                       </a:r>
                       <a:endParaRPr lang="en-US" sz="900" dirty="0">
                         <a:latin typeface="맑은 고딕" charset="0"/>
@@ -18036,7 +18036,7 @@
         </p:nvSpPr>
         <p:spPr>
           <a:xfrm>
-            <a:off x="566928" y="5413248"/>
+            <a:off x="566928" y="5504688"/>
             <a:ext cx="11057839" cy="310896"/>
           </a:xfrm>
           <a:prstGeom prst="rect">
@@ -21738,7 +21738,7 @@
                 <a:ea typeface="맑은 고딕" pitchFamily="34" charset="-122"/>
                 <a:cs typeface="맑은 고딕" pitchFamily="34" charset="-120"/>
               </a:rPr>
-              <a:t>말 풀이 — 서류에 나오는 말과 맞춰 보기</a:t>
+              <a:t>말 풀이 — 서류의 말을 쉬운 말로</a:t>
             </a:r>
             <a:endParaRPr lang="en-US" sz="2400" dirty="0"/>
           </a:p>
@@ -21777,7 +21777,7 @@
                 <a:ea typeface="맑은 고딕" pitchFamily="34" charset="-122"/>
                 <a:cs typeface="맑은 고딕" pitchFamily="34" charset="-120"/>
               </a:rPr>
-              <a:t>이 자료는 어려운 말을 일부러 풀어서 썼습니다. 홈페이지와 투자설명서에는 원래 용어로 적혀 있으니, 고객이 서류를 펴 놓고 물으시면 두 말을 이어드리십시오.</a:t>
+              <a:t>고객이 투자설명서나 홈페이지를 펴 놓고 "여기 이건 무슨 말이냐" 물으실 때 쓰십시오. 왼쪽에서 그 말을 찾아, 가운데 말로 바꿔 말씀하시면 됩니다.</a:t>
             </a:r>
             <a:endParaRPr lang="en-US" sz="1250" dirty="0"/>
           </a:p>
@@ -21806,9 +21806,9 @@
             <a:tbl>
               <a:tblPr/>
               <a:tblGrid>
+                <a:gridCol w="1426464"/>
                 <a:gridCol w="1481328"/>
-                <a:gridCol w="1316736"/>
-                <a:gridCol w="2593696"/>
+                <a:gridCol w="2483968"/>
               </a:tblGrid>
               <a:tr h="457200">
                 <a:tc>
@@ -21828,7 +21828,7 @@
                           <a:ea typeface="맑은 고딕" pitchFamily="34" charset="-122"/>
                           <a:cs typeface="맑은 고딕" pitchFamily="34" charset="-120"/>
                         </a:rPr>
-                        <a:t>이 자료에서 쓴 말</a:t>
+                        <a:t>서류·홈페이지 용어</a:t>
                       </a:r>
                       <a:endParaRPr lang="en-US" sz="1050" dirty="0">
                         <a:latin typeface="맑은 고딕" charset="0"/>
@@ -21896,7 +21896,7 @@
                           <a:ea typeface="맑은 고딕" pitchFamily="34" charset="-122"/>
                           <a:cs typeface="맑은 고딕" pitchFamily="34" charset="-120"/>
                         </a:rPr>
-                        <a:t>서류 용어</a:t>
+                        <a:t>쉬운 용어</a:t>
                       </a:r>
                       <a:endParaRPr lang="en-US" sz="1050" dirty="0">
                         <a:latin typeface="맑은 고딕" charset="0"/>
@@ -22034,7 +22034,7 @@
                           <a:ea typeface="맑은 고딕" pitchFamily="34" charset="-122"/>
                           <a:cs typeface="맑은 고딕" pitchFamily="34" charset="-120"/>
                         </a:rPr>
-                        <a:t>기준 자산</a:t>
+                        <a:t>기초자산</a:t>
                       </a:r>
                       <a:endParaRPr lang="en-US" sz="1050" dirty="0">
                         <a:latin typeface="맑은 고딕" charset="0"/>
@@ -22093,13 +22093,13 @@
                       <a:r>
                         <a:rPr lang="en-US" sz="1050" dirty="0">
                           <a:solidFill>
-                            <a:srgbClr val="6C6C6C"/>
+                            <a:srgbClr val="CB6015"/>
                           </a:solidFill>
                           <a:latin typeface="맑은 고딕" pitchFamily="34" charset="0"/>
                           <a:ea typeface="맑은 고딕" pitchFamily="34" charset="-122"/>
                           <a:cs typeface="맑은 고딕" pitchFamily="34" charset="-120"/>
                         </a:rPr>
-                        <a:t>기초자산</a:t>
+                        <a:t>기준 자산</a:t>
                       </a:r>
                       <a:endParaRPr lang="en-US" sz="1050" dirty="0">
                         <a:latin typeface="맑은 고딕" charset="0"/>
@@ -22231,7 +22231,7 @@
                           <a:ea typeface="맑은 고딕" pitchFamily="34" charset="-122"/>
                           <a:cs typeface="맑은 고딕" pitchFamily="34" charset="-120"/>
                         </a:rPr>
-                        <a:t>처음 가격</a:t>
+                        <a:t>최초기준가격</a:t>
                       </a:r>
                       <a:endParaRPr lang="en-US" sz="1050" dirty="0">
                         <a:latin typeface="맑은 고딕" charset="0"/>
@@ -22290,13 +22290,13 @@
                       <a:r>
                         <a:rPr lang="en-US" sz="1050" dirty="0">
                           <a:solidFill>
-                            <a:srgbClr val="6C6C6C"/>
+                            <a:srgbClr val="CB6015"/>
                           </a:solidFill>
                           <a:latin typeface="맑은 고딕" pitchFamily="34" charset="0"/>
                           <a:ea typeface="맑은 고딕" pitchFamily="34" charset="-122"/>
                           <a:cs typeface="맑은 고딕" pitchFamily="34" charset="-120"/>
                         </a:rPr>
-                        <a:t>최초기준가격</a:t>
+                        <a:t>처음 가격</a:t>
                       </a:r>
                       <a:endParaRPr lang="en-US" sz="1050" dirty="0">
                         <a:latin typeface="맑은 고딕" charset="0"/>
@@ -22428,7 +22428,7 @@
                           <a:ea typeface="맑은 고딕" pitchFamily="34" charset="-122"/>
                           <a:cs typeface="맑은 고딕" pitchFamily="34" charset="-120"/>
                         </a:rPr>
-                        <a:t>미리 끝나는 기준선</a:t>
+                        <a:t>조기상환 배리어</a:t>
                       </a:r>
                       <a:endParaRPr lang="en-US" sz="1050" dirty="0">
                         <a:latin typeface="맑은 고딕" charset="0"/>
@@ -22487,13 +22487,13 @@
                       <a:r>
                         <a:rPr lang="en-US" sz="1050" dirty="0">
                           <a:solidFill>
-                            <a:srgbClr val="6C6C6C"/>
+                            <a:srgbClr val="CB6015"/>
                           </a:solidFill>
                           <a:latin typeface="맑은 고딕" pitchFamily="34" charset="0"/>
                           <a:ea typeface="맑은 고딕" pitchFamily="34" charset="-122"/>
                           <a:cs typeface="맑은 고딕" pitchFamily="34" charset="-120"/>
                         </a:rPr>
-                        <a:t>조기상환 배리어</a:t>
+                        <a:t>미리 끝나는 기준선</a:t>
                       </a:r>
                       <a:endParaRPr lang="en-US" sz="1050" dirty="0">
                         <a:latin typeface="맑은 고딕" charset="0"/>
@@ -22625,7 +22625,7 @@
                           <a:ea typeface="맑은 고딕" pitchFamily="34" charset="-122"/>
                           <a:cs typeface="맑은 고딕" pitchFamily="34" charset="-120"/>
                         </a:rPr>
-                        <a:t>뒤로 갈수록 기준이 낮아짐</a:t>
+                        <a:t>스텝다운</a:t>
                       </a:r>
                       <a:endParaRPr lang="en-US" sz="1050" dirty="0">
                         <a:latin typeface="맑은 고딕" charset="0"/>
@@ -22684,13 +22684,13 @@
                       <a:r>
                         <a:rPr lang="en-US" sz="1050" dirty="0">
                           <a:solidFill>
-                            <a:srgbClr val="6C6C6C"/>
+                            <a:srgbClr val="CB6015"/>
                           </a:solidFill>
                           <a:latin typeface="맑은 고딕" pitchFamily="34" charset="0"/>
                           <a:ea typeface="맑은 고딕" pitchFamily="34" charset="-122"/>
                           <a:cs typeface="맑은 고딕" pitchFamily="34" charset="-120"/>
                         </a:rPr>
-                        <a:t>스텝다운</a:t>
+                        <a:t>뒤로 갈수록 낮아지는 기준</a:t>
                       </a:r>
                       <a:endParaRPr lang="en-US" sz="1050" dirty="0">
                         <a:latin typeface="맑은 고딕" charset="0"/>
@@ -22822,7 +22822,7 @@
                           <a:ea typeface="맑은 고딕" pitchFamily="34" charset="-122"/>
                           <a:cs typeface="맑은 고딕" pitchFamily="34" charset="-120"/>
                         </a:rPr>
-                        <a:t>원금 지키는 선</a:t>
+                        <a:t>낙인(KI) 배리어</a:t>
                       </a:r>
                       <a:endParaRPr lang="en-US" sz="1050" dirty="0">
                         <a:latin typeface="맑은 고딕" charset="0"/>
@@ -22881,13 +22881,13 @@
                       <a:r>
                         <a:rPr lang="en-US" sz="1050" dirty="0">
                           <a:solidFill>
-                            <a:srgbClr val="6C6C6C"/>
+                            <a:srgbClr val="CB6015"/>
                           </a:solidFill>
                           <a:latin typeface="맑은 고딕" pitchFamily="34" charset="0"/>
                           <a:ea typeface="맑은 고딕" pitchFamily="34" charset="-122"/>
                           <a:cs typeface="맑은 고딕" pitchFamily="34" charset="-120"/>
                         </a:rPr>
-                        <a:t>낙인(KI) 배리어</a:t>
+                        <a:t>원금 지키는 선</a:t>
                       </a:r>
                       <a:endParaRPr lang="en-US" sz="1050" dirty="0">
                         <a:latin typeface="맑은 고딕" charset="0"/>
@@ -23019,7 +23019,7 @@
                           <a:ea typeface="맑은 고딕" pitchFamily="34" charset="-122"/>
                           <a:cs typeface="맑은 고딕" pitchFamily="34" charset="-120"/>
                         </a:rPr>
-                        <a:t>더 떨어진 하나로 판정</a:t>
+                        <a:t>워스트 퍼포머</a:t>
                       </a:r>
                       <a:endParaRPr lang="en-US" sz="1050" dirty="0">
                         <a:latin typeface="맑은 고딕" charset="0"/>
@@ -23078,13 +23078,13 @@
                       <a:r>
                         <a:rPr lang="en-US" sz="1050" dirty="0">
                           <a:solidFill>
-                            <a:srgbClr val="6C6C6C"/>
+                            <a:srgbClr val="CB6015"/>
                           </a:solidFill>
                           <a:latin typeface="맑은 고딕" pitchFamily="34" charset="0"/>
                           <a:ea typeface="맑은 고딕" pitchFamily="34" charset="-122"/>
                           <a:cs typeface="맑은 고딕" pitchFamily="34" charset="-120"/>
                         </a:rPr>
-                        <a:t>워스트 퍼포머</a:t>
+                        <a:t>더 떨어진 하나로 판정</a:t>
                       </a:r>
                       <a:endParaRPr lang="en-US" sz="1050" dirty="0">
                         <a:latin typeface="맑은 고딕" charset="0"/>
@@ -23216,7 +23216,7 @@
                           <a:ea typeface="맑은 고딕" pitchFamily="34" charset="-122"/>
                           <a:cs typeface="맑은 고딕" pitchFamily="34" charset="-120"/>
                         </a:rPr>
-                        <a:t>가격 출렁임</a:t>
+                        <a:t>(내재)변동성</a:t>
                       </a:r>
                       <a:endParaRPr lang="en-US" sz="1050" dirty="0">
                         <a:latin typeface="맑은 고딕" charset="0"/>
@@ -23275,13 +23275,13 @@
                       <a:r>
                         <a:rPr lang="en-US" sz="1050" dirty="0">
                           <a:solidFill>
-                            <a:srgbClr val="6C6C6C"/>
+                            <a:srgbClr val="CB6015"/>
                           </a:solidFill>
                           <a:latin typeface="맑은 고딕" pitchFamily="34" charset="0"/>
                           <a:ea typeface="맑은 고딕" pitchFamily="34" charset="-122"/>
                           <a:cs typeface="맑은 고딕" pitchFamily="34" charset="-120"/>
                         </a:rPr>
-                        <a:t>(내재)변동성</a:t>
+                        <a:t>가격 출렁임</a:t>
                       </a:r>
                       <a:endParaRPr lang="en-US" sz="1050" dirty="0">
                         <a:latin typeface="맑은 고딕" charset="0"/>
@@ -23422,9 +23422,9 @@
             <a:tbl>
               <a:tblPr/>
               <a:tblGrid>
+                <a:gridCol w="1426464"/>
                 <a:gridCol w="1481328"/>
-                <a:gridCol w="1316736"/>
-                <a:gridCol w="2593696"/>
+                <a:gridCol w="2483968"/>
               </a:tblGrid>
               <a:tr h="457200">
                 <a:tc>
@@ -23444,7 +23444,7 @@
                           <a:ea typeface="맑은 고딕" pitchFamily="34" charset="-122"/>
                           <a:cs typeface="맑은 고딕" pitchFamily="34" charset="-120"/>
                         </a:rPr>
-                        <a:t>이 자료에서 쓴 말</a:t>
+                        <a:t>서류·홈페이지 용어</a:t>
                       </a:r>
                       <a:endParaRPr lang="en-US" sz="1050" dirty="0">
                         <a:latin typeface="맑은 고딕" charset="0"/>
@@ -23512,7 +23512,7 @@
                           <a:ea typeface="맑은 고딕" pitchFamily="34" charset="-122"/>
                           <a:cs typeface="맑은 고딕" pitchFamily="34" charset="-120"/>
                         </a:rPr>
-                        <a:t>서류 용어</a:t>
+                        <a:t>쉬운 용어</a:t>
                       </a:r>
                       <a:endParaRPr lang="en-US" sz="1050" dirty="0">
                         <a:latin typeface="맑은 고딕" charset="0"/>
@@ -23650,7 +23650,7 @@
                           <a:ea typeface="맑은 고딕" pitchFamily="34" charset="-122"/>
                           <a:cs typeface="맑은 고딕" pitchFamily="34" charset="-120"/>
                         </a:rPr>
-                        <a:t>같이 움직이는 정도</a:t>
+                        <a:t>상관계수</a:t>
                       </a:r>
                       <a:endParaRPr lang="en-US" sz="1050" dirty="0">
                         <a:latin typeface="맑은 고딕" charset="0"/>
@@ -23709,13 +23709,13 @@
                       <a:r>
                         <a:rPr lang="en-US" sz="1050" dirty="0">
                           <a:solidFill>
-                            <a:srgbClr val="6C6C6C"/>
+                            <a:srgbClr val="CB6015"/>
                           </a:solidFill>
                           <a:latin typeface="맑은 고딕" pitchFamily="34" charset="0"/>
                           <a:ea typeface="맑은 고딕" pitchFamily="34" charset="-122"/>
                           <a:cs typeface="맑은 고딕" pitchFamily="34" charset="-120"/>
                         </a:rPr>
-                        <a:t>상관계수</a:t>
+                        <a:t>같이 움직이는 정도</a:t>
                       </a:r>
                       <a:endParaRPr lang="en-US" sz="1050" dirty="0">
                         <a:latin typeface="맑은 고딕" charset="0"/>
@@ -23847,7 +23847,7 @@
                           <a:ea typeface="맑은 고딕" pitchFamily="34" charset="-122"/>
                           <a:cs typeface="맑은 고딕" pitchFamily="34" charset="-120"/>
                         </a:rPr>
-                        <a:t>실제 값어치</a:t>
+                        <a:t>공정가액</a:t>
                       </a:r>
                       <a:endParaRPr lang="en-US" sz="1050" dirty="0">
                         <a:latin typeface="맑은 고딕" charset="0"/>
@@ -23906,13 +23906,13 @@
                       <a:r>
                         <a:rPr lang="en-US" sz="1050" dirty="0">
                           <a:solidFill>
-                            <a:srgbClr val="6C6C6C"/>
+                            <a:srgbClr val="CB6015"/>
                           </a:solidFill>
                           <a:latin typeface="맑은 고딕" pitchFamily="34" charset="0"/>
                           <a:ea typeface="맑은 고딕" pitchFamily="34" charset="-122"/>
                           <a:cs typeface="맑은 고딕" pitchFamily="34" charset="-120"/>
                         </a:rPr>
-                        <a:t>공정가액</a:t>
+                        <a:t>실제 값어치</a:t>
                       </a:r>
                       <a:endParaRPr lang="en-US" sz="1050" dirty="0">
                         <a:latin typeface="맑은 고딕" charset="0"/>
@@ -24044,7 +24044,7 @@
                           <a:ea typeface="맑은 고딕" pitchFamily="34" charset="-122"/>
                           <a:cs typeface="맑은 고딕" pitchFamily="34" charset="-120"/>
                         </a:rPr>
-                        <a:t>평균적으로 잃는 크기</a:t>
+                        <a:t>기대손실</a:t>
                       </a:r>
                       <a:endParaRPr lang="en-US" sz="1050" dirty="0">
                         <a:latin typeface="맑은 고딕" charset="0"/>
@@ -24103,13 +24103,13 @@
                       <a:r>
                         <a:rPr lang="en-US" sz="1050" dirty="0">
                           <a:solidFill>
-                            <a:srgbClr val="6C6C6C"/>
+                            <a:srgbClr val="CB6015"/>
                           </a:solidFill>
                           <a:latin typeface="맑은 고딕" pitchFamily="34" charset="0"/>
                           <a:ea typeface="맑은 고딕" pitchFamily="34" charset="-122"/>
                           <a:cs typeface="맑은 고딕" pitchFamily="34" charset="-120"/>
                         </a:rPr>
-                        <a:t>기대손실</a:t>
+                        <a:t>평균적으로 잃는 크기</a:t>
                       </a:r>
                       <a:endParaRPr lang="en-US" sz="1050" dirty="0">
                         <a:latin typeface="맑은 고딕" charset="0"/>
@@ -24300,13 +24300,13 @@
                       <a:r>
                         <a:rPr lang="en-US" sz="1050" dirty="0">
                           <a:solidFill>
-                            <a:srgbClr val="6C6C6C"/>
+                            <a:srgbClr val="CB6015"/>
                           </a:solidFill>
                           <a:latin typeface="맑은 고딕" pitchFamily="34" charset="0"/>
                           <a:ea typeface="맑은 고딕" pitchFamily="34" charset="-122"/>
                           <a:cs typeface="맑은 고딕" pitchFamily="34" charset="-120"/>
                         </a:rPr>
-                        <a:t>서류와 같은 말</a:t>
+                        <a:t>다시 생각하는 기간</a:t>
                       </a:r>
                       <a:endParaRPr lang="en-US" sz="1050" dirty="0">
                         <a:latin typeface="맑은 고딕" charset="0"/>
@@ -24371,7 +24371,7 @@
                           <a:ea typeface="맑은 고딕" pitchFamily="34" charset="-122"/>
                           <a:cs typeface="맑은 고딕" pitchFamily="34" charset="-120"/>
                         </a:rPr>
-                        <a:t>다시 생각해 보시라고 법이 비워 둔 2영업일 이상. 이때는 청약 못 넣음</a:t>
+                        <a:t>법이 비워 둔 2영업일 이상. 이때는 청약 못 넣음</a:t>
                       </a:r>
                       <a:endParaRPr lang="en-US" sz="1050" dirty="0">
                         <a:latin typeface="맑은 고딕" charset="0"/>
@@ -24497,13 +24497,13 @@
                       <a:r>
                         <a:rPr lang="en-US" sz="1050" dirty="0">
                           <a:solidFill>
-                            <a:srgbClr val="6C6C6C"/>
+                            <a:srgbClr val="CB6015"/>
                           </a:solidFill>
                           <a:latin typeface="맑은 고딕" pitchFamily="34" charset="0"/>
                           <a:ea typeface="맑은 고딕" pitchFamily="34" charset="-122"/>
                           <a:cs typeface="맑은 고딕" pitchFamily="34" charset="-120"/>
                         </a:rPr>
-                        <a:t>서류와 같은 말</a:t>
+                        <a:t>정말 하실 건지 확인</a:t>
                       </a:r>
                       <a:endParaRPr lang="en-US" sz="1050" dirty="0">
                         <a:latin typeface="맑은 고딕" charset="0"/>
@@ -24568,7 +24568,7 @@
                           <a:ea typeface="맑은 고딕" pitchFamily="34" charset="-122"/>
                           <a:cs typeface="맑은 고딕" pitchFamily="34" charset="-120"/>
                         </a:rPr>
-                        <a:t>정말 하실 건지 회사가 연락해 확인. 안 닿으면 청약 취소</a:t>
+                        <a:t>회사가 연락해 확인. 안 닿으면 청약 취소</a:t>
                       </a:r>
                       <a:endParaRPr lang="en-US" sz="1050" dirty="0">
                         <a:latin typeface="맑은 고딕" charset="0"/>
@@ -24635,7 +24635,7 @@
                           <a:ea typeface="맑은 고딕" pitchFamily="34" charset="-122"/>
                           <a:cs typeface="맑은 고딕" pitchFamily="34" charset="-120"/>
                         </a:rPr>
-                        <a:t>중간에 빼기</a:t>
+                        <a:t>중도상환</a:t>
                       </a:r>
                       <a:endParaRPr lang="en-US" sz="1050" dirty="0">
                         <a:latin typeface="맑은 고딕" charset="0"/>
@@ -24694,13 +24694,13 @@
                       <a:r>
                         <a:rPr lang="en-US" sz="1050" dirty="0">
                           <a:solidFill>
-                            <a:srgbClr val="6C6C6C"/>
+                            <a:srgbClr val="CB6015"/>
                           </a:solidFill>
                           <a:latin typeface="맑은 고딕" pitchFamily="34" charset="0"/>
                           <a:ea typeface="맑은 고딕" pitchFamily="34" charset="-122"/>
                           <a:cs typeface="맑은 고딕" pitchFamily="34" charset="-120"/>
                         </a:rPr>
-                        <a:t>중도상환</a:t>
+                        <a:t>중간에 빼기</a:t>
                       </a:r>
                       <a:endParaRPr lang="en-US" sz="1050" dirty="0">
                         <a:latin typeface="맑은 고딕" charset="0"/>
@@ -24832,7 +24832,7 @@
                           <a:ea typeface="맑은 고딕" pitchFamily="34" charset="-122"/>
                           <a:cs typeface="맑은 고딕" pitchFamily="34" charset="-120"/>
                         </a:rPr>
-                        <a:t>1등급</a:t>
+                        <a:t>위험등급 1등급</a:t>
                       </a:r>
                       <a:endParaRPr lang="en-US" sz="1050" dirty="0">
                         <a:latin typeface="맑은 고딕" charset="0"/>
@@ -24891,13 +24891,13 @@
                       <a:r>
                         <a:rPr lang="en-US" sz="1050" dirty="0">
                           <a:solidFill>
-                            <a:srgbClr val="6C6C6C"/>
+                            <a:srgbClr val="CB6015"/>
                           </a:solidFill>
                           <a:latin typeface="맑은 고딕" pitchFamily="34" charset="0"/>
                           <a:ea typeface="맑은 고딕" pitchFamily="34" charset="-122"/>
                           <a:cs typeface="맑은 고딕" pitchFamily="34" charset="-120"/>
                         </a:rPr>
-                        <a:t>위험등급 1등급</a:t>
+                        <a:t>가장 위험한 등급</a:t>
                       </a:r>
                       <a:endParaRPr lang="en-US" sz="1050" dirty="0">
                         <a:latin typeface="맑은 고딕" charset="0"/>
@@ -27902,7 +27902,7 @@
                 <a:ea typeface="맑은 고딕" pitchFamily="34" charset="-122"/>
                 <a:cs typeface="맑은 고딕" pitchFamily="34" charset="-120"/>
               </a:rPr>
-              <a:t>B. 컴퓨터로 다시 돌린 결과</a:t>
+              <a:t>B. 같은 조건 시뮬레이션</a:t>
             </a:r>
             <a:endParaRPr lang="en-US" sz="1500" dirty="0"/>
           </a:p>
@@ -35828,7 +35828,7 @@
                 <a:ea typeface="맑은 고딕" pitchFamily="34" charset="-122"/>
                 <a:cs typeface="맑은 고딕" pitchFamily="34" charset="-120"/>
               </a:rPr>
-              <a:t>B. 컴퓨터로 다시 돌린 손실</a:t>
+              <a:t>B. 같은 조건 시뮬레이션 손실</a:t>
             </a:r>
             <a:endParaRPr lang="en-US" sz="1000" dirty="0"/>
           </a:p>
@@ -37415,7 +37415,7 @@
                 <a:ea typeface="맑은 고딕" pitchFamily="34" charset="-122"/>
                 <a:cs typeface="맑은 고딕" pitchFamily="34" charset="-120"/>
               </a:rPr>
-              <a:t>B. 컴퓨터로 다시 돌린 손실</a:t>
+              <a:t>B. 같은 조건 시뮬레이션 손실</a:t>
             </a:r>
             <a:endParaRPr lang="en-US" sz="1000" dirty="0"/>
           </a:p>

--- a/els-proposal.pptx
+++ b/els-proposal.pptx
@@ -5664,7 +5664,7 @@
                           <a:ea typeface="맑은 고딕" pitchFamily="34" charset="-122"/>
                           <a:cs typeface="맑은 고딕" pitchFamily="34" charset="-120"/>
                         </a:rPr>
-                        <a:t>A. 20년 백테스트 손실</a:t>
+                        <a:t>A. 백테스트 손실 확률</a:t>
                       </a:r>
                       <a:endParaRPr lang="en-US" sz="900" dirty="0">
                         <a:latin typeface="맑은 고딕" charset="0"/>

--- a/els-proposal.pptx
+++ b/els-proposal.pptx
@@ -5392,7 +5392,7 @@
                           <a:ea typeface="맑은 고딕" pitchFamily="34" charset="-122"/>
                           <a:cs typeface="맑은 고딕" pitchFamily="34" charset="-120"/>
                         </a:rPr>
-                        <a:t>원금 지키는 선</a:t>
+                        <a:t>낙인 배리어</a:t>
                       </a:r>
                       <a:endParaRPr lang="en-US" sz="900" dirty="0">
                         <a:latin typeface="맑은 고딕" charset="0"/>
@@ -5664,7 +5664,7 @@
                           <a:ea typeface="맑은 고딕" pitchFamily="34" charset="-122"/>
                           <a:cs typeface="맑은 고딕" pitchFamily="34" charset="-120"/>
                         </a:rPr>
-                        <a:t>A. 백테스트 손실 확률</a:t>
+                        <a:t>A. 설명서상 백테스트 손실 확률</a:t>
                       </a:r>
                       <a:endParaRPr lang="en-US" sz="900" dirty="0">
                         <a:latin typeface="맑은 고딕" charset="0"/>
@@ -24700,7 +24700,7 @@
                           <a:ea typeface="맑은 고딕" pitchFamily="34" charset="-122"/>
                           <a:cs typeface="맑은 고딕" pitchFamily="34" charset="-120"/>
                         </a:rPr>
-                        <a:t>중간에 빼기</a:t>
+                        <a:t>중간에 해지</a:t>
                       </a:r>
                       <a:endParaRPr lang="en-US" sz="1050" dirty="0">
                         <a:latin typeface="맑은 고딕" charset="0"/>

--- a/els-proposal.pptx
+++ b/els-proposal.pptx
@@ -30528,7 +30528,7 @@
                           <a:ea typeface="맑은 고딕" pitchFamily="34" charset="-122"/>
                           <a:cs typeface="맑은 고딕" pitchFamily="34" charset="-120"/>
                         </a:rPr>
-                        <a:t>가격 출렁임</a:t>
+                        <a:t>가격 출렁임 (적용 변동성)</a:t>
                       </a:r>
                       <a:endParaRPr lang="en-US" sz="1150" dirty="0">
                         <a:latin typeface="맑은 고딕" charset="0"/>
@@ -30745,15 +30745,15 @@
                         <a:buNone/>
                       </a:pPr>
                       <a:r>
-                        <a:rPr lang="en-US" sz="1150" dirty="0">
+                        <a:rPr lang="en-US" sz="1150" b="1" dirty="0">
                           <a:solidFill>
-                            <a:srgbClr val="3D3D3D"/>
+                            <a:srgbClr val="1A1A1A"/>
                           </a:solidFill>
                           <a:latin typeface="맑은 고딕" pitchFamily="34" charset="0"/>
                           <a:ea typeface="맑은 고딕" pitchFamily="34" charset="-122"/>
                           <a:cs typeface="맑은 고딕" pitchFamily="34" charset="-120"/>
                         </a:rPr>
-                        <a:t>손해 볼 가능성</a:t>
+                        <a:t>손실 확률 — 이 문서가 등급을 매기는 기준</a:t>
                       </a:r>
                       <a:endParaRPr lang="en-US" sz="1150" dirty="0">
                         <a:latin typeface="맑은 고딕" charset="0"/>
@@ -30812,7 +30812,7 @@
                       <a:r>
                         <a:rPr lang="en-US" sz="1300" b="1" dirty="0">
                           <a:solidFill>
-                            <a:srgbClr val="1A1A1A"/>
+                            <a:srgbClr val="CB6015"/>
                           </a:solidFill>
                           <a:latin typeface="맑은 고딕" pitchFamily="34" charset="0"/>
                           <a:ea typeface="맑은 고딕" pitchFamily="34" charset="-122"/>
@@ -30891,7 +30891,7 @@
                       <a:r>
                         <a:rPr lang="en-US" sz="1300" b="1" dirty="0">
                           <a:solidFill>
-                            <a:srgbClr val="1A1A1A"/>
+                            <a:srgbClr val="CB6015"/>
                           </a:solidFill>
                           <a:latin typeface="맑은 고딕" pitchFamily="34" charset="0"/>
                           <a:ea typeface="맑은 고딕" pitchFamily="34" charset="-122"/>
@@ -30970,15 +30970,15 @@
                         <a:buNone/>
                       </a:pPr>
                       <a:r>
-                        <a:rPr lang="en-US" sz="1150" b="1" dirty="0">
+                        <a:rPr lang="en-US" sz="1150" dirty="0">
                           <a:solidFill>
-                            <a:srgbClr val="1A1A1A"/>
+                            <a:srgbClr val="3D3D3D"/>
                           </a:solidFill>
                           <a:latin typeface="맑은 고딕" pitchFamily="34" charset="0"/>
                           <a:ea typeface="맑은 고딕" pitchFamily="34" charset="-122"/>
                           <a:cs typeface="맑은 고딕" pitchFamily="34" charset="-120"/>
                         </a:rPr>
-                        <a:t>평균적으로 잃는 크기 (가능성 × 잃을 때의 크기)</a:t>
+                        <a:t>참고 · 손실 확률 × 잃을 때의 크기</a:t>
                       </a:r>
                       <a:endParaRPr lang="en-US" sz="1150" dirty="0">
                         <a:latin typeface="맑은 고딕" charset="0"/>
@@ -31037,7 +31037,7 @@
                       <a:r>
                         <a:rPr lang="en-US" sz="1300" b="1" dirty="0">
                           <a:solidFill>
-                            <a:srgbClr val="CB6015"/>
+                            <a:srgbClr val="1A1A1A"/>
                           </a:solidFill>
                           <a:latin typeface="맑은 고딕" pitchFamily="34" charset="0"/>
                           <a:ea typeface="맑은 고딕" pitchFamily="34" charset="-122"/>
@@ -31116,7 +31116,7 @@
                       <a:r>
                         <a:rPr lang="en-US" sz="1300" b="1" dirty="0">
                           <a:solidFill>
-                            <a:srgbClr val="CB6015"/>
+                            <a:srgbClr val="1A1A1A"/>
                           </a:solidFill>
                           <a:latin typeface="맑은 고딕" pitchFamily="34" charset="0"/>
                           <a:ea typeface="맑은 고딕" pitchFamily="34" charset="-122"/>
@@ -31225,7 +31225,7 @@
                 <a:ea typeface="맑은 고딕" pitchFamily="34" charset="-122"/>
                 <a:cs typeface="맑은 고딕" pitchFamily="34" charset="-120"/>
               </a:rPr>
-              <a:t>숫자가 1에 가까울수록 "수익률 높은 상품이 위험도 크다"가 잘 들어맞고, 0이면 아무 관계가 없다는 뜻입니다(순서를 견주는 방식으로 쟀습니다).  값어치 멀쩡한 13종 = 넣는 순간의 값어치가 제값보다 5% 넘게 깎이지는 않은 상품 — 나머지 4종은 높은 수익률이 위험의 대가가 아니라 비용으로 빠져나간 상품이라 이 법칙 자체가 통하지 않습니다.</a:t>
+              <a:t>숫자가 1에 가까울수록 "수익률 높은 상품이 손실 확률도 높다"가 잘 들어맞고, 0이면 아무 관계가 없다는 뜻입니다(순서를 견주는 방식으로 쟀습니다).  값어치 멀쩡한 13종 = 넣는 순간의 값어치가 제값보다 5% 넘게 깎이지는 않은 상품 — 나머지 4종은 높은 수익률이 위험의 대가가 아니라 비용으로 빠져나간 상품이라 이 법칙 자체가 통하지 않습니다.</a:t>
             </a:r>
             <a:endParaRPr lang="en-US" sz="1000" dirty="0"/>
           </a:p>
@@ -31328,7 +31328,7 @@
                 <a:ea typeface="맑은 고딕" pitchFamily="34" charset="-122"/>
                 <a:cs typeface="맑은 고딕" pitchFamily="34" charset="-120"/>
               </a:rPr>
-              <a:t>75%</a:t>
+              <a:t>71%</a:t>
             </a:r>
             <a:endParaRPr lang="en-US" sz="2800" dirty="0"/>
           </a:p>
@@ -31370,7 +31370,7 @@
                 <a:ea typeface="맑은 고딕" pitchFamily="34" charset="-122"/>
                 <a:cs typeface="맑은 고딕" pitchFamily="34" charset="-120"/>
               </a:rPr>
-              <a:t>17종으로 만들 수 있는 136짝 중 102짝에서 "수익률 높은 쪽이 잃는 크기도 컸다"가 맞았습니다</a:t>
+              <a:t>17종으로 만들 수 있는 136짝 중 97짝에서 "수익률 높은 쪽이 손실 확률도 높다"가 맞았습니다</a:t>
             </a:r>
             <a:endParaRPr lang="en-US" sz="1000" dirty="0"/>
           </a:p>
@@ -31515,7 +31515,7 @@
                 <a:ea typeface="맑은 고딕" pitchFamily="34" charset="-122"/>
                 <a:cs typeface="맑은 고딕" pitchFamily="34" charset="-120"/>
               </a:rPr>
-              <a:t>수익률 1%p당 손해 볼 가능성 +0.34%p — 방향은 맞지만 상품마다 그 몇 배씩 들쭉날쭉합니다</a:t>
+              <a:t>수익률 1%p당 손실 확률 +0.34%p — 방향은 맞지만 상품마다 그 몇 배씩 들쭉날쭉합니다</a:t>
             </a:r>
             <a:endParaRPr lang="en-US" sz="1000" dirty="0"/>
           </a:p>
@@ -31579,7 +31579,7 @@
                 <a:ea typeface="맑은 고딕" pitchFamily="34" charset="-122"/>
                 <a:cs typeface="맑은 고딕" pitchFamily="34" charset="-120"/>
               </a:rPr>
-              <a:t>같은 위험에 받는 수익률</a:t>
+              <a:t>손실 확률 1%당 연 수익률</a:t>
             </a:r>
             <a:endParaRPr lang="en-US" sz="1050" dirty="0"/>
           </a:p>
@@ -31618,7 +31618,7 @@
                 <a:ea typeface="맑은 고딕" pitchFamily="34" charset="-122"/>
                 <a:cs typeface="맑은 고딕" pitchFamily="34" charset="-120"/>
               </a:rPr>
-              <a:t>6.1배</a:t>
+              <a:t>5.4배</a:t>
             </a:r>
             <a:endParaRPr lang="en-US" sz="2800" dirty="0"/>
           </a:p>
@@ -31660,7 +31660,7 @@
                 <a:ea typeface="맑은 고딕" pitchFamily="34" charset="-122"/>
                 <a:cs typeface="맑은 고딕" pitchFamily="34" charset="-120"/>
               </a:rPr>
-              <a:t>0.57(제38046회) ~ 3.48(제38044회). 정확히 비례한다면 전부 같아야 합니다</a:t>
+              <a:t>0.50%(제38046회) ~ 2.68%(제38044회). 정확히 비례한다면 전부 같아야 합니다</a:t>
             </a:r>
             <a:endParaRPr lang="en-US" sz="1000" dirty="0"/>
           </a:p>
@@ -31830,7 +31830,7 @@
                 <a:ea typeface="맑은 고딕" pitchFamily="34" charset="-122"/>
                 <a:cs typeface="맑은 고딕" pitchFamily="34" charset="-120"/>
               </a:rPr>
-              <a:t>수익률이 갚는 건 "가능성"이 아닙니다</a:t>
+              <a:t>확률만 보면 왜 느슨해지나</a:t>
             </a:r>
             <a:endParaRPr lang="en-US" sz="1200" dirty="0"/>
           </a:p>
@@ -31872,7 +31872,7 @@
                 <a:ea typeface="맑은 고딕" pitchFamily="34" charset="-122"/>
                 <a:cs typeface="맑은 고딕" pitchFamily="34" charset="-120"/>
               </a:rPr>
-              <a:t>수익률은 손해 볼 가능성(0.66)보다 평균적으로 잃는 크기(0.82)와 훨씬 잘 붙습니다. 지수만 담은 상품은 잃을 때 65% 남짓, 개별 종목 상품은 80%가량 잃습니다. 회사는 "얼마나 자주"가 아니라 "자주 × 크게"로 값을 매깁니다.</a:t>
+              <a:t>손실 확률은 0.66인데, 잃을 때 얼마나 잃는지까지 곱하면 0.82로 올라갑니다. 확률이 못 잡는 부분이 손실의 크기입니다 — 지수만 담은 상품은 손해가 나면 65% 남짓, 개별 종목 상품은 80%가량 잃습니다. 등급이 같은 두 상품이면 개별 종목 쪽이 더 비싼 위험입니다.</a:t>
             </a:r>
             <a:endParaRPr lang="en-US" sz="1050" dirty="0"/>
           </a:p>
@@ -32078,7 +32078,7 @@
                 <a:ea typeface="맑은 고딕" pitchFamily="34" charset="-122"/>
                 <a:cs typeface="맑은 고딕" pitchFamily="34" charset="-120"/>
               </a:rPr>
-              <a:t>수익률과 위험이 어긋나는 이유는 셋입니다. 셋 다 이번 주 데이터에서 그대로 확인됩니다.</a:t>
+              <a:t>수익률과 손실 확률이 어긋나는 이유는 셋입니다. 셋 다 이번 회차 데이터에서 그대로 확인됩니다.</a:t>
             </a:r>
             <a:endParaRPr lang="en-US" sz="1250" dirty="0"/>
           </a:p>
@@ -32198,7 +32198,7 @@
                 <a:ea typeface="맑은 고딕" pitchFamily="34" charset="-122"/>
                 <a:cs typeface="맑은 고딕" pitchFamily="34" charset="-120"/>
               </a:rPr>
-              <a:t>삼성전자·SK하이닉스 6종은 기준 자산도, 가격 출렁임(60.9%)도, 기간(36개월)도 똑같은데 수익률만 갈립니다.</a:t>
+              <a:t>삼성전자·SK하이닉스 6종은 기초자산도, 적용 변동성(60.9%)도, 기간(36개월)도 똑같은데 수익률만 갈립니다.</a:t>
             </a:r>
             <a:endParaRPr lang="en-US" sz="1000" dirty="0"/>
           </a:p>
@@ -32227,7 +32227,7 @@
                 <a:ea typeface="맑은 고딕" pitchFamily="34" charset="-122"/>
                 <a:cs typeface="맑은 고딕" pitchFamily="34" charset="-120"/>
               </a:rPr>
-              <a:t>제38039회 연 31.3% · 평균적으로 잃는 크기 13.6%</a:t>
+              <a:t>제38037회 손실 확률 15.9% · 연 27.5%</a:t>
             </a:r>
             <a:endParaRPr lang="en-US" sz="1000" dirty="0"/>
           </a:p>
@@ -32247,7 +32247,7 @@
                 <a:ea typeface="맑은 고딕" pitchFamily="34" charset="-122"/>
                 <a:cs typeface="맑은 고딕" pitchFamily="34" charset="-120"/>
               </a:rPr>
-              <a:t>제38043회 연 19.2% · 평균적으로 잃는 크기 12.6%</a:t>
+              <a:t>제38043회 손실 확률 15.4% · 연 19.2%</a:t>
             </a:r>
             <a:endParaRPr lang="en-US" sz="1000" dirty="0"/>
           </a:p>
@@ -32276,7 +32276,7 @@
                 <a:ea typeface="맑은 고딕" pitchFamily="34" charset="-122"/>
                 <a:cs typeface="맑은 고딕" pitchFamily="34" charset="-120"/>
               </a:rPr>
-              <a:t>위험이 사실상 같은데 수익률이 12.1%p 차이 납니다. 끝날 기회를 3개월마다 보느냐 6개월마다 보느냐, 원금 지키는 선이 30%냐 20%냐가 갈랐습니다.</a:t>
+              <a:t>손실 확률은 0.5%p 차인데 수익률은 8.3%p 차입니다. 끝날 기회를 3개월마다 보느냐 6개월마다 보느냐, 낙인이 25%냐 20%냐가 갈랐습니다.</a:t>
             </a:r>
             <a:endParaRPr lang="en-US" sz="1000" dirty="0"/>
           </a:p>
@@ -32396,7 +32396,7 @@
                 <a:ea typeface="맑은 고딕" pitchFamily="34" charset="-122"/>
                 <a:cs typeface="맑은 고딕" pitchFamily="34" charset="-120"/>
               </a:rPr>
-              <a:t>제38046회는 연 25.0%인데 평균적으로 잃는 크기가 43.8%나 됩니다. 넣는 순간의 값어치가 제값보다 -31.7%나 깎여 있기 때문입니다.</a:t>
+              <a:t>제38046회는 연 25.0%인데 손실 확률이 50.4%나 됩니다 — 손실 확률 1%당 0.50%로 이번 회차 꼴찌입니다. 넣는 순간의 값어치가 제값보다 -31.7%나 깎여 있기 때문입니다.</a:t>
             </a:r>
             <a:endParaRPr lang="en-US" sz="1000" dirty="0"/>
           </a:p>
@@ -32454,7 +32454,7 @@
                 <a:ea typeface="맑은 고딕" pitchFamily="34" charset="-122"/>
                 <a:cs typeface="맑은 고딕" pitchFamily="34" charset="-120"/>
               </a:rPr>
-              <a:t>많이 깎인 4종만 빼도 수익률과 출렁임의 관계가 0.77 → 0.86로 올라갑니다. 이 법칙은 제값 받는 상품에서만 통합니다.</a:t>
+              <a:t>많이 깎인 4종만 빼도 수익률과 변동성의 관계가 0.77 → 0.86로 올라갑니다. 이 법칙은 제값 받는 상품에서만 통합니다.</a:t>
             </a:r>
             <a:endParaRPr lang="en-US" sz="1000" dirty="0"/>
           </a:p>
@@ -32574,7 +32574,7 @@
                 <a:ea typeface="맑은 고딕" pitchFamily="34" charset="-122"/>
                 <a:cs typeface="맑은 고딕" pitchFamily="34" charset="-120"/>
               </a:rPr>
-              <a:t>제38041회(USD)는 연 40.0%에 평균적으로 잃는 크기가 14.2%로, 기준 자산이 똑같은 원화 제38040회(35.2% · 21.4%)보다 더 주면서 덜 위험해 보입니다.</a:t>
+              <a:t>제38041회(USD)는 연 40.0%에 손실 확률이 18.9%로, 기초자산이 똑같은 원화 제38040회(35.2% · 28.8%)보다 더 주면서 덜 위험해 보입니다.</a:t>
             </a:r>
             <a:endParaRPr lang="en-US" sz="1000" dirty="0"/>
           </a:p>
@@ -32603,7 +32603,7 @@
                 <a:ea typeface="맑은 고딕" pitchFamily="34" charset="-122"/>
                 <a:cs typeface="맑은 고딕" pitchFamily="34" charset="-120"/>
               </a:rPr>
-              <a:t>USD 이자가 수익률에 섞여 들어간 것이고, 대신 이 손실 계산에 잡히지 않는 환율 위험이 따로 붙기 때문입니다.</a:t>
+              <a:t>USD 이자가 수익률에 섞여 들어간 것이고, 대신 이 손실 확률에 잡히지 않는 환율 위험이 따로 붙기 때문입니다.</a:t>
             </a:r>
             <a:endParaRPr lang="en-US" sz="1000" dirty="0"/>
           </a:p>
@@ -32632,7 +32632,7 @@
                 <a:ea typeface="맑은 고딕" pitchFamily="34" charset="-122"/>
                 <a:cs typeface="맑은 고딕" pitchFamily="34" charset="-120"/>
               </a:rPr>
-              <a:t>이 상품의 손해 볼 가능성은 환율을 뺀 숫자입니다.</a:t>
+              <a:t>이 상품의 손실 확률은 환율을 뺀 숫자입니다.</a:t>
             </a:r>
             <a:endParaRPr lang="en-US" sz="1000" dirty="0"/>
           </a:p>
@@ -32671,7 +32671,7 @@
                 <a:ea typeface="맑은 고딕" pitchFamily="34" charset="-122"/>
                 <a:cs typeface="맑은 고딕" pitchFamily="34" charset="-120"/>
               </a:rPr>
-              <a:t>가장 크게 어긋난 제38044회 — 그 우위가 "두 자산이 0.94만큼 같이 움직인다"는 서류 값 하나에 얹혀 있는지 흔들어 봤습니다 (이 문서가 추천하는 상품)</a:t>
+              <a:t>제38044회(추천 1번) — 손실 확률 1%당 수익률 1등. 이 우위가 공시 상관 0.94 하나에 얹혀 있는지 흔들어 봤습니다</a:t>
             </a:r>
             <a:endParaRPr lang="en-US" sz="1200" dirty="0"/>
           </a:p>
@@ -32700,15 +32700,15 @@
             <a:tbl>
               <a:tblPr/>
               <a:tblGrid>
-                <a:gridCol w="2194560"/>
-                <a:gridCol w="1477213"/>
-                <a:gridCol w="1477213"/>
-                <a:gridCol w="1477213"/>
-                <a:gridCol w="1477213"/>
-                <a:gridCol w="1477213"/>
-                <a:gridCol w="1477213"/>
+                <a:gridCol w="2560320"/>
+                <a:gridCol w="1416253"/>
+                <a:gridCol w="1416253"/>
+                <a:gridCol w="1416253"/>
+                <a:gridCol w="1416253"/>
+                <a:gridCol w="1416253"/>
+                <a:gridCol w="1416253"/>
               </a:tblGrid>
-              <a:tr h="274320">
+              <a:tr h="310896">
                 <a:tc>
                   <a:txBody>
                     <a:bodyPr/>
@@ -33186,7 +33186,7 @@
                   </a:tcPr>
                 </a:tc>
               </a:tr>
-              <a:tr h="274320">
+              <a:tr h="310896">
                 <a:tc>
                   <a:txBody>
                     <a:bodyPr/>
@@ -33204,7 +33204,7 @@
                           <a:ea typeface="맑은 고딕" pitchFamily="34" charset="-122"/>
                           <a:cs typeface="맑은 고딕" pitchFamily="34" charset="-120"/>
                         </a:rPr>
-                        <a:t>손해 볼 가능성</a:t>
+                        <a:t>손실 확률</a:t>
                       </a:r>
                       <a:endParaRPr lang="en-US" sz="1100" dirty="0">
                         <a:latin typeface="맑은 고딕" charset="0"/>
@@ -33643,464 +33643,7 @@
                   </a:tcPr>
                 </a:tc>
               </a:tr>
-              <a:tr h="274320">
-                <a:tc>
-                  <a:txBody>
-                    <a:bodyPr/>
-                    <a:lstStyle/>
-                    <a:p>
-                      <a:pPr indent="0" marL="0">
-                        <a:buNone/>
-                      </a:pPr>
-                      <a:r>
-                        <a:rPr lang="en-US" sz="1100" dirty="0">
-                          <a:solidFill>
-                            <a:srgbClr val="3D3D3D"/>
-                          </a:solidFill>
-                          <a:latin typeface="맑은 고딕" pitchFamily="34" charset="0"/>
-                          <a:ea typeface="맑은 고딕" pitchFamily="34" charset="-122"/>
-                          <a:cs typeface="맑은 고딕" pitchFamily="34" charset="-120"/>
-                        </a:rPr>
-                        <a:t>평균적으로 잃는 크기</a:t>
-                      </a:r>
-                      <a:endParaRPr lang="en-US" sz="1100" dirty="0">
-                        <a:latin typeface="맑은 고딕" charset="0"/>
-                        <a:ea typeface="맑은 고딕" charset="0"/>
-                        <a:cs typeface="맑은 고딕" charset="0"/>
-                      </a:endParaRPr>
-                    </a:p>
-                  </a:txBody>
-                  <a:tcPr marL="50800" marR="50800" marT="50800" marB="50800" anchor="ctr">
-                    <a:lnL w="12700" cap="flat" cmpd="sng" algn="ctr">
-                      <a:solidFill>
-                        <a:srgbClr val="E5E4E1"/>
-                      </a:solidFill>
-                      <a:prstDash val="solid"/>
-                      <a:round/>
-                      <a:headEnd type="none" w="med" len="med"/>
-                      <a:tailEnd type="none" w="med" len="med"/>
-                    </a:lnL>
-                    <a:lnR w="12700" cap="flat" cmpd="sng" algn="ctr">
-                      <a:solidFill>
-                        <a:srgbClr val="E5E4E1"/>
-                      </a:solidFill>
-                      <a:prstDash val="solid"/>
-                      <a:round/>
-                      <a:headEnd type="none" w="med" len="med"/>
-                      <a:tailEnd type="none" w="med" len="med"/>
-                    </a:lnR>
-                    <a:lnT w="12700" cap="flat" cmpd="sng" algn="ctr">
-                      <a:solidFill>
-                        <a:srgbClr val="E5E4E1"/>
-                      </a:solidFill>
-                      <a:prstDash val="solid"/>
-                      <a:round/>
-                      <a:headEnd type="none" w="med" len="med"/>
-                      <a:tailEnd type="none" w="med" len="med"/>
-                    </a:lnT>
-                    <a:lnB w="12700" cap="flat" cmpd="sng" algn="ctr">
-                      <a:solidFill>
-                        <a:srgbClr val="E5E4E1"/>
-                      </a:solidFill>
-                      <a:prstDash val="solid"/>
-                      <a:round/>
-                      <a:headEnd type="none" w="med" len="med"/>
-                      <a:tailEnd type="none" w="med" len="med"/>
-                    </a:lnB>
-                  </a:tcPr>
-                </a:tc>
-                <a:tc>
-                  <a:txBody>
-                    <a:bodyPr/>
-                    <a:lstStyle/>
-                    <a:p>
-                      <a:pPr algn="r" indent="0" marL="0">
-                        <a:buNone/>
-                      </a:pPr>
-                      <a:r>
-                        <a:rPr lang="en-US" sz="1100" dirty="0">
-                          <a:solidFill>
-                            <a:srgbClr val="3D3D3D"/>
-                          </a:solidFill>
-                          <a:latin typeface="맑은 고딕" pitchFamily="34" charset="0"/>
-                          <a:ea typeface="맑은 고딕" pitchFamily="34" charset="-122"/>
-                          <a:cs typeface="맑은 고딕" pitchFamily="34" charset="-120"/>
-                        </a:rPr>
-                        <a:t>6.9%</a:t>
-                      </a:r>
-                      <a:endParaRPr lang="en-US" sz="1100" dirty="0">
-                        <a:latin typeface="맑은 고딕" charset="0"/>
-                        <a:ea typeface="맑은 고딕" charset="0"/>
-                        <a:cs typeface="맑은 고딕" charset="0"/>
-                      </a:endParaRPr>
-                    </a:p>
-                  </a:txBody>
-                  <a:tcPr marL="50800" marR="50800" marT="50800" marB="50800" anchor="ctr">
-                    <a:lnL w="12700" cap="flat" cmpd="sng" algn="ctr">
-                      <a:solidFill>
-                        <a:srgbClr val="E5E4E1"/>
-                      </a:solidFill>
-                      <a:prstDash val="solid"/>
-                      <a:round/>
-                      <a:headEnd type="none" w="med" len="med"/>
-                      <a:tailEnd type="none" w="med" len="med"/>
-                    </a:lnL>
-                    <a:lnR w="12700" cap="flat" cmpd="sng" algn="ctr">
-                      <a:solidFill>
-                        <a:srgbClr val="E5E4E1"/>
-                      </a:solidFill>
-                      <a:prstDash val="solid"/>
-                      <a:round/>
-                      <a:headEnd type="none" w="med" len="med"/>
-                      <a:tailEnd type="none" w="med" len="med"/>
-                    </a:lnR>
-                    <a:lnT w="12700" cap="flat" cmpd="sng" algn="ctr">
-                      <a:solidFill>
-                        <a:srgbClr val="E5E4E1"/>
-                      </a:solidFill>
-                      <a:prstDash val="solid"/>
-                      <a:round/>
-                      <a:headEnd type="none" w="med" len="med"/>
-                      <a:tailEnd type="none" w="med" len="med"/>
-                    </a:lnT>
-                    <a:lnB w="12700" cap="flat" cmpd="sng" algn="ctr">
-                      <a:solidFill>
-                        <a:srgbClr val="E5E4E1"/>
-                      </a:solidFill>
-                      <a:prstDash val="solid"/>
-                      <a:round/>
-                      <a:headEnd type="none" w="med" len="med"/>
-                      <a:tailEnd type="none" w="med" len="med"/>
-                    </a:lnB>
-                  </a:tcPr>
-                </a:tc>
-                <a:tc>
-                  <a:txBody>
-                    <a:bodyPr/>
-                    <a:lstStyle/>
-                    <a:p>
-                      <a:pPr algn="r" indent="0" marL="0">
-                        <a:buNone/>
-                      </a:pPr>
-                      <a:r>
-                        <a:rPr lang="en-US" sz="1100" dirty="0">
-                          <a:solidFill>
-                            <a:srgbClr val="3D3D3D"/>
-                          </a:solidFill>
-                          <a:latin typeface="맑은 고딕" pitchFamily="34" charset="0"/>
-                          <a:ea typeface="맑은 고딕" pitchFamily="34" charset="-122"/>
-                          <a:cs typeface="맑은 고딕" pitchFamily="34" charset="-120"/>
-                        </a:rPr>
-                        <a:t>7.1%</a:t>
-                      </a:r>
-                      <a:endParaRPr lang="en-US" sz="1100" dirty="0">
-                        <a:latin typeface="맑은 고딕" charset="0"/>
-                        <a:ea typeface="맑은 고딕" charset="0"/>
-                        <a:cs typeface="맑은 고딕" charset="0"/>
-                      </a:endParaRPr>
-                    </a:p>
-                  </a:txBody>
-                  <a:tcPr marL="50800" marR="50800" marT="50800" marB="50800" anchor="ctr">
-                    <a:lnL w="12700" cap="flat" cmpd="sng" algn="ctr">
-                      <a:solidFill>
-                        <a:srgbClr val="E5E4E1"/>
-                      </a:solidFill>
-                      <a:prstDash val="solid"/>
-                      <a:round/>
-                      <a:headEnd type="none" w="med" len="med"/>
-                      <a:tailEnd type="none" w="med" len="med"/>
-                    </a:lnL>
-                    <a:lnR w="12700" cap="flat" cmpd="sng" algn="ctr">
-                      <a:solidFill>
-                        <a:srgbClr val="E5E4E1"/>
-                      </a:solidFill>
-                      <a:prstDash val="solid"/>
-                      <a:round/>
-                      <a:headEnd type="none" w="med" len="med"/>
-                      <a:tailEnd type="none" w="med" len="med"/>
-                    </a:lnR>
-                    <a:lnT w="12700" cap="flat" cmpd="sng" algn="ctr">
-                      <a:solidFill>
-                        <a:srgbClr val="E5E4E1"/>
-                      </a:solidFill>
-                      <a:prstDash val="solid"/>
-                      <a:round/>
-                      <a:headEnd type="none" w="med" len="med"/>
-                      <a:tailEnd type="none" w="med" len="med"/>
-                    </a:lnT>
-                    <a:lnB w="12700" cap="flat" cmpd="sng" algn="ctr">
-                      <a:solidFill>
-                        <a:srgbClr val="E5E4E1"/>
-                      </a:solidFill>
-                      <a:prstDash val="solid"/>
-                      <a:round/>
-                      <a:headEnd type="none" w="med" len="med"/>
-                      <a:tailEnd type="none" w="med" len="med"/>
-                    </a:lnB>
-                  </a:tcPr>
-                </a:tc>
-                <a:tc>
-                  <a:txBody>
-                    <a:bodyPr/>
-                    <a:lstStyle/>
-                    <a:p>
-                      <a:pPr algn="r" indent="0" marL="0">
-                        <a:buNone/>
-                      </a:pPr>
-                      <a:r>
-                        <a:rPr lang="en-US" sz="1100" dirty="0">
-                          <a:solidFill>
-                            <a:srgbClr val="3D3D3D"/>
-                          </a:solidFill>
-                          <a:latin typeface="맑은 고딕" pitchFamily="34" charset="0"/>
-                          <a:ea typeface="맑은 고딕" pitchFamily="34" charset="-122"/>
-                          <a:cs typeface="맑은 고딕" pitchFamily="34" charset="-120"/>
-                        </a:rPr>
-                        <a:t>7.7%</a:t>
-                      </a:r>
-                      <a:endParaRPr lang="en-US" sz="1100" dirty="0">
-                        <a:latin typeface="맑은 고딕" charset="0"/>
-                        <a:ea typeface="맑은 고딕" charset="0"/>
-                        <a:cs typeface="맑은 고딕" charset="0"/>
-                      </a:endParaRPr>
-                    </a:p>
-                  </a:txBody>
-                  <a:tcPr marL="50800" marR="50800" marT="50800" marB="50800" anchor="ctr">
-                    <a:lnL w="12700" cap="flat" cmpd="sng" algn="ctr">
-                      <a:solidFill>
-                        <a:srgbClr val="E5E4E1"/>
-                      </a:solidFill>
-                      <a:prstDash val="solid"/>
-                      <a:round/>
-                      <a:headEnd type="none" w="med" len="med"/>
-                      <a:tailEnd type="none" w="med" len="med"/>
-                    </a:lnL>
-                    <a:lnR w="12700" cap="flat" cmpd="sng" algn="ctr">
-                      <a:solidFill>
-                        <a:srgbClr val="E5E4E1"/>
-                      </a:solidFill>
-                      <a:prstDash val="solid"/>
-                      <a:round/>
-                      <a:headEnd type="none" w="med" len="med"/>
-                      <a:tailEnd type="none" w="med" len="med"/>
-                    </a:lnR>
-                    <a:lnT w="12700" cap="flat" cmpd="sng" algn="ctr">
-                      <a:solidFill>
-                        <a:srgbClr val="E5E4E1"/>
-                      </a:solidFill>
-                      <a:prstDash val="solid"/>
-                      <a:round/>
-                      <a:headEnd type="none" w="med" len="med"/>
-                      <a:tailEnd type="none" w="med" len="med"/>
-                    </a:lnT>
-                    <a:lnB w="12700" cap="flat" cmpd="sng" algn="ctr">
-                      <a:solidFill>
-                        <a:srgbClr val="E5E4E1"/>
-                      </a:solidFill>
-                      <a:prstDash val="solid"/>
-                      <a:round/>
-                      <a:headEnd type="none" w="med" len="med"/>
-                      <a:tailEnd type="none" w="med" len="med"/>
-                    </a:lnB>
-                  </a:tcPr>
-                </a:tc>
-                <a:tc>
-                  <a:txBody>
-                    <a:bodyPr/>
-                    <a:lstStyle/>
-                    <a:p>
-                      <a:pPr algn="r" indent="0" marL="0">
-                        <a:buNone/>
-                      </a:pPr>
-                      <a:r>
-                        <a:rPr lang="en-US" sz="1100" dirty="0">
-                          <a:solidFill>
-                            <a:srgbClr val="3D3D3D"/>
-                          </a:solidFill>
-                          <a:latin typeface="맑은 고딕" pitchFamily="34" charset="0"/>
-                          <a:ea typeface="맑은 고딕" pitchFamily="34" charset="-122"/>
-                          <a:cs typeface="맑은 고딕" pitchFamily="34" charset="-120"/>
-                        </a:rPr>
-                        <a:t>8.1%</a:t>
-                      </a:r>
-                      <a:endParaRPr lang="en-US" sz="1100" dirty="0">
-                        <a:latin typeface="맑은 고딕" charset="0"/>
-                        <a:ea typeface="맑은 고딕" charset="0"/>
-                        <a:cs typeface="맑은 고딕" charset="0"/>
-                      </a:endParaRPr>
-                    </a:p>
-                  </a:txBody>
-                  <a:tcPr marL="50800" marR="50800" marT="50800" marB="50800" anchor="ctr">
-                    <a:lnL w="12700" cap="flat" cmpd="sng" algn="ctr">
-                      <a:solidFill>
-                        <a:srgbClr val="E5E4E1"/>
-                      </a:solidFill>
-                      <a:prstDash val="solid"/>
-                      <a:round/>
-                      <a:headEnd type="none" w="med" len="med"/>
-                      <a:tailEnd type="none" w="med" len="med"/>
-                    </a:lnL>
-                    <a:lnR w="12700" cap="flat" cmpd="sng" algn="ctr">
-                      <a:solidFill>
-                        <a:srgbClr val="E5E4E1"/>
-                      </a:solidFill>
-                      <a:prstDash val="solid"/>
-                      <a:round/>
-                      <a:headEnd type="none" w="med" len="med"/>
-                      <a:tailEnd type="none" w="med" len="med"/>
-                    </a:lnR>
-                    <a:lnT w="12700" cap="flat" cmpd="sng" algn="ctr">
-                      <a:solidFill>
-                        <a:srgbClr val="E5E4E1"/>
-                      </a:solidFill>
-                      <a:prstDash val="solid"/>
-                      <a:round/>
-                      <a:headEnd type="none" w="med" len="med"/>
-                      <a:tailEnd type="none" w="med" len="med"/>
-                    </a:lnT>
-                    <a:lnB w="12700" cap="flat" cmpd="sng" algn="ctr">
-                      <a:solidFill>
-                        <a:srgbClr val="E5E4E1"/>
-                      </a:solidFill>
-                      <a:prstDash val="solid"/>
-                      <a:round/>
-                      <a:headEnd type="none" w="med" len="med"/>
-                      <a:tailEnd type="none" w="med" len="med"/>
-                    </a:lnB>
-                  </a:tcPr>
-                </a:tc>
-                <a:tc>
-                  <a:txBody>
-                    <a:bodyPr/>
-                    <a:lstStyle/>
-                    <a:p>
-                      <a:pPr algn="r" indent="0" marL="0">
-                        <a:buNone/>
-                      </a:pPr>
-                      <a:r>
-                        <a:rPr lang="en-US" sz="1100" dirty="0">
-                          <a:solidFill>
-                            <a:srgbClr val="3D3D3D"/>
-                          </a:solidFill>
-                          <a:latin typeface="맑은 고딕" pitchFamily="34" charset="0"/>
-                          <a:ea typeface="맑은 고딕" pitchFamily="34" charset="-122"/>
-                          <a:cs typeface="맑은 고딕" pitchFamily="34" charset="-120"/>
-                        </a:rPr>
-                        <a:t>8.5%</a:t>
-                      </a:r>
-                      <a:endParaRPr lang="en-US" sz="1100" dirty="0">
-                        <a:latin typeface="맑은 고딕" charset="0"/>
-                        <a:ea typeface="맑은 고딕" charset="0"/>
-                        <a:cs typeface="맑은 고딕" charset="0"/>
-                      </a:endParaRPr>
-                    </a:p>
-                  </a:txBody>
-                  <a:tcPr marL="50800" marR="50800" marT="50800" marB="50800" anchor="ctr">
-                    <a:lnL w="12700" cap="flat" cmpd="sng" algn="ctr">
-                      <a:solidFill>
-                        <a:srgbClr val="E5E4E1"/>
-                      </a:solidFill>
-                      <a:prstDash val="solid"/>
-                      <a:round/>
-                      <a:headEnd type="none" w="med" len="med"/>
-                      <a:tailEnd type="none" w="med" len="med"/>
-                    </a:lnL>
-                    <a:lnR w="12700" cap="flat" cmpd="sng" algn="ctr">
-                      <a:solidFill>
-                        <a:srgbClr val="E5E4E1"/>
-                      </a:solidFill>
-                      <a:prstDash val="solid"/>
-                      <a:round/>
-                      <a:headEnd type="none" w="med" len="med"/>
-                      <a:tailEnd type="none" w="med" len="med"/>
-                    </a:lnR>
-                    <a:lnT w="12700" cap="flat" cmpd="sng" algn="ctr">
-                      <a:solidFill>
-                        <a:srgbClr val="E5E4E1"/>
-                      </a:solidFill>
-                      <a:prstDash val="solid"/>
-                      <a:round/>
-                      <a:headEnd type="none" w="med" len="med"/>
-                      <a:tailEnd type="none" w="med" len="med"/>
-                    </a:lnT>
-                    <a:lnB w="12700" cap="flat" cmpd="sng" algn="ctr">
-                      <a:solidFill>
-                        <a:srgbClr val="E5E4E1"/>
-                      </a:solidFill>
-                      <a:prstDash val="solid"/>
-                      <a:round/>
-                      <a:headEnd type="none" w="med" len="med"/>
-                      <a:tailEnd type="none" w="med" len="med"/>
-                    </a:lnB>
-                  </a:tcPr>
-                </a:tc>
-                <a:tc>
-                  <a:txBody>
-                    <a:bodyPr/>
-                    <a:lstStyle/>
-                    <a:p>
-                      <a:pPr algn="r" indent="0" marL="0">
-                        <a:buNone/>
-                      </a:pPr>
-                      <a:r>
-                        <a:rPr lang="en-US" sz="1100" dirty="0">
-                          <a:solidFill>
-                            <a:srgbClr val="3D3D3D"/>
-                          </a:solidFill>
-                          <a:latin typeface="맑은 고딕" pitchFamily="34" charset="0"/>
-                          <a:ea typeface="맑은 고딕" pitchFamily="34" charset="-122"/>
-                          <a:cs typeface="맑은 고딕" pitchFamily="34" charset="-120"/>
-                        </a:rPr>
-                        <a:t>8.9%</a:t>
-                      </a:r>
-                      <a:endParaRPr lang="en-US" sz="1100" dirty="0">
-                        <a:latin typeface="맑은 고딕" charset="0"/>
-                        <a:ea typeface="맑은 고딕" charset="0"/>
-                        <a:cs typeface="맑은 고딕" charset="0"/>
-                      </a:endParaRPr>
-                    </a:p>
-                  </a:txBody>
-                  <a:tcPr marL="50800" marR="50800" marT="50800" marB="50800" anchor="ctr">
-                    <a:lnL w="12700" cap="flat" cmpd="sng" algn="ctr">
-                      <a:solidFill>
-                        <a:srgbClr val="E5E4E1"/>
-                      </a:solidFill>
-                      <a:prstDash val="solid"/>
-                      <a:round/>
-                      <a:headEnd type="none" w="med" len="med"/>
-                      <a:tailEnd type="none" w="med" len="med"/>
-                    </a:lnL>
-                    <a:lnR w="12700" cap="flat" cmpd="sng" algn="ctr">
-                      <a:solidFill>
-                        <a:srgbClr val="E5E4E1"/>
-                      </a:solidFill>
-                      <a:prstDash val="solid"/>
-                      <a:round/>
-                      <a:headEnd type="none" w="med" len="med"/>
-                      <a:tailEnd type="none" w="med" len="med"/>
-                    </a:lnR>
-                    <a:lnT w="12700" cap="flat" cmpd="sng" algn="ctr">
-                      <a:solidFill>
-                        <a:srgbClr val="E5E4E1"/>
-                      </a:solidFill>
-                      <a:prstDash val="solid"/>
-                      <a:round/>
-                      <a:headEnd type="none" w="med" len="med"/>
-                      <a:tailEnd type="none" w="med" len="med"/>
-                    </a:lnT>
-                    <a:lnB w="12700" cap="flat" cmpd="sng" algn="ctr">
-                      <a:solidFill>
-                        <a:srgbClr val="E5E4E1"/>
-                      </a:solidFill>
-                      <a:prstDash val="solid"/>
-                      <a:round/>
-                      <a:headEnd type="none" w="med" len="med"/>
-                      <a:tailEnd type="none" w="med" len="med"/>
-                    </a:lnB>
-                  </a:tcPr>
-                </a:tc>
-              </a:tr>
-              <a:tr h="274320">
+              <a:tr h="310896">
                 <a:tc>
                   <a:txBody>
                     <a:bodyPr/>
@@ -34118,7 +33661,7 @@
                           <a:ea typeface="맑은 고딕" pitchFamily="34" charset="-122"/>
                           <a:cs typeface="맑은 고딕" pitchFamily="34" charset="-120"/>
                         </a:rPr>
-                        <a:t>위험 한 단위당 수익률</a:t>
+                        <a:t>손실 확률 1%당 연 수익률</a:t>
                       </a:r>
                       <a:endParaRPr lang="en-US" sz="1100" dirty="0">
                         <a:latin typeface="맑은 고딕" charset="0"/>
@@ -34183,7 +33726,7 @@
                           <a:ea typeface="맑은 고딕" pitchFamily="34" charset="-122"/>
                           <a:cs typeface="맑은 고딕" pitchFamily="34" charset="-120"/>
                         </a:rPr>
-                        <a:t>3.48</a:t>
+                        <a:t>2.68%</a:t>
                       </a:r>
                       <a:endParaRPr lang="en-US" sz="1100" dirty="0">
                         <a:latin typeface="맑은 고딕" charset="0"/>
@@ -34248,7 +33791,7 @@
                           <a:ea typeface="맑은 고딕" pitchFamily="34" charset="-122"/>
                           <a:cs typeface="맑은 고딕" pitchFamily="34" charset="-120"/>
                         </a:rPr>
-                        <a:t>3.37</a:t>
+                        <a:t>2.60%</a:t>
                       </a:r>
                       <a:endParaRPr lang="en-US" sz="1100" dirty="0">
                         <a:latin typeface="맑은 고딕" charset="0"/>
@@ -34313,7 +33856,7 @@
                           <a:ea typeface="맑은 고딕" pitchFamily="34" charset="-122"/>
                           <a:cs typeface="맑은 고딕" pitchFamily="34" charset="-120"/>
                         </a:rPr>
-                        <a:t>3.12</a:t>
+                        <a:t>2.39%</a:t>
                       </a:r>
                       <a:endParaRPr lang="en-US" sz="1100" dirty="0">
                         <a:latin typeface="맑은 고딕" charset="0"/>
@@ -34378,7 +33921,7 @@
                           <a:ea typeface="맑은 고딕" pitchFamily="34" charset="-122"/>
                           <a:cs typeface="맑은 고딕" pitchFamily="34" charset="-120"/>
                         </a:rPr>
-                        <a:t>2.95</a:t>
+                        <a:t>2.26%</a:t>
                       </a:r>
                       <a:endParaRPr lang="en-US" sz="1100" dirty="0">
                         <a:latin typeface="맑은 고딕" charset="0"/>
@@ -34443,7 +33986,7 @@
                           <a:ea typeface="맑은 고딕" pitchFamily="34" charset="-122"/>
                           <a:cs typeface="맑은 고딕" pitchFamily="34" charset="-120"/>
                         </a:rPr>
-                        <a:t>2.82</a:t>
+                        <a:t>2.16%</a:t>
                       </a:r>
                       <a:endParaRPr lang="en-US" sz="1100" dirty="0">
                         <a:latin typeface="맑은 고딕" charset="0"/>
@@ -34508,7 +34051,7 @@
                           <a:ea typeface="맑은 고딕" pitchFamily="34" charset="-122"/>
                           <a:cs typeface="맑은 고딕" pitchFamily="34" charset="-120"/>
                         </a:rPr>
-                        <a:t>2.69</a:t>
+                        <a:t>2.05%</a:t>
                       </a:r>
                       <a:endParaRPr lang="en-US" sz="1100" dirty="0">
                         <a:latin typeface="맑은 고딕" charset="0"/>
@@ -34569,8 +34112,8 @@
         </p:nvSpPr>
         <p:spPr>
           <a:xfrm>
-            <a:off x="566928" y="5138928"/>
-            <a:ext cx="11057839" cy="402336"/>
+            <a:off x="566928" y="4919472"/>
+            <a:ext cx="11057839" cy="566928"/>
           </a:xfrm>
           <a:prstGeom prst="rect">
             <a:avLst/>
@@ -34597,7 +34140,7 @@
                 <a:ea typeface="맑은 고딕" pitchFamily="34" charset="-122"/>
                 <a:cs typeface="맑은 고딕" pitchFamily="34" charset="-120"/>
               </a:rPr>
-              <a:t>같이 움직이는 정도를 0.50까지 억지로 낮춰도 손해 볼 가능성은 8.9% → 11.7% 오르는 데 그치고, 위험 대비 대가는 2.69로 여전히 이번 주 1등입니다. 두 자산의 출렁임 정도가 20.4%p나 벌어져 있어서, 같이 움직이든 말든 "더 나쁜 쪽"이 거의 항상 같은 자산이기 때문입니다. 출렁임이 비슷한 짝이었다면 이렇게 버티지 못합니다.</a:t>
+              <a:t>같이 움직이는 정도를 0.50까지 억지로 낮춰도 손실 확률은 8.9% → 11.7% 오르는 데 그치고, 손실 확률 1%당 수익률은 2.05%로 여전히 이번 회차 1등입니다. 두 기초자산의 변동성이 20.4%p나 벌어져 있어서, 같이 움직이든 말든 "더 나쁜 쪽"이 거의 항상 같은 자산이기 때문입니다. 변동성이 비슷한 짝이었다면 이렇게 버티지 못합니다.</a:t>
             </a:r>
             <a:endParaRPr lang="en-US" sz="1000" dirty="0"/>
           </a:p>
@@ -34681,7 +34224,7 @@
                 <a:ea typeface="맑은 고딕" pitchFamily="34" charset="-122"/>
                 <a:cs typeface="맑은 고딕" pitchFamily="34" charset="-120"/>
               </a:rPr>
-              <a:t>→ "수익률이 높으면 위험도 큰 것, 맞습니다. 다만 같은 위험을 지고도 남들보다 많이 받는 상품이 따로 있습니다. 이번 주는 그 차이가 3.0배까지 벌어집니다."</a:t>
+              <a:t>→ "수익률이 높으면 위험도 큰 것, 맞습니다. 다만 같은 손실 확률을 지고도 남들보다 많이 받는 상품이 따로 있습니다. 이번 회차는 그 차이가 3.6배까지 벌어집니다."</a:t>
             </a:r>
             <a:endParaRPr lang="en-US" sz="1150" dirty="0"/>
           </a:p>
